--- a/docs/presentation/TuitionPilot_deck.pptx
+++ b/docs/presentation/TuitionPilot_deck.pptx
@@ -4,21 +4,22 @@
   <p:sldMasterIdLst>
     <p:sldMasterId id="2147483648" r:id="rId1"/>
   </p:sldMasterIdLst>
+  <p:notesMasterIdLst>
+    <p:notesMasterId r:id="rId13"/>
+  </p:notesMasterIdLst>
   <p:sldIdLst>
     <p:sldId id="256" r:id="rId2"/>
     <p:sldId id="257" r:id="rId3"/>
     <p:sldId id="258" r:id="rId4"/>
-    <p:sldId id="259" r:id="rId5"/>
-    <p:sldId id="260" r:id="rId6"/>
-    <p:sldId id="261" r:id="rId7"/>
-    <p:sldId id="262" r:id="rId8"/>
-    <p:sldId id="263" r:id="rId9"/>
-    <p:sldId id="264" r:id="rId10"/>
-    <p:sldId id="265" r:id="rId11"/>
+    <p:sldId id="266" r:id="rId5"/>
+    <p:sldId id="259" r:id="rId6"/>
+    <p:sldId id="260" r:id="rId7"/>
+    <p:sldId id="261" r:id="rId8"/>
+    <p:sldId id="262" r:id="rId9"/>
+    <p:sldId id="263" r:id="rId10"/>
+    <p:sldId id="264" r:id="rId11"/>
+    <p:sldId id="265" r:id="rId12"/>
   </p:sldIdLst>
-  <p:notesMasterIdLst>
-    <p:notesMasterId r:id="rId12"/>
-  </p:notesMasterIdLst>
   <p:sldSz cx="12192000" cy="6858000"/>
   <p:notesSz cx="6858000" cy="12192000"/>
   <p:defaultTextStyle>
@@ -116,27 +117,28 @@
   <p:extLst>
     <p:ext uri="{521415D9-36F7-43E2-AB2F-B90AF26B5E84}">
       <p14:sectionLst xmlns:p14="http://schemas.microsoft.com/office/powerpoint/2010/main">
-        <p14:section name="Why and what" id="{9d2b21ec-8548-15c2-2f91-b67ea3e9f932}">
+        <p14:section name="Why and what" id="{9D2B21EC-8548-15C2-2F91-B67EA3E9F932}">
           <p14:sldIdLst>
             <p14:sldId id="256"/>
             <p14:sldId id="257"/>
             <p14:sldId id="258"/>
+            <p14:sldId id="266"/>
           </p14:sldIdLst>
         </p14:section>
-        <p14:section name="How it works" id="{ec9c4240-00aa-2043-9398-fc54007919d6}">
+        <p14:section name="How it works" id="{EC9C4240-00AA-2043-9398-FC54007919D6}">
           <p14:sldIdLst>
             <p14:sldId id="259"/>
             <p14:sldId id="260"/>
             <p14:sldId id="261"/>
           </p14:sldIdLst>
         </p14:section>
-        <p14:section name="Security" id="{e8a7e532-d253-719d-bb2d-21056846d3f6}">
+        <p14:section name="Security" id="{E8A7E532-D253-719D-BB2D-21056846D3F6}">
           <p14:sldIdLst>
             <p14:sldId id="262"/>
             <p14:sldId id="263"/>
           </p14:sldIdLst>
         </p14:section>
-        <p14:section name="Proof and limits" id="{80149092-e3b3-3589-9947-7b98f2ca5581}">
+        <p14:section name="Proof and limits" id="{80149092-E3B3-3589-9947-7B98F2CA5581}">
           <p14:sldIdLst>
             <p14:sldId id="264"/>
             <p14:sldId id="265"/>
@@ -152,9 +154,11 @@
 </file>
 
 <file path=ppt/charts/chart1.xml><?xml version="1.0" encoding="utf-8"?>
-<c:chartSpace xmlns:c="http://schemas.openxmlformats.org/drawingml/2006/chart" xmlns:a="http://schemas.openxmlformats.org/drawingml/2006/main" xmlns:r="http://schemas.openxmlformats.org/officeDocument/2006/relationships">
+<c:chartSpace xmlns:c="http://schemas.openxmlformats.org/drawingml/2006/chart" xmlns:a="http://schemas.openxmlformats.org/drawingml/2006/main" xmlns:r="http://schemas.openxmlformats.org/officeDocument/2006/relationships" xmlns:c16r2="http://schemas.microsoft.com/office/drawing/2015/06/chart">
   <c:date1904 val="0"/>
+  <c:lang val="en-US"/>
   <c:roundedCorners val="1"/>
+  <c:style val="2"/>
   <c:chart>
     <c:title>
       <c:tx>
@@ -182,7 +186,6 @@
           </a:p>
         </c:rich>
       </c:tx>
-      <c:layout/>
       <c:overlay val="0"/>
     </c:title>
     <c:autoTitleDeleted val="0"/>
@@ -215,18 +218,26 @@
           <c:invertIfNegative val="0"/>
           <c:dLbls>
             <c:numFmt formatCode="#,##0" sourceLinked="0"/>
+            <c:spPr>
+              <a:noFill/>
+              <a:ln>
+                <a:noFill/>
+              </a:ln>
+              <a:effectLst/>
+            </c:spPr>
             <c:txPr>
               <a:bodyPr/>
               <a:lstStyle/>
               <a:p>
                 <a:pPr>
-                  <a:defRPr b="0" i="0" strike="noStrike" sz="1100" u="none">
+                  <a:defRPr sz="1100" b="0" i="0" u="none" strike="noStrike">
                     <a:solidFill>
                       <a:srgbClr val="FFFFFF"/>
                     </a:solidFill>
                     <a:latin typeface="+mn-lt"/>
                   </a:defRPr>
                 </a:pPr>
+                <a:endParaRPr lang="en-US"/>
               </a:p>
             </c:txPr>
             <c:dLblPos val="ctr"/>
@@ -237,22 +248,25 @@
             <c:showPercent val="0"/>
             <c:showBubbleSize val="0"/>
             <c:showLeaderLines val="0"/>
+            <c:extLst>
+              <c:ext xmlns:c15="http://schemas.microsoft.com/office/drawing/2012/chart" uri="{CE6537A1-D6FC-4f65-9D91-7224C49458BB}">
+                <c15:showLeaderLines val="0"/>
+              </c:ext>
+            </c:extLst>
           </c:dLbls>
           <c:cat>
-            <c:multiLvlStrRef>
+            <c:strRef>
               <c:f>Sheet1!$A$2:$A$3</c:f>
-              <c:multiLvlStrCache>
+              <c:strCache>
                 <c:ptCount val="2"/>
-                <c:lvl>
-                  <c:pt idx="0">
-                    <c:v>Provider B</c:v>
-                  </c:pt>
-                  <c:pt idx="1">
-                    <c:v>Provider A</c:v>
-                  </c:pt>
-                </c:lvl>
-              </c:multiLvlStrCache>
-            </c:multiLvlStrRef>
+                <c:pt idx="0">
+                  <c:v>Provider B</c:v>
+                </c:pt>
+                <c:pt idx="1">
+                  <c:v>Provider A</c:v>
+                </c:pt>
+              </c:strCache>
+            </c:strRef>
           </c:cat>
           <c:val>
             <c:numRef>
@@ -269,6 +283,11 @@
               </c:numCache>
             </c:numRef>
           </c:val>
+          <c:extLst>
+            <c:ext xmlns:c16="http://schemas.microsoft.com/office/drawing/2014/chart" uri="{C3380CC4-5D6E-409C-BE32-E72D297353CC}">
+              <c16:uniqueId val="{00000000-D083-4C06-84CC-7745274358E9}"/>
+            </c:ext>
+          </c:extLst>
         </c:ser>
         <c:ser>
           <c:idx val="1"/>
@@ -293,18 +312,26 @@
           <c:invertIfNegative val="0"/>
           <c:dLbls>
             <c:numFmt formatCode="#,##0" sourceLinked="0"/>
+            <c:spPr>
+              <a:noFill/>
+              <a:ln>
+                <a:noFill/>
+              </a:ln>
+              <a:effectLst/>
+            </c:spPr>
             <c:txPr>
               <a:bodyPr/>
               <a:lstStyle/>
               <a:p>
                 <a:pPr>
-                  <a:defRPr b="0" i="0" strike="noStrike" sz="1100" u="none">
+                  <a:defRPr sz="1100" b="0" i="0" u="none" strike="noStrike">
                     <a:solidFill>
                       <a:srgbClr val="FFFFFF"/>
                     </a:solidFill>
                     <a:latin typeface="+mn-lt"/>
                   </a:defRPr>
                 </a:pPr>
+                <a:endParaRPr lang="en-US"/>
               </a:p>
             </c:txPr>
             <c:dLblPos val="ctr"/>
@@ -315,22 +342,25 @@
             <c:showPercent val="0"/>
             <c:showBubbleSize val="0"/>
             <c:showLeaderLines val="0"/>
+            <c:extLst>
+              <c:ext xmlns:c15="http://schemas.microsoft.com/office/drawing/2012/chart" uri="{CE6537A1-D6FC-4f65-9D91-7224C49458BB}">
+                <c15:showLeaderLines val="0"/>
+              </c:ext>
+            </c:extLst>
           </c:dLbls>
           <c:cat>
-            <c:multiLvlStrRef>
+            <c:strRef>
               <c:f>Sheet1!$A$2:$A$3</c:f>
-              <c:multiLvlStrCache>
+              <c:strCache>
                 <c:ptCount val="2"/>
-                <c:lvl>
-                  <c:pt idx="0">
-                    <c:v>Provider B</c:v>
-                  </c:pt>
-                  <c:pt idx="1">
-                    <c:v>Provider A</c:v>
-                  </c:pt>
-                </c:lvl>
-              </c:multiLvlStrCache>
-            </c:multiLvlStrRef>
+                <c:pt idx="0">
+                  <c:v>Provider B</c:v>
+                </c:pt>
+                <c:pt idx="1">
+                  <c:v>Provider A</c:v>
+                </c:pt>
+              </c:strCache>
+            </c:strRef>
           </c:cat>
           <c:val>
             <c:numRef>
@@ -347,6 +377,11 @@
               </c:numCache>
             </c:numRef>
           </c:val>
+          <c:extLst>
+            <c:ext xmlns:c16="http://schemas.microsoft.com/office/drawing/2014/chart" uri="{C3380CC4-5D6E-409C-BE32-E72D297353CC}">
+              <c16:uniqueId val="{00000001-D083-4C06-84CC-7745274358E9}"/>
+            </c:ext>
+          </c:extLst>
         </c:ser>
         <c:ser>
           <c:idx val="2"/>
@@ -371,18 +406,26 @@
           <c:invertIfNegative val="0"/>
           <c:dLbls>
             <c:numFmt formatCode="#,##0" sourceLinked="0"/>
+            <c:spPr>
+              <a:noFill/>
+              <a:ln>
+                <a:noFill/>
+              </a:ln>
+              <a:effectLst/>
+            </c:spPr>
             <c:txPr>
               <a:bodyPr/>
               <a:lstStyle/>
               <a:p>
                 <a:pPr>
-                  <a:defRPr b="0" i="0" strike="noStrike" sz="1100" u="none">
+                  <a:defRPr sz="1100" b="0" i="0" u="none" strike="noStrike">
                     <a:solidFill>
                       <a:srgbClr val="FFFFFF"/>
                     </a:solidFill>
                     <a:latin typeface="+mn-lt"/>
                   </a:defRPr>
                 </a:pPr>
+                <a:endParaRPr lang="en-US"/>
               </a:p>
             </c:txPr>
             <c:dLblPos val="ctr"/>
@@ -393,22 +436,25 @@
             <c:showPercent val="0"/>
             <c:showBubbleSize val="0"/>
             <c:showLeaderLines val="0"/>
+            <c:extLst>
+              <c:ext xmlns:c15="http://schemas.microsoft.com/office/drawing/2012/chart" uri="{CE6537A1-D6FC-4f65-9D91-7224C49458BB}">
+                <c15:showLeaderLines val="0"/>
+              </c:ext>
+            </c:extLst>
           </c:dLbls>
           <c:cat>
-            <c:multiLvlStrRef>
+            <c:strRef>
               <c:f>Sheet1!$A$2:$A$3</c:f>
-              <c:multiLvlStrCache>
+              <c:strCache>
                 <c:ptCount val="2"/>
-                <c:lvl>
-                  <c:pt idx="0">
-                    <c:v>Provider B</c:v>
-                  </c:pt>
-                  <c:pt idx="1">
-                    <c:v>Provider A</c:v>
-                  </c:pt>
-                </c:lvl>
-              </c:multiLvlStrCache>
-            </c:multiLvlStrRef>
+                <c:pt idx="0">
+                  <c:v>Provider B</c:v>
+                </c:pt>
+                <c:pt idx="1">
+                  <c:v>Provider A</c:v>
+                </c:pt>
+              </c:strCache>
+            </c:strRef>
           </c:cat>
           <c:val>
             <c:numRef>
@@ -425,23 +471,13 @@
               </c:numCache>
             </c:numRef>
           </c:val>
+          <c:extLst>
+            <c:ext xmlns:c16="http://schemas.microsoft.com/office/drawing/2014/chart" uri="{C3380CC4-5D6E-409C-BE32-E72D297353CC}">
+              <c16:uniqueId val="{00000002-D083-4C06-84CC-7745274358E9}"/>
+            </c:ext>
+          </c:extLst>
         </c:ser>
         <c:dLbls>
-          <c:numFmt formatCode="#,##0" sourceLinked="0"/>
-          <c:txPr>
-            <a:bodyPr/>
-            <a:lstStyle/>
-            <a:p>
-              <a:pPr>
-                <a:defRPr b="0" i="0" strike="noStrike" sz="1100" u="none">
-                  <a:solidFill>
-                    <a:srgbClr val="FFFFFF"/>
-                  </a:solidFill>
-                  <a:latin typeface="+mn-lt"/>
-                </a:defRPr>
-              </a:pPr>
-            </a:p>
-          </c:txPr>
           <c:dLblPos val="ctr"/>
           <c:showLegendKey val="0"/>
           <c:showVal val="1"/>
@@ -449,13 +485,11 @@
           <c:showSerName val="0"/>
           <c:showPercent val="0"/>
           <c:showBubbleSize val="0"/>
-          <c:showLeaderLines val="0"/>
         </c:dLbls>
         <c:gapWidth val="60"/>
         <c:overlap val="100"/>
         <c:axId val="2094734554"/>
         <c:axId val="2094734552"/>
-        <c:axId val="2094734556"/>
       </c:barChart>
       <c:catAx>
         <c:axId val="2094734554"/>
@@ -496,6 +530,7 @@
         <c:crosses val="autoZero"/>
         <c:auto val="1"/>
         <c:lblAlgn val="ctr"/>
+        <c:lblOffset val="100"/>
         <c:noMultiLvlLbl val="1"/>
       </c:catAx>
       <c:valAx>
@@ -581,6 +616,7 @@
     </c:legend>
     <c:plotVisOnly val="1"/>
     <c:dispBlanksAs val="span"/>
+    <c:showDLblsOverMax val="1"/>
   </c:chart>
   <c:spPr>
     <a:noFill/>
@@ -617,234 +653,10 @@
           <a:chExt cx="0" cy="0"/>
         </a:xfrm>
       </p:grpSpPr>
-      <p:sp>
-        <p:nvSpPr>
-          <p:cNvPr id="2" name="Header Placeholder 1"/>
-          <p:cNvSpPr>
-            <a:spLocks noGrp="1"/>
-          </p:cNvSpPr>
-          <p:nvPr>
-            <p:ph type="hdr" sz="quarter"/>
-          </p:nvPr>
-        </p:nvSpPr>
-        <p:spPr>
-          <a:xfrm>
-            <a:off x="0" y="0"/>
-            <a:ext cx="2971800" cy="458788"/>
-          </a:xfrm>
-          <a:prstGeom prst="rect">
-            <a:avLst/>
-          </a:prstGeom>
-        </p:spPr>
-        <p:txBody>
-          <a:bodyPr vert="horz" lIns="91440" tIns="45720" rIns="91440" bIns="45720" rtlCol="0"/>
-          <a:lstStyle>
-            <a:lvl1pPr algn="l">
-              <a:defRPr sz="1200"/>
-            </a:lvl1pPr>
-          </a:lstStyle>
-          <a:p>
-            <a:endParaRPr lang="en-US"/>
-          </a:p>
-        </p:txBody>
-      </p:sp>
-      <p:sp>
-        <p:nvSpPr>
-          <p:cNvPr id="3" name="Date Placeholder 2"/>
-          <p:cNvSpPr>
-            <a:spLocks noGrp="1"/>
-          </p:cNvSpPr>
-          <p:nvPr>
-            <p:ph type="dt" idx="1"/>
-          </p:nvPr>
-        </p:nvSpPr>
-        <p:spPr>
-          <a:xfrm>
-            <a:off x="3884613" y="0"/>
-            <a:ext cx="2971800" cy="458788"/>
-          </a:xfrm>
-          <a:prstGeom prst="rect">
-            <a:avLst/>
-          </a:prstGeom>
-        </p:spPr>
-        <p:txBody>
-          <a:bodyPr vert="horz" lIns="91440" tIns="45720" rIns="91440" bIns="45720" rtlCol="0"/>
-          <a:lstStyle>
-            <a:lvl1pPr algn="r">
-              <a:defRPr sz="1200"/>
-            </a:lvl1pPr>
-          </a:lstStyle>
-          <a:p>
-            <a:fld id="{5282F153-3F37-0F45-9E97-73ACFA13230C}" type="datetimeFigureOut">
-              <a:rPr lang="en-US"/>
-              <a:t>7/23/19</a:t>
-            </a:fld>
-            <a:endParaRPr lang="en-US"/>
-          </a:p>
-        </p:txBody>
-      </p:sp>
-      <p:sp>
-        <p:nvSpPr>
-          <p:cNvPr id="4" name="Slide Image Placeholder 3"/>
-          <p:cNvSpPr>
-            <a:spLocks noGrp="1" noRot="1" noChangeAspect="1"/>
-          </p:cNvSpPr>
-          <p:nvPr>
-            <p:ph type="sldImg" idx="2"/>
-          </p:nvPr>
-        </p:nvSpPr>
-        <p:spPr>
-          <a:xfrm>
-            <a:off x="685800" y="1143000"/>
-            <a:ext cx="5486400" cy="3086100"/>
-          </a:xfrm>
-          <a:prstGeom prst="rect">
-            <a:avLst/>
-          </a:prstGeom>
-          <a:noFill/>
-          <a:ln w="12700">
-            <a:solidFill>
-              <a:prstClr val="black"/>
-            </a:solidFill>
-          </a:ln>
-        </p:spPr>
-        <p:txBody>
-          <a:bodyPr vert="horz" lIns="91440" tIns="45720" rIns="91440" bIns="45720" rtlCol="0" anchor="ctr"/>
-          <a:lstStyle/>
-          <a:p>
-            <a:endParaRPr lang="en-US"/>
-          </a:p>
-        </p:txBody>
-      </p:sp>
-      <p:sp>
-        <p:nvSpPr>
-          <p:cNvPr id="5" name="Notes Placeholder 4"/>
-          <p:cNvSpPr>
-            <a:spLocks noGrp="1"/>
-          </p:cNvSpPr>
-          <p:nvPr>
-            <p:ph type="body" sz="quarter" idx="3"/>
-          </p:nvPr>
-        </p:nvSpPr>
-        <p:spPr>
-          <a:xfrm>
-            <a:off x="685800" y="4400550"/>
-            <a:ext cx="5486400" cy="3600450"/>
-          </a:xfrm>
-          <a:prstGeom prst="rect">
-            <a:avLst/>
-          </a:prstGeom>
-        </p:spPr>
-        <p:txBody>
-          <a:bodyPr vert="horz" lIns="91440" tIns="45720" rIns="91440" bIns="45720" rtlCol="0"/>
-          <a:lstStyle/>
-          <a:p>
-            <a:pPr lvl="0"/>
-            <a:r>
-              <a:rPr lang="en-US"/>
-              <a:t>Click to edit Master text styles</a:t>
-            </a:r>
-          </a:p>
-          <a:p>
-            <a:pPr lvl="1"/>
-            <a:r>
-              <a:rPr lang="en-US"/>
-              <a:t>Second level</a:t>
-            </a:r>
-          </a:p>
-          <a:p>
-            <a:pPr lvl="2"/>
-            <a:r>
-              <a:rPr lang="en-US"/>
-              <a:t>Third level</a:t>
-            </a:r>
-          </a:p>
-          <a:p>
-            <a:pPr lvl="3"/>
-            <a:r>
-              <a:rPr lang="en-US"/>
-              <a:t>Fourth level</a:t>
-            </a:r>
-          </a:p>
-          <a:p>
-            <a:pPr lvl="4"/>
-            <a:r>
-              <a:rPr lang="en-US"/>
-              <a:t>Fifth level</a:t>
-            </a:r>
-          </a:p>
-        </p:txBody>
-      </p:sp>
-      <p:sp>
-        <p:nvSpPr>
-          <p:cNvPr id="6" name="Footer Placeholder 5"/>
-          <p:cNvSpPr>
-            <a:spLocks noGrp="1"/>
-          </p:cNvSpPr>
-          <p:nvPr>
-            <p:ph type="ftr" sz="quarter" idx="4"/>
-          </p:nvPr>
-        </p:nvSpPr>
-        <p:spPr>
-          <a:xfrm>
-            <a:off x="0" y="8685213"/>
-            <a:ext cx="2971800" cy="458787"/>
-          </a:xfrm>
-          <a:prstGeom prst="rect">
-            <a:avLst/>
-          </a:prstGeom>
-        </p:spPr>
-        <p:txBody>
-          <a:bodyPr vert="horz" lIns="91440" tIns="45720" rIns="91440" bIns="45720" rtlCol="0" anchor="b"/>
-          <a:lstStyle>
-            <a:lvl1pPr algn="l">
-              <a:defRPr sz="1200"/>
-            </a:lvl1pPr>
-          </a:lstStyle>
-          <a:p>
-            <a:endParaRPr lang="en-US"/>
-          </a:p>
-        </p:txBody>
-      </p:sp>
-      <p:sp>
-        <p:nvSpPr>
-          <p:cNvPr id="7" name="Slide Number Placeholder 6"/>
-          <p:cNvSpPr>
-            <a:spLocks noGrp="1"/>
-          </p:cNvSpPr>
-          <p:nvPr>
-            <p:ph type="sldNum" sz="quarter" idx="5"/>
-          </p:nvPr>
-        </p:nvSpPr>
-        <p:spPr>
-          <a:xfrm>
-            <a:off x="3884613" y="8685213"/>
-            <a:ext cx="2971800" cy="458787"/>
-          </a:xfrm>
-          <a:prstGeom prst="rect">
-            <a:avLst/>
-          </a:prstGeom>
-        </p:spPr>
-        <p:txBody>
-          <a:bodyPr vert="horz" lIns="91440" tIns="45720" rIns="91440" bIns="45720" rtlCol="0" anchor="b"/>
-          <a:lstStyle>
-            <a:lvl1pPr algn="r">
-              <a:defRPr sz="1200"/>
-            </a:lvl1pPr>
-          </a:lstStyle>
-          <a:p>
-            <a:fld id="{CE5E9CC1-C706-0F49-92D6-E571CC5EEA8F}" type="slidenum">
-              <a:rPr lang="en-US"/>
-              <a:t>‹#›</a:t>
-            </a:fld>
-            <a:endParaRPr lang="en-US"/>
-          </a:p>
-        </p:txBody>
-      </p:sp>
     </p:spTree>
     <p:extLst>
       <p:ext uri="{BB962C8B-B14F-4D97-AF65-F5344CB8AC3E}">
-        <p14:creationId xmlns:p14="http://schemas.microsoft.com/office/powerpoint/2010/main" val="1024086991"/>
+        <p14:creationId xmlns:p14="http://schemas.microsoft.com/office/powerpoint/2010/main" val="2731423064"/>
       </p:ext>
     </p:extLst>
   </p:cSld>
@@ -992,7 +804,6 @@
               <a:rPr lang="en-US" dirty="0"/>
               <a:t>About 45 seconds. TuitionPilot is an AI agent for Indian families who pay university fees abroad. It does three things that matter: it proves the invoice really comes from the university and its real bank account, it explains every rupee of tax and cost, and it can pay only after the parent's own device signs the exact plan. Everything you will see uses synthetic data and a simulated bank. It is not tax advice.</a:t>
             </a:r>
-            <a:endParaRPr lang="en-US" dirty="0"/>
           </a:p>
         </p:txBody>
       </p:sp>
@@ -1077,8 +888,8 @@
           <a:lstStyle/>
           <a:p>
             <a:r>
-              <a:rPr lang="en-US" dirty="0"/>
-              <a:t>About 1 minute. We want to be plain about limits. Some tax rules are still unverified or from secondary sources, and every output that uses them says so; GST on the currency conversion itself is not modelled. The AI step is an offline stand-in, our signature code is not hardened, the demo keys are synthetic, and the local server still lacks an origin check. Next, we verify every rule against the RBI Master Direction and the Income-tax Act, connect a hosted model behind the same guards, move to a vetted crypto library or hardware keys, and harden the server. Thank you.</a:t>
+              <a:rPr lang="en-US"/>
+              <a:t>About 45 seconds. Everything here can be rerun with one command each. 239 tests pass. All 27 scenarios pass: ten task-completion, six safe-execution, nine attacks including a forged approval and a revoked university key, and two privacy scenarios. The attack lab stops all 16 attacks. The scripted sandbox run writes a ledger, the log of what the AI saw, and an audit log whose hash chain verifies. A finance audit of 400 random cases matched an independent formula.</a:t>
             </a:r>
             <a:endParaRPr lang="en-US" dirty="0"/>
           </a:p>
@@ -1102,6 +913,94 @@
             <a:fld id="{F7021451-1387-4CA6-816F-3879F97B5CBC}" type="slidenum">
               <a:rPr lang="en-US"/>
               <a:t>10</a:t>
+            </a:fld>
+            <a:endParaRPr lang="en-US"/>
+          </a:p>
+        </p:txBody>
+      </p:sp>
+    </p:spTree>
+    <p:extLst>
+      <p:ext uri="{BB962C8B-B14F-4D97-AF65-F5344CB8AC3E}">
+        <p14:creationId xmlns:p14="http://schemas.microsoft.com/office/powerpoint/2010/main" val="1024086991"/>
+      </p:ext>
+    </p:extLst>
+  </p:cSld>
+  <p:clrMapOvr>
+    <a:masterClrMapping/>
+  </p:clrMapOvr>
+</p:notes>
+</file>
+
+<file path=ppt/notesSlides/notesSlide11.xml><?xml version="1.0" encoding="utf-8"?>
+<p:notes xmlns:a="http://schemas.openxmlformats.org/drawingml/2006/main" xmlns:r="http://schemas.openxmlformats.org/officeDocument/2006/relationships" xmlns:p="http://schemas.openxmlformats.org/presentationml/2006/main">
+  <p:cSld>
+    <p:spTree>
+      <p:nvGrpSpPr>
+        <p:cNvPr id="1" name=""/>
+        <p:cNvGrpSpPr/>
+        <p:nvPr/>
+      </p:nvGrpSpPr>
+      <p:grpSpPr>
+        <a:xfrm>
+          <a:off x="0" y="0"/>
+          <a:ext cx="0" cy="0"/>
+          <a:chOff x="0" y="0"/>
+          <a:chExt cx="0" cy="0"/>
+        </a:xfrm>
+      </p:grpSpPr>
+      <p:sp>
+        <p:nvSpPr>
+          <p:cNvPr id="2" name="Slide Image Placeholder 1"/>
+          <p:cNvSpPr>
+            <a:spLocks noGrp="1" noRot="1" noChangeAspect="1"/>
+          </p:cNvSpPr>
+          <p:nvPr>
+            <p:ph type="sldImg"/>
+          </p:nvPr>
+        </p:nvSpPr>
+        <p:spPr/>
+      </p:sp>
+      <p:sp>
+        <p:nvSpPr>
+          <p:cNvPr id="3" name="Notes Placeholder 2"/>
+          <p:cNvSpPr>
+            <a:spLocks noGrp="1"/>
+          </p:cNvSpPr>
+          <p:nvPr>
+            <p:ph type="body" idx="1"/>
+          </p:nvPr>
+        </p:nvSpPr>
+        <p:spPr/>
+        <p:txBody>
+          <a:bodyPr/>
+          <a:lstStyle/>
+          <a:p>
+            <a:r>
+              <a:rPr lang="en-US"/>
+              <a:t>About 45 seconds. Limits, plainly. Six tax rules are now verified against RBI and the Income-tax Act; two still need a bank's confirmation, and GST on the conversion itself is not modelled. The default AI step is offline, our signature code is not hardened, and the demo keys are synthetic. Next: bank confirmation, credit building and more destinations for students, a vetted crypto library or hardware keys, and cookie sessions. Thank you.</a:t>
+            </a:r>
+            <a:endParaRPr lang="en-US" dirty="0"/>
+          </a:p>
+        </p:txBody>
+      </p:sp>
+      <p:sp>
+        <p:nvSpPr>
+          <p:cNvPr id="4" name="Slide Number Placeholder 3"/>
+          <p:cNvSpPr>
+            <a:spLocks noGrp="1"/>
+          </p:cNvSpPr>
+          <p:nvPr>
+            <p:ph type="sldNum" sz="quarter" idx="10"/>
+          </p:nvPr>
+        </p:nvSpPr>
+        <p:spPr/>
+        <p:txBody>
+          <a:bodyPr/>
+          <a:lstStyle/>
+          <a:p>
+            <a:fld id="{F7021451-1387-4CA6-816F-3879F97B5CBC}" type="slidenum">
+              <a:rPr lang="en-US"/>
+              <a:t>11</a:t>
             </a:fld>
             <a:endParaRPr lang="en-US"/>
           </a:p>
@@ -1165,8 +1064,8 @@
           <a:lstStyle/>
           <a:p>
             <a:r>
-              <a:rPr lang="en-US" dirty="0"/>
-              <a:t>About 1 minute. Before paying, a family has to answer four questions on their own: how much of the yearly LRS limit is left, how much TCS tax the bank will add, which bank or provider is really cheapest once the exchange-rate markup is counted, and which papers the bank wants. One mistake costs money. And there is a fraud risk: an e-mail saying the university's bank details have changed is a classic way to steal fees. TuitionPilot is built so that this attack fails by design. Note the LRS cap is still marked unverified in our rule pack.</a:t>
+              <a:rPr lang="en-US"/>
+              <a:t>About 50 seconds. Before paying, a family has to answer four questions on their own: how much of the yearly LRS limit is left, how much TCS tax the bank will add, which bank or provider is really cheapest once the exchange-rate markup is counted, and which papers the bank wants. One mistake costs money. And there is a fraud risk: an e-mail saying the university's bank details have changed is a classic way to steal fees. TuitionPilot is built so that this attack fails by design.</a:t>
             </a:r>
             <a:endParaRPr lang="en-US" dirty="0"/>
           </a:p>
@@ -1253,8 +1152,8 @@
           <a:lstStyle/>
           <a:p>
             <a:r>
-              <a:rPr lang="en-US" dirty="0"/>
-              <a:t>About 1 minute. The app tells the payment as a guided six-step story: welcome and consent, the invoice with an animated signature check, one question at a time, the best route with a cost chart, what-if sliders and the LRS gauge, review and sign with a PIN while the parent's device signs the plan, and the receipt. Beside it, a live agent panel shows every decision and exactly what the AI saw, and an attack lab runs 16 attacks live. Our design rule is that code computes and the AI explains. To be honest, the AI step today is an offline, deterministic stand-in.</a:t>
+              <a:rPr lang="en-US"/>
+              <a:t>About 50 seconds. The app tells the payment as a guided six-step story: consent, the invoice with an animated signature check, one question at a time, the best route with a cost chart and what-if sliders, review and sign with a PIN while the parent's device signs the plan, and the receipt. Beside it, a live agent panel shows the next action and why, every decision, and exactly what the AI saw. Code computes and the AI explains: it runs offline by default, and a hosted Claude model can be switched on behind the same guards.</a:t>
             </a:r>
             <a:endParaRPr lang="en-US" dirty="0"/>
           </a:p>
@@ -1341,8 +1240,8 @@
           <a:lstStyle/>
           <a:p>
             <a:r>
-              <a:rPr lang="en-US" dirty="0"/>
-              <a:t>About 1 minute. Orange is outside our server: the university, the parent's and student's browsers, and the trust root. Every private key lives there, never on the server. Blue is the agent pipeline from intake to plan; the dashed box is the only step that uses an AI model, and it sees masked text only. White boxes are guards: the text scanner, the grounding check, the versioned rule pack and the message contract. Navy is the money path: every tool call goes through the policy gate, then the sandbox bank, then a hash-chained audit log and receipt. The whole server is Python standard library and listens only on this computer.</a:t>
+              <a:rPr lang="en-US"/>
+              <a:t>About 45 seconds. This is the real app. Topic C is about international students, so the student does the work: they sign in on their own device without a password, upload the invoice, the agent verifies the university's signature and asks only what is missing, and the student taps 'Ask a parent to sign'. The parent sees the request on their own device, opens it, the browser re-checks the plan hash, the parent signs with the PIN, and the sandbox pays once. The student's session is retired the moment the parent opens it, so a student device can never act as the parent.</a:t>
             </a:r>
             <a:endParaRPr lang="en-US" dirty="0"/>
           </a:p>
@@ -1430,9 +1329,8 @@
           <a:p>
             <a:r>
               <a:rPr lang="en-US" dirty="0"/>
-              <a:t>About 1 minute 15. The rules engine stores every rate in a versioned rule pack with its value, start date, source and status. No TCS on the first 10 lakh rupees a person sends in a year; above that, 2 percent for self-funded education from 1 April 2026, and zero with an education loan. Worked example A2: 15 lakh self-funded, so 5 lakh is taxable and TCS is 10,000 rupees. With a loan, zero. We are honest about sources: the threshold and education rates come from secondary sources, and the LRS cap and no-PAN rate are still unverified, so every output that uses them says so.</a:t>
-            </a:r>
-            <a:endParaRPr lang="en-US" dirty="0"/>
+              <a:t>About 1 minute. Orange is outside our server: the university, the parent's and student's browsers, and the trust root. Every private key lives there, never on the server. Blue is the agent pipeline from intake to plan; the dashed box is the only step that uses an AI model, and it sees masked text only. White boxes are guards: the text scanner, the grounding check, the versioned rule pack and the message contract. Navy is the money path: every tool call goes through the policy gate, then the sandbox bank, then a hash-chained audit log and receipt. The whole server is Python standard library and listens only on this computer.</a:t>
+            </a:r>
           </a:p>
         </p:txBody>
       </p:sp>
@@ -1517,8 +1415,8 @@
           <a:lstStyle/>
           <a:p>
             <a:r>
-              <a:rPr lang="en-US" dirty="0"/>
-              <a:t>About 1 minute 15. Same USD 20,000, two providers. Provider A has the lower fee, so most people pick A. But B is 4,620 rupees cheaper. The chart shows what each route costs on top of the real exchange value: A hides 10,000 rupees inside its exchange rate, B only 4,000. The why breakdown, written by code, adds up exactly: B's better rate saves 6,000, A's fee is 1,500 lower, and TCS is 120 less with B. The mid-market rate of 90.00 is an example value from our tests.</a:t>
+              <a:rPr lang="en-US"/>
+              <a:t>About 55 seconds. Every rate lives in a versioned rule pack with its value, start date, source and status. On 18 October we checked them against the primary texts: the RBI Master Direction for the USD 250,000 cap, and sections 394 and 397 of the Income-tax Act 2025 for the 10 lakh threshold, 2 percent for self-funded education, no TCS on an education loan, and 5 percent without a PAN. Worked example A2: 15 lakh self-funded, so 5 lakh is taxable and TCS is 10,000 rupees. Two rules still need a bank's confirmation, and every output that uses them says so.</a:t>
             </a:r>
             <a:endParaRPr lang="en-US" dirty="0"/>
           </a:p>
@@ -1606,9 +1504,8 @@
           <a:p>
             <a:r>
               <a:rPr lang="en-US" dirty="0"/>
-              <a:t>About 1 minute 15. We keep no list of good payees. One trust root certifies each university together with its bank account, and the university signs every invoice. The agent checks every link: certificate from the root and not revoked, invoice signature valid, bank details equal to the certificate, printed text equal to the signed data. Change the bank account and the signature breaks. For payments, the parent's browser makes its own key that cannot be exported, registers only the public half with the PIN, recomputes the plan hash itself and signs that exact plan. The policy gate checks the signature before any payment, so the agent can neither forge an approval nor change the plan afterwards.</a:t>
-            </a:r>
-            <a:endParaRPr lang="en-US" dirty="0"/>
+              <a:t>About 1 minute 15. Same USD 20,000, two providers. Provider A has the lower fee, so most people pick A. But B is 4,620 rupees cheaper. The chart shows what each route costs on top of the real exchange value: A hides 10,000 rupees inside its exchange rate, B only 4,000. The why breakdown, written by code, adds up exactly: B's better rate saves 6,000, A's fee is 1,500 lower, and TCS is 120 less with B. The mid-market rate of 90.00 is an example value from our tests.</a:t>
+            </a:r>
           </a:p>
         </p:txBody>
       </p:sp>
@@ -1693,8 +1590,8 @@
           <a:lstStyle/>
           <a:p>
             <a:r>
-              <a:rPr lang="en-US" dirty="0"/>
-              <a:t>About 1 minute. Security is 30 percent of the score, so we layered it. Every action has a permission tier. Reading and computing need no approval, saving needs a click, a sandbox payment needs the PIN plus the parent device's signature over the plan hash, and tier 4 is never allowed. The AI model has no payment tool at all. Around that: masking before the model sees anything, a grounding check on every number it writes, a text scanner for injection and fake-admin tricks, a cap, emergency stop and circuit breaker, a hash-chained audit log, and a family vault where documents are encrypted in the browser so the server only ever holds ciphertext.</a:t>
+              <a:rPr lang="en-US"/>
+              <a:t>About 55 seconds. We keep no list of good payees. One trust root certifies each university together with its bank account, and the university signs every invoice. The agent checks every link, so changing the bank account breaks the signature. For payments, the parent's browser makes its own key that cannot be exported. The first parent device enrols with the PIN; every later device also needs a signature from an enrolled parent device. The browser recomputes the plan hash itself and signs that exact plan, so the agent can neither forge an approval nor change the plan afterwards.</a:t>
             </a:r>
             <a:endParaRPr lang="en-US" dirty="0"/>
           </a:p>
@@ -1782,9 +1679,8 @@
           <a:p>
             <a:r>
               <a:rPr lang="en-US" dirty="0"/>
-              <a:t>About 1 minute. Everything here can be rerun with one command each. 227 tests pass. All 27 scenarios pass: ten task-completion, six safe-execution, nine attacks including a forged approval and a revoked university key, and two privacy scenarios. The attack lab stops all 16 attacks. The scripted sandbox run writes a ledger, the log of what the AI saw, and an audit log of 153 entries whose hash chain verifies. A finance audit of 400 random cases matched an independent formula, and it found three bugs in the agent, which we fixed with tests.</a:t>
-            </a:r>
-            <a:endParaRPr lang="en-US" dirty="0"/>
+              <a:t>About 1 minute. Security is 30 percent of the score, so we layered it. Every action has a permission tier. Reading and computing need no approval, saving needs a click, a sandbox payment needs the PIN plus the parent device's signature over the plan hash, and tier 4 is never allowed. The AI model has no payment tool at all. Around that: masking before the model sees anything, a grounding check on every number it writes, a text scanner for injection and fake-admin tricks, a cap, emergency stop and circuit breaker, a hash-chained audit log, and a family vault where documents are encrypted in the browser so the server only ever holds ciphertext.</a:t>
+            </a:r>
           </a:p>
         </p:txBody>
       </p:sp>
@@ -1862,6 +1758,7 @@
         <a:solidFill>
           <a:srgbClr val="FFFFFF"/>
         </a:solidFill>
+        <a:effectLst/>
       </p:bgPr>
     </p:bg>
     <p:spTree>
@@ -1881,9 +1778,11 @@
       <p:sp>
         <p:nvSpPr>
           <p:cNvPr id="2" name="Text 0"/>
-          <p:cNvSpPr/>
+          <p:cNvSpPr>
+            <a:spLocks noGrp="1"/>
+          </p:cNvSpPr>
           <p:nvPr>
-            <p:ph idx="100" type="title" hasCustomPrompt="1"/>
+            <p:ph type="title" idx="100" hasCustomPrompt="1"/>
           </p:nvPr>
         </p:nvSpPr>
         <p:spPr>
@@ -1900,7 +1799,7 @@
         <p:txBody>
           <a:bodyPr wrap="square" rtlCol="0"/>
           <a:lstStyle>
-            <a:lvl1pPr algn="l" indent="0" marL="0">
+            <a:lvl1pPr marL="0" indent="0" algn="l">
               <a:buNone/>
               <a:defRPr lang="en-US" sz="3000" b="1" dirty="0">
                 <a:solidFill>
@@ -1913,7 +1812,7 @@
             </a:lvl1pPr>
           </a:lstStyle>
           <a:p>
-            <a:pPr algn="l" indent="0" marL="0">
+            <a:pPr marL="0" indent="0" algn="l">
               <a:buNone/>
             </a:pPr>
             <a:endParaRPr lang="en-US" sz="3000" dirty="0"/>
@@ -1941,7 +1840,7 @@
           <a:bodyPr wrap="square" lIns="0" tIns="0" rIns="0" bIns="0" rtlCol="0" anchor="ctr"/>
           <a:lstStyle/>
           <a:p>
-            <a:pPr indent="0" marL="0">
+            <a:pPr marL="0" indent="0">
               <a:buNone/>
             </a:pPr>
             <a:r>
@@ -1979,7 +1878,7 @@
           </a:prstGeom>
           <a:extLst>
             <a:ext uri="{C572A759-6A51-4108-AA02-DFA0A04FC94B}">
-              <ma14:wrappingTextBoxFlag xmlns:ma14="http://schemas.microsoft.com/office/mac/drawingml/2011/main" val="0"/>
+              <ma14:wrappingTextBoxFlag xmlns="" xmlns:ma14="http://schemas.microsoft.com/office/mac/drawingml/2011/main" val="0"/>
             </a:ext>
           </a:extLst>
         </p:spPr>
@@ -2000,8 +1899,8 @@
           <a:p>
             <a:pPr algn="r"/>
             <a:fld id="{F7021451-1387-4CA6-816F-3879F97B5CBC}" type="slidenum">
-              <a:rPr b="0" lang="en-US"/>
-              <a:t>1002</a:t>
+              <a:rPr lang="en-US" b="0"/>
+              <a:t>‹#›</a:t>
             </a:fld>
             <a:endParaRPr lang="en-US"/>
           </a:p>
@@ -2023,6 +1922,7 @@
         <a:solidFill>
           <a:srgbClr val="14213D"/>
         </a:solidFill>
+        <a:effectLst/>
       </p:bgPr>
     </p:bg>
     <p:spTree>
@@ -2050,6 +1950,11 @@
 <file path=ppt/slideMasters/slideMaster1.xml><?xml version="1.0" encoding="utf-8"?>
 <p:sldMaster xmlns:a="http://schemas.openxmlformats.org/drawingml/2006/main" xmlns:r="http://schemas.openxmlformats.org/officeDocument/2006/relationships" xmlns:p="http://schemas.openxmlformats.org/presentationml/2006/main">
   <p:cSld>
+    <p:bg>
+      <p:bgRef idx="1001">
+        <a:schemeClr val="bg1"/>
+      </p:bgRef>
+    </p:bg>
     <p:spTree>
       <p:nvGrpSpPr>
         <p:cNvPr id="1" name=""/>
@@ -2084,7 +1989,7 @@
           </a:prstGeom>
           <a:extLst>
             <a:ext uri="{C572A759-6A51-4108-AA02-DFA0A04FC94B}">
-              <ma14:wrappingTextBoxFlag xmlns:ma14="http://schemas.microsoft.com/office/mac/drawingml/2011/main" val="0"/>
+              <ma14:wrappingTextBoxFlag xmlns="" xmlns:ma14="http://schemas.microsoft.com/office/mac/drawingml/2011/main" val="0"/>
             </a:ext>
           </a:extLst>
         </p:spPr>
@@ -2105,8 +2010,8 @@
           <a:p>
             <a:pPr algn="r"/>
             <a:fld id="{F7021451-1387-4CA6-816F-3879F97B5CBC}" type="slidenum">
-              <a:rPr b="0" lang="en-US"/>
-              <a:t>null</a:t>
+              <a:rPr lang="en-US" b="0"/>
+              <a:t>‹#›</a:t>
             </a:fld>
             <a:endParaRPr lang="en-US"/>
           </a:p>
@@ -2412,11 +2317,11 @@
           <a:bodyPr wrap="square" lIns="0" tIns="0" rIns="0" bIns="0" rtlCol="0" anchor="t"/>
           <a:lstStyle/>
           <a:p>
-            <a:pPr indent="0" marL="0">
-              <a:buNone/>
-            </a:pPr>
-            <a:r>
-              <a:rPr lang="en-US" sz="1400" b="1" spc="200" kern="0" dirty="0">
+            <a:pPr marL="0" indent="0">
+              <a:buNone/>
+            </a:pPr>
+            <a:r>
+              <a:rPr lang="en-US" sz="1400" b="1" kern="0" spc="200" dirty="0">
                 <a:solidFill>
                   <a:srgbClr val="F2C38B"/>
                 </a:solidFill>
@@ -2451,7 +2356,7 @@
           <a:bodyPr wrap="square" lIns="0" tIns="0" rIns="0" bIns="0" rtlCol="0" anchor="t"/>
           <a:lstStyle/>
           <a:p>
-            <a:pPr indent="0" marL="0">
+            <a:pPr marL="0" indent="0">
               <a:buNone/>
             </a:pPr>
             <a:r>
@@ -2490,7 +2395,7 @@
           <a:bodyPr wrap="square" lIns="0" tIns="0" rIns="0" bIns="0" rtlCol="0" anchor="t"/>
           <a:lstStyle/>
           <a:p>
-            <a:pPr indent="0" marL="0">
+            <a:pPr marL="0" indent="0">
               <a:buNone/>
             </a:pPr>
             <a:r>
@@ -2571,7 +2476,7 @@
           <a:bodyPr wrap="square" lIns="0" tIns="0" rIns="0" bIns="0" rtlCol="0" anchor="ctr"/>
           <a:lstStyle/>
           <a:p>
-            <a:pPr algn="ctr" indent="0" marL="0">
+            <a:pPr marL="0" indent="0" algn="ctr">
               <a:buNone/>
             </a:pPr>
             <a:r>
@@ -2610,7 +2515,7 @@
           <a:bodyPr wrap="square" lIns="0" tIns="0" rIns="0" bIns="0" rtlCol="0" anchor="ctr"/>
           <a:lstStyle/>
           <a:p>
-            <a:pPr indent="0" marL="0">
+            <a:pPr marL="0" indent="0">
               <a:buNone/>
             </a:pPr>
             <a:r>
@@ -2691,7 +2596,7 @@
           <a:bodyPr wrap="square" lIns="0" tIns="0" rIns="0" bIns="0" rtlCol="0" anchor="ctr"/>
           <a:lstStyle/>
           <a:p>
-            <a:pPr algn="ctr" indent="0" marL="0">
+            <a:pPr marL="0" indent="0" algn="ctr">
               <a:buNone/>
             </a:pPr>
             <a:r>
@@ -2730,7 +2635,7 @@
           <a:bodyPr wrap="square" lIns="0" tIns="0" rIns="0" bIns="0" rtlCol="0" anchor="ctr"/>
           <a:lstStyle/>
           <a:p>
-            <a:pPr indent="0" marL="0">
+            <a:pPr marL="0" indent="0">
               <a:buNone/>
             </a:pPr>
             <a:r>
@@ -2811,7 +2716,7 @@
           <a:bodyPr wrap="square" lIns="0" tIns="0" rIns="0" bIns="0" rtlCol="0" anchor="ctr"/>
           <a:lstStyle/>
           <a:p>
-            <a:pPr algn="ctr" indent="0" marL="0">
+            <a:pPr marL="0" indent="0" algn="ctr">
               <a:buNone/>
             </a:pPr>
             <a:r>
@@ -2850,7 +2755,7 @@
           <a:bodyPr wrap="square" lIns="0" tIns="0" rIns="0" bIns="0" rtlCol="0" anchor="ctr"/>
           <a:lstStyle/>
           <a:p>
-            <a:pPr indent="0" marL="0">
+            <a:pPr marL="0" indent="0">
               <a:buNone/>
             </a:pPr>
             <a:r>
@@ -2889,7 +2794,7 @@
           <a:bodyPr wrap="square" lIns="0" tIns="0" rIns="0" bIns="0" rtlCol="0" anchor="t"/>
           <a:lstStyle/>
           <a:p>
-            <a:pPr indent="0" marL="0">
+            <a:pPr marL="0" indent="0">
               <a:buNone/>
             </a:pPr>
             <a:r>
@@ -2916,6 +2821,1157 @@
 </file>
 
 <file path=ppt/slides/slide10.xml><?xml version="1.0" encoding="utf-8"?>
+<p:sld xmlns:a="http://schemas.openxmlformats.org/drawingml/2006/main" xmlns:r="http://schemas.openxmlformats.org/officeDocument/2006/relationships" xmlns:p="http://schemas.openxmlformats.org/presentationml/2006/main">
+  <p:cSld name="Slide 9">
+    <p:spTree>
+      <p:nvGrpSpPr>
+        <p:cNvPr id="1" name=""/>
+        <p:cNvGrpSpPr/>
+        <p:nvPr/>
+      </p:nvGrpSpPr>
+      <p:grpSpPr>
+        <a:xfrm>
+          <a:off x="0" y="0"/>
+          <a:ext cx="0" cy="0"/>
+          <a:chOff x="0" y="0"/>
+          <a:chExt cx="0" cy="0"/>
+        </a:xfrm>
+      </p:grpSpPr>
+      <p:sp>
+        <p:nvSpPr>
+          <p:cNvPr id="2" name="Text 0"/>
+          <p:cNvSpPr txBox="1"/>
+          <p:nvPr/>
+        </p:nvSpPr>
+        <p:spPr>
+          <a:xfrm>
+            <a:off x="548640" y="365760"/>
+            <a:ext cx="11064240" cy="731520"/>
+          </a:xfrm>
+          <a:prstGeom prst="rect">
+            <a:avLst/>
+          </a:prstGeom>
+          <a:noFill/>
+          <a:ln/>
+        </p:spPr>
+        <p:txBody>
+          <a:bodyPr wrap="square" lIns="0" tIns="0" rIns="0" bIns="0" rtlCol="0" anchor="ctr"/>
+          <a:lstStyle/>
+          <a:p>
+            <a:pPr marL="0" indent="0">
+              <a:buNone/>
+            </a:pPr>
+            <a:r>
+              <a:rPr lang="en-US" sz="3000" b="1" dirty="0">
+                <a:solidFill>
+                  <a:srgbClr val="FFFFFF"/>
+                </a:solidFill>
+                <a:latin typeface="Cambria" pitchFamily="34" charset="0"/>
+                <a:ea typeface="Cambria" pitchFamily="34" charset="-122"/>
+                <a:cs typeface="Cambria" pitchFamily="34" charset="-120"/>
+              </a:rPr>
+              <a:t>Evidence: run it yourself, one command each</a:t>
+            </a:r>
+            <a:endParaRPr lang="en-US" sz="3000" dirty="0"/>
+          </a:p>
+        </p:txBody>
+      </p:sp>
+      <p:sp>
+        <p:nvSpPr>
+          <p:cNvPr id="3" name="Shape 1"/>
+          <p:cNvSpPr/>
+          <p:nvPr/>
+        </p:nvSpPr>
+        <p:spPr>
+          <a:xfrm>
+            <a:off x="548640" y="1371600"/>
+            <a:ext cx="2651760" cy="1691640"/>
+          </a:xfrm>
+          <a:prstGeom prst="roundRect">
+            <a:avLst>
+              <a:gd name="adj" fmla="val 6486"/>
+            </a:avLst>
+          </a:prstGeom>
+          <a:solidFill>
+            <a:srgbClr val="1F2F52"/>
+          </a:solidFill>
+          <a:ln/>
+        </p:spPr>
+      </p:sp>
+      <p:sp>
+        <p:nvSpPr>
+          <p:cNvPr id="4" name="Text 2"/>
+          <p:cNvSpPr txBox="1"/>
+          <p:nvPr/>
+        </p:nvSpPr>
+        <p:spPr>
+          <a:xfrm>
+            <a:off x="777240" y="1481328"/>
+            <a:ext cx="2286000" cy="868680"/>
+          </a:xfrm>
+          <a:prstGeom prst="rect">
+            <a:avLst/>
+          </a:prstGeom>
+          <a:noFill/>
+          <a:ln/>
+        </p:spPr>
+        <p:txBody>
+          <a:bodyPr wrap="square" lIns="0" tIns="0" rIns="0" bIns="0" rtlCol="0" anchor="t"/>
+          <a:lstStyle/>
+          <a:p>
+            <a:pPr marL="0" indent="0">
+              <a:buNone/>
+            </a:pPr>
+            <a:r>
+              <a:rPr lang="en-US" sz="4400" b="1">
+                <a:solidFill>
+                  <a:srgbClr val="8FBCF0"/>
+                </a:solidFill>
+                <a:latin typeface="Cambria" pitchFamily="34" charset="0"/>
+                <a:ea typeface="Cambria" pitchFamily="34" charset="-122"/>
+                <a:cs typeface="Cambria" pitchFamily="34" charset="-120"/>
+              </a:rPr>
+              <a:t>239</a:t>
+            </a:r>
+            <a:endParaRPr lang="en-US" sz="4400" dirty="0"/>
+          </a:p>
+        </p:txBody>
+      </p:sp>
+      <p:sp>
+        <p:nvSpPr>
+          <p:cNvPr id="5" name="Text 3"/>
+          <p:cNvSpPr txBox="1"/>
+          <p:nvPr/>
+        </p:nvSpPr>
+        <p:spPr>
+          <a:xfrm>
+            <a:off x="777240" y="2377440"/>
+            <a:ext cx="2286000" cy="594360"/>
+          </a:xfrm>
+          <a:prstGeom prst="rect">
+            <a:avLst/>
+          </a:prstGeom>
+          <a:noFill/>
+          <a:ln/>
+        </p:spPr>
+        <p:txBody>
+          <a:bodyPr wrap="square" lIns="0" tIns="0" rIns="0" bIns="0" rtlCol="0" anchor="t"/>
+          <a:lstStyle/>
+          <a:p>
+            <a:pPr marL="0" indent="0">
+              <a:buNone/>
+            </a:pPr>
+            <a:r>
+              <a:rPr lang="en-US" sz="1400" dirty="0">
+                <a:solidFill>
+                  <a:srgbClr val="FFFFFF"/>
+                </a:solidFill>
+                <a:latin typeface="Calibri" pitchFamily="34" charset="0"/>
+                <a:ea typeface="Calibri" pitchFamily="34" charset="-122"/>
+                <a:cs typeface="Calibri" pitchFamily="34" charset="-120"/>
+              </a:rPr>
+              <a:t>tests pass</a:t>
+            </a:r>
+            <a:endParaRPr lang="en-US" sz="1400" dirty="0"/>
+          </a:p>
+        </p:txBody>
+      </p:sp>
+      <p:sp>
+        <p:nvSpPr>
+          <p:cNvPr id="6" name="Shape 4"/>
+          <p:cNvSpPr/>
+          <p:nvPr/>
+        </p:nvSpPr>
+        <p:spPr>
+          <a:xfrm>
+            <a:off x="3364992" y="1371600"/>
+            <a:ext cx="2651760" cy="1691640"/>
+          </a:xfrm>
+          <a:prstGeom prst="roundRect">
+            <a:avLst>
+              <a:gd name="adj" fmla="val 6486"/>
+            </a:avLst>
+          </a:prstGeom>
+          <a:solidFill>
+            <a:srgbClr val="1F2F52"/>
+          </a:solidFill>
+          <a:ln/>
+        </p:spPr>
+      </p:sp>
+      <p:sp>
+        <p:nvSpPr>
+          <p:cNvPr id="7" name="Text 5"/>
+          <p:cNvSpPr txBox="1"/>
+          <p:nvPr/>
+        </p:nvSpPr>
+        <p:spPr>
+          <a:xfrm>
+            <a:off x="3593592" y="1481328"/>
+            <a:ext cx="2286000" cy="868680"/>
+          </a:xfrm>
+          <a:prstGeom prst="rect">
+            <a:avLst/>
+          </a:prstGeom>
+          <a:noFill/>
+          <a:ln/>
+        </p:spPr>
+        <p:txBody>
+          <a:bodyPr wrap="square" lIns="0" tIns="0" rIns="0" bIns="0" rtlCol="0" anchor="t"/>
+          <a:lstStyle/>
+          <a:p>
+            <a:pPr marL="0" indent="0">
+              <a:buNone/>
+            </a:pPr>
+            <a:r>
+              <a:rPr lang="en-US" sz="4400" b="1" dirty="0">
+                <a:solidFill>
+                  <a:srgbClr val="8FBCF0"/>
+                </a:solidFill>
+                <a:latin typeface="Cambria" pitchFamily="34" charset="0"/>
+                <a:ea typeface="Cambria" pitchFamily="34" charset="-122"/>
+                <a:cs typeface="Cambria" pitchFamily="34" charset="-120"/>
+              </a:rPr>
+              <a:t>27 / 27</a:t>
+            </a:r>
+            <a:endParaRPr lang="en-US" sz="4400" dirty="0"/>
+          </a:p>
+        </p:txBody>
+      </p:sp>
+      <p:sp>
+        <p:nvSpPr>
+          <p:cNvPr id="8" name="Text 6"/>
+          <p:cNvSpPr txBox="1"/>
+          <p:nvPr/>
+        </p:nvSpPr>
+        <p:spPr>
+          <a:xfrm>
+            <a:off x="3593592" y="2377440"/>
+            <a:ext cx="2286000" cy="594360"/>
+          </a:xfrm>
+          <a:prstGeom prst="rect">
+            <a:avLst/>
+          </a:prstGeom>
+          <a:noFill/>
+          <a:ln/>
+        </p:spPr>
+        <p:txBody>
+          <a:bodyPr wrap="square" lIns="0" tIns="0" rIns="0" bIns="0" rtlCol="0" anchor="t"/>
+          <a:lstStyle/>
+          <a:p>
+            <a:pPr marL="0" indent="0">
+              <a:buNone/>
+            </a:pPr>
+            <a:r>
+              <a:rPr lang="en-US" sz="1400" dirty="0">
+                <a:solidFill>
+                  <a:srgbClr val="FFFFFF"/>
+                </a:solidFill>
+                <a:latin typeface="Calibri" pitchFamily="34" charset="0"/>
+                <a:ea typeface="Calibri" pitchFamily="34" charset="-122"/>
+                <a:cs typeface="Calibri" pitchFamily="34" charset="-120"/>
+              </a:rPr>
+              <a:t>scenarios pass</a:t>
+            </a:r>
+            <a:endParaRPr lang="en-US" sz="1400" dirty="0"/>
+          </a:p>
+        </p:txBody>
+      </p:sp>
+      <p:sp>
+        <p:nvSpPr>
+          <p:cNvPr id="9" name="Shape 7"/>
+          <p:cNvSpPr/>
+          <p:nvPr/>
+        </p:nvSpPr>
+        <p:spPr>
+          <a:xfrm>
+            <a:off x="6181344" y="1371600"/>
+            <a:ext cx="2651760" cy="1691640"/>
+          </a:xfrm>
+          <a:prstGeom prst="roundRect">
+            <a:avLst>
+              <a:gd name="adj" fmla="val 6486"/>
+            </a:avLst>
+          </a:prstGeom>
+          <a:solidFill>
+            <a:srgbClr val="1F2F52"/>
+          </a:solidFill>
+          <a:ln/>
+        </p:spPr>
+      </p:sp>
+      <p:sp>
+        <p:nvSpPr>
+          <p:cNvPr id="10" name="Text 8"/>
+          <p:cNvSpPr txBox="1"/>
+          <p:nvPr/>
+        </p:nvSpPr>
+        <p:spPr>
+          <a:xfrm>
+            <a:off x="6409944" y="1481328"/>
+            <a:ext cx="2286000" cy="868680"/>
+          </a:xfrm>
+          <a:prstGeom prst="rect">
+            <a:avLst/>
+          </a:prstGeom>
+          <a:noFill/>
+          <a:ln/>
+        </p:spPr>
+        <p:txBody>
+          <a:bodyPr wrap="square" lIns="0" tIns="0" rIns="0" bIns="0" rtlCol="0" anchor="t"/>
+          <a:lstStyle/>
+          <a:p>
+            <a:pPr marL="0" indent="0">
+              <a:buNone/>
+            </a:pPr>
+            <a:r>
+              <a:rPr lang="en-US" sz="4400" b="1" dirty="0">
+                <a:solidFill>
+                  <a:srgbClr val="F2C38B"/>
+                </a:solidFill>
+                <a:latin typeface="Cambria" pitchFamily="34" charset="0"/>
+                <a:ea typeface="Cambria" pitchFamily="34" charset="-122"/>
+                <a:cs typeface="Cambria" pitchFamily="34" charset="-120"/>
+              </a:rPr>
+              <a:t>16 / 16</a:t>
+            </a:r>
+            <a:endParaRPr lang="en-US" sz="4400" dirty="0"/>
+          </a:p>
+        </p:txBody>
+      </p:sp>
+      <p:sp>
+        <p:nvSpPr>
+          <p:cNvPr id="11" name="Text 9"/>
+          <p:cNvSpPr txBox="1"/>
+          <p:nvPr/>
+        </p:nvSpPr>
+        <p:spPr>
+          <a:xfrm>
+            <a:off x="6409944" y="2377440"/>
+            <a:ext cx="2286000" cy="594360"/>
+          </a:xfrm>
+          <a:prstGeom prst="rect">
+            <a:avLst/>
+          </a:prstGeom>
+          <a:noFill/>
+          <a:ln/>
+        </p:spPr>
+        <p:txBody>
+          <a:bodyPr wrap="square" lIns="0" tIns="0" rIns="0" bIns="0" rtlCol="0" anchor="t"/>
+          <a:lstStyle/>
+          <a:p>
+            <a:pPr marL="0" indent="0">
+              <a:buNone/>
+            </a:pPr>
+            <a:r>
+              <a:rPr lang="en-US" sz="1400" dirty="0">
+                <a:solidFill>
+                  <a:srgbClr val="FFFFFF"/>
+                </a:solidFill>
+                <a:latin typeface="Calibri" pitchFamily="34" charset="0"/>
+                <a:ea typeface="Calibri" pitchFamily="34" charset="-122"/>
+                <a:cs typeface="Calibri" pitchFamily="34" charset="-120"/>
+              </a:rPr>
+              <a:t>attacks stopped in the attack lab</a:t>
+            </a:r>
+            <a:endParaRPr lang="en-US" sz="1400" dirty="0"/>
+          </a:p>
+        </p:txBody>
+      </p:sp>
+      <p:sp>
+        <p:nvSpPr>
+          <p:cNvPr id="12" name="Shape 10"/>
+          <p:cNvSpPr/>
+          <p:nvPr/>
+        </p:nvSpPr>
+        <p:spPr>
+          <a:xfrm>
+            <a:off x="8997696" y="1371600"/>
+            <a:ext cx="2651760" cy="1691640"/>
+          </a:xfrm>
+          <a:prstGeom prst="roundRect">
+            <a:avLst>
+              <a:gd name="adj" fmla="val 6486"/>
+            </a:avLst>
+          </a:prstGeom>
+          <a:solidFill>
+            <a:srgbClr val="1F2F52"/>
+          </a:solidFill>
+          <a:ln/>
+        </p:spPr>
+      </p:sp>
+      <p:sp>
+        <p:nvSpPr>
+          <p:cNvPr id="13" name="Text 11"/>
+          <p:cNvSpPr txBox="1"/>
+          <p:nvPr/>
+        </p:nvSpPr>
+        <p:spPr>
+          <a:xfrm>
+            <a:off x="9226296" y="1481328"/>
+            <a:ext cx="2286000" cy="868680"/>
+          </a:xfrm>
+          <a:prstGeom prst="rect">
+            <a:avLst/>
+          </a:prstGeom>
+          <a:noFill/>
+          <a:ln/>
+        </p:spPr>
+        <p:txBody>
+          <a:bodyPr wrap="square" lIns="0" tIns="0" rIns="0" bIns="0" rtlCol="0" anchor="t"/>
+          <a:lstStyle/>
+          <a:p>
+            <a:pPr marL="0" indent="0">
+              <a:buNone/>
+            </a:pPr>
+            <a:r>
+              <a:rPr lang="en-US" sz="4400" b="1" dirty="0">
+                <a:solidFill>
+                  <a:srgbClr val="8FBCF0"/>
+                </a:solidFill>
+                <a:latin typeface="Cambria" pitchFamily="34" charset="0"/>
+                <a:ea typeface="Cambria" pitchFamily="34" charset="-122"/>
+                <a:cs typeface="Cambria" pitchFamily="34" charset="-120"/>
+              </a:rPr>
+              <a:t>153</a:t>
+            </a:r>
+            <a:endParaRPr lang="en-US" sz="4400" dirty="0"/>
+          </a:p>
+        </p:txBody>
+      </p:sp>
+      <p:sp>
+        <p:nvSpPr>
+          <p:cNvPr id="14" name="Text 12"/>
+          <p:cNvSpPr txBox="1"/>
+          <p:nvPr/>
+        </p:nvSpPr>
+        <p:spPr>
+          <a:xfrm>
+            <a:off x="9226296" y="2377440"/>
+            <a:ext cx="2286000" cy="594360"/>
+          </a:xfrm>
+          <a:prstGeom prst="rect">
+            <a:avLst/>
+          </a:prstGeom>
+          <a:noFill/>
+          <a:ln/>
+        </p:spPr>
+        <p:txBody>
+          <a:bodyPr wrap="square" lIns="0" tIns="0" rIns="0" bIns="0" rtlCol="0" anchor="t"/>
+          <a:lstStyle/>
+          <a:p>
+            <a:pPr marL="0" indent="0">
+              <a:buNone/>
+            </a:pPr>
+            <a:r>
+              <a:rPr lang="en-US" sz="1400" dirty="0">
+                <a:solidFill>
+                  <a:srgbClr val="FFFFFF"/>
+                </a:solidFill>
+                <a:latin typeface="Calibri" pitchFamily="34" charset="0"/>
+                <a:ea typeface="Calibri" pitchFamily="34" charset="-122"/>
+                <a:cs typeface="Calibri" pitchFamily="34" charset="-120"/>
+              </a:rPr>
+              <a:t>audit entries; the hash chain verifies</a:t>
+            </a:r>
+            <a:endParaRPr lang="en-US" sz="1400" dirty="0"/>
+          </a:p>
+        </p:txBody>
+      </p:sp>
+      <p:sp>
+        <p:nvSpPr>
+          <p:cNvPr id="15" name="Text 13"/>
+          <p:cNvSpPr txBox="1"/>
+          <p:nvPr/>
+        </p:nvSpPr>
+        <p:spPr>
+          <a:xfrm>
+            <a:off x="548640" y="3337560"/>
+            <a:ext cx="5303520" cy="365760"/>
+          </a:xfrm>
+          <a:prstGeom prst="rect">
+            <a:avLst/>
+          </a:prstGeom>
+          <a:noFill/>
+          <a:ln/>
+        </p:spPr>
+        <p:txBody>
+          <a:bodyPr wrap="square" lIns="0" tIns="0" rIns="0" bIns="0" rtlCol="0" anchor="t"/>
+          <a:lstStyle/>
+          <a:p>
+            <a:pPr marL="0" indent="0">
+              <a:buNone/>
+            </a:pPr>
+            <a:r>
+              <a:rPr lang="en-US" sz="1600" b="1" dirty="0">
+                <a:solidFill>
+                  <a:srgbClr val="FFFFFF"/>
+                </a:solidFill>
+                <a:latin typeface="Calibri" pitchFamily="34" charset="0"/>
+                <a:ea typeface="Calibri" pitchFamily="34" charset="-122"/>
+                <a:cs typeface="Calibri" pitchFamily="34" charset="-120"/>
+              </a:rPr>
+              <a:t>Scenarios by group</a:t>
+            </a:r>
+            <a:endParaRPr lang="en-US" sz="1600" dirty="0"/>
+          </a:p>
+        </p:txBody>
+      </p:sp>
+      <p:sp>
+        <p:nvSpPr>
+          <p:cNvPr id="16" name="Text 14"/>
+          <p:cNvSpPr txBox="1"/>
+          <p:nvPr/>
+        </p:nvSpPr>
+        <p:spPr>
+          <a:xfrm>
+            <a:off x="548640" y="3794760"/>
+            <a:ext cx="4389120" cy="365760"/>
+          </a:xfrm>
+          <a:prstGeom prst="rect">
+            <a:avLst/>
+          </a:prstGeom>
+          <a:noFill/>
+          <a:ln/>
+        </p:spPr>
+        <p:txBody>
+          <a:bodyPr wrap="square" lIns="0" tIns="0" rIns="0" bIns="0" rtlCol="0" anchor="t"/>
+          <a:lstStyle/>
+          <a:p>
+            <a:pPr marL="0" indent="0">
+              <a:buNone/>
+            </a:pPr>
+            <a:r>
+              <a:rPr lang="en-US" sz="1400" dirty="0">
+                <a:solidFill>
+                  <a:srgbClr val="FFFFFF"/>
+                </a:solidFill>
+                <a:latin typeface="Calibri" pitchFamily="34" charset="0"/>
+                <a:ea typeface="Calibri" pitchFamily="34" charset="-122"/>
+                <a:cs typeface="Calibri" pitchFamily="34" charset="-120"/>
+              </a:rPr>
+              <a:t>A  Task completion</a:t>
+            </a:r>
+            <a:endParaRPr lang="en-US" sz="1400" dirty="0"/>
+          </a:p>
+        </p:txBody>
+      </p:sp>
+      <p:sp>
+        <p:nvSpPr>
+          <p:cNvPr id="17" name="Text 15"/>
+          <p:cNvSpPr txBox="1"/>
+          <p:nvPr/>
+        </p:nvSpPr>
+        <p:spPr>
+          <a:xfrm>
+            <a:off x="4572000" y="3794760"/>
+            <a:ext cx="1280160" cy="365760"/>
+          </a:xfrm>
+          <a:prstGeom prst="rect">
+            <a:avLst/>
+          </a:prstGeom>
+          <a:noFill/>
+          <a:ln/>
+        </p:spPr>
+        <p:txBody>
+          <a:bodyPr wrap="square" lIns="0" tIns="0" rIns="0" bIns="0" rtlCol="0" anchor="t"/>
+          <a:lstStyle/>
+          <a:p>
+            <a:pPr marL="0" indent="0" algn="r">
+              <a:buNone/>
+            </a:pPr>
+            <a:r>
+              <a:rPr lang="en-US" sz="1400" b="1" dirty="0">
+                <a:solidFill>
+                  <a:srgbClr val="8FBCF0"/>
+                </a:solidFill>
+                <a:latin typeface="Calibri" pitchFamily="34" charset="0"/>
+                <a:ea typeface="Calibri" pitchFamily="34" charset="-122"/>
+                <a:cs typeface="Calibri" pitchFamily="34" charset="-120"/>
+              </a:rPr>
+              <a:t>10 / 10 pass</a:t>
+            </a:r>
+            <a:endParaRPr lang="en-US" sz="1400" dirty="0"/>
+          </a:p>
+        </p:txBody>
+      </p:sp>
+      <p:sp>
+        <p:nvSpPr>
+          <p:cNvPr id="18" name="Shape 16"/>
+          <p:cNvSpPr/>
+          <p:nvPr/>
+        </p:nvSpPr>
+        <p:spPr>
+          <a:xfrm>
+            <a:off x="548640" y="4197096"/>
+            <a:ext cx="5303520" cy="0"/>
+          </a:xfrm>
+          <a:prstGeom prst="line">
+            <a:avLst/>
+          </a:prstGeom>
+          <a:noFill/>
+          <a:ln w="9525">
+            <a:solidFill>
+              <a:srgbClr val="3A4A6E"/>
+            </a:solidFill>
+            <a:prstDash val="solid"/>
+          </a:ln>
+        </p:spPr>
+      </p:sp>
+      <p:sp>
+        <p:nvSpPr>
+          <p:cNvPr id="19" name="Text 17"/>
+          <p:cNvSpPr txBox="1"/>
+          <p:nvPr/>
+        </p:nvSpPr>
+        <p:spPr>
+          <a:xfrm>
+            <a:off x="548640" y="4251960"/>
+            <a:ext cx="4389120" cy="365760"/>
+          </a:xfrm>
+          <a:prstGeom prst="rect">
+            <a:avLst/>
+          </a:prstGeom>
+          <a:noFill/>
+          <a:ln/>
+        </p:spPr>
+        <p:txBody>
+          <a:bodyPr wrap="square" lIns="0" tIns="0" rIns="0" bIns="0" rtlCol="0" anchor="t"/>
+          <a:lstStyle/>
+          <a:p>
+            <a:pPr marL="0" indent="0">
+              <a:buNone/>
+            </a:pPr>
+            <a:r>
+              <a:rPr lang="en-US" sz="1400" dirty="0">
+                <a:solidFill>
+                  <a:srgbClr val="FFFFFF"/>
+                </a:solidFill>
+                <a:latin typeface="Calibri" pitchFamily="34" charset="0"/>
+                <a:ea typeface="Calibri" pitchFamily="34" charset="-122"/>
+                <a:cs typeface="Calibri" pitchFamily="34" charset="-120"/>
+              </a:rPr>
+              <a:t>B  Safe execution</a:t>
+            </a:r>
+            <a:endParaRPr lang="en-US" sz="1400" dirty="0"/>
+          </a:p>
+        </p:txBody>
+      </p:sp>
+      <p:sp>
+        <p:nvSpPr>
+          <p:cNvPr id="20" name="Text 18"/>
+          <p:cNvSpPr txBox="1"/>
+          <p:nvPr/>
+        </p:nvSpPr>
+        <p:spPr>
+          <a:xfrm>
+            <a:off x="4572000" y="4251960"/>
+            <a:ext cx="1280160" cy="365760"/>
+          </a:xfrm>
+          <a:prstGeom prst="rect">
+            <a:avLst/>
+          </a:prstGeom>
+          <a:noFill/>
+          <a:ln/>
+        </p:spPr>
+        <p:txBody>
+          <a:bodyPr wrap="square" lIns="0" tIns="0" rIns="0" bIns="0" rtlCol="0" anchor="t"/>
+          <a:lstStyle/>
+          <a:p>
+            <a:pPr marL="0" indent="0" algn="r">
+              <a:buNone/>
+            </a:pPr>
+            <a:r>
+              <a:rPr lang="en-US" sz="1400" b="1" dirty="0">
+                <a:solidFill>
+                  <a:srgbClr val="8FBCF0"/>
+                </a:solidFill>
+                <a:latin typeface="Calibri" pitchFamily="34" charset="0"/>
+                <a:ea typeface="Calibri" pitchFamily="34" charset="-122"/>
+                <a:cs typeface="Calibri" pitchFamily="34" charset="-120"/>
+              </a:rPr>
+              <a:t>6 / 6 pass</a:t>
+            </a:r>
+            <a:endParaRPr lang="en-US" sz="1400" dirty="0"/>
+          </a:p>
+        </p:txBody>
+      </p:sp>
+      <p:sp>
+        <p:nvSpPr>
+          <p:cNvPr id="21" name="Shape 19"/>
+          <p:cNvSpPr/>
+          <p:nvPr/>
+        </p:nvSpPr>
+        <p:spPr>
+          <a:xfrm>
+            <a:off x="548640" y="4654296"/>
+            <a:ext cx="5303520" cy="0"/>
+          </a:xfrm>
+          <a:prstGeom prst="line">
+            <a:avLst/>
+          </a:prstGeom>
+          <a:noFill/>
+          <a:ln w="9525">
+            <a:solidFill>
+              <a:srgbClr val="3A4A6E"/>
+            </a:solidFill>
+            <a:prstDash val="solid"/>
+          </a:ln>
+        </p:spPr>
+      </p:sp>
+      <p:sp>
+        <p:nvSpPr>
+          <p:cNvPr id="22" name="Text 20"/>
+          <p:cNvSpPr txBox="1"/>
+          <p:nvPr/>
+        </p:nvSpPr>
+        <p:spPr>
+          <a:xfrm>
+            <a:off x="548640" y="4709160"/>
+            <a:ext cx="4389120" cy="365760"/>
+          </a:xfrm>
+          <a:prstGeom prst="rect">
+            <a:avLst/>
+          </a:prstGeom>
+          <a:noFill/>
+          <a:ln/>
+        </p:spPr>
+        <p:txBody>
+          <a:bodyPr wrap="square" lIns="0" tIns="0" rIns="0" bIns="0" rtlCol="0" anchor="t"/>
+          <a:lstStyle/>
+          <a:p>
+            <a:pPr marL="0" indent="0">
+              <a:buNone/>
+            </a:pPr>
+            <a:r>
+              <a:rPr lang="en-US" sz="1400" dirty="0">
+                <a:solidFill>
+                  <a:srgbClr val="FFFFFF"/>
+                </a:solidFill>
+                <a:latin typeface="Calibri" pitchFamily="34" charset="0"/>
+                <a:ea typeface="Calibri" pitchFamily="34" charset="-122"/>
+                <a:cs typeface="Calibri" pitchFamily="34" charset="-120"/>
+              </a:rPr>
+              <a:t>C  Attacks, incl. forged approval and revoked key</a:t>
+            </a:r>
+            <a:endParaRPr lang="en-US" sz="1400" dirty="0"/>
+          </a:p>
+        </p:txBody>
+      </p:sp>
+      <p:sp>
+        <p:nvSpPr>
+          <p:cNvPr id="23" name="Text 21"/>
+          <p:cNvSpPr txBox="1"/>
+          <p:nvPr/>
+        </p:nvSpPr>
+        <p:spPr>
+          <a:xfrm>
+            <a:off x="4572000" y="4709160"/>
+            <a:ext cx="1280160" cy="365760"/>
+          </a:xfrm>
+          <a:prstGeom prst="rect">
+            <a:avLst/>
+          </a:prstGeom>
+          <a:noFill/>
+          <a:ln/>
+        </p:spPr>
+        <p:txBody>
+          <a:bodyPr wrap="square" lIns="0" tIns="0" rIns="0" bIns="0" rtlCol="0" anchor="t"/>
+          <a:lstStyle/>
+          <a:p>
+            <a:pPr marL="0" indent="0" algn="r">
+              <a:buNone/>
+            </a:pPr>
+            <a:r>
+              <a:rPr lang="en-US" sz="1400" b="1" dirty="0">
+                <a:solidFill>
+                  <a:srgbClr val="8FBCF0"/>
+                </a:solidFill>
+                <a:latin typeface="Calibri" pitchFamily="34" charset="0"/>
+                <a:ea typeface="Calibri" pitchFamily="34" charset="-122"/>
+                <a:cs typeface="Calibri" pitchFamily="34" charset="-120"/>
+              </a:rPr>
+              <a:t>9 / 9 pass</a:t>
+            </a:r>
+            <a:endParaRPr lang="en-US" sz="1400" dirty="0"/>
+          </a:p>
+        </p:txBody>
+      </p:sp>
+      <p:sp>
+        <p:nvSpPr>
+          <p:cNvPr id="24" name="Shape 22"/>
+          <p:cNvSpPr/>
+          <p:nvPr/>
+        </p:nvSpPr>
+        <p:spPr>
+          <a:xfrm>
+            <a:off x="548640" y="5111496"/>
+            <a:ext cx="5303520" cy="0"/>
+          </a:xfrm>
+          <a:prstGeom prst="line">
+            <a:avLst/>
+          </a:prstGeom>
+          <a:noFill/>
+          <a:ln w="9525">
+            <a:solidFill>
+              <a:srgbClr val="3A4A6E"/>
+            </a:solidFill>
+            <a:prstDash val="solid"/>
+          </a:ln>
+        </p:spPr>
+      </p:sp>
+      <p:sp>
+        <p:nvSpPr>
+          <p:cNvPr id="25" name="Text 23"/>
+          <p:cNvSpPr txBox="1"/>
+          <p:nvPr/>
+        </p:nvSpPr>
+        <p:spPr>
+          <a:xfrm>
+            <a:off x="548640" y="5166360"/>
+            <a:ext cx="4389120" cy="365760"/>
+          </a:xfrm>
+          <a:prstGeom prst="rect">
+            <a:avLst/>
+          </a:prstGeom>
+          <a:noFill/>
+          <a:ln/>
+        </p:spPr>
+        <p:txBody>
+          <a:bodyPr wrap="square" lIns="0" tIns="0" rIns="0" bIns="0" rtlCol="0" anchor="t"/>
+          <a:lstStyle/>
+          <a:p>
+            <a:pPr marL="0" indent="0">
+              <a:buNone/>
+            </a:pPr>
+            <a:r>
+              <a:rPr lang="en-US" sz="1400" dirty="0">
+                <a:solidFill>
+                  <a:srgbClr val="FFFFFF"/>
+                </a:solidFill>
+                <a:latin typeface="Calibri" pitchFamily="34" charset="0"/>
+                <a:ea typeface="Calibri" pitchFamily="34" charset="-122"/>
+                <a:cs typeface="Calibri" pitchFamily="34" charset="-120"/>
+              </a:rPr>
+              <a:t>D  Privacy</a:t>
+            </a:r>
+            <a:endParaRPr lang="en-US" sz="1400" dirty="0"/>
+          </a:p>
+        </p:txBody>
+      </p:sp>
+      <p:sp>
+        <p:nvSpPr>
+          <p:cNvPr id="26" name="Text 24"/>
+          <p:cNvSpPr txBox="1"/>
+          <p:nvPr/>
+        </p:nvSpPr>
+        <p:spPr>
+          <a:xfrm>
+            <a:off x="4572000" y="5166360"/>
+            <a:ext cx="1280160" cy="365760"/>
+          </a:xfrm>
+          <a:prstGeom prst="rect">
+            <a:avLst/>
+          </a:prstGeom>
+          <a:noFill/>
+          <a:ln/>
+        </p:spPr>
+        <p:txBody>
+          <a:bodyPr wrap="square" lIns="0" tIns="0" rIns="0" bIns="0" rtlCol="0" anchor="t"/>
+          <a:lstStyle/>
+          <a:p>
+            <a:pPr marL="0" indent="0" algn="r">
+              <a:buNone/>
+            </a:pPr>
+            <a:r>
+              <a:rPr lang="en-US" sz="1400" b="1" dirty="0">
+                <a:solidFill>
+                  <a:srgbClr val="8FBCF0"/>
+                </a:solidFill>
+                <a:latin typeface="Calibri" pitchFamily="34" charset="0"/>
+                <a:ea typeface="Calibri" pitchFamily="34" charset="-122"/>
+                <a:cs typeface="Calibri" pitchFamily="34" charset="-120"/>
+              </a:rPr>
+              <a:t>2 / 2 pass</a:t>
+            </a:r>
+            <a:endParaRPr lang="en-US" sz="1400" dirty="0"/>
+          </a:p>
+        </p:txBody>
+      </p:sp>
+      <p:sp>
+        <p:nvSpPr>
+          <p:cNvPr id="27" name="Shape 25"/>
+          <p:cNvSpPr/>
+          <p:nvPr/>
+        </p:nvSpPr>
+        <p:spPr>
+          <a:xfrm>
+            <a:off x="548640" y="5568696"/>
+            <a:ext cx="5303520" cy="0"/>
+          </a:xfrm>
+          <a:prstGeom prst="line">
+            <a:avLst/>
+          </a:prstGeom>
+          <a:noFill/>
+          <a:ln w="9525">
+            <a:solidFill>
+              <a:srgbClr val="3A4A6E"/>
+            </a:solidFill>
+            <a:prstDash val="solid"/>
+          </a:ln>
+        </p:spPr>
+      </p:sp>
+      <p:sp>
+        <p:nvSpPr>
+          <p:cNvPr id="28" name="Shape 26"/>
+          <p:cNvSpPr/>
+          <p:nvPr/>
+        </p:nvSpPr>
+        <p:spPr>
+          <a:xfrm>
+            <a:off x="6263640" y="3337560"/>
+            <a:ext cx="5349240" cy="2331720"/>
+          </a:xfrm>
+          <a:prstGeom prst="roundRect">
+            <a:avLst>
+              <a:gd name="adj" fmla="val 4706"/>
+            </a:avLst>
+          </a:prstGeom>
+          <a:solidFill>
+            <a:srgbClr val="1F2F52"/>
+          </a:solidFill>
+          <a:ln/>
+        </p:spPr>
+      </p:sp>
+      <p:sp>
+        <p:nvSpPr>
+          <p:cNvPr id="29" name="Text 27"/>
+          <p:cNvSpPr txBox="1"/>
+          <p:nvPr/>
+        </p:nvSpPr>
+        <p:spPr>
+          <a:xfrm>
+            <a:off x="6492240" y="3474720"/>
+            <a:ext cx="4937760" cy="365760"/>
+          </a:xfrm>
+          <a:prstGeom prst="rect">
+            <a:avLst/>
+          </a:prstGeom>
+          <a:noFill/>
+          <a:ln/>
+        </p:spPr>
+        <p:txBody>
+          <a:bodyPr wrap="square" lIns="0" tIns="0" rIns="0" bIns="0" rtlCol="0" anchor="t"/>
+          <a:lstStyle/>
+          <a:p>
+            <a:pPr marL="0" indent="0">
+              <a:buNone/>
+            </a:pPr>
+            <a:r>
+              <a:rPr lang="en-US" sz="1600" b="1" dirty="0">
+                <a:solidFill>
+                  <a:srgbClr val="FFFFFF"/>
+                </a:solidFill>
+                <a:latin typeface="Calibri" pitchFamily="34" charset="0"/>
+                <a:ea typeface="Calibri" pitchFamily="34" charset="-122"/>
+                <a:cs typeface="Calibri" pitchFamily="34" charset="-120"/>
+              </a:rPr>
+              <a:t>Finance audit: 400 random cases</a:t>
+            </a:r>
+            <a:endParaRPr lang="en-US" sz="1600" dirty="0"/>
+          </a:p>
+        </p:txBody>
+      </p:sp>
+      <p:sp>
+        <p:nvSpPr>
+          <p:cNvPr id="30" name="Text 28"/>
+          <p:cNvSpPr txBox="1"/>
+          <p:nvPr/>
+        </p:nvSpPr>
+        <p:spPr>
+          <a:xfrm>
+            <a:off x="6492240" y="3886200"/>
+            <a:ext cx="4937760" cy="1737360"/>
+          </a:xfrm>
+          <a:prstGeom prst="rect">
+            <a:avLst/>
+          </a:prstGeom>
+          <a:noFill/>
+          <a:ln/>
+        </p:spPr>
+        <p:txBody>
+          <a:bodyPr wrap="square" lIns="0" tIns="0" rIns="0" bIns="0" rtlCol="0" anchor="t"/>
+          <a:lstStyle/>
+          <a:p>
+            <a:pPr marL="0" indent="0">
+              <a:spcAft>
+                <a:spcPts val="300"/>
+              </a:spcAft>
+              <a:buNone/>
+            </a:pPr>
+            <a:r>
+              <a:rPr lang="en-US" sz="1400" dirty="0">
+                <a:solidFill>
+                  <a:srgbClr val="C9D3E6"/>
+                </a:solidFill>
+                <a:latin typeface="Calibri" pitchFamily="34" charset="0"/>
+                <a:ea typeface="Calibri" pitchFamily="34" charset="-122"/>
+                <a:cs typeface="Calibri" pitchFamily="34" charset="-120"/>
+              </a:rPr>
+              <a:t>The engine matched an independent formula in every case. The audit found 3 agent bugs, all fixed with tests:</a:t>
+            </a:r>
+            <a:endParaRPr lang="en-US" sz="1400" dirty="0"/>
+          </a:p>
+          <a:p>
+            <a:pPr marL="342900" indent="-342900">
+              <a:spcAft>
+                <a:spcPts val="300"/>
+              </a:spcAft>
+              <a:buSzPct val="100000"/>
+              <a:buChar char="•"/>
+            </a:pPr>
+            <a:r>
+              <a:rPr lang="en-US" sz="1400" dirty="0">
+                <a:solidFill>
+                  <a:srgbClr val="C9D3E6"/>
+                </a:solidFill>
+                <a:latin typeface="Calibri" pitchFamily="34" charset="0"/>
+                <a:ea typeface="Calibri" pitchFamily="34" charset="-122"/>
+                <a:cs typeface="Calibri" pitchFamily="34" charset="-120"/>
+              </a:rPr>
+              <a:t>an earlier in-app payment was not counted</a:t>
+            </a:r>
+            <a:endParaRPr lang="en-US" sz="1400" dirty="0"/>
+          </a:p>
+          <a:p>
+            <a:pPr marL="342900" indent="-342900">
+              <a:spcAft>
+                <a:spcPts val="300"/>
+              </a:spcAft>
+              <a:buSzPct val="100000"/>
+              <a:buChar char="•"/>
+            </a:pPr>
+            <a:r>
+              <a:rPr lang="en-US" sz="1400" dirty="0">
+                <a:solidFill>
+                  <a:srgbClr val="C9D3E6"/>
+                </a:solidFill>
+                <a:latin typeface="Calibri" pitchFamily="34" charset="0"/>
+                <a:ea typeface="Calibri" pitchFamily="34" charset="-122"/>
+                <a:cs typeface="Calibri" pitchFamily="34" charset="-120"/>
+              </a:rPr>
+              <a:t>inconsistent USD answers were accepted</a:t>
+            </a:r>
+            <a:endParaRPr lang="en-US" sz="1400" dirty="0"/>
+          </a:p>
+          <a:p>
+            <a:pPr marL="342900" indent="-342900">
+              <a:spcAft>
+                <a:spcPts val="300"/>
+              </a:spcAft>
+              <a:buSzPct val="100000"/>
+              <a:buChar char="•"/>
+            </a:pPr>
+            <a:r>
+              <a:rPr lang="en-US" sz="1400" dirty="0">
+                <a:solidFill>
+                  <a:srgbClr val="C9D3E6"/>
+                </a:solidFill>
+                <a:latin typeface="Calibri" pitchFamily="34" charset="0"/>
+                <a:ea typeface="Calibri" pitchFamily="34" charset="-122"/>
+                <a:cs typeface="Calibri" pitchFamily="34" charset="-120"/>
+              </a:rPr>
+              <a:t>no PAN + loan applied 0% silently (now a warning)</a:t>
+            </a:r>
+            <a:endParaRPr lang="en-US" sz="1400" dirty="0"/>
+          </a:p>
+        </p:txBody>
+      </p:sp>
+      <p:sp>
+        <p:nvSpPr>
+          <p:cNvPr id="31" name="Text 29"/>
+          <p:cNvSpPr txBox="1"/>
+          <p:nvPr/>
+        </p:nvSpPr>
+        <p:spPr>
+          <a:xfrm>
+            <a:off x="548640" y="5897880"/>
+            <a:ext cx="11064240" cy="320040"/>
+          </a:xfrm>
+          <a:prstGeom prst="rect">
+            <a:avLst/>
+          </a:prstGeom>
+          <a:noFill/>
+          <a:ln/>
+        </p:spPr>
+        <p:txBody>
+          <a:bodyPr wrap="square" lIns="0" tIns="0" rIns="0" bIns="0" rtlCol="0" anchor="t"/>
+          <a:lstStyle/>
+          <a:p>
+            <a:pPr marL="0" indent="0">
+              <a:buNone/>
+            </a:pPr>
+            <a:r>
+              <a:rPr lang="en-US" sz="1100" dirty="0">
+                <a:solidFill>
+                  <a:srgbClr val="A9B6CF"/>
+                </a:solidFill>
+                <a:latin typeface="Courier New" pitchFamily="34" charset="0"/>
+                <a:ea typeface="Courier New" pitchFamily="34" charset="-122"/>
+                <a:cs typeface="Courier New" pitchFamily="34" charset="-120"/>
+              </a:rPr>
+              <a:t>python -m unittest discover -s tests -t .   ·   python -m scenarios.runner   ·   python -m app.demo_run</a:t>
+            </a:r>
+            <a:endParaRPr lang="en-US" sz="1100" dirty="0"/>
+          </a:p>
+        </p:txBody>
+      </p:sp>
+      <p:sp>
+        <p:nvSpPr>
+          <p:cNvPr id="32" name="Text 30"/>
+          <p:cNvSpPr txBox="1"/>
+          <p:nvPr/>
+        </p:nvSpPr>
+        <p:spPr>
+          <a:xfrm>
+            <a:off x="548640" y="6355080"/>
+            <a:ext cx="9144000" cy="274320"/>
+          </a:xfrm>
+          <a:prstGeom prst="rect">
+            <a:avLst/>
+          </a:prstGeom>
+          <a:noFill/>
+          <a:ln/>
+        </p:spPr>
+        <p:txBody>
+          <a:bodyPr wrap="square" lIns="0" tIns="0" rIns="0" bIns="0" rtlCol="0" anchor="t"/>
+          <a:lstStyle/>
+          <a:p>
+            <a:pPr marL="0" indent="0">
+              <a:buNone/>
+            </a:pPr>
+            <a:r>
+              <a:rPr lang="en-US" sz="1000" dirty="0">
+                <a:solidFill>
+                  <a:srgbClr val="A9B6CF"/>
+                </a:solidFill>
+                <a:latin typeface="Calibri" pitchFamily="34" charset="0"/>
+                <a:ea typeface="Calibri" pitchFamily="34" charset="-122"/>
+                <a:cs typeface="Calibri" pitchFamily="34" charset="-120"/>
+              </a:rPr>
+              <a:t>TuitionPilot · 2026 Shenzhen FinTechathon · Synthetic data · Not tax advice</a:t>
+            </a:r>
+            <a:endParaRPr lang="en-US" sz="1000" dirty="0"/>
+          </a:p>
+        </p:txBody>
+      </p:sp>
+    </p:spTree>
+  </p:cSld>
+  <p:clrMapOvr>
+    <a:masterClrMapping/>
+  </p:clrMapOvr>
+</p:sld>
+</file>
+
+<file path=ppt/slides/slide11.xml><?xml version="1.0" encoding="utf-8"?>
 <p:sld xmlns:a="http://schemas.openxmlformats.org/drawingml/2006/main" xmlns:r="http://schemas.openxmlformats.org/officeDocument/2006/relationships" xmlns:p="http://schemas.openxmlformats.org/presentationml/2006/main">
   <p:cSld name="Slide 10">
     <p:spTree>
@@ -2935,9 +3991,11 @@
       <p:sp>
         <p:nvSpPr>
           <p:cNvPr id="2" name="Text 0"/>
-          <p:cNvSpPr/>
+          <p:cNvSpPr>
+            <a:spLocks noGrp="1"/>
+          </p:cNvSpPr>
           <p:nvPr>
-            <p:ph idx="100" type="title" hasCustomPrompt="1"/>
+            <p:ph type="title" idx="100" hasCustomPrompt="1"/>
           </p:nvPr>
         </p:nvSpPr>
         <p:spPr>
@@ -2955,7 +4013,7 @@
           <a:bodyPr wrap="square" lIns="0" tIns="0" rIns="0" bIns="0" rtlCol="0" anchor="ctr"/>
           <a:lstStyle/>
           <a:p>
-            <a:pPr algn="l" indent="0" marL="0">
+            <a:pPr marL="0" indent="0" algn="l">
               <a:buNone/>
             </a:pPr>
             <a:r>
@@ -3021,11 +4079,11 @@
           <a:bodyPr wrap="square" lIns="0" tIns="0" rIns="0" bIns="0" rtlCol="0" anchor="t"/>
           <a:lstStyle/>
           <a:p>
-            <a:pPr indent="0" marL="0">
-              <a:buNone/>
-            </a:pPr>
-            <a:r>
-              <a:rPr lang="en-US" sz="1700" b="1" dirty="0">
+            <a:pPr marL="0" indent="0">
+              <a:buNone/>
+            </a:pPr>
+            <a:r>
+              <a:rPr lang="en-US" sz="1700" b="1">
                 <a:solidFill>
                   <a:srgbClr val="B4561F"/>
                 </a:solidFill>
@@ -3033,7 +4091,7 @@
                 <a:ea typeface="Calibri" pitchFamily="34" charset="-122"/>
                 <a:cs typeface="Calibri" pitchFamily="34" charset="-120"/>
               </a:rPr>
-              <a:t>Tax rules not yet verified</a:t>
+              <a:t>Tax rules: what is still open</a:t>
             </a:r>
             <a:endParaRPr lang="en-US" sz="1700" dirty="0"/>
           </a:p>
@@ -3068,7 +4126,7 @@
               <a:buChar char="•"/>
             </a:pPr>
             <a:r>
-              <a:rPr lang="en-US" sz="1400" dirty="0">
+              <a:rPr lang="en-US" sz="1400">
                 <a:solidFill>
                   <a:srgbClr val="1F2A44"/>
                 </a:solidFill>
@@ -3076,9 +4134,8 @@
                 <a:ea typeface="Calibri" pitchFamily="34" charset="-122"/>
                 <a:cs typeface="Calibri" pitchFamily="34" charset="-120"/>
               </a:rPr>
-              <a:t>Unverified: LRS cap USD 250,000; no-PAN rate 5%; earlier payments counting toward Rs 10 lakh; TCS on the amount sent, not fees</a:t>
-            </a:r>
-            <a:endParaRPr lang="en-US" sz="1400" dirty="0"/>
+              <a:t>Verified 18 Oct: LRS cap, Rs 10 lakh threshold, 2% and loan-free education rates, 5% without PAN</a:t>
+            </a:r>
           </a:p>
           <a:p>
             <a:pPr marL="342900" indent="-342900">
@@ -3089,7 +4146,7 @@
               <a:buChar char="•"/>
             </a:pPr>
             <a:r>
-              <a:rPr lang="en-US" sz="1400" dirty="0">
+              <a:rPr lang="en-US" sz="1400">
                 <a:solidFill>
                   <a:srgbClr val="1F2A44"/>
                 </a:solidFill>
@@ -3097,9 +4154,8 @@
                 <a:ea typeface="Calibri" pitchFamily="34" charset="-122"/>
                 <a:cs typeface="Calibri" pitchFamily="34" charset="-120"/>
               </a:rPr>
-              <a:t>Secondary sources: the Rs 10 lakh threshold, 2% and 0% education rates</a:t>
-            </a:r>
-            <a:endParaRPr lang="en-US" sz="1400" dirty="0"/>
+              <a:t>Still open: earlier other-purpose payments using up the threshold; TCS on the amount sent, not fees</a:t>
+            </a:r>
           </a:p>
           <a:p>
             <a:pPr marL="342900" indent="-342900">
@@ -3110,7 +4166,7 @@
               <a:buChar char="•"/>
             </a:pPr>
             <a:r>
-              <a:rPr lang="en-US" sz="1400" dirty="0">
+              <a:rPr lang="en-US" sz="1400">
                 <a:solidFill>
                   <a:srgbClr val="1F2A44"/>
                 </a:solidFill>
@@ -3167,7 +4223,7 @@
           <a:bodyPr wrap="square" lIns="0" tIns="0" rIns="0" bIns="0" rtlCol="0" anchor="t"/>
           <a:lstStyle/>
           <a:p>
-            <a:pPr indent="0" marL="0">
+            <a:pPr marL="0" indent="0">
               <a:buNone/>
             </a:pPr>
             <a:r>
@@ -3214,7 +4270,7 @@
               <a:buChar char="•"/>
             </a:pPr>
             <a:r>
-              <a:rPr lang="en-US" sz="1400" dirty="0">
+              <a:rPr lang="en-US" sz="1400">
                 <a:solidFill>
                   <a:srgbClr val="1F2A44"/>
                 </a:solidFill>
@@ -3222,9 +4278,8 @@
                 <a:ea typeface="Calibri" pitchFamily="34" charset="-122"/>
                 <a:cs typeface="Calibri" pitchFamily="34" charset="-120"/>
               </a:rPr>
-              <a:t>The AI step is an offline, deterministic stand-in</a:t>
-            </a:r>
-            <a:endParaRPr lang="en-US" sz="1400" dirty="0"/>
+              <a:t>Hosted Claude is optional; the default AI step is offline</a:t>
+            </a:r>
           </a:p>
           <a:p>
             <a:pPr marL="342900" indent="-342900">
@@ -3235,7 +4290,7 @@
               <a:buChar char="•"/>
             </a:pPr>
             <a:r>
-              <a:rPr lang="en-US" sz="1400" dirty="0">
+              <a:rPr lang="en-US" sz="1400">
                 <a:solidFill>
                   <a:srgbClr val="1F2A44"/>
                 </a:solidFill>
@@ -3245,7 +4300,6 @@
               </a:rPr>
               <a:t>Ed25519 code is not hardened (not constant-time, not audited)</a:t>
             </a:r>
-            <a:endParaRPr lang="en-US" sz="1400" dirty="0"/>
           </a:p>
           <a:p>
             <a:pPr marL="342900" indent="-342900">
@@ -3256,7 +4310,7 @@
               <a:buChar char="•"/>
             </a:pPr>
             <a:r>
-              <a:rPr lang="en-US" sz="1400" dirty="0">
+              <a:rPr lang="en-US" sz="1400">
                 <a:solidFill>
                   <a:srgbClr val="1F2A44"/>
                 </a:solidFill>
@@ -3266,7 +4320,6 @@
               </a:rPr>
               <a:t>Demo keys are synthetic; one trust root</a:t>
             </a:r>
-            <a:endParaRPr lang="en-US" sz="1400" dirty="0"/>
           </a:p>
           <a:p>
             <a:pPr marL="342900" indent="-342900">
@@ -3277,7 +4330,7 @@
               <a:buChar char="•"/>
             </a:pPr>
             <a:r>
-              <a:rPr lang="en-US" sz="1400" dirty="0">
+              <a:rPr lang="en-US" sz="1400">
                 <a:solidFill>
                   <a:srgbClr val="1F2A44"/>
                 </a:solidFill>
@@ -3285,7 +4338,7 @@
                 <a:ea typeface="Calibri" pitchFamily="34" charset="-122"/>
                 <a:cs typeface="Calibri" pitchFamily="34" charset="-120"/>
               </a:rPr>
-              <a:t>Local server: no Origin check yet; demo PIN is fixed</a:t>
+              <a:t>Demo PIN is fixed; scanned PDFs need OCR</a:t>
             </a:r>
             <a:endParaRPr lang="en-US" sz="1400" dirty="0"/>
           </a:p>
@@ -3334,7 +4387,7 @@
           <a:bodyPr wrap="square" lIns="0" tIns="0" rIns="0" bIns="0" rtlCol="0" anchor="t"/>
           <a:lstStyle/>
           <a:p>
-            <a:pPr indent="0" marL="0">
+            <a:pPr marL="0" indent="0">
               <a:buNone/>
             </a:pPr>
             <a:r>
@@ -3381,7 +4434,7 @@
               <a:buChar char="•"/>
             </a:pPr>
             <a:r>
-              <a:rPr lang="en-US" sz="1400" dirty="0">
+              <a:rPr lang="en-US" sz="1400">
                 <a:solidFill>
                   <a:srgbClr val="1F2A44"/>
                 </a:solidFill>
@@ -3389,9 +4442,8 @@
                 <a:ea typeface="Calibri" pitchFamily="34" charset="-122"/>
                 <a:cs typeface="Calibri" pitchFamily="34" charset="-120"/>
               </a:rPr>
-              <a:t>Check every rule against the RBI Master Direction and the Income-tax Act 2025 s.394</a:t>
-            </a:r>
-            <a:endParaRPr lang="en-US" sz="1400" dirty="0"/>
+              <a:t>A bank's confirmation for the two open rules</a:t>
+            </a:r>
           </a:p>
           <a:p>
             <a:pPr marL="342900" indent="-342900">
@@ -3402,7 +4454,7 @@
               <a:buChar char="•"/>
             </a:pPr>
             <a:r>
-              <a:rPr lang="en-US" sz="1400" dirty="0">
+              <a:rPr lang="en-US" sz="1400">
                 <a:solidFill>
                   <a:srgbClr val="1F2A44"/>
                 </a:solidFill>
@@ -3410,9 +4462,8 @@
                 <a:ea typeface="Calibri" pitchFamily="34" charset="-122"/>
                 <a:cs typeface="Calibri" pitchFamily="34" charset="-120"/>
               </a:rPr>
-              <a:t>Connect a hosted AI model behind masking, grounding and the policy gate</a:t>
-            </a:r>
-            <a:endParaRPr lang="en-US" sz="1400" dirty="0"/>
+              <a:t>Credit building and more destination countries for students</a:t>
+            </a:r>
           </a:p>
           <a:p>
             <a:pPr marL="342900" indent="-342900">
@@ -3423,7 +4474,7 @@
               <a:buChar char="•"/>
             </a:pPr>
             <a:r>
-              <a:rPr lang="en-US" sz="1400" dirty="0">
+              <a:rPr lang="en-US" sz="1400">
                 <a:solidFill>
                   <a:srgbClr val="1F2A44"/>
                 </a:solidFill>
@@ -3433,7 +4484,6 @@
               </a:rPr>
               <a:t>Vetted crypto library or hardware keys; offline parent recovery key</a:t>
             </a:r>
-            <a:endParaRPr lang="en-US" sz="1400" dirty="0"/>
           </a:p>
           <a:p>
             <a:pPr marL="342900" indent="-342900">
@@ -3444,7 +4494,7 @@
               <a:buChar char="•"/>
             </a:pPr>
             <a:r>
-              <a:rPr lang="en-US" sz="1400" dirty="0">
+              <a:rPr lang="en-US" sz="1400">
                 <a:solidFill>
                   <a:srgbClr val="1F2A44"/>
                 </a:solidFill>
@@ -3452,7 +4502,7 @@
                 <a:ea typeface="Calibri" pitchFamily="34" charset="-122"/>
                 <a:cs typeface="Calibri" pitchFamily="34" charset="-120"/>
               </a:rPr>
-              <a:t>Same-origin checks and cookie sessions on the server</a:t>
+              <a:t>Cookie sessions with idle timeouts</a:t>
             </a:r>
             <a:endParaRPr lang="en-US" sz="1400" dirty="0"/>
           </a:p>
@@ -3501,7 +4551,7 @@
           <a:bodyPr wrap="square" lIns="0" tIns="0" rIns="0" bIns="0" rtlCol="0" anchor="ctr"/>
           <a:lstStyle/>
           <a:p>
-            <a:pPr indent="0" marL="0">
+            <a:pPr marL="0" indent="0">
               <a:buNone/>
             </a:pPr>
             <a:r>
@@ -3539,7 +4589,7 @@
           </a:prstGeom>
           <a:extLst>
             <a:ext uri="{C572A759-6A51-4108-AA02-DFA0A04FC94B}">
-              <ma14:wrappingTextBoxFlag xmlns:ma14="http://schemas.microsoft.com/office/mac/drawingml/2011/main" val="0"/>
+              <ma14:wrappingTextBoxFlag xmlns="" xmlns:ma14="http://schemas.microsoft.com/office/mac/drawingml/2011/main" val="0"/>
             </a:ext>
           </a:extLst>
         </p:spPr>
@@ -3560,8 +4610,8 @@
           <a:p>
             <a:pPr algn="r"/>
             <a:fld id="{F7021451-1387-4CA6-816F-3879F97B5CBC}" type="slidenum">
-              <a:rPr b="0" lang="en-US"/>
-              <a:t>10</a:t>
+              <a:rPr lang="en-US" b="0"/>
+              <a:t>11</a:t>
             </a:fld>
             <a:endParaRPr lang="en-US"/>
           </a:p>
@@ -3595,9 +4645,11 @@
       <p:sp>
         <p:nvSpPr>
           <p:cNvPr id="2" name="Text 0"/>
-          <p:cNvSpPr/>
+          <p:cNvSpPr>
+            <a:spLocks noGrp="1"/>
+          </p:cNvSpPr>
           <p:nvPr>
-            <p:ph idx="100" type="title" hasCustomPrompt="1"/>
+            <p:ph type="title" idx="100" hasCustomPrompt="1"/>
           </p:nvPr>
         </p:nvSpPr>
         <p:spPr>
@@ -3615,7 +4667,7 @@
           <a:bodyPr wrap="square" lIns="0" tIns="0" rIns="0" bIns="0" rtlCol="0" anchor="ctr"/>
           <a:lstStyle/>
           <a:p>
-            <a:pPr algn="l" indent="0" marL="0">
+            <a:pPr marL="0" indent="0" algn="l">
               <a:buNone/>
             </a:pPr>
             <a:r>
@@ -3696,7 +4748,7 @@
           <a:bodyPr wrap="square" lIns="0" tIns="0" rIns="0" bIns="0" rtlCol="0" anchor="ctr"/>
           <a:lstStyle/>
           <a:p>
-            <a:pPr algn="ctr" indent="0" marL="0">
+            <a:pPr marL="0" indent="0" algn="ctr">
               <a:buNone/>
             </a:pPr>
             <a:r>
@@ -3735,7 +4787,7 @@
           <a:bodyPr wrap="square" lIns="0" tIns="0" rIns="0" bIns="0" rtlCol="0" anchor="t"/>
           <a:lstStyle/>
           <a:p>
-            <a:pPr indent="0" marL="0">
+            <a:pPr marL="0" indent="0">
               <a:buNone/>
             </a:pPr>
             <a:r>
@@ -3774,11 +4826,11 @@
           <a:bodyPr wrap="square" lIns="0" tIns="0" rIns="0" bIns="0" rtlCol="0" anchor="t"/>
           <a:lstStyle/>
           <a:p>
-            <a:pPr indent="0" marL="0">
-              <a:buNone/>
-            </a:pPr>
-            <a:r>
-              <a:rPr lang="en-US" sz="1300" dirty="0">
+            <a:pPr marL="0" indent="0">
+              <a:buNone/>
+            </a:pPr>
+            <a:r>
+              <a:rPr lang="en-US" sz="1300">
                 <a:solidFill>
                   <a:srgbClr val="5A6378"/>
                 </a:solidFill>
@@ -3786,7 +4838,7 @@
                 <a:ea typeface="Calibri" pitchFamily="34" charset="-122"/>
                 <a:cs typeface="Calibri" pitchFamily="34" charset="-120"/>
               </a:rPr>
-              <a:t>USD 250,000 per person per year, all purposes together (rule still unverified)</a:t>
+              <a:t>USD 250,000 per person per year, all purposes together (RBI Master Direction)</a:t>
             </a:r>
             <a:endParaRPr lang="en-US" sz="1300" dirty="0"/>
           </a:p>
@@ -3855,7 +4907,7 @@
           <a:bodyPr wrap="square" lIns="0" tIns="0" rIns="0" bIns="0" rtlCol="0" anchor="ctr"/>
           <a:lstStyle/>
           <a:p>
-            <a:pPr algn="ctr" indent="0" marL="0">
+            <a:pPr marL="0" indent="0" algn="ctr">
               <a:buNone/>
             </a:pPr>
             <a:r>
@@ -3894,7 +4946,7 @@
           <a:bodyPr wrap="square" lIns="0" tIns="0" rIns="0" bIns="0" rtlCol="0" anchor="t"/>
           <a:lstStyle/>
           <a:p>
-            <a:pPr indent="0" marL="0">
+            <a:pPr marL="0" indent="0">
               <a:buNone/>
             </a:pPr>
             <a:r>
@@ -3933,7 +4985,7 @@
           <a:bodyPr wrap="square" lIns="0" tIns="0" rIns="0" bIns="0" rtlCol="0" anchor="t"/>
           <a:lstStyle/>
           <a:p>
-            <a:pPr indent="0" marL="0">
+            <a:pPr marL="0" indent="0">
               <a:buNone/>
             </a:pPr>
             <a:r>
@@ -4014,7 +5066,7 @@
           <a:bodyPr wrap="square" lIns="0" tIns="0" rIns="0" bIns="0" rtlCol="0" anchor="ctr"/>
           <a:lstStyle/>
           <a:p>
-            <a:pPr algn="ctr" indent="0" marL="0">
+            <a:pPr marL="0" indent="0" algn="ctr">
               <a:buNone/>
             </a:pPr>
             <a:r>
@@ -4053,7 +5105,7 @@
           <a:bodyPr wrap="square" lIns="0" tIns="0" rIns="0" bIns="0" rtlCol="0" anchor="t"/>
           <a:lstStyle/>
           <a:p>
-            <a:pPr indent="0" marL="0">
+            <a:pPr marL="0" indent="0">
               <a:buNone/>
             </a:pPr>
             <a:r>
@@ -4092,7 +5144,7 @@
           <a:bodyPr wrap="square" lIns="0" tIns="0" rIns="0" bIns="0" rtlCol="0" anchor="t"/>
           <a:lstStyle/>
           <a:p>
-            <a:pPr indent="0" marL="0">
+            <a:pPr marL="0" indent="0">
               <a:buNone/>
             </a:pPr>
             <a:r>
@@ -4173,7 +5225,7 @@
           <a:bodyPr wrap="square" lIns="0" tIns="0" rIns="0" bIns="0" rtlCol="0" anchor="ctr"/>
           <a:lstStyle/>
           <a:p>
-            <a:pPr algn="ctr" indent="0" marL="0">
+            <a:pPr marL="0" indent="0" algn="ctr">
               <a:buNone/>
             </a:pPr>
             <a:r>
@@ -4212,7 +5264,7 @@
           <a:bodyPr wrap="square" lIns="0" tIns="0" rIns="0" bIns="0" rtlCol="0" anchor="t"/>
           <a:lstStyle/>
           <a:p>
-            <a:pPr indent="0" marL="0">
+            <a:pPr marL="0" indent="0">
               <a:buNone/>
             </a:pPr>
             <a:r>
@@ -4251,7 +5303,7 @@
           <a:bodyPr wrap="square" lIns="0" tIns="0" rIns="0" bIns="0" rtlCol="0" anchor="t"/>
           <a:lstStyle/>
           <a:p>
-            <a:pPr indent="0" marL="0">
+            <a:pPr marL="0" indent="0">
               <a:buNone/>
             </a:pPr>
             <a:r>
@@ -4312,11 +5364,11 @@
           <a:bodyPr wrap="square" lIns="0" tIns="0" rIns="0" bIns="0" rtlCol="0" anchor="t"/>
           <a:lstStyle/>
           <a:p>
-            <a:pPr indent="0" marL="0">
-              <a:buNone/>
-            </a:pPr>
-            <a:r>
-              <a:rPr lang="en-US" sz="1300" b="1" spc="200" kern="0" dirty="0">
+            <a:pPr marL="0" indent="0">
+              <a:buNone/>
+            </a:pPr>
+            <a:r>
+              <a:rPr lang="en-US" sz="1300" b="1" kern="0" spc="200" dirty="0">
                 <a:solidFill>
                   <a:srgbClr val="F2C38B"/>
                 </a:solidFill>
@@ -4351,7 +5403,7 @@
           <a:bodyPr wrap="square" lIns="0" tIns="0" rIns="0" bIns="0" rtlCol="0" anchor="t"/>
           <a:lstStyle/>
           <a:p>
-            <a:pPr indent="0" marL="0">
+            <a:pPr marL="0" indent="0">
               <a:buNone/>
             </a:pPr>
             <a:r>
@@ -4390,7 +5442,7 @@
           <a:bodyPr wrap="square" lIns="0" tIns="0" rIns="0" bIns="0" rtlCol="0" anchor="t"/>
           <a:lstStyle/>
           <a:p>
-            <a:pPr indent="0" marL="0">
+            <a:pPr marL="0" indent="0">
               <a:buNone/>
             </a:pPr>
             <a:r>
@@ -4429,11 +5481,11 @@
           <a:bodyPr wrap="square" lIns="0" tIns="0" rIns="0" bIns="0" rtlCol="0" anchor="t"/>
           <a:lstStyle/>
           <a:p>
-            <a:pPr indent="0" marL="0">
-              <a:buNone/>
-            </a:pPr>
-            <a:r>
-              <a:rPr lang="en-US" sz="1100" i="1" dirty="0">
+            <a:pPr marL="0" indent="0">
+              <a:buNone/>
+            </a:pPr>
+            <a:r>
+              <a:rPr lang="en-US" sz="1100" i="1">
                 <a:solidFill>
                   <a:srgbClr val="5A6378"/>
                 </a:solidFill>
@@ -4441,7 +5493,7 @@
                 <a:ea typeface="Calibri" pitchFamily="34" charset="-122"/>
                 <a:cs typeface="Calibri" pitchFamily="34" charset="-120"/>
               </a:rPr>
-              <a:t>Rates come from our versioned rule pack; rules not yet checked against RBI and Income Tax sources are flagged (slide 10).</a:t>
+              <a:t>Rates come from our versioned rule pack; six rules are verified against RBI and the Income-tax Act 2025, the rest are flagged (slide 11).</a:t>
             </a:r>
             <a:endParaRPr lang="en-US" sz="1100" dirty="0"/>
           </a:p>
@@ -4449,7 +5501,7 @@
       </p:sp>
       <p:sp>
         <p:nvSpPr>
-          <p:cNvPr id="25" name="Slide Number Placeholder 0"/>
+          <p:cNvPr id="28" name="Slide Number Placeholder 0"/>
           <p:cNvSpPr>
             <a:spLocks noGrp="1"/>
           </p:cNvSpPr>
@@ -4467,7 +5519,7 @@
           </a:prstGeom>
           <a:extLst>
             <a:ext uri="{C572A759-6A51-4108-AA02-DFA0A04FC94B}">
-              <ma14:wrappingTextBoxFlag xmlns:ma14="http://schemas.microsoft.com/office/mac/drawingml/2011/main" val="0"/>
+              <ma14:wrappingTextBoxFlag xmlns="" xmlns:ma14="http://schemas.microsoft.com/office/mac/drawingml/2011/main" val="0"/>
             </a:ext>
           </a:extLst>
         </p:spPr>
@@ -4488,7 +5540,7 @@
           <a:p>
             <a:pPr algn="r"/>
             <a:fld id="{F7021451-1387-4CA6-816F-3879F97B5CBC}" type="slidenum">
-              <a:rPr b="0" lang="en-US"/>
+              <a:rPr lang="en-US" b="0"/>
               <a:t>2</a:t>
             </a:fld>
             <a:endParaRPr lang="en-US"/>
@@ -4523,9 +5575,11 @@
       <p:sp>
         <p:nvSpPr>
           <p:cNvPr id="2" name="Text 0"/>
-          <p:cNvSpPr/>
+          <p:cNvSpPr>
+            <a:spLocks noGrp="1"/>
+          </p:cNvSpPr>
           <p:nvPr>
-            <p:ph idx="100" type="title" hasCustomPrompt="1"/>
+            <p:ph type="title" idx="100" hasCustomPrompt="1"/>
           </p:nvPr>
         </p:nvSpPr>
         <p:spPr>
@@ -4543,7 +5597,7 @@
           <a:bodyPr wrap="square" lIns="0" tIns="0" rIns="0" bIns="0" rtlCol="0" anchor="ctr"/>
           <a:lstStyle/>
           <a:p>
-            <a:pPr algn="l" indent="0" marL="0">
+            <a:pPr marL="0" indent="0" algn="l">
               <a:buNone/>
             </a:pPr>
             <a:r>
@@ -4624,7 +5678,7 @@
           <a:bodyPr wrap="square" lIns="0" tIns="0" rIns="0" bIns="0" rtlCol="0" anchor="ctr"/>
           <a:lstStyle/>
           <a:p>
-            <a:pPr algn="ctr" indent="0" marL="0">
+            <a:pPr marL="0" indent="0" algn="ctr">
               <a:buNone/>
             </a:pPr>
             <a:r>
@@ -4663,7 +5717,7 @@
           <a:bodyPr wrap="square" lIns="0" tIns="0" rIns="0" bIns="0" rtlCol="0" anchor="t"/>
           <a:lstStyle/>
           <a:p>
-            <a:pPr indent="0" marL="0">
+            <a:pPr marL="0" indent="0">
               <a:buNone/>
             </a:pPr>
             <a:r>
@@ -4702,7 +5756,7 @@
           <a:bodyPr wrap="square" lIns="0" tIns="0" rIns="0" bIns="0" rtlCol="0" anchor="t"/>
           <a:lstStyle/>
           <a:p>
-            <a:pPr indent="0" marL="0">
+            <a:pPr marL="0" indent="0">
               <a:buNone/>
             </a:pPr>
             <a:r>
@@ -4783,7 +5837,7 @@
           <a:bodyPr wrap="square" lIns="0" tIns="0" rIns="0" bIns="0" rtlCol="0" anchor="ctr"/>
           <a:lstStyle/>
           <a:p>
-            <a:pPr algn="ctr" indent="0" marL="0">
+            <a:pPr marL="0" indent="0" algn="ctr">
               <a:buNone/>
             </a:pPr>
             <a:r>
@@ -4822,7 +5876,7 @@
           <a:bodyPr wrap="square" lIns="0" tIns="0" rIns="0" bIns="0" rtlCol="0" anchor="t"/>
           <a:lstStyle/>
           <a:p>
-            <a:pPr indent="0" marL="0">
+            <a:pPr marL="0" indent="0">
               <a:buNone/>
             </a:pPr>
             <a:r>
@@ -4861,7 +5915,7 @@
           <a:bodyPr wrap="square" lIns="0" tIns="0" rIns="0" bIns="0" rtlCol="0" anchor="t"/>
           <a:lstStyle/>
           <a:p>
-            <a:pPr indent="0" marL="0">
+            <a:pPr marL="0" indent="0">
               <a:buNone/>
             </a:pPr>
             <a:r>
@@ -4942,7 +5996,7 @@
           <a:bodyPr wrap="square" lIns="0" tIns="0" rIns="0" bIns="0" rtlCol="0" anchor="ctr"/>
           <a:lstStyle/>
           <a:p>
-            <a:pPr algn="ctr" indent="0" marL="0">
+            <a:pPr marL="0" indent="0" algn="ctr">
               <a:buNone/>
             </a:pPr>
             <a:r>
@@ -4981,7 +6035,7 @@
           <a:bodyPr wrap="square" lIns="0" tIns="0" rIns="0" bIns="0" rtlCol="0" anchor="t"/>
           <a:lstStyle/>
           <a:p>
-            <a:pPr indent="0" marL="0">
+            <a:pPr marL="0" indent="0">
               <a:buNone/>
             </a:pPr>
             <a:r>
@@ -5020,7 +6074,7 @@
           <a:bodyPr wrap="square" lIns="0" tIns="0" rIns="0" bIns="0" rtlCol="0" anchor="t"/>
           <a:lstStyle/>
           <a:p>
-            <a:pPr indent="0" marL="0">
+            <a:pPr marL="0" indent="0">
               <a:buNone/>
             </a:pPr>
             <a:r>
@@ -5101,7 +6155,7 @@
           <a:bodyPr wrap="square" lIns="0" tIns="0" rIns="0" bIns="0" rtlCol="0" anchor="ctr"/>
           <a:lstStyle/>
           <a:p>
-            <a:pPr algn="ctr" indent="0" marL="0">
+            <a:pPr marL="0" indent="0" algn="ctr">
               <a:buNone/>
             </a:pPr>
             <a:r>
@@ -5140,7 +6194,7 @@
           <a:bodyPr wrap="square" lIns="0" tIns="0" rIns="0" bIns="0" rtlCol="0" anchor="t"/>
           <a:lstStyle/>
           <a:p>
-            <a:pPr indent="0" marL="0">
+            <a:pPr marL="0" indent="0">
               <a:buNone/>
             </a:pPr>
             <a:r>
@@ -5179,7 +6233,7 @@
           <a:bodyPr wrap="square" lIns="0" tIns="0" rIns="0" bIns="0" rtlCol="0" anchor="t"/>
           <a:lstStyle/>
           <a:p>
-            <a:pPr indent="0" marL="0">
+            <a:pPr marL="0" indent="0">
               <a:buNone/>
             </a:pPr>
             <a:r>
@@ -5265,7 +6319,7 @@
           <a:bodyPr wrap="square" lIns="0" tIns="0" rIns="0" bIns="0" rtlCol="0" anchor="ctr"/>
           <a:lstStyle/>
           <a:p>
-            <a:pPr algn="ctr" indent="0" marL="0">
+            <a:pPr marL="0" indent="0" algn="ctr">
               <a:buNone/>
             </a:pPr>
             <a:r>
@@ -5304,7 +6358,7 @@
           <a:bodyPr wrap="square" lIns="0" tIns="0" rIns="0" bIns="0" rtlCol="0" anchor="t"/>
           <a:lstStyle/>
           <a:p>
-            <a:pPr indent="0" marL="0">
+            <a:pPr marL="0" indent="0">
               <a:buNone/>
             </a:pPr>
             <a:r>
@@ -5343,7 +6397,7 @@
           <a:bodyPr wrap="square" lIns="0" tIns="0" rIns="0" bIns="0" rtlCol="0" anchor="t"/>
           <a:lstStyle/>
           <a:p>
-            <a:pPr indent="0" marL="0">
+            <a:pPr marL="0" indent="0">
               <a:buNone/>
             </a:pPr>
             <a:r>
@@ -5424,7 +6478,7 @@
           <a:bodyPr wrap="square" lIns="0" tIns="0" rIns="0" bIns="0" rtlCol="0" anchor="ctr"/>
           <a:lstStyle/>
           <a:p>
-            <a:pPr algn="ctr" indent="0" marL="0">
+            <a:pPr marL="0" indent="0" algn="ctr">
               <a:buNone/>
             </a:pPr>
             <a:r>
@@ -5463,7 +6517,7 @@
           <a:bodyPr wrap="square" lIns="0" tIns="0" rIns="0" bIns="0" rtlCol="0" anchor="t"/>
           <a:lstStyle/>
           <a:p>
-            <a:pPr indent="0" marL="0">
+            <a:pPr marL="0" indent="0">
               <a:buNone/>
             </a:pPr>
             <a:r>
@@ -5502,7 +6556,7 @@
           <a:bodyPr wrap="square" lIns="0" tIns="0" rIns="0" bIns="0" rtlCol="0" anchor="t"/>
           <a:lstStyle/>
           <a:p>
-            <a:pPr indent="0" marL="0">
+            <a:pPr marL="0" indent="0">
               <a:buNone/>
             </a:pPr>
             <a:r>
@@ -5568,7 +6622,7 @@
           <a:bodyPr wrap="square" lIns="0" tIns="0" rIns="0" bIns="0" rtlCol="0" anchor="t"/>
           <a:lstStyle/>
           <a:p>
-            <a:pPr indent="0" marL="0">
+            <a:pPr marL="0" indent="0">
               <a:buNone/>
             </a:pPr>
             <a:r>
@@ -5607,7 +6661,7 @@
           <a:bodyPr wrap="square" lIns="0" tIns="0" rIns="0" bIns="0" rtlCol="0" anchor="t"/>
           <a:lstStyle/>
           <a:p>
-            <a:pPr indent="0" marL="0">
+            <a:pPr marL="0" indent="0">
               <a:buNone/>
             </a:pPr>
             <a:r>
@@ -5673,7 +6727,7 @@
           <a:bodyPr wrap="square" lIns="0" tIns="0" rIns="0" bIns="0" rtlCol="0" anchor="t"/>
           <a:lstStyle/>
           <a:p>
-            <a:pPr indent="0" marL="0">
+            <a:pPr marL="0" indent="0">
               <a:buNone/>
             </a:pPr>
             <a:r>
@@ -5712,7 +6766,7 @@
           <a:bodyPr wrap="square" lIns="0" tIns="0" rIns="0" bIns="0" rtlCol="0" anchor="t"/>
           <a:lstStyle/>
           <a:p>
-            <a:pPr indent="0" marL="0">
+            <a:pPr marL="0" indent="0">
               <a:buNone/>
             </a:pPr>
             <a:r>
@@ -5778,7 +6832,7 @@
           <a:bodyPr wrap="square" lIns="0" tIns="0" rIns="0" bIns="0" rtlCol="0" anchor="t"/>
           <a:lstStyle/>
           <a:p>
-            <a:pPr indent="0" marL="0">
+            <a:pPr marL="0" indent="0">
               <a:buNone/>
             </a:pPr>
             <a:r>
@@ -5817,11 +6871,11 @@
           <a:bodyPr wrap="square" lIns="0" tIns="0" rIns="0" bIns="0" rtlCol="0" anchor="t"/>
           <a:lstStyle/>
           <a:p>
-            <a:pPr indent="0" marL="0">
-              <a:buNone/>
-            </a:pPr>
-            <a:r>
-              <a:rPr lang="en-US" sz="1300" dirty="0">
+            <a:pPr marL="0" indent="0">
+              <a:buNone/>
+            </a:pPr>
+            <a:r>
+              <a:rPr lang="en-US" sz="1300">
                 <a:solidFill>
                   <a:srgbClr val="1F2A44"/>
                 </a:solidFill>
@@ -5829,7 +6883,7 @@
                 <a:ea typeface="Calibri" pitchFamily="34" charset="-122"/>
                 <a:cs typeface="Calibri" pitchFamily="34" charset="-120"/>
               </a:rPr>
-              <a:t>Passwordless sign-in on each enrolled device. Documents are encrypted in the browser; a student can review but never sign.</a:t>
+              <a:t>Passwordless sign-in on each enrolled device. A student prepares the payment; only a parent device can sign it. Documents are encrypted in the browser.</a:t>
             </a:r>
             <a:endParaRPr lang="en-US" sz="1300" dirty="0"/>
           </a:p>
@@ -5878,11 +6932,11 @@
           <a:bodyPr wrap="square" lIns="0" tIns="0" rIns="0" bIns="0" rtlCol="0" anchor="ctr"/>
           <a:lstStyle/>
           <a:p>
-            <a:pPr indent="0" marL="0">
-              <a:buNone/>
-            </a:pPr>
-            <a:r>
-              <a:rPr lang="en-US" sz="1400" b="1" dirty="0">
+            <a:pPr marL="0" indent="0">
+              <a:buNone/>
+            </a:pPr>
+            <a:r>
+              <a:rPr lang="en-US" sz="1400" b="1">
                 <a:solidFill>
                   <a:srgbClr val="FFFFFF"/>
                 </a:solidFill>
@@ -5890,21 +6944,7 @@
                 <a:ea typeface="Calibri" pitchFamily="34" charset="-122"/>
                 <a:cs typeface="Calibri" pitchFamily="34" charset="-120"/>
               </a:rPr>
-              <a:t>Code computes; the AI explains.  </a:t>
-            </a:r>
-            <a:pPr indent="0" marL="0">
-              <a:buNone/>
-            </a:pPr>
-            <a:r>
-              <a:rPr lang="en-US" sz="1400" dirty="0">
-                <a:solidFill>
-                  <a:srgbClr val="C9D3E6"/>
-                </a:solidFill>
-                <a:latin typeface="Calibri" pitchFamily="34" charset="0"/>
-                <a:ea typeface="Calibri" pitchFamily="34" charset="-122"/>
-                <a:cs typeface="Calibri" pitchFamily="34" charset="-120"/>
-              </a:rPr>
-              <a:t>Tax, cost and limits come from tested code. The AI only reads the invoice and words results, sees masked text only, and today is an offline stand-in.</a:t>
+              <a:t>Code computes; the AI explains.  Tax, cost and limits come from tested code. The AI only reads the invoice and words results, sees masked text only, and runs offline by default (hosted Claude optional).</a:t>
             </a:r>
             <a:endParaRPr lang="en-US" sz="1400" dirty="0"/>
           </a:p>
@@ -5912,7 +6952,7 @@
       </p:sp>
       <p:sp>
         <p:nvSpPr>
-          <p:cNvPr id="25" name="Slide Number Placeholder 0"/>
+          <p:cNvPr id="44" name="Slide Number Placeholder 0"/>
           <p:cNvSpPr>
             <a:spLocks noGrp="1"/>
           </p:cNvSpPr>
@@ -5930,7 +6970,7 @@
           </a:prstGeom>
           <a:extLst>
             <a:ext uri="{C572A759-6A51-4108-AA02-DFA0A04FC94B}">
-              <ma14:wrappingTextBoxFlag xmlns:ma14="http://schemas.microsoft.com/office/mac/drawingml/2011/main" val="0"/>
+              <ma14:wrappingTextBoxFlag xmlns="" xmlns:ma14="http://schemas.microsoft.com/office/mac/drawingml/2011/main" val="0"/>
             </a:ext>
           </a:extLst>
         </p:spPr>
@@ -5951,7 +6991,7 @@
           <a:p>
             <a:pPr algn="r"/>
             <a:fld id="{F7021451-1387-4CA6-816F-3879F97B5CBC}" type="slidenum">
-              <a:rPr b="0" lang="en-US"/>
+              <a:rPr lang="en-US" b="0"/>
               <a:t>3</a:t>
             </a:fld>
             <a:endParaRPr lang="en-US"/>
@@ -5967,6 +7007,567 @@
 </file>
 
 <file path=ppt/slides/slide4.xml><?xml version="1.0" encoding="utf-8"?>
+<p:sld xmlns:a="http://schemas.openxmlformats.org/drawingml/2006/main" xmlns:r="http://schemas.openxmlformats.org/officeDocument/2006/relationships" xmlns:p="http://schemas.openxmlformats.org/presentationml/2006/main">
+  <p:cSld name="Slide 3">
+    <p:spTree>
+      <p:nvGrpSpPr>
+        <p:cNvPr id="1" name=""/>
+        <p:cNvGrpSpPr/>
+        <p:nvPr/>
+      </p:nvGrpSpPr>
+      <p:grpSpPr>
+        <a:xfrm>
+          <a:off x="0" y="0"/>
+          <a:ext cx="0" cy="0"/>
+          <a:chOff x="0" y="0"/>
+          <a:chExt cx="0" cy="0"/>
+        </a:xfrm>
+      </p:grpSpPr>
+      <p:sp>
+        <p:nvSpPr>
+          <p:cNvPr id="2" name="Text 0"/>
+          <p:cNvSpPr>
+            <a:spLocks noGrp="1"/>
+          </p:cNvSpPr>
+          <p:nvPr>
+            <p:ph type="title" idx="100" hasCustomPrompt="1"/>
+          </p:nvPr>
+        </p:nvSpPr>
+        <p:spPr>
+          <a:xfrm>
+            <a:off x="548640" y="365760"/>
+            <a:ext cx="11064240" cy="731520"/>
+          </a:xfrm>
+          <a:prstGeom prst="rect">
+            <a:avLst/>
+          </a:prstGeom>
+          <a:noFill/>
+          <a:ln/>
+        </p:spPr>
+        <p:txBody>
+          <a:bodyPr wrap="square" lIns="0" tIns="0" rIns="0" bIns="0" rtlCol="0" anchor="ctr"/>
+          <a:lstStyle/>
+          <a:p>
+            <a:pPr marL="0" indent="0" algn="l">
+              <a:buNone/>
+            </a:pPr>
+            <a:r>
+              <a:rPr lang="en-US" sz="3000" b="1">
+                <a:solidFill>
+                  <a:srgbClr val="14213D"/>
+                </a:solidFill>
+                <a:latin typeface="Cambria" pitchFamily="34" charset="0"/>
+                <a:ea typeface="Cambria" pitchFamily="34" charset="-122"/>
+                <a:cs typeface="Cambria" pitchFamily="34" charset="-120"/>
+              </a:rPr>
+              <a:t>Student prepares, parent signs: the real app</a:t>
+            </a:r>
+            <a:endParaRPr lang="en-US" sz="3000" dirty="0"/>
+          </a:p>
+        </p:txBody>
+      </p:sp>
+      <p:sp>
+        <p:nvSpPr>
+          <p:cNvPr id="44" name="Slide Number Placeholder 0"/>
+          <p:cNvSpPr>
+            <a:spLocks noGrp="1"/>
+          </p:cNvSpPr>
+          <p:nvPr>
+            <p:ph type="sldNum" sz="quarter" idx="4294967295"/>
+          </p:nvPr>
+        </p:nvSpPr>
+        <p:spPr>
+          <a:xfrm>
+            <a:off x="11247120" y="6355080"/>
+            <a:ext cx="365760" cy="274320"/>
+          </a:xfrm>
+          <a:prstGeom prst="rect">
+            <a:avLst/>
+          </a:prstGeom>
+          <a:extLst>
+            <a:ext uri="{C572A759-6A51-4108-AA02-DFA0A04FC94B}">
+              <ma14:wrappingTextBoxFlag xmlns:ma14="http://schemas.microsoft.com/office/mac/drawingml/2011/main" xmlns="" val="0"/>
+            </a:ext>
+          </a:extLst>
+        </p:spPr>
+        <p:txBody>
+          <a:bodyPr/>
+          <a:lstStyle>
+            <a:lvl1pPr>
+              <a:defRPr sz="1000">
+                <a:solidFill>
+                  <a:srgbClr val="5A6378"/>
+                </a:solidFill>
+                <a:latin typeface="Calibri"/>
+                <a:ea typeface="Calibri"/>
+                <a:cs typeface="Calibri"/>
+              </a:defRPr>
+            </a:lvl1pPr>
+          </a:lstStyle>
+          <a:p>
+            <a:pPr algn="r"/>
+            <a:fld id="{F7021451-1387-4CA6-816F-3879F97B5CBC}" type="slidenum">
+              <a:rPr lang="en-US" b="0"/>
+              <a:t>4</a:t>
+            </a:fld>
+            <a:endParaRPr lang="en-US"/>
+          </a:p>
+        </p:txBody>
+      </p:sp>
+      <p:sp>
+        <p:nvSpPr>
+          <p:cNvPr id="45" name="TextBox 44">
+            <a:extLst>
+              <a:ext uri="{FF2B5EF4-FFF2-40B4-BE49-F238E27FC236}">
+                <a16:creationId xmlns:a16="http://schemas.microsoft.com/office/drawing/2014/main" id="{3D073469-A1BD-BDC1-63CB-446C24BB081F}"/>
+              </a:ext>
+            </a:extLst>
+          </p:cNvPr>
+          <p:cNvSpPr txBox="1"/>
+          <p:nvPr/>
+        </p:nvSpPr>
+        <p:spPr>
+          <a:xfrm>
+            <a:off x="546100" y="1320800"/>
+            <a:ext cx="3683000" cy="2790508"/>
+          </a:xfrm>
+          <a:prstGeom prst="rect">
+            <a:avLst/>
+          </a:prstGeom>
+          <a:noFill/>
+        </p:spPr>
+        <p:txBody>
+          <a:bodyPr vert="horz" wrap="square" rtlCol="0">
+            <a:spAutoFit/>
+          </a:bodyPr>
+          <a:lstStyle/>
+          <a:p>
+            <a:pPr>
+              <a:spcAft>
+                <a:spcPts val="800"/>
+              </a:spcAft>
+            </a:pPr>
+            <a:r>
+              <a:rPr lang="en-US" sz="1600" b="1">
+                <a:latin typeface="Calibri" panose="020F0502020204030204" pitchFamily="34" charset="0"/>
+              </a:rPr>
+              <a:t>Topic C's own user does the work</a:t>
+            </a:r>
+          </a:p>
+          <a:p>
+            <a:pPr>
+              <a:spcAft>
+                <a:spcPts val="800"/>
+              </a:spcAft>
+            </a:pPr>
+            <a:r>
+              <a:rPr lang="en-US" sz="1300">
+                <a:latin typeface="Calibri" panose="020F0502020204030204" pitchFamily="34" charset="0"/>
+              </a:rPr>
+              <a:t>1  The student signs in on their own device: no password, a key that never leaves the browser</a:t>
+            </a:r>
+          </a:p>
+          <a:p>
+            <a:pPr>
+              <a:spcAft>
+                <a:spcPts val="800"/>
+              </a:spcAft>
+            </a:pPr>
+            <a:r>
+              <a:rPr lang="en-US" sz="1300">
+                <a:latin typeface="Calibri" panose="020F0502020204030204" pitchFamily="34" charset="0"/>
+              </a:rPr>
+              <a:t>2  Uploads the invoice; the agent checks the university's signature and asks only what is missing</a:t>
+            </a:r>
+          </a:p>
+          <a:p>
+            <a:pPr>
+              <a:spcAft>
+                <a:spcPts val="800"/>
+              </a:spcAft>
+            </a:pPr>
+            <a:r>
+              <a:rPr lang="en-US" sz="1300">
+                <a:latin typeface="Calibri" panose="020F0502020204030204" pitchFamily="34" charset="0"/>
+              </a:rPr>
+              <a:t>3  Taps 'Ask a parent to sign'</a:t>
+            </a:r>
+          </a:p>
+          <a:p>
+            <a:pPr>
+              <a:spcAft>
+                <a:spcPts val="800"/>
+              </a:spcAft>
+            </a:pPr>
+            <a:r>
+              <a:rPr lang="en-US" sz="1300">
+                <a:latin typeface="Calibri" panose="020F0502020204030204" pitchFamily="34" charset="0"/>
+              </a:rPr>
+              <a:t>4  The parent opens it on their own device, the browser re-checks the plan hash, the parent signs, and the sandbox pays once</a:t>
+            </a:r>
+          </a:p>
+          <a:p>
+            <a:pPr>
+              <a:spcAft>
+                <a:spcPts val="800"/>
+              </a:spcAft>
+            </a:pPr>
+            <a:r>
+              <a:rPr lang="en-US" sz="1100">
+                <a:solidFill>
+                  <a:srgbClr val="787878"/>
+                </a:solidFill>
+                <a:latin typeface="Calibri" panose="020F0502020204030204" pitchFamily="34" charset="0"/>
+              </a:rPr>
+              <a:t>The student's session is retired the moment a parent opens it, so a student device can never act as the parent.</a:t>
+            </a:r>
+            <a:endParaRPr lang="en-IN" sz="1100">
+              <a:solidFill>
+                <a:srgbClr val="787878"/>
+              </a:solidFill>
+              <a:latin typeface="Calibri" panose="020F0502020204030204" pitchFamily="34" charset="0"/>
+            </a:endParaRPr>
+          </a:p>
+        </p:txBody>
+      </p:sp>
+      <p:pic>
+        <p:nvPicPr>
+          <p:cNvPr id="47" name="Picture 46">
+            <a:extLst>
+              <a:ext uri="{FF2B5EF4-FFF2-40B4-BE49-F238E27FC236}">
+                <a16:creationId xmlns:a16="http://schemas.microsoft.com/office/drawing/2014/main" id="{1B7A7462-0B3C-5311-1733-F21733A383E2}"/>
+              </a:ext>
+            </a:extLst>
+          </p:cNvPr>
+          <p:cNvPicPr>
+            <a:picLocks/>
+          </p:cNvPicPr>
+          <p:nvPr/>
+        </p:nvPicPr>
+        <p:blipFill>
+          <a:blip r:embed="rId3"/>
+          <a:stretch>
+            <a:fillRect/>
+          </a:stretch>
+        </p:blipFill>
+        <p:spPr>
+          <a:xfrm>
+            <a:off x="4445000" y="1320800"/>
+            <a:ext cx="3479800" cy="2159000"/>
+          </a:xfrm>
+          <a:prstGeom prst="rect">
+            <a:avLst/>
+          </a:prstGeom>
+          <a:ln w="9525">
+            <a:solidFill>
+              <a:srgbClr val="DBDBDB"/>
+            </a:solidFill>
+          </a:ln>
+        </p:spPr>
+      </p:pic>
+      <p:sp>
+        <p:nvSpPr>
+          <p:cNvPr id="48" name="TextBox 47">
+            <a:extLst>
+              <a:ext uri="{FF2B5EF4-FFF2-40B4-BE49-F238E27FC236}">
+                <a16:creationId xmlns:a16="http://schemas.microsoft.com/office/drawing/2014/main" id="{0ABAFDD5-4A89-5DA6-BC32-24A57CB9580D}"/>
+              </a:ext>
+            </a:extLst>
+          </p:cNvPr>
+          <p:cNvSpPr txBox="1"/>
+          <p:nvPr/>
+        </p:nvSpPr>
+        <p:spPr>
+          <a:xfrm>
+            <a:off x="4445000" y="3492500"/>
+            <a:ext cx="3479800" cy="246221"/>
+          </a:xfrm>
+          <a:prstGeom prst="rect">
+            <a:avLst/>
+          </a:prstGeom>
+          <a:noFill/>
+        </p:spPr>
+        <p:txBody>
+          <a:bodyPr vert="horz" rtlCol="0">
+            <a:spAutoFit/>
+          </a:bodyPr>
+          <a:lstStyle/>
+          <a:p>
+            <a:r>
+              <a:rPr lang="en-US" sz="1000">
+                <a:solidFill>
+                  <a:srgbClr val="787878"/>
+                </a:solidFill>
+                <a:latin typeface="Calibri" panose="020F0502020204030204" pitchFamily="34" charset="0"/>
+              </a:rPr>
+              <a:t>Signature chain checked, link by link</a:t>
+            </a:r>
+            <a:endParaRPr lang="en-IN" sz="1000">
+              <a:solidFill>
+                <a:srgbClr val="787878"/>
+              </a:solidFill>
+              <a:latin typeface="Calibri" panose="020F0502020204030204" pitchFamily="34" charset="0"/>
+            </a:endParaRPr>
+          </a:p>
+        </p:txBody>
+      </p:sp>
+      <p:pic>
+        <p:nvPicPr>
+          <p:cNvPr id="50" name="Picture 49">
+            <a:extLst>
+              <a:ext uri="{FF2B5EF4-FFF2-40B4-BE49-F238E27FC236}">
+                <a16:creationId xmlns:a16="http://schemas.microsoft.com/office/drawing/2014/main" id="{9B22E8E5-20A5-E081-A529-690C7D37D423}"/>
+              </a:ext>
+            </a:extLst>
+          </p:cNvPr>
+          <p:cNvPicPr>
+            <a:picLocks/>
+          </p:cNvPicPr>
+          <p:nvPr/>
+        </p:nvPicPr>
+        <p:blipFill>
+          <a:blip r:embed="rId4"/>
+          <a:stretch>
+            <a:fillRect/>
+          </a:stretch>
+        </p:blipFill>
+        <p:spPr>
+          <a:xfrm>
+            <a:off x="8128000" y="1320800"/>
+            <a:ext cx="3479800" cy="2159000"/>
+          </a:xfrm>
+          <a:prstGeom prst="rect">
+            <a:avLst/>
+          </a:prstGeom>
+          <a:ln w="9525">
+            <a:solidFill>
+              <a:srgbClr val="DBDBDB"/>
+            </a:solidFill>
+          </a:ln>
+        </p:spPr>
+      </p:pic>
+      <p:sp>
+        <p:nvSpPr>
+          <p:cNvPr id="51" name="TextBox 50">
+            <a:extLst>
+              <a:ext uri="{FF2B5EF4-FFF2-40B4-BE49-F238E27FC236}">
+                <a16:creationId xmlns:a16="http://schemas.microsoft.com/office/drawing/2014/main" id="{09BEDC77-B3F9-2447-BB6E-A679D3010E45}"/>
+              </a:ext>
+            </a:extLst>
+          </p:cNvPr>
+          <p:cNvSpPr txBox="1"/>
+          <p:nvPr/>
+        </p:nvSpPr>
+        <p:spPr>
+          <a:xfrm>
+            <a:off x="8128000" y="3492500"/>
+            <a:ext cx="3479800" cy="246221"/>
+          </a:xfrm>
+          <a:prstGeom prst="rect">
+            <a:avLst/>
+          </a:prstGeom>
+          <a:noFill/>
+        </p:spPr>
+        <p:txBody>
+          <a:bodyPr vert="horz" rtlCol="0">
+            <a:spAutoFit/>
+          </a:bodyPr>
+          <a:lstStyle/>
+          <a:p>
+            <a:r>
+              <a:rPr lang="en-US" sz="1000">
+                <a:solidFill>
+                  <a:srgbClr val="787878"/>
+                </a:solidFill>
+                <a:latin typeface="Calibri" panose="020F0502020204030204" pitchFamily="34" charset="0"/>
+              </a:rPr>
+              <a:t>Every route costed against the real rate</a:t>
+            </a:r>
+            <a:endParaRPr lang="en-IN" sz="1000">
+              <a:solidFill>
+                <a:srgbClr val="787878"/>
+              </a:solidFill>
+              <a:latin typeface="Calibri" panose="020F0502020204030204" pitchFamily="34" charset="0"/>
+            </a:endParaRPr>
+          </a:p>
+        </p:txBody>
+      </p:sp>
+      <p:pic>
+        <p:nvPicPr>
+          <p:cNvPr id="53" name="Picture 52">
+            <a:extLst>
+              <a:ext uri="{FF2B5EF4-FFF2-40B4-BE49-F238E27FC236}">
+                <a16:creationId xmlns:a16="http://schemas.microsoft.com/office/drawing/2014/main" id="{FC98E358-E0F6-F3B6-5EC1-8A0DB59EBA25}"/>
+              </a:ext>
+            </a:extLst>
+          </p:cNvPr>
+          <p:cNvPicPr>
+            <a:picLocks/>
+          </p:cNvPicPr>
+          <p:nvPr/>
+        </p:nvPicPr>
+        <p:blipFill>
+          <a:blip r:embed="rId5"/>
+          <a:stretch>
+            <a:fillRect/>
+          </a:stretch>
+        </p:blipFill>
+        <p:spPr>
+          <a:xfrm>
+            <a:off x="4445000" y="3810000"/>
+            <a:ext cx="3479800" cy="2159000"/>
+          </a:xfrm>
+          <a:prstGeom prst="rect">
+            <a:avLst/>
+          </a:prstGeom>
+          <a:ln w="9525">
+            <a:solidFill>
+              <a:srgbClr val="DBDBDB"/>
+            </a:solidFill>
+          </a:ln>
+        </p:spPr>
+      </p:pic>
+      <p:sp>
+        <p:nvSpPr>
+          <p:cNvPr id="54" name="TextBox 53">
+            <a:extLst>
+              <a:ext uri="{FF2B5EF4-FFF2-40B4-BE49-F238E27FC236}">
+                <a16:creationId xmlns:a16="http://schemas.microsoft.com/office/drawing/2014/main" id="{8CA5533E-B0F1-5272-FFEA-B9A576639EBB}"/>
+              </a:ext>
+            </a:extLst>
+          </p:cNvPr>
+          <p:cNvSpPr txBox="1"/>
+          <p:nvPr/>
+        </p:nvSpPr>
+        <p:spPr>
+          <a:xfrm>
+            <a:off x="4445000" y="5981700"/>
+            <a:ext cx="3479800" cy="246221"/>
+          </a:xfrm>
+          <a:prstGeom prst="rect">
+            <a:avLst/>
+          </a:prstGeom>
+          <a:noFill/>
+        </p:spPr>
+        <p:txBody>
+          <a:bodyPr vert="horz" rtlCol="0">
+            <a:spAutoFit/>
+          </a:bodyPr>
+          <a:lstStyle/>
+          <a:p>
+            <a:r>
+              <a:rPr lang="en-US" sz="1000">
+                <a:solidFill>
+                  <a:srgbClr val="787878"/>
+                </a:solidFill>
+                <a:latin typeface="Calibri" panose="020F0502020204030204" pitchFamily="34" charset="0"/>
+              </a:rPr>
+              <a:t>The parent sees what the student prepared</a:t>
+            </a:r>
+            <a:endParaRPr lang="en-IN" sz="1000">
+              <a:solidFill>
+                <a:srgbClr val="787878"/>
+              </a:solidFill>
+              <a:latin typeface="Calibri" panose="020F0502020204030204" pitchFamily="34" charset="0"/>
+            </a:endParaRPr>
+          </a:p>
+        </p:txBody>
+      </p:sp>
+      <p:pic>
+        <p:nvPicPr>
+          <p:cNvPr id="56" name="Picture 55">
+            <a:extLst>
+              <a:ext uri="{FF2B5EF4-FFF2-40B4-BE49-F238E27FC236}">
+                <a16:creationId xmlns:a16="http://schemas.microsoft.com/office/drawing/2014/main" id="{AABB2022-FCF0-3BE9-1D50-38A934466BC2}"/>
+              </a:ext>
+            </a:extLst>
+          </p:cNvPr>
+          <p:cNvPicPr>
+            <a:picLocks/>
+          </p:cNvPicPr>
+          <p:nvPr/>
+        </p:nvPicPr>
+        <p:blipFill>
+          <a:blip r:embed="rId6"/>
+          <a:stretch>
+            <a:fillRect/>
+          </a:stretch>
+        </p:blipFill>
+        <p:spPr>
+          <a:xfrm>
+            <a:off x="8128000" y="3810000"/>
+            <a:ext cx="3479800" cy="2159000"/>
+          </a:xfrm>
+          <a:prstGeom prst="rect">
+            <a:avLst/>
+          </a:prstGeom>
+          <a:ln w="9525">
+            <a:solidFill>
+              <a:srgbClr val="DBDBDB"/>
+            </a:solidFill>
+          </a:ln>
+        </p:spPr>
+      </p:pic>
+      <p:sp>
+        <p:nvSpPr>
+          <p:cNvPr id="57" name="TextBox 56">
+            <a:extLst>
+              <a:ext uri="{FF2B5EF4-FFF2-40B4-BE49-F238E27FC236}">
+                <a16:creationId xmlns:a16="http://schemas.microsoft.com/office/drawing/2014/main" id="{69D0D408-FC74-07FE-8E51-77C34222E54D}"/>
+              </a:ext>
+            </a:extLst>
+          </p:cNvPr>
+          <p:cNvSpPr txBox="1"/>
+          <p:nvPr/>
+        </p:nvSpPr>
+        <p:spPr>
+          <a:xfrm>
+            <a:off x="8128000" y="5981700"/>
+            <a:ext cx="3479800" cy="246221"/>
+          </a:xfrm>
+          <a:prstGeom prst="rect">
+            <a:avLst/>
+          </a:prstGeom>
+          <a:noFill/>
+        </p:spPr>
+        <p:txBody>
+          <a:bodyPr vert="horz" rtlCol="0">
+            <a:spAutoFit/>
+          </a:bodyPr>
+          <a:lstStyle/>
+          <a:p>
+            <a:r>
+              <a:rPr lang="en-US" sz="1000">
+                <a:solidFill>
+                  <a:srgbClr val="787878"/>
+                </a:solidFill>
+                <a:latin typeface="Calibri" panose="020F0502020204030204" pitchFamily="34" charset="0"/>
+              </a:rPr>
+              <a:t>Signed, paid once in the sandbox, receipt</a:t>
+            </a:r>
+            <a:endParaRPr lang="en-IN" sz="1000">
+              <a:solidFill>
+                <a:srgbClr val="787878"/>
+              </a:solidFill>
+              <a:latin typeface="Calibri" panose="020F0502020204030204" pitchFamily="34" charset="0"/>
+            </a:endParaRPr>
+          </a:p>
+        </p:txBody>
+      </p:sp>
+    </p:spTree>
+    <p:extLst>
+      <p:ext uri="{BB962C8B-B14F-4D97-AF65-F5344CB8AC3E}">
+        <p14:creationId xmlns:p14="http://schemas.microsoft.com/office/powerpoint/2010/main" val="1477076426"/>
+      </p:ext>
+    </p:extLst>
+  </p:cSld>
+  <p:clrMapOvr>
+    <a:masterClrMapping/>
+  </p:clrMapOvr>
+</p:sld>
+</file>
+
+<file path=ppt/slides/slide5.xml><?xml version="1.0" encoding="utf-8"?>
 <p:sld xmlns:a="http://schemas.openxmlformats.org/drawingml/2006/main" xmlns:r="http://schemas.openxmlformats.org/officeDocument/2006/relationships" xmlns:p="http://schemas.openxmlformats.org/presentationml/2006/main">
   <p:cSld name="Slide 4">
     <p:spTree>
@@ -5986,9 +7587,11 @@
       <p:sp>
         <p:nvSpPr>
           <p:cNvPr id="2" name="Text 0"/>
-          <p:cNvSpPr/>
+          <p:cNvSpPr>
+            <a:spLocks noGrp="1"/>
+          </p:cNvSpPr>
           <p:nvPr>
-            <p:ph idx="100" type="title" hasCustomPrompt="1"/>
+            <p:ph type="title" idx="100" hasCustomPrompt="1"/>
           </p:nvPr>
         </p:nvSpPr>
         <p:spPr>
@@ -6006,7 +7609,7 @@
           <a:bodyPr wrap="square" lIns="0" tIns="0" rIns="0" bIns="0" rtlCol="0" anchor="ctr"/>
           <a:lstStyle/>
           <a:p>
-            <a:pPr algn="l" indent="0" marL="0">
+            <a:pPr marL="0" indent="0" algn="l">
               <a:buNone/>
             </a:pPr>
             <a:r>
@@ -6026,14 +7629,14 @@
       </p:sp>
       <p:pic>
         <p:nvPicPr>
-          <p:cNvPr id="3" name="Image 0" descr="TuitionPilot architecture diagram">    </p:cNvPr>
+          <p:cNvPr id="3" name="Image 0" descr="TuitionPilot architecture diagram"/>
           <p:cNvPicPr>
             <a:picLocks noChangeAspect="1"/>
           </p:cNvPicPr>
           <p:nvPr/>
         </p:nvPicPr>
         <p:blipFill>
-          <a:blip r:embed="rId1"/>
+          <a:blip r:embed="rId3"/>
           <a:stretch>
             <a:fillRect/>
           </a:stretch>
@@ -6091,7 +7694,7 @@
           <a:bodyPr wrap="square" lIns="0" tIns="0" rIns="0" bIns="0" rtlCol="0" anchor="t"/>
           <a:lstStyle/>
           <a:p>
-            <a:pPr indent="0" marL="0">
+            <a:pPr marL="0" indent="0">
               <a:buNone/>
             </a:pPr>
             <a:r>
@@ -6130,7 +7733,7 @@
           <a:bodyPr wrap="square" lIns="0" tIns="0" rIns="0" bIns="0" rtlCol="0" anchor="t"/>
           <a:lstStyle/>
           <a:p>
-            <a:pPr indent="0" marL="0">
+            <a:pPr marL="0" indent="0">
               <a:buNone/>
             </a:pPr>
             <a:r>
@@ -6191,7 +7794,7 @@
           <a:bodyPr wrap="square" lIns="0" tIns="0" rIns="0" bIns="0" rtlCol="0" anchor="t"/>
           <a:lstStyle/>
           <a:p>
-            <a:pPr indent="0" marL="0">
+            <a:pPr marL="0" indent="0">
               <a:buNone/>
             </a:pPr>
             <a:r>
@@ -6230,7 +7833,7 @@
           <a:bodyPr wrap="square" lIns="0" tIns="0" rIns="0" bIns="0" rtlCol="0" anchor="t"/>
           <a:lstStyle/>
           <a:p>
-            <a:pPr indent="0" marL="0">
+            <a:pPr marL="0" indent="0">
               <a:buNone/>
             </a:pPr>
             <a:r>
@@ -6291,7 +7894,7 @@
           <a:bodyPr wrap="square" lIns="0" tIns="0" rIns="0" bIns="0" rtlCol="0" anchor="t"/>
           <a:lstStyle/>
           <a:p>
-            <a:pPr indent="0" marL="0">
+            <a:pPr marL="0" indent="0">
               <a:buNone/>
             </a:pPr>
             <a:r>
@@ -6330,7 +7933,7 @@
           <a:bodyPr wrap="square" lIns="0" tIns="0" rIns="0" bIns="0" rtlCol="0" anchor="t"/>
           <a:lstStyle/>
           <a:p>
-            <a:pPr indent="0" marL="0">
+            <a:pPr marL="0" indent="0">
               <a:buNone/>
             </a:pPr>
             <a:r>
@@ -6368,7 +7971,7 @@
           </a:prstGeom>
           <a:extLst>
             <a:ext uri="{C572A759-6A51-4108-AA02-DFA0A04FC94B}">
-              <ma14:wrappingTextBoxFlag xmlns:ma14="http://schemas.microsoft.com/office/mac/drawingml/2011/main" val="0"/>
+              <ma14:wrappingTextBoxFlag xmlns="" xmlns:ma14="http://schemas.microsoft.com/office/mac/drawingml/2011/main" val="0"/>
             </a:ext>
           </a:extLst>
         </p:spPr>
@@ -6389,8 +7992,8 @@
           <a:p>
             <a:pPr algn="r"/>
             <a:fld id="{F7021451-1387-4CA6-816F-3879F97B5CBC}" type="slidenum">
-              <a:rPr b="0" lang="en-US"/>
-              <a:t>4</a:t>
+              <a:rPr lang="en-US" b="0"/>
+              <a:t>5</a:t>
             </a:fld>
             <a:endParaRPr lang="en-US"/>
           </a:p>
@@ -6404,7 +8007,7 @@
 </p:sld>
 </file>
 
-<file path=ppt/slides/slide5.xml><?xml version="1.0" encoding="utf-8"?>
+<file path=ppt/slides/slide6.xml><?xml version="1.0" encoding="utf-8"?>
 <p:sld xmlns:a="http://schemas.openxmlformats.org/drawingml/2006/main" xmlns:r="http://schemas.openxmlformats.org/officeDocument/2006/relationships" xmlns:p="http://schemas.openxmlformats.org/presentationml/2006/main">
   <p:cSld name="Slide 5">
     <p:spTree>
@@ -6424,9 +8027,11 @@
       <p:sp>
         <p:nvSpPr>
           <p:cNvPr id="2" name="Text 0"/>
-          <p:cNvSpPr/>
+          <p:cNvSpPr>
+            <a:spLocks noGrp="1"/>
+          </p:cNvSpPr>
           <p:nvPr>
-            <p:ph idx="100" type="title" hasCustomPrompt="1"/>
+            <p:ph type="title" idx="100" hasCustomPrompt="1"/>
           </p:nvPr>
         </p:nvSpPr>
         <p:spPr>
@@ -6444,7 +8049,7 @@
           <a:bodyPr wrap="square" lIns="0" tIns="0" rIns="0" bIns="0" rtlCol="0" anchor="ctr"/>
           <a:lstStyle/>
           <a:p>
-            <a:pPr algn="l" indent="0" marL="0">
+            <a:pPr marL="0" indent="0" algn="l">
               <a:buNone/>
             </a:pPr>
             <a:r>
@@ -6471,7 +8076,7 @@
           <p:nvPr>
             <p:extLst>
               <p:ext uri="{D42A27DB-BD31-4B8C-83A1-F6EECF244321}">
-                <p14:modId xmlns:p14="http://schemas.microsoft.com/office/powerpoint/2010/main" val="1579011935"/>
+                <p14:modId xmlns:p14="http://schemas.microsoft.com/office/powerpoint/2010/main" val="4137691267"/>
               </p:ext>
             </p:extLst>
           </p:nvPr>
@@ -6485,9 +8090,27 @@
             <a:tbl>
               <a:tblPr/>
               <a:tblGrid>
-                <a:gridCol w="1920240"/>
-                <a:gridCol w="3291840"/>
-                <a:gridCol w="1554480"/>
+                <a:gridCol w="1920240">
+                  <a:extLst>
+                    <a:ext uri="{9D8B030D-6E8A-4147-A177-3AD203B41FA5}">
+                      <a16:colId xmlns:a16="http://schemas.microsoft.com/office/drawing/2014/main" val="20000"/>
+                    </a:ext>
+                  </a:extLst>
+                </a:gridCol>
+                <a:gridCol w="3291840">
+                  <a:extLst>
+                    <a:ext uri="{9D8B030D-6E8A-4147-A177-3AD203B41FA5}">
+                      <a16:colId xmlns:a16="http://schemas.microsoft.com/office/drawing/2014/main" val="20001"/>
+                    </a:ext>
+                  </a:extLst>
+                </a:gridCol>
+                <a:gridCol w="1554480">
+                  <a:extLst>
+                    <a:ext uri="{9D8B030D-6E8A-4147-A177-3AD203B41FA5}">
+                      <a16:colId xmlns:a16="http://schemas.microsoft.com/office/drawing/2014/main" val="20002"/>
+                    </a:ext>
+                  </a:extLst>
+                </a:gridCol>
               </a:tblGrid>
               <a:tr h="457200">
                 <a:tc>
@@ -6495,7 +8118,7 @@
                     <a:bodyPr/>
                     <a:lstStyle/>
                     <a:p>
-                      <a:pPr indent="0" marL="0">
+                      <a:pPr marL="0" indent="0">
                         <a:buNone/>
                       </a:pPr>
                       <a:r>
@@ -6563,7 +8186,7 @@
                     <a:bodyPr/>
                     <a:lstStyle/>
                     <a:p>
-                      <a:pPr indent="0" marL="0">
+                      <a:pPr marL="0" indent="0">
                         <a:buNone/>
                       </a:pPr>
                       <a:r>
@@ -6631,11 +8254,11 @@
                     <a:bodyPr/>
                     <a:lstStyle/>
                     <a:p>
-                      <a:pPr indent="0" marL="0">
+                      <a:pPr marL="0" indent="0">
                         <a:buNone/>
                       </a:pPr>
                       <a:r>
-                        <a:rPr lang="en-US" sz="1300" b="1" dirty="0">
+                        <a:rPr lang="en-US" sz="1300" b="1">
                           <a:solidFill>
                             <a:srgbClr val="FFFFFF"/>
                           </a:solidFill>
@@ -6643,7 +8266,7 @@
                           <a:ea typeface="Calibri" pitchFamily="34" charset="-122"/>
                           <a:cs typeface="Calibri" pitchFamily="34" charset="-120"/>
                         </a:rPr>
-                        <a:t>Status</a:t>
+                        <a:t>Status (18 Oct)</a:t>
                       </a:r>
                       <a:endParaRPr lang="en-US" sz="1300" dirty="0">
                         <a:latin typeface="Calibri" charset="0"/>
@@ -6694,6 +8317,11 @@
                     </a:solidFill>
                   </a:tcPr>
                 </a:tc>
+                <a:extLst>
+                  <a:ext uri="{0D108BD9-81ED-4DB2-BD59-A6C34878D82A}">
+                    <a16:rowId xmlns:a16="http://schemas.microsoft.com/office/drawing/2014/main" val="10000"/>
+                  </a:ext>
+                </a:extLst>
               </a:tr>
               <a:tr h="457200">
                 <a:tc>
@@ -6701,7 +8329,7 @@
                     <a:bodyPr/>
                     <a:lstStyle/>
                     <a:p>
-                      <a:pPr indent="0" marL="0">
+                      <a:pPr marL="0" indent="0">
                         <a:buNone/>
                       </a:pPr>
                       <a:r>
@@ -6766,7 +8394,7 @@
                     <a:bodyPr/>
                     <a:lstStyle/>
                     <a:p>
-                      <a:pPr indent="0" marL="0">
+                      <a:pPr marL="0" indent="0">
                         <a:buNone/>
                       </a:pPr>
                       <a:r>
@@ -6831,21 +8459,24 @@
                     <a:bodyPr/>
                     <a:lstStyle/>
                     <a:p>
-                      <a:pPr indent="0" marL="0">
+                      <a:pPr marL="0" indent="0">
                         <a:buNone/>
                       </a:pPr>
                       <a:r>
-                        <a:rPr lang="en-US" sz="1300" b="1" dirty="0">
+                        <a:rPr lang="en-US" sz="1300" b="0">
                           <a:solidFill>
-                            <a:srgbClr val="B4561F"/>
+                            <a:srgbClr val="000000"/>
                           </a:solidFill>
                           <a:latin typeface="Calibri" pitchFamily="34" charset="0"/>
                           <a:ea typeface="Calibri" pitchFamily="34" charset="-122"/>
                           <a:cs typeface="Calibri" pitchFamily="34" charset="-120"/>
                         </a:rPr>
-                        <a:t>Unverified</a:t>
+                        <a:t>Verified</a:t>
                       </a:r>
-                      <a:endParaRPr lang="en-US" sz="1300" dirty="0">
+                      <a:endParaRPr lang="en-US" sz="1300" b="0" dirty="0">
+                        <a:solidFill>
+                          <a:srgbClr val="000000"/>
+                        </a:solidFill>
                         <a:latin typeface="Calibri" charset="0"/>
                         <a:ea typeface="Calibri" charset="0"/>
                         <a:cs typeface="Calibri" charset="0"/>
@@ -6891,6 +8522,11 @@
                     </a:lnB>
                   </a:tcPr>
                 </a:tc>
+                <a:extLst>
+                  <a:ext uri="{0D108BD9-81ED-4DB2-BD59-A6C34878D82A}">
+                    <a16:rowId xmlns:a16="http://schemas.microsoft.com/office/drawing/2014/main" val="10001"/>
+                  </a:ext>
+                </a:extLst>
               </a:tr>
               <a:tr h="457200">
                 <a:tc>
@@ -6898,7 +8534,7 @@
                     <a:bodyPr/>
                     <a:lstStyle/>
                     <a:p>
-                      <a:pPr indent="0" marL="0">
+                      <a:pPr marL="0" indent="0">
                         <a:buNone/>
                       </a:pPr>
                       <a:r>
@@ -6963,7 +8599,7 @@
                     <a:bodyPr/>
                     <a:lstStyle/>
                     <a:p>
-                      <a:pPr indent="0" marL="0">
+                      <a:pPr marL="0" indent="0">
                         <a:buNone/>
                       </a:pPr>
                       <a:r>
@@ -7028,21 +8664,24 @@
                     <a:bodyPr/>
                     <a:lstStyle/>
                     <a:p>
-                      <a:pPr indent="0" marL="0">
+                      <a:pPr marL="0" indent="0">
                         <a:buNone/>
                       </a:pPr>
                       <a:r>
-                        <a:rPr lang="en-US" sz="1300" dirty="0">
+                        <a:rPr lang="en-US" sz="1300" b="0">
                           <a:solidFill>
-                            <a:srgbClr val="1F2A44"/>
+                            <a:srgbClr val="000000"/>
                           </a:solidFill>
                           <a:latin typeface="Calibri" pitchFamily="34" charset="0"/>
                           <a:ea typeface="Calibri" pitchFamily="34" charset="-122"/>
                           <a:cs typeface="Calibri" pitchFamily="34" charset="-120"/>
                         </a:rPr>
-                        <a:t>Secondary source</a:t>
+                        <a:t>Verified</a:t>
                       </a:r>
-                      <a:endParaRPr lang="en-US" sz="1300" dirty="0">
+                      <a:endParaRPr lang="en-US" sz="1300" b="0" dirty="0">
+                        <a:solidFill>
+                          <a:srgbClr val="000000"/>
+                        </a:solidFill>
                         <a:latin typeface="Calibri" charset="0"/>
                         <a:ea typeface="Calibri" charset="0"/>
                         <a:cs typeface="Calibri" charset="0"/>
@@ -7088,6 +8727,11 @@
                     </a:lnB>
                   </a:tcPr>
                 </a:tc>
+                <a:extLst>
+                  <a:ext uri="{0D108BD9-81ED-4DB2-BD59-A6C34878D82A}">
+                    <a16:rowId xmlns:a16="http://schemas.microsoft.com/office/drawing/2014/main" val="10002"/>
+                  </a:ext>
+                </a:extLst>
               </a:tr>
               <a:tr h="457200">
                 <a:tc>
@@ -7095,7 +8739,7 @@
                     <a:bodyPr/>
                     <a:lstStyle/>
                     <a:p>
-                      <a:pPr indent="0" marL="0">
+                      <a:pPr marL="0" indent="0">
                         <a:buNone/>
                       </a:pPr>
                       <a:r>
@@ -7160,7 +8804,7 @@
                     <a:bodyPr/>
                     <a:lstStyle/>
                     <a:p>
-                      <a:pPr indent="0" marL="0">
+                      <a:pPr marL="0" indent="0">
                         <a:buNone/>
                       </a:pPr>
                       <a:r>
@@ -7225,21 +8869,24 @@
                     <a:bodyPr/>
                     <a:lstStyle/>
                     <a:p>
-                      <a:pPr indent="0" marL="0">
+                      <a:pPr marL="0" indent="0">
                         <a:buNone/>
                       </a:pPr>
                       <a:r>
-                        <a:rPr lang="en-US" sz="1300" dirty="0">
+                        <a:rPr lang="en-US" sz="1300" b="0">
                           <a:solidFill>
-                            <a:srgbClr val="1F2A44"/>
+                            <a:srgbClr val="000000"/>
                           </a:solidFill>
                           <a:latin typeface="Calibri" pitchFamily="34" charset="0"/>
                           <a:ea typeface="Calibri" pitchFamily="34" charset="-122"/>
                           <a:cs typeface="Calibri" pitchFamily="34" charset="-120"/>
                         </a:rPr>
-                        <a:t>Secondary source</a:t>
+                        <a:t>Verified</a:t>
                       </a:r>
-                      <a:endParaRPr lang="en-US" sz="1300" dirty="0">
+                      <a:endParaRPr lang="en-US" sz="1300" b="0" dirty="0">
+                        <a:solidFill>
+                          <a:srgbClr val="000000"/>
+                        </a:solidFill>
                         <a:latin typeface="Calibri" charset="0"/>
                         <a:ea typeface="Calibri" charset="0"/>
                         <a:cs typeface="Calibri" charset="0"/>
@@ -7285,6 +8932,11 @@
                     </a:lnB>
                   </a:tcPr>
                 </a:tc>
+                <a:extLst>
+                  <a:ext uri="{0D108BD9-81ED-4DB2-BD59-A6C34878D82A}">
+                    <a16:rowId xmlns:a16="http://schemas.microsoft.com/office/drawing/2014/main" val="10003"/>
+                  </a:ext>
+                </a:extLst>
               </a:tr>
               <a:tr h="457200">
                 <a:tc>
@@ -7292,7 +8944,7 @@
                     <a:bodyPr/>
                     <a:lstStyle/>
                     <a:p>
-                      <a:pPr indent="0" marL="0">
+                      <a:pPr marL="0" indent="0">
                         <a:buNone/>
                       </a:pPr>
                       <a:r>
@@ -7357,11 +9009,11 @@
                     <a:bodyPr/>
                     <a:lstStyle/>
                     <a:p>
-                      <a:pPr indent="0" marL="0">
+                      <a:pPr marL="0" indent="0">
                         <a:buNone/>
                       </a:pPr>
                       <a:r>
-                        <a:rPr lang="en-US" sz="1300" dirty="0">
+                        <a:rPr lang="en-US" sz="1300">
                           <a:solidFill>
                             <a:srgbClr val="1F2A44"/>
                           </a:solidFill>
@@ -7369,7 +9021,7 @@
                           <a:ea typeface="Calibri" pitchFamily="34" charset="-122"/>
                           <a:cs typeface="Calibri" pitchFamily="34" charset="-120"/>
                         </a:rPr>
-                        <a:t>0% (loan from a notified institution)</a:t>
+                        <a:t>No TCS on an education loan from a financial institution</a:t>
                       </a:r>
                       <a:endParaRPr lang="en-US" sz="1300" dirty="0">
                         <a:latin typeface="Calibri" charset="0"/>
@@ -7422,21 +9074,24 @@
                     <a:bodyPr/>
                     <a:lstStyle/>
                     <a:p>
-                      <a:pPr indent="0" marL="0">
+                      <a:pPr marL="0" indent="0">
                         <a:buNone/>
                       </a:pPr>
                       <a:r>
-                        <a:rPr lang="en-US" sz="1300" dirty="0">
+                        <a:rPr lang="en-US" sz="1300" b="0">
                           <a:solidFill>
-                            <a:srgbClr val="1F2A44"/>
+                            <a:srgbClr val="000000"/>
                           </a:solidFill>
                           <a:latin typeface="Calibri" pitchFamily="34" charset="0"/>
                           <a:ea typeface="Calibri" pitchFamily="34" charset="-122"/>
                           <a:cs typeface="Calibri" pitchFamily="34" charset="-120"/>
                         </a:rPr>
-                        <a:t>Secondary source</a:t>
+                        <a:t>Verified</a:t>
                       </a:r>
-                      <a:endParaRPr lang="en-US" sz="1300" dirty="0">
+                      <a:endParaRPr lang="en-US" sz="1300" b="0" dirty="0">
+                        <a:solidFill>
+                          <a:srgbClr val="000000"/>
+                        </a:solidFill>
                         <a:latin typeface="Calibri" charset="0"/>
                         <a:ea typeface="Calibri" charset="0"/>
                         <a:cs typeface="Calibri" charset="0"/>
@@ -7482,6 +9137,11 @@
                     </a:lnB>
                   </a:tcPr>
                 </a:tc>
+                <a:extLst>
+                  <a:ext uri="{0D108BD9-81ED-4DB2-BD59-A6C34878D82A}">
+                    <a16:rowId xmlns:a16="http://schemas.microsoft.com/office/drawing/2014/main" val="10004"/>
+                  </a:ext>
+                </a:extLst>
               </a:tr>
               <a:tr h="457200">
                 <a:tc>
@@ -7489,7 +9149,7 @@
                     <a:bodyPr/>
                     <a:lstStyle/>
                     <a:p>
-                      <a:pPr indent="0" marL="0">
+                      <a:pPr marL="0" indent="0">
                         <a:buNone/>
                       </a:pPr>
                       <a:r>
@@ -7554,7 +9214,7 @@
                     <a:bodyPr/>
                     <a:lstStyle/>
                     <a:p>
-                      <a:pPr indent="0" marL="0">
+                      <a:pPr marL="0" indent="0">
                         <a:buNone/>
                       </a:pPr>
                       <a:r>
@@ -7619,21 +9279,24 @@
                     <a:bodyPr/>
                     <a:lstStyle/>
                     <a:p>
-                      <a:pPr indent="0" marL="0">
+                      <a:pPr marL="0" indent="0">
                         <a:buNone/>
                       </a:pPr>
                       <a:r>
-                        <a:rPr lang="en-US" sz="1300" b="1" dirty="0">
+                        <a:rPr lang="en-US" sz="1300" b="0">
                           <a:solidFill>
-                            <a:srgbClr val="B4561F"/>
+                            <a:srgbClr val="000000"/>
                           </a:solidFill>
                           <a:latin typeface="Calibri" pitchFamily="34" charset="0"/>
                           <a:ea typeface="Calibri" pitchFamily="34" charset="-122"/>
                           <a:cs typeface="Calibri" pitchFamily="34" charset="-120"/>
                         </a:rPr>
-                        <a:t>Unverified</a:t>
+                        <a:t>Verified</a:t>
                       </a:r>
-                      <a:endParaRPr lang="en-US" sz="1300" dirty="0">
+                      <a:endParaRPr lang="en-US" sz="1300" b="0" dirty="0">
+                        <a:solidFill>
+                          <a:srgbClr val="000000"/>
+                        </a:solidFill>
                         <a:latin typeface="Calibri" charset="0"/>
                         <a:ea typeface="Calibri" charset="0"/>
                         <a:cs typeface="Calibri" charset="0"/>
@@ -7679,6 +9342,11 @@
                     </a:lnB>
                   </a:tcPr>
                 </a:tc>
+                <a:extLst>
+                  <a:ext uri="{0D108BD9-81ED-4DB2-BD59-A6C34878D82A}">
+                    <a16:rowId xmlns:a16="http://schemas.microsoft.com/office/drawing/2014/main" val="10005"/>
+                  </a:ext>
+                </a:extLst>
               </a:tr>
             </a:tbl>
           </a:graphicData>
@@ -7727,11 +9395,11 @@
           <a:bodyPr wrap="square" lIns="0" tIns="0" rIns="0" bIns="0" rtlCol="0" anchor="t"/>
           <a:lstStyle/>
           <a:p>
-            <a:pPr indent="0" marL="0">
-              <a:buNone/>
-            </a:pPr>
-            <a:r>
-              <a:rPr lang="en-US" sz="1400" b="1" dirty="0">
+            <a:pPr marL="0" indent="0">
+              <a:buNone/>
+            </a:pPr>
+            <a:r>
+              <a:rPr lang="en-US" sz="1400" b="1">
                 <a:solidFill>
                   <a:srgbClr val="14213D"/>
                 </a:solidFill>
@@ -7739,32 +9407,31 @@
                 <a:ea typeface="Calibri" pitchFamily="34" charset="-122"/>
                 <a:cs typeface="Calibri" pitchFamily="34" charset="-120"/>
               </a:rPr>
-              <a:t>TCS = rate × (this year’s total − the larger of earlier payments or Rs 10 lakh)</a:t>
+              <a:t>TCS = rate x (this year's total - the larger of earlier payments or Rs 10 lakh)</a:t>
+            </a:r>
+          </a:p>
+          <a:p>
+            <a:pPr marL="0" indent="0">
+              <a:buNone/>
+            </a:pPr>
+            <a:r>
+              <a:rPr lang="en-US" sz="1400">
+                <a:solidFill>
+                  <a:srgbClr val="14213D"/>
+                </a:solidFill>
+                <a:latin typeface="Calibri" pitchFamily="34" charset="0"/>
+                <a:ea typeface="Calibri" pitchFamily="34" charset="-122"/>
+                <a:cs typeface="Calibri" pitchFamily="34" charset="-120"/>
+              </a:rPr>
+              <a:t>Never below zero. Every result carries the rule id, pack version, effective date and source. Verified against RBI and the Income-tax Act 2025 (s.394, s.397); rules still open are flagged in every output.</a:t>
             </a:r>
             <a:endParaRPr lang="en-US" sz="1400" dirty="0"/>
           </a:p>
-          <a:p>
-            <a:pPr indent="0" marL="0">
-              <a:buNone/>
-            </a:pPr>
-            <a:r>
-              <a:rPr lang="en-US" sz="1400" dirty="0">
-                <a:solidFill>
-                  <a:srgbClr val="1F2A44"/>
-                </a:solidFill>
-                <a:latin typeface="Calibri" pitchFamily="34" charset="0"/>
-                <a:ea typeface="Calibri" pitchFamily="34" charset="-122"/>
-                <a:cs typeface="Calibri" pitchFamily="34" charset="-120"/>
-              </a:rPr>
-              <a:t>Never below zero. Every result carries the rule id, pack version, effective date and source. The engine refuses dates before a rule took effect, and unverified rules are flagged in every output.</a:t>
-            </a:r>
-            <a:endParaRPr lang="en-US" sz="1400" dirty="0"/>
-          </a:p>
-        </p:txBody>
-      </p:sp>
-      <p:sp>
-        <p:nvSpPr>
-          <p:cNvPr id="6" name="Shape 3"/>
+        </p:txBody>
+      </p:sp>
+      <p:sp>
+        <p:nvSpPr>
+          <p:cNvPr id="3" name="Shape 3"/>
           <p:cNvSpPr/>
           <p:nvPr/>
         </p:nvSpPr>
@@ -7810,7 +9477,7 @@
           <a:bodyPr wrap="square" lIns="0" tIns="0" rIns="0" bIns="0" rtlCol="0" anchor="t"/>
           <a:lstStyle/>
           <a:p>
-            <a:pPr indent="0" marL="0">
+            <a:pPr marL="0" indent="0">
               <a:buNone/>
             </a:pPr>
             <a:r>
@@ -7849,7 +9516,7 @@
           <a:bodyPr wrap="square" lIns="0" tIns="0" rIns="0" bIns="0" rtlCol="0" anchor="t"/>
           <a:lstStyle/>
           <a:p>
-            <a:pPr indent="0" marL="0">
+            <a:pPr marL="0" indent="0">
               <a:buNone/>
             </a:pPr>
             <a:r>
@@ -7888,7 +9555,7 @@
           <a:bodyPr wrap="square" lIns="0" tIns="0" rIns="0" bIns="0" rtlCol="0" anchor="t"/>
           <a:lstStyle/>
           <a:p>
-            <a:pPr indent="0" marL="0">
+            <a:pPr marL="0" indent="0">
               <a:buNone/>
             </a:pPr>
             <a:r>
@@ -7927,7 +9594,7 @@
           <a:bodyPr wrap="square" lIns="0" tIns="0" rIns="0" bIns="0" rtlCol="0" anchor="t"/>
           <a:lstStyle/>
           <a:p>
-            <a:pPr algn="r" indent="0" marL="0">
+            <a:pPr marL="0" indent="0" algn="r">
               <a:buNone/>
             </a:pPr>
             <a:r>
@@ -7966,7 +9633,7 @@
           <a:bodyPr wrap="square" lIns="0" tIns="0" rIns="0" bIns="0" rtlCol="0" anchor="t"/>
           <a:lstStyle/>
           <a:p>
-            <a:pPr indent="0" marL="0">
+            <a:pPr marL="0" indent="0">
               <a:buNone/>
             </a:pPr>
             <a:r>
@@ -8005,7 +9672,7 @@
           <a:bodyPr wrap="square" lIns="0" tIns="0" rIns="0" bIns="0" rtlCol="0" anchor="t"/>
           <a:lstStyle/>
           <a:p>
-            <a:pPr algn="r" indent="0" marL="0">
+            <a:pPr marL="0" indent="0" algn="r">
               <a:buNone/>
             </a:pPr>
             <a:r>
@@ -8044,7 +9711,7 @@
           <a:bodyPr wrap="square" lIns="0" tIns="0" rIns="0" bIns="0" rtlCol="0" anchor="t"/>
           <a:lstStyle/>
           <a:p>
-            <a:pPr indent="0" marL="0">
+            <a:pPr marL="0" indent="0">
               <a:buNone/>
             </a:pPr>
             <a:r>
@@ -8083,7 +9750,7 @@
           <a:bodyPr wrap="square" lIns="0" tIns="0" rIns="0" bIns="0" rtlCol="0" anchor="t"/>
           <a:lstStyle/>
           <a:p>
-            <a:pPr algn="r" indent="0" marL="0">
+            <a:pPr marL="0" indent="0" algn="r">
               <a:buNone/>
             </a:pPr>
             <a:r>
@@ -8145,7 +9812,7 @@
           <a:bodyPr wrap="square" lIns="0" tIns="0" rIns="0" bIns="0" rtlCol="0" anchor="t"/>
           <a:lstStyle/>
           <a:p>
-            <a:pPr indent="0" marL="0">
+            <a:pPr marL="0" indent="0">
               <a:buNone/>
             </a:pPr>
             <a:r>
@@ -8184,7 +9851,7 @@
           <a:bodyPr wrap="square" lIns="0" tIns="0" rIns="0" bIns="0" rtlCol="0" anchor="t"/>
           <a:lstStyle/>
           <a:p>
-            <a:pPr algn="r" indent="0" marL="0">
+            <a:pPr marL="0" indent="0" algn="r">
               <a:buNone/>
             </a:pPr>
             <a:r>
@@ -8223,7 +9890,7 @@
           <a:bodyPr wrap="square" lIns="0" tIns="0" rIns="0" bIns="0" rtlCol="0" anchor="t"/>
           <a:lstStyle/>
           <a:p>
-            <a:pPr indent="0" marL="0">
+            <a:pPr marL="0" indent="0">
               <a:buNone/>
             </a:pPr>
             <a:r>
@@ -8261,7 +9928,7 @@
           </a:prstGeom>
           <a:extLst>
             <a:ext uri="{C572A759-6A51-4108-AA02-DFA0A04FC94B}">
-              <ma14:wrappingTextBoxFlag xmlns:ma14="http://schemas.microsoft.com/office/mac/drawingml/2011/main" val="0"/>
+              <ma14:wrappingTextBoxFlag xmlns="" xmlns:ma14="http://schemas.microsoft.com/office/mac/drawingml/2011/main" val="0"/>
             </a:ext>
           </a:extLst>
         </p:spPr>
@@ -8282,8 +9949,8 @@
           <a:p>
             <a:pPr algn="r"/>
             <a:fld id="{F7021451-1387-4CA6-816F-3879F97B5CBC}" type="slidenum">
-              <a:rPr b="0" lang="en-US"/>
-              <a:t>5</a:t>
+              <a:rPr lang="en-US" b="0"/>
+              <a:t>6</a:t>
             </a:fld>
             <a:endParaRPr lang="en-US"/>
           </a:p>
@@ -8297,7 +9964,7 @@
 </p:sld>
 </file>
 
-<file path=ppt/slides/slide6.xml><?xml version="1.0" encoding="utf-8"?>
+<file path=ppt/slides/slide7.xml><?xml version="1.0" encoding="utf-8"?>
 <p:sld xmlns:a="http://schemas.openxmlformats.org/drawingml/2006/main" xmlns:r="http://schemas.openxmlformats.org/officeDocument/2006/relationships" xmlns:p="http://schemas.openxmlformats.org/presentationml/2006/main">
   <p:cSld name="Slide 6">
     <p:spTree>
@@ -8317,9 +9984,11 @@
       <p:sp>
         <p:nvSpPr>
           <p:cNvPr id="2" name="Text 0"/>
-          <p:cNvSpPr/>
+          <p:cNvSpPr>
+            <a:spLocks noGrp="1"/>
+          </p:cNvSpPr>
           <p:nvPr>
-            <p:ph idx="100" type="title" hasCustomPrompt="1"/>
+            <p:ph type="title" idx="100" hasCustomPrompt="1"/>
           </p:nvPr>
         </p:nvSpPr>
         <p:spPr>
@@ -8337,7 +10006,7 @@
           <a:bodyPr wrap="square" lIns="0" tIns="0" rIns="0" bIns="0" rtlCol="0" anchor="ctr"/>
           <a:lstStyle/>
           <a:p>
-            <a:pPr algn="l" indent="0" marL="0">
+            <a:pPr marL="0" indent="0" algn="l">
               <a:buNone/>
             </a:pPr>
             <a:r>
@@ -8357,7 +10026,7 @@
       </p:sp>
       <p:graphicFrame>
         <p:nvGraphicFramePr>
-          <p:cNvPr id="3" name="Chart 0" descr=""/>
+          <p:cNvPr id="3" name="Chart 0"/>
           <p:cNvGraphicFramePr/>
           <p:nvPr/>
         </p:nvGraphicFramePr>
@@ -8365,9 +10034,9 @@
           <a:off x="548640" y="1280160"/>
           <a:ext cx="6583680" cy="4206240"/>
         </p:xfrm>
-        <a:graphic xmlns:a="http://schemas.openxmlformats.org/drawingml/2006/main">
+        <a:graphic>
           <a:graphicData uri="http://schemas.openxmlformats.org/drawingml/2006/chart">
-            <c:chart xmlns:c="http://schemas.openxmlformats.org/drawingml/2006/chart" r:id="rId1"/>
+            <c:chart xmlns:c="http://schemas.openxmlformats.org/drawingml/2006/chart" xmlns:r="http://schemas.openxmlformats.org/officeDocument/2006/relationships" r:id="rId3"/>
           </a:graphicData>
         </a:graphic>
       </p:graphicFrame>
@@ -8414,7 +10083,7 @@
           <a:bodyPr wrap="square" lIns="0" tIns="0" rIns="0" bIns="0" rtlCol="0" anchor="t"/>
           <a:lstStyle/>
           <a:p>
-            <a:pPr indent="0" marL="0">
+            <a:pPr marL="0" indent="0">
               <a:buNone/>
             </a:pPr>
             <a:r>
@@ -8453,7 +10122,7 @@
           <a:bodyPr wrap="square" lIns="0" tIns="0" rIns="0" bIns="0" rtlCol="0" anchor="t"/>
           <a:lstStyle/>
           <a:p>
-            <a:pPr indent="0" marL="0">
+            <a:pPr marL="0" indent="0">
               <a:buNone/>
             </a:pPr>
             <a:r>
@@ -8492,7 +10161,7 @@
           <a:bodyPr wrap="square" lIns="0" tIns="0" rIns="0" bIns="0" rtlCol="0" anchor="t"/>
           <a:lstStyle/>
           <a:p>
-            <a:pPr algn="r" indent="0" marL="0">
+            <a:pPr marL="0" indent="0" algn="r">
               <a:buNone/>
             </a:pPr>
             <a:r>
@@ -8531,7 +10200,7 @@
           <a:bodyPr wrap="square" lIns="0" tIns="0" rIns="0" bIns="0" rtlCol="0" anchor="t"/>
           <a:lstStyle/>
           <a:p>
-            <a:pPr indent="0" marL="0">
+            <a:pPr marL="0" indent="0">
               <a:buNone/>
             </a:pPr>
             <a:r>
@@ -8570,7 +10239,7 @@
           <a:bodyPr wrap="square" lIns="0" tIns="0" rIns="0" bIns="0" rtlCol="0" anchor="t"/>
           <a:lstStyle/>
           <a:p>
-            <a:pPr algn="r" indent="0" marL="0">
+            <a:pPr marL="0" indent="0" algn="r">
               <a:buNone/>
             </a:pPr>
             <a:r>
@@ -8609,7 +10278,7 @@
           <a:bodyPr wrap="square" lIns="0" tIns="0" rIns="0" bIns="0" rtlCol="0" anchor="t"/>
           <a:lstStyle/>
           <a:p>
-            <a:pPr indent="0" marL="0">
+            <a:pPr marL="0" indent="0">
               <a:buNone/>
             </a:pPr>
             <a:r>
@@ -8648,7 +10317,7 @@
           <a:bodyPr wrap="square" lIns="0" tIns="0" rIns="0" bIns="0" rtlCol="0" anchor="t"/>
           <a:lstStyle/>
           <a:p>
-            <a:pPr algn="r" indent="0" marL="0">
+            <a:pPr marL="0" indent="0" algn="r">
               <a:buNone/>
             </a:pPr>
             <a:r>
@@ -8710,7 +10379,7 @@
           <a:bodyPr wrap="square" lIns="0" tIns="0" rIns="0" bIns="0" rtlCol="0" anchor="t"/>
           <a:lstStyle/>
           <a:p>
-            <a:pPr indent="0" marL="0">
+            <a:pPr marL="0" indent="0">
               <a:buNone/>
             </a:pPr>
             <a:r>
@@ -8749,7 +10418,7 @@
           <a:bodyPr wrap="square" lIns="0" tIns="0" rIns="0" bIns="0" rtlCol="0" anchor="t"/>
           <a:lstStyle/>
           <a:p>
-            <a:pPr algn="r" indent="0" marL="0">
+            <a:pPr marL="0" indent="0" algn="r">
               <a:buNone/>
             </a:pPr>
             <a:r>
@@ -8788,7 +10457,7 @@
           <a:bodyPr wrap="square" lIns="0" tIns="0" rIns="0" bIns="0" rtlCol="0" anchor="t"/>
           <a:lstStyle/>
           <a:p>
-            <a:pPr indent="0" marL="0">
+            <a:pPr marL="0" indent="0">
               <a:buNone/>
             </a:pPr>
             <a:r>
@@ -8827,7 +10496,7 @@
           <a:bodyPr wrap="square" lIns="0" tIns="0" rIns="0" bIns="0" rtlCol="0" anchor="t"/>
           <a:lstStyle/>
           <a:p>
-            <a:pPr indent="0" marL="0">
+            <a:pPr marL="0" indent="0">
               <a:buNone/>
             </a:pPr>
             <a:r>
@@ -8865,7 +10534,7 @@
           </a:prstGeom>
           <a:extLst>
             <a:ext uri="{C572A759-6A51-4108-AA02-DFA0A04FC94B}">
-              <ma14:wrappingTextBoxFlag xmlns:ma14="http://schemas.microsoft.com/office/mac/drawingml/2011/main" val="0"/>
+              <ma14:wrappingTextBoxFlag xmlns="" xmlns:ma14="http://schemas.microsoft.com/office/mac/drawingml/2011/main" val="0"/>
             </a:ext>
           </a:extLst>
         </p:spPr>
@@ -8886,8 +10555,8 @@
           <a:p>
             <a:pPr algn="r"/>
             <a:fld id="{F7021451-1387-4CA6-816F-3879F97B5CBC}" type="slidenum">
-              <a:rPr b="0" lang="en-US"/>
-              <a:t>6</a:t>
+              <a:rPr lang="en-US" b="0"/>
+              <a:t>7</a:t>
             </a:fld>
             <a:endParaRPr lang="en-US"/>
           </a:p>
@@ -8901,7 +10570,7 @@
 </p:sld>
 </file>
 
-<file path=ppt/slides/slide7.xml><?xml version="1.0" encoding="utf-8"?>
+<file path=ppt/slides/slide8.xml><?xml version="1.0" encoding="utf-8"?>
 <p:sld xmlns:a="http://schemas.openxmlformats.org/drawingml/2006/main" xmlns:r="http://schemas.openxmlformats.org/officeDocument/2006/relationships" xmlns:p="http://schemas.openxmlformats.org/presentationml/2006/main">
   <p:cSld name="Slide 7">
     <p:spTree>
@@ -8921,9 +10590,11 @@
       <p:sp>
         <p:nvSpPr>
           <p:cNvPr id="2" name="Text 0"/>
-          <p:cNvSpPr/>
+          <p:cNvSpPr>
+            <a:spLocks noGrp="1"/>
+          </p:cNvSpPr>
           <p:nvPr>
-            <p:ph idx="100" type="title" hasCustomPrompt="1"/>
+            <p:ph type="title" idx="100" hasCustomPrompt="1"/>
           </p:nvPr>
         </p:nvSpPr>
         <p:spPr>
@@ -8941,7 +10612,7 @@
           <a:bodyPr wrap="square" lIns="0" tIns="0" rIns="0" bIns="0" rtlCol="0" anchor="ctr"/>
           <a:lstStyle/>
           <a:p>
-            <a:pPr algn="l" indent="0" marL="0">
+            <a:pPr marL="0" indent="0" algn="l">
               <a:buNone/>
             </a:pPr>
             <a:r>
@@ -8980,7 +10651,7 @@
           <a:bodyPr wrap="square" lIns="0" tIns="0" rIns="0" bIns="0" rtlCol="0" anchor="t"/>
           <a:lstStyle/>
           <a:p>
-            <a:pPr indent="0" marL="0">
+            <a:pPr marL="0" indent="0">
               <a:buNone/>
             </a:pPr>
             <a:r>
@@ -8994,9 +10665,6 @@
               </a:rPr>
               <a:t>University invoice.  </a:t>
             </a:r>
-            <a:pPr indent="0" marL="0">
-              <a:buNone/>
-            </a:pPr>
             <a:r>
               <a:rPr lang="en-US" sz="1500" dirty="0">
                 <a:solidFill>
@@ -9055,7 +10723,7 @@
           <a:bodyPr wrap="square" lIns="0" tIns="0" rIns="0" bIns="0" rtlCol="0" anchor="t"/>
           <a:lstStyle/>
           <a:p>
-            <a:pPr indent="0" marL="0">
+            <a:pPr marL="0" indent="0">
               <a:buNone/>
             </a:pPr>
             <a:r>
@@ -9094,7 +10762,7 @@
           <a:bodyPr wrap="square" lIns="0" tIns="0" rIns="0" bIns="0" rtlCol="0" anchor="t"/>
           <a:lstStyle/>
           <a:p>
-            <a:pPr indent="0" marL="0">
+            <a:pPr marL="0" indent="0">
               <a:buNone/>
             </a:pPr>
             <a:r>
@@ -9175,7 +10843,7 @@
           <a:bodyPr wrap="square" lIns="0" tIns="0" rIns="0" bIns="0" rtlCol="0" anchor="t"/>
           <a:lstStyle/>
           <a:p>
-            <a:pPr indent="0" marL="0">
+            <a:pPr marL="0" indent="0">
               <a:buNone/>
             </a:pPr>
             <a:r>
@@ -9214,7 +10882,7 @@
           <a:bodyPr wrap="square" lIns="0" tIns="0" rIns="0" bIns="0" rtlCol="0" anchor="t"/>
           <a:lstStyle/>
           <a:p>
-            <a:pPr indent="0" marL="0">
+            <a:pPr marL="0" indent="0">
               <a:buNone/>
             </a:pPr>
             <a:r>
@@ -9295,7 +10963,7 @@
           <a:bodyPr wrap="square" lIns="0" tIns="0" rIns="0" bIns="0" rtlCol="0" anchor="t"/>
           <a:lstStyle/>
           <a:p>
-            <a:pPr indent="0" marL="0">
+            <a:pPr marL="0" indent="0">
               <a:buNone/>
             </a:pPr>
             <a:r>
@@ -9334,7 +11002,7 @@
           <a:bodyPr wrap="square" lIns="0" tIns="0" rIns="0" bIns="0" rtlCol="0" anchor="t"/>
           <a:lstStyle/>
           <a:p>
-            <a:pPr indent="0" marL="0">
+            <a:pPr marL="0" indent="0">
               <a:buNone/>
             </a:pPr>
             <a:r>
@@ -9415,7 +11083,7 @@
           <a:bodyPr wrap="square" lIns="0" tIns="0" rIns="0" bIns="0" rtlCol="0" anchor="t"/>
           <a:lstStyle/>
           <a:p>
-            <a:pPr indent="0" marL="0">
+            <a:pPr marL="0" indent="0">
               <a:buNone/>
             </a:pPr>
             <a:r>
@@ -9454,7 +11122,7 @@
           <a:bodyPr wrap="square" lIns="0" tIns="0" rIns="0" bIns="0" rtlCol="0" anchor="t"/>
           <a:lstStyle/>
           <a:p>
-            <a:pPr indent="0" marL="0">
+            <a:pPr marL="0" indent="0">
               <a:buNone/>
             </a:pPr>
             <a:r>
@@ -9535,7 +11203,7 @@
           <a:bodyPr wrap="square" lIns="0" tIns="0" rIns="0" bIns="0" rtlCol="0" anchor="t"/>
           <a:lstStyle/>
           <a:p>
-            <a:pPr indent="0" marL="0">
+            <a:pPr marL="0" indent="0">
               <a:buNone/>
             </a:pPr>
             <a:r>
@@ -9574,7 +11242,7 @@
           <a:bodyPr wrap="square" lIns="0" tIns="0" rIns="0" bIns="0" rtlCol="0" anchor="t"/>
           <a:lstStyle/>
           <a:p>
-            <a:pPr indent="0" marL="0">
+            <a:pPr marL="0" indent="0">
               <a:buNone/>
             </a:pPr>
             <a:r>
@@ -9613,7 +11281,7 @@
           <a:bodyPr wrap="square" lIns="0" tIns="0" rIns="0" bIns="0" rtlCol="0" anchor="t"/>
           <a:lstStyle/>
           <a:p>
-            <a:pPr indent="0" marL="0">
+            <a:pPr marL="0" indent="0">
               <a:buNone/>
             </a:pPr>
             <a:r>
@@ -9627,9 +11295,6 @@
               </a:rPr>
               <a:t>Parent approval.  </a:t>
             </a:r>
-            <a:pPr indent="0" marL="0">
-              <a:buNone/>
-            </a:pPr>
             <a:r>
               <a:rPr lang="en-US" sz="1500" dirty="0">
                 <a:solidFill>
@@ -9693,7 +11358,7 @@
           <a:bodyPr wrap="square" lIns="0" tIns="0" rIns="0" bIns="0" rtlCol="0" anchor="t"/>
           <a:lstStyle/>
           <a:p>
-            <a:pPr indent="0" marL="0">
+            <a:pPr marL="0" indent="0">
               <a:buNone/>
             </a:pPr>
             <a:r>
@@ -9732,7 +11397,7 @@
           <a:bodyPr wrap="square" lIns="0" tIns="0" rIns="0" bIns="0" rtlCol="0" anchor="t"/>
           <a:lstStyle/>
           <a:p>
-            <a:pPr indent="0" marL="0">
+            <a:pPr marL="0" indent="0">
               <a:buNone/>
             </a:pPr>
             <a:r>
@@ -9818,7 +11483,7 @@
           <a:bodyPr wrap="square" lIns="0" tIns="0" rIns="0" bIns="0" rtlCol="0" anchor="t"/>
           <a:lstStyle/>
           <a:p>
-            <a:pPr indent="0" marL="0">
+            <a:pPr marL="0" indent="0">
               <a:buNone/>
             </a:pPr>
             <a:r>
@@ -9857,11 +11522,11 @@
           <a:bodyPr wrap="square" lIns="0" tIns="0" rIns="0" bIns="0" rtlCol="0" anchor="t"/>
           <a:lstStyle/>
           <a:p>
-            <a:pPr indent="0" marL="0">
-              <a:buNone/>
-            </a:pPr>
-            <a:r>
-              <a:rPr lang="en-US" sz="1300" dirty="0">
+            <a:pPr marL="0" indent="0">
+              <a:buNone/>
+            </a:pPr>
+            <a:r>
+              <a:rPr lang="en-US" sz="1300">
                 <a:solidFill>
                   <a:srgbClr val="1F2A44"/>
                 </a:solidFill>
@@ -9869,7 +11534,7 @@
                 <a:ea typeface="Calibri" pitchFamily="34" charset="-122"/>
                 <a:cs typeface="Calibri" pitchFamily="34" charset="-120"/>
               </a:rPr>
-              <a:t>Only the public key, with the PIN</a:t>
+              <a:t>Public key only; PIN plus a parent device's approval</a:t>
             </a:r>
             <a:endParaRPr lang="en-US" sz="1300" dirty="0"/>
           </a:p>
@@ -9943,7 +11608,7 @@
           <a:bodyPr wrap="square" lIns="0" tIns="0" rIns="0" bIns="0" rtlCol="0" anchor="t"/>
           <a:lstStyle/>
           <a:p>
-            <a:pPr indent="0" marL="0">
+            <a:pPr marL="0" indent="0">
               <a:buNone/>
             </a:pPr>
             <a:r>
@@ -9982,7 +11647,7 @@
           <a:bodyPr wrap="square" lIns="0" tIns="0" rIns="0" bIns="0" rtlCol="0" anchor="t"/>
           <a:lstStyle/>
           <a:p>
-            <a:pPr indent="0" marL="0">
+            <a:pPr marL="0" indent="0">
               <a:buNone/>
             </a:pPr>
             <a:r>
@@ -10068,7 +11733,7 @@
           <a:bodyPr wrap="square" lIns="0" tIns="0" rIns="0" bIns="0" rtlCol="0" anchor="t"/>
           <a:lstStyle/>
           <a:p>
-            <a:pPr indent="0" marL="0">
+            <a:pPr marL="0" indent="0">
               <a:buNone/>
             </a:pPr>
             <a:r>
@@ -10107,7 +11772,7 @@
           <a:bodyPr wrap="square" lIns="0" tIns="0" rIns="0" bIns="0" rtlCol="0" anchor="t"/>
           <a:lstStyle/>
           <a:p>
-            <a:pPr indent="0" marL="0">
+            <a:pPr marL="0" indent="0">
               <a:buNone/>
             </a:pPr>
             <a:r>
@@ -10193,7 +11858,7 @@
           <a:bodyPr wrap="square" lIns="0" tIns="0" rIns="0" bIns="0" rtlCol="0" anchor="t"/>
           <a:lstStyle/>
           <a:p>
-            <a:pPr indent="0" marL="0">
+            <a:pPr marL="0" indent="0">
               <a:buNone/>
             </a:pPr>
             <a:r>
@@ -10232,7 +11897,7 @@
           <a:bodyPr wrap="square" lIns="0" tIns="0" rIns="0" bIns="0" rtlCol="0" anchor="t"/>
           <a:lstStyle/>
           <a:p>
-            <a:pPr indent="0" marL="0">
+            <a:pPr marL="0" indent="0">
               <a:buNone/>
             </a:pPr>
             <a:r>
@@ -10293,7 +11958,7 @@
           <a:bodyPr wrap="square" lIns="0" tIns="0" rIns="0" bIns="0" rtlCol="0" anchor="ctr"/>
           <a:lstStyle/>
           <a:p>
-            <a:pPr indent="0" marL="0">
+            <a:pPr marL="0" indent="0">
               <a:buNone/>
             </a:pPr>
             <a:r>
@@ -10313,7 +11978,7 @@
       </p:sp>
       <p:sp>
         <p:nvSpPr>
-          <p:cNvPr id="25" name="Slide Number Placeholder 0"/>
+          <p:cNvPr id="45" name="Slide Number Placeholder 0"/>
           <p:cNvSpPr>
             <a:spLocks noGrp="1"/>
           </p:cNvSpPr>
@@ -10331,7 +11996,7 @@
           </a:prstGeom>
           <a:extLst>
             <a:ext uri="{C572A759-6A51-4108-AA02-DFA0A04FC94B}">
-              <ma14:wrappingTextBoxFlag xmlns:ma14="http://schemas.microsoft.com/office/mac/drawingml/2011/main" val="0"/>
+              <ma14:wrappingTextBoxFlag xmlns="" xmlns:ma14="http://schemas.microsoft.com/office/mac/drawingml/2011/main" val="0"/>
             </a:ext>
           </a:extLst>
         </p:spPr>
@@ -10352,8 +12017,8 @@
           <a:p>
             <a:pPr algn="r"/>
             <a:fld id="{F7021451-1387-4CA6-816F-3879F97B5CBC}" type="slidenum">
-              <a:rPr b="0" lang="en-US"/>
-              <a:t>7</a:t>
+              <a:rPr lang="en-US" b="0"/>
+              <a:t>8</a:t>
             </a:fld>
             <a:endParaRPr lang="en-US"/>
           </a:p>
@@ -10367,7 +12032,7 @@
 </p:sld>
 </file>
 
-<file path=ppt/slides/slide8.xml><?xml version="1.0" encoding="utf-8"?>
+<file path=ppt/slides/slide9.xml><?xml version="1.0" encoding="utf-8"?>
 <p:sld xmlns:a="http://schemas.openxmlformats.org/drawingml/2006/main" xmlns:r="http://schemas.openxmlformats.org/officeDocument/2006/relationships" xmlns:p="http://schemas.openxmlformats.org/presentationml/2006/main">
   <p:cSld name="Slide 8">
     <p:spTree>
@@ -10387,9 +12052,11 @@
       <p:sp>
         <p:nvSpPr>
           <p:cNvPr id="2" name="Text 0"/>
-          <p:cNvSpPr/>
+          <p:cNvSpPr>
+            <a:spLocks noGrp="1"/>
+          </p:cNvSpPr>
           <p:nvPr>
-            <p:ph idx="100" type="title" hasCustomPrompt="1"/>
+            <p:ph type="title" idx="100" hasCustomPrompt="1"/>
           </p:nvPr>
         </p:nvSpPr>
         <p:spPr>
@@ -10407,7 +12074,7 @@
           <a:bodyPr wrap="square" lIns="0" tIns="0" rIns="0" bIns="0" rtlCol="0" anchor="ctr"/>
           <a:lstStyle/>
           <a:p>
-            <a:pPr algn="l" indent="0" marL="0">
+            <a:pPr marL="0" indent="0" algn="l">
               <a:buNone/>
             </a:pPr>
             <a:r>
@@ -10448,9 +12115,27 @@
             <a:tbl>
               <a:tblPr/>
               <a:tblGrid>
-                <a:gridCol w="640080"/>
-                <a:gridCol w="2926080"/>
-                <a:gridCol w="2194560"/>
+                <a:gridCol w="640080">
+                  <a:extLst>
+                    <a:ext uri="{9D8B030D-6E8A-4147-A177-3AD203B41FA5}">
+                      <a16:colId xmlns:a16="http://schemas.microsoft.com/office/drawing/2014/main" val="20000"/>
+                    </a:ext>
+                  </a:extLst>
+                </a:gridCol>
+                <a:gridCol w="2926080">
+                  <a:extLst>
+                    <a:ext uri="{9D8B030D-6E8A-4147-A177-3AD203B41FA5}">
+                      <a16:colId xmlns:a16="http://schemas.microsoft.com/office/drawing/2014/main" val="20001"/>
+                    </a:ext>
+                  </a:extLst>
+                </a:gridCol>
+                <a:gridCol w="2194560">
+                  <a:extLst>
+                    <a:ext uri="{9D8B030D-6E8A-4147-A177-3AD203B41FA5}">
+                      <a16:colId xmlns:a16="http://schemas.microsoft.com/office/drawing/2014/main" val="20002"/>
+                    </a:ext>
+                  </a:extLst>
+                </a:gridCol>
               </a:tblGrid>
               <a:tr h="502920">
                 <a:tc>
@@ -10458,7 +12143,7 @@
                     <a:bodyPr/>
                     <a:lstStyle/>
                     <a:p>
-                      <a:pPr indent="0" marL="0">
+                      <a:pPr marL="0" indent="0">
                         <a:buNone/>
                       </a:pPr>
                       <a:r>
@@ -10526,7 +12211,7 @@
                     <a:bodyPr/>
                     <a:lstStyle/>
                     <a:p>
-                      <a:pPr indent="0" marL="0">
+                      <a:pPr marL="0" indent="0">
                         <a:buNone/>
                       </a:pPr>
                       <a:r>
@@ -10594,7 +12279,7 @@
                     <a:bodyPr/>
                     <a:lstStyle/>
                     <a:p>
-                      <a:pPr indent="0" marL="0">
+                      <a:pPr marL="0" indent="0">
                         <a:buNone/>
                       </a:pPr>
                       <a:r>
@@ -10657,6 +12342,11 @@
                     </a:solidFill>
                   </a:tcPr>
                 </a:tc>
+                <a:extLst>
+                  <a:ext uri="{0D108BD9-81ED-4DB2-BD59-A6C34878D82A}">
+                    <a16:rowId xmlns:a16="http://schemas.microsoft.com/office/drawing/2014/main" val="10000"/>
+                  </a:ext>
+                </a:extLst>
               </a:tr>
               <a:tr h="502920">
                 <a:tc>
@@ -10664,7 +12354,7 @@
                     <a:bodyPr/>
                     <a:lstStyle/>
                     <a:p>
-                      <a:pPr indent="0" marL="0">
+                      <a:pPr marL="0" indent="0">
                         <a:buNone/>
                       </a:pPr>
                       <a:r>
@@ -10729,7 +12419,7 @@
                     <a:bodyPr/>
                     <a:lstStyle/>
                     <a:p>
-                      <a:pPr indent="0" marL="0">
+                      <a:pPr marL="0" indent="0">
                         <a:buNone/>
                       </a:pPr>
                       <a:r>
@@ -10794,7 +12484,7 @@
                     <a:bodyPr/>
                     <a:lstStyle/>
                     <a:p>
-                      <a:pPr indent="0" marL="0">
+                      <a:pPr marL="0" indent="0">
                         <a:buNone/>
                       </a:pPr>
                       <a:r>
@@ -10854,6 +12544,11 @@
                     </a:lnB>
                   </a:tcPr>
                 </a:tc>
+                <a:extLst>
+                  <a:ext uri="{0D108BD9-81ED-4DB2-BD59-A6C34878D82A}">
+                    <a16:rowId xmlns:a16="http://schemas.microsoft.com/office/drawing/2014/main" val="10001"/>
+                  </a:ext>
+                </a:extLst>
               </a:tr>
               <a:tr h="502920">
                 <a:tc>
@@ -10861,7 +12556,7 @@
                     <a:bodyPr/>
                     <a:lstStyle/>
                     <a:p>
-                      <a:pPr indent="0" marL="0">
+                      <a:pPr marL="0" indent="0">
                         <a:buNone/>
                       </a:pPr>
                       <a:r>
@@ -10926,7 +12621,7 @@
                     <a:bodyPr/>
                     <a:lstStyle/>
                     <a:p>
-                      <a:pPr indent="0" marL="0">
+                      <a:pPr marL="0" indent="0">
                         <a:buNone/>
                       </a:pPr>
                       <a:r>
@@ -10991,7 +12686,7 @@
                     <a:bodyPr/>
                     <a:lstStyle/>
                     <a:p>
-                      <a:pPr indent="0" marL="0">
+                      <a:pPr marL="0" indent="0">
                         <a:buNone/>
                       </a:pPr>
                       <a:r>
@@ -11051,6 +12746,11 @@
                     </a:lnB>
                   </a:tcPr>
                 </a:tc>
+                <a:extLst>
+                  <a:ext uri="{0D108BD9-81ED-4DB2-BD59-A6C34878D82A}">
+                    <a16:rowId xmlns:a16="http://schemas.microsoft.com/office/drawing/2014/main" val="10002"/>
+                  </a:ext>
+                </a:extLst>
               </a:tr>
               <a:tr h="502920">
                 <a:tc>
@@ -11058,7 +12758,7 @@
                     <a:bodyPr/>
                     <a:lstStyle/>
                     <a:p>
-                      <a:pPr indent="0" marL="0">
+                      <a:pPr marL="0" indent="0">
                         <a:buNone/>
                       </a:pPr>
                       <a:r>
@@ -11123,7 +12823,7 @@
                     <a:bodyPr/>
                     <a:lstStyle/>
                     <a:p>
-                      <a:pPr indent="0" marL="0">
+                      <a:pPr marL="0" indent="0">
                         <a:buNone/>
                       </a:pPr>
                       <a:r>
@@ -11188,7 +12888,7 @@
                     <a:bodyPr/>
                     <a:lstStyle/>
                     <a:p>
-                      <a:pPr indent="0" marL="0">
+                      <a:pPr marL="0" indent="0">
                         <a:buNone/>
                       </a:pPr>
                       <a:r>
@@ -11248,6 +12948,11 @@
                     </a:lnB>
                   </a:tcPr>
                 </a:tc>
+                <a:extLst>
+                  <a:ext uri="{0D108BD9-81ED-4DB2-BD59-A6C34878D82A}">
+                    <a16:rowId xmlns:a16="http://schemas.microsoft.com/office/drawing/2014/main" val="10003"/>
+                  </a:ext>
+                </a:extLst>
               </a:tr>
               <a:tr h="502920">
                 <a:tc>
@@ -11255,7 +12960,7 @@
                     <a:bodyPr/>
                     <a:lstStyle/>
                     <a:p>
-                      <a:pPr indent="0" marL="0">
+                      <a:pPr marL="0" indent="0">
                         <a:buNone/>
                       </a:pPr>
                       <a:r>
@@ -11320,7 +13025,7 @@
                     <a:bodyPr/>
                     <a:lstStyle/>
                     <a:p>
-                      <a:pPr indent="0" marL="0">
+                      <a:pPr marL="0" indent="0">
                         <a:buNone/>
                       </a:pPr>
                       <a:r>
@@ -11385,7 +13090,7 @@
                     <a:bodyPr/>
                     <a:lstStyle/>
                     <a:p>
-                      <a:pPr indent="0" marL="0">
+                      <a:pPr marL="0" indent="0">
                         <a:buNone/>
                       </a:pPr>
                       <a:r>
@@ -11445,6 +13150,11 @@
                     </a:lnB>
                   </a:tcPr>
                 </a:tc>
+                <a:extLst>
+                  <a:ext uri="{0D108BD9-81ED-4DB2-BD59-A6C34878D82A}">
+                    <a16:rowId xmlns:a16="http://schemas.microsoft.com/office/drawing/2014/main" val="10004"/>
+                  </a:ext>
+                </a:extLst>
               </a:tr>
               <a:tr h="502920">
                 <a:tc>
@@ -11452,7 +13162,7 @@
                     <a:bodyPr/>
                     <a:lstStyle/>
                     <a:p>
-                      <a:pPr indent="0" marL="0">
+                      <a:pPr marL="0" indent="0">
                         <a:buNone/>
                       </a:pPr>
                       <a:r>
@@ -11517,7 +13227,7 @@
                     <a:bodyPr/>
                     <a:lstStyle/>
                     <a:p>
-                      <a:pPr indent="0" marL="0">
+                      <a:pPr marL="0" indent="0">
                         <a:buNone/>
                       </a:pPr>
                       <a:r>
@@ -11582,7 +13292,7 @@
                     <a:bodyPr/>
                     <a:lstStyle/>
                     <a:p>
-                      <a:pPr indent="0" marL="0">
+                      <a:pPr marL="0" indent="0">
                         <a:buNone/>
                       </a:pPr>
                       <a:r>
@@ -11642,6 +13352,11 @@
                     </a:lnB>
                   </a:tcPr>
                 </a:tc>
+                <a:extLst>
+                  <a:ext uri="{0D108BD9-81ED-4DB2-BD59-A6C34878D82A}">
+                    <a16:rowId xmlns:a16="http://schemas.microsoft.com/office/drawing/2014/main" val="10005"/>
+                  </a:ext>
+                </a:extLst>
               </a:tr>
             </a:tbl>
           </a:graphicData>
@@ -11668,7 +13383,7 @@
           <a:bodyPr wrap="square" lIns="0" tIns="0" rIns="0" bIns="0" rtlCol="0" anchor="t"/>
           <a:lstStyle/>
           <a:p>
-            <a:pPr indent="0" marL="0">
+            <a:pPr marL="0" indent="0">
               <a:buNone/>
             </a:pPr>
             <a:r>
@@ -11729,7 +13444,7 @@
           <a:bodyPr wrap="square" lIns="0" tIns="0" rIns="0" bIns="0" rtlCol="0" anchor="t"/>
           <a:lstStyle/>
           <a:p>
-            <a:pPr indent="0" marL="0">
+            <a:pPr marL="0" indent="0">
               <a:buNone/>
             </a:pPr>
             <a:r>
@@ -11768,7 +13483,7 @@
           <a:bodyPr wrap="square" lIns="0" tIns="0" rIns="0" bIns="0" rtlCol="0" anchor="t"/>
           <a:lstStyle/>
           <a:p>
-            <a:pPr indent="0" marL="0">
+            <a:pPr marL="0" indent="0">
               <a:buNone/>
             </a:pPr>
             <a:r>
@@ -11810,7 +13525,7 @@
       </p:sp>
       <p:sp>
         <p:nvSpPr>
-          <p:cNvPr id="9" name="Text 6"/>
+          <p:cNvPr id="3" name="Text 6"/>
           <p:cNvSpPr txBox="1"/>
           <p:nvPr/>
         </p:nvSpPr>
@@ -11829,7 +13544,7 @@
           <a:bodyPr wrap="square" lIns="0" tIns="0" rIns="0" bIns="0" rtlCol="0" anchor="t"/>
           <a:lstStyle/>
           <a:p>
-            <a:pPr indent="0" marL="0">
+            <a:pPr marL="0" indent="0">
               <a:buNone/>
             </a:pPr>
             <a:r>
@@ -11868,7 +13583,7 @@
           <a:bodyPr wrap="square" lIns="0" tIns="0" rIns="0" bIns="0" rtlCol="0" anchor="t"/>
           <a:lstStyle/>
           <a:p>
-            <a:pPr indent="0" marL="0">
+            <a:pPr marL="0" indent="0">
               <a:buNone/>
             </a:pPr>
             <a:r>
@@ -11929,7 +13644,7 @@
           <a:bodyPr wrap="square" lIns="0" tIns="0" rIns="0" bIns="0" rtlCol="0" anchor="t"/>
           <a:lstStyle/>
           <a:p>
-            <a:pPr indent="0" marL="0">
+            <a:pPr marL="0" indent="0">
               <a:buNone/>
             </a:pPr>
             <a:r>
@@ -11968,7 +13683,7 @@
           <a:bodyPr wrap="square" lIns="0" tIns="0" rIns="0" bIns="0" rtlCol="0" anchor="t"/>
           <a:lstStyle/>
           <a:p>
-            <a:pPr indent="0" marL="0">
+            <a:pPr marL="0" indent="0">
               <a:buNone/>
             </a:pPr>
             <a:r>
@@ -12029,7 +13744,7 @@
           <a:bodyPr wrap="square" lIns="0" tIns="0" rIns="0" bIns="0" rtlCol="0" anchor="t"/>
           <a:lstStyle/>
           <a:p>
-            <a:pPr indent="0" marL="0">
+            <a:pPr marL="0" indent="0">
               <a:buNone/>
             </a:pPr>
             <a:r>
@@ -12068,7 +13783,7 @@
           <a:bodyPr wrap="square" lIns="0" tIns="0" rIns="0" bIns="0" rtlCol="0" anchor="t"/>
           <a:lstStyle/>
           <a:p>
-            <a:pPr indent="0" marL="0">
+            <a:pPr marL="0" indent="0">
               <a:buNone/>
             </a:pPr>
             <a:r>
@@ -12129,7 +13844,7 @@
           <a:bodyPr wrap="square" lIns="0" tIns="0" rIns="0" bIns="0" rtlCol="0" anchor="t"/>
           <a:lstStyle/>
           <a:p>
-            <a:pPr indent="0" marL="0">
+            <a:pPr marL="0" indent="0">
               <a:buNone/>
             </a:pPr>
             <a:r>
@@ -12168,7 +13883,7 @@
           <a:bodyPr wrap="square" lIns="0" tIns="0" rIns="0" bIns="0" rtlCol="0" anchor="t"/>
           <a:lstStyle/>
           <a:p>
-            <a:pPr indent="0" marL="0">
+            <a:pPr marL="0" indent="0">
               <a:buNone/>
             </a:pPr>
             <a:r>
@@ -12229,7 +13944,7 @@
           <a:bodyPr wrap="square" lIns="0" tIns="0" rIns="0" bIns="0" rtlCol="0" anchor="t"/>
           <a:lstStyle/>
           <a:p>
-            <a:pPr indent="0" marL="0">
+            <a:pPr marL="0" indent="0">
               <a:buNone/>
             </a:pPr>
             <a:r>
@@ -12268,7 +13983,7 @@
           <a:bodyPr wrap="square" lIns="0" tIns="0" rIns="0" bIns="0" rtlCol="0" anchor="t"/>
           <a:lstStyle/>
           <a:p>
-            <a:pPr indent="0" marL="0">
+            <a:pPr marL="0" indent="0">
               <a:buNone/>
             </a:pPr>
             <a:r>
@@ -12306,7 +14021,7 @@
           </a:prstGeom>
           <a:extLst>
             <a:ext uri="{C572A759-6A51-4108-AA02-DFA0A04FC94B}">
-              <ma14:wrappingTextBoxFlag xmlns:ma14="http://schemas.microsoft.com/office/mac/drawingml/2011/main" val="0"/>
+              <ma14:wrappingTextBoxFlag xmlns="" xmlns:ma14="http://schemas.microsoft.com/office/mac/drawingml/2011/main" val="0"/>
             </a:ext>
           </a:extLst>
         </p:spPr>
@@ -12327,1161 +14042,10 @@
           <a:p>
             <a:pPr algn="r"/>
             <a:fld id="{F7021451-1387-4CA6-816F-3879F97B5CBC}" type="slidenum">
-              <a:rPr b="0" lang="en-US"/>
-              <a:t>8</a:t>
+              <a:rPr lang="en-US" b="0"/>
+              <a:t>9</a:t>
             </a:fld>
             <a:endParaRPr lang="en-US"/>
-          </a:p>
-        </p:txBody>
-      </p:sp>
-    </p:spTree>
-  </p:cSld>
-  <p:clrMapOvr>
-    <a:masterClrMapping/>
-  </p:clrMapOvr>
-</p:sld>
-</file>
-
-<file path=ppt/slides/slide9.xml><?xml version="1.0" encoding="utf-8"?>
-<p:sld xmlns:a="http://schemas.openxmlformats.org/drawingml/2006/main" xmlns:r="http://schemas.openxmlformats.org/officeDocument/2006/relationships" xmlns:p="http://schemas.openxmlformats.org/presentationml/2006/main">
-  <p:cSld name="Slide 9">
-    <p:spTree>
-      <p:nvGrpSpPr>
-        <p:cNvPr id="1" name=""/>
-        <p:cNvGrpSpPr/>
-        <p:nvPr/>
-      </p:nvGrpSpPr>
-      <p:grpSpPr>
-        <a:xfrm>
-          <a:off x="0" y="0"/>
-          <a:ext cx="0" cy="0"/>
-          <a:chOff x="0" y="0"/>
-          <a:chExt cx="0" cy="0"/>
-        </a:xfrm>
-      </p:grpSpPr>
-      <p:sp>
-        <p:nvSpPr>
-          <p:cNvPr id="2" name="Text 0"/>
-          <p:cNvSpPr txBox="1"/>
-          <p:nvPr/>
-        </p:nvSpPr>
-        <p:spPr>
-          <a:xfrm>
-            <a:off x="548640" y="365760"/>
-            <a:ext cx="11064240" cy="731520"/>
-          </a:xfrm>
-          <a:prstGeom prst="rect">
-            <a:avLst/>
-          </a:prstGeom>
-          <a:noFill/>
-          <a:ln/>
-        </p:spPr>
-        <p:txBody>
-          <a:bodyPr wrap="square" lIns="0" tIns="0" rIns="0" bIns="0" rtlCol="0" anchor="ctr"/>
-          <a:lstStyle/>
-          <a:p>
-            <a:pPr indent="0" marL="0">
-              <a:buNone/>
-            </a:pPr>
-            <a:r>
-              <a:rPr lang="en-US" sz="3000" b="1" dirty="0">
-                <a:solidFill>
-                  <a:srgbClr val="FFFFFF"/>
-                </a:solidFill>
-                <a:latin typeface="Cambria" pitchFamily="34" charset="0"/>
-                <a:ea typeface="Cambria" pitchFamily="34" charset="-122"/>
-                <a:cs typeface="Cambria" pitchFamily="34" charset="-120"/>
-              </a:rPr>
-              <a:t>Evidence: run it yourself, one command each</a:t>
-            </a:r>
-            <a:endParaRPr lang="en-US" sz="3000" dirty="0"/>
-          </a:p>
-        </p:txBody>
-      </p:sp>
-      <p:sp>
-        <p:nvSpPr>
-          <p:cNvPr id="3" name="Shape 1"/>
-          <p:cNvSpPr/>
-          <p:nvPr/>
-        </p:nvSpPr>
-        <p:spPr>
-          <a:xfrm>
-            <a:off x="548640" y="1371600"/>
-            <a:ext cx="2651760" cy="1691640"/>
-          </a:xfrm>
-          <a:prstGeom prst="roundRect">
-            <a:avLst>
-              <a:gd name="adj" fmla="val 6486"/>
-            </a:avLst>
-          </a:prstGeom>
-          <a:solidFill>
-            <a:srgbClr val="1F2F52"/>
-          </a:solidFill>
-          <a:ln/>
-        </p:spPr>
-      </p:sp>
-      <p:sp>
-        <p:nvSpPr>
-          <p:cNvPr id="4" name="Text 2"/>
-          <p:cNvSpPr txBox="1"/>
-          <p:nvPr/>
-        </p:nvSpPr>
-        <p:spPr>
-          <a:xfrm>
-            <a:off x="777240" y="1481328"/>
-            <a:ext cx="2286000" cy="868680"/>
-          </a:xfrm>
-          <a:prstGeom prst="rect">
-            <a:avLst/>
-          </a:prstGeom>
-          <a:noFill/>
-          <a:ln/>
-        </p:spPr>
-        <p:txBody>
-          <a:bodyPr wrap="square" lIns="0" tIns="0" rIns="0" bIns="0" rtlCol="0" anchor="t"/>
-          <a:lstStyle/>
-          <a:p>
-            <a:pPr indent="0" marL="0">
-              <a:buNone/>
-            </a:pPr>
-            <a:r>
-              <a:rPr lang="en-US" sz="4400" b="1" dirty="0">
-                <a:solidFill>
-                  <a:srgbClr val="8FBCF0"/>
-                </a:solidFill>
-                <a:latin typeface="Cambria" pitchFamily="34" charset="0"/>
-                <a:ea typeface="Cambria" pitchFamily="34" charset="-122"/>
-                <a:cs typeface="Cambria" pitchFamily="34" charset="-120"/>
-              </a:rPr>
-              <a:t>227</a:t>
-            </a:r>
-            <a:endParaRPr lang="en-US" sz="4400" dirty="0"/>
-          </a:p>
-        </p:txBody>
-      </p:sp>
-      <p:sp>
-        <p:nvSpPr>
-          <p:cNvPr id="5" name="Text 3"/>
-          <p:cNvSpPr txBox="1"/>
-          <p:nvPr/>
-        </p:nvSpPr>
-        <p:spPr>
-          <a:xfrm>
-            <a:off x="777240" y="2377440"/>
-            <a:ext cx="2286000" cy="594360"/>
-          </a:xfrm>
-          <a:prstGeom prst="rect">
-            <a:avLst/>
-          </a:prstGeom>
-          <a:noFill/>
-          <a:ln/>
-        </p:spPr>
-        <p:txBody>
-          <a:bodyPr wrap="square" lIns="0" tIns="0" rIns="0" bIns="0" rtlCol="0" anchor="t"/>
-          <a:lstStyle/>
-          <a:p>
-            <a:pPr indent="0" marL="0">
-              <a:buNone/>
-            </a:pPr>
-            <a:r>
-              <a:rPr lang="en-US" sz="1400" dirty="0">
-                <a:solidFill>
-                  <a:srgbClr val="FFFFFF"/>
-                </a:solidFill>
-                <a:latin typeface="Calibri" pitchFamily="34" charset="0"/>
-                <a:ea typeface="Calibri" pitchFamily="34" charset="-122"/>
-                <a:cs typeface="Calibri" pitchFamily="34" charset="-120"/>
-              </a:rPr>
-              <a:t>tests pass</a:t>
-            </a:r>
-            <a:endParaRPr lang="en-US" sz="1400" dirty="0"/>
-          </a:p>
-        </p:txBody>
-      </p:sp>
-      <p:sp>
-        <p:nvSpPr>
-          <p:cNvPr id="6" name="Shape 4"/>
-          <p:cNvSpPr/>
-          <p:nvPr/>
-        </p:nvSpPr>
-        <p:spPr>
-          <a:xfrm>
-            <a:off x="3364992" y="1371600"/>
-            <a:ext cx="2651760" cy="1691640"/>
-          </a:xfrm>
-          <a:prstGeom prst="roundRect">
-            <a:avLst>
-              <a:gd name="adj" fmla="val 6486"/>
-            </a:avLst>
-          </a:prstGeom>
-          <a:solidFill>
-            <a:srgbClr val="1F2F52"/>
-          </a:solidFill>
-          <a:ln/>
-        </p:spPr>
-      </p:sp>
-      <p:sp>
-        <p:nvSpPr>
-          <p:cNvPr id="7" name="Text 5"/>
-          <p:cNvSpPr txBox="1"/>
-          <p:nvPr/>
-        </p:nvSpPr>
-        <p:spPr>
-          <a:xfrm>
-            <a:off x="3593592" y="1481328"/>
-            <a:ext cx="2286000" cy="868680"/>
-          </a:xfrm>
-          <a:prstGeom prst="rect">
-            <a:avLst/>
-          </a:prstGeom>
-          <a:noFill/>
-          <a:ln/>
-        </p:spPr>
-        <p:txBody>
-          <a:bodyPr wrap="square" lIns="0" tIns="0" rIns="0" bIns="0" rtlCol="0" anchor="t"/>
-          <a:lstStyle/>
-          <a:p>
-            <a:pPr indent="0" marL="0">
-              <a:buNone/>
-            </a:pPr>
-            <a:r>
-              <a:rPr lang="en-US" sz="4400" b="1" dirty="0">
-                <a:solidFill>
-                  <a:srgbClr val="8FBCF0"/>
-                </a:solidFill>
-                <a:latin typeface="Cambria" pitchFamily="34" charset="0"/>
-                <a:ea typeface="Cambria" pitchFamily="34" charset="-122"/>
-                <a:cs typeface="Cambria" pitchFamily="34" charset="-120"/>
-              </a:rPr>
-              <a:t>27 / 27</a:t>
-            </a:r>
-            <a:endParaRPr lang="en-US" sz="4400" dirty="0"/>
-          </a:p>
-        </p:txBody>
-      </p:sp>
-      <p:sp>
-        <p:nvSpPr>
-          <p:cNvPr id="8" name="Text 6"/>
-          <p:cNvSpPr txBox="1"/>
-          <p:nvPr/>
-        </p:nvSpPr>
-        <p:spPr>
-          <a:xfrm>
-            <a:off x="3593592" y="2377440"/>
-            <a:ext cx="2286000" cy="594360"/>
-          </a:xfrm>
-          <a:prstGeom prst="rect">
-            <a:avLst/>
-          </a:prstGeom>
-          <a:noFill/>
-          <a:ln/>
-        </p:spPr>
-        <p:txBody>
-          <a:bodyPr wrap="square" lIns="0" tIns="0" rIns="0" bIns="0" rtlCol="0" anchor="t"/>
-          <a:lstStyle/>
-          <a:p>
-            <a:pPr indent="0" marL="0">
-              <a:buNone/>
-            </a:pPr>
-            <a:r>
-              <a:rPr lang="en-US" sz="1400" dirty="0">
-                <a:solidFill>
-                  <a:srgbClr val="FFFFFF"/>
-                </a:solidFill>
-                <a:latin typeface="Calibri" pitchFamily="34" charset="0"/>
-                <a:ea typeface="Calibri" pitchFamily="34" charset="-122"/>
-                <a:cs typeface="Calibri" pitchFamily="34" charset="-120"/>
-              </a:rPr>
-              <a:t>scenarios pass</a:t>
-            </a:r>
-            <a:endParaRPr lang="en-US" sz="1400" dirty="0"/>
-          </a:p>
-        </p:txBody>
-      </p:sp>
-      <p:sp>
-        <p:nvSpPr>
-          <p:cNvPr id="9" name="Shape 7"/>
-          <p:cNvSpPr/>
-          <p:nvPr/>
-        </p:nvSpPr>
-        <p:spPr>
-          <a:xfrm>
-            <a:off x="6181344" y="1371600"/>
-            <a:ext cx="2651760" cy="1691640"/>
-          </a:xfrm>
-          <a:prstGeom prst="roundRect">
-            <a:avLst>
-              <a:gd name="adj" fmla="val 6486"/>
-            </a:avLst>
-          </a:prstGeom>
-          <a:solidFill>
-            <a:srgbClr val="1F2F52"/>
-          </a:solidFill>
-          <a:ln/>
-        </p:spPr>
-      </p:sp>
-      <p:sp>
-        <p:nvSpPr>
-          <p:cNvPr id="10" name="Text 8"/>
-          <p:cNvSpPr txBox="1"/>
-          <p:nvPr/>
-        </p:nvSpPr>
-        <p:spPr>
-          <a:xfrm>
-            <a:off x="6409944" y="1481328"/>
-            <a:ext cx="2286000" cy="868680"/>
-          </a:xfrm>
-          <a:prstGeom prst="rect">
-            <a:avLst/>
-          </a:prstGeom>
-          <a:noFill/>
-          <a:ln/>
-        </p:spPr>
-        <p:txBody>
-          <a:bodyPr wrap="square" lIns="0" tIns="0" rIns="0" bIns="0" rtlCol="0" anchor="t"/>
-          <a:lstStyle/>
-          <a:p>
-            <a:pPr indent="0" marL="0">
-              <a:buNone/>
-            </a:pPr>
-            <a:r>
-              <a:rPr lang="en-US" sz="4400" b="1" dirty="0">
-                <a:solidFill>
-                  <a:srgbClr val="F2C38B"/>
-                </a:solidFill>
-                <a:latin typeface="Cambria" pitchFamily="34" charset="0"/>
-                <a:ea typeface="Cambria" pitchFamily="34" charset="-122"/>
-                <a:cs typeface="Cambria" pitchFamily="34" charset="-120"/>
-              </a:rPr>
-              <a:t>16 / 16</a:t>
-            </a:r>
-            <a:endParaRPr lang="en-US" sz="4400" dirty="0"/>
-          </a:p>
-        </p:txBody>
-      </p:sp>
-      <p:sp>
-        <p:nvSpPr>
-          <p:cNvPr id="11" name="Text 9"/>
-          <p:cNvSpPr txBox="1"/>
-          <p:nvPr/>
-        </p:nvSpPr>
-        <p:spPr>
-          <a:xfrm>
-            <a:off x="6409944" y="2377440"/>
-            <a:ext cx="2286000" cy="594360"/>
-          </a:xfrm>
-          <a:prstGeom prst="rect">
-            <a:avLst/>
-          </a:prstGeom>
-          <a:noFill/>
-          <a:ln/>
-        </p:spPr>
-        <p:txBody>
-          <a:bodyPr wrap="square" lIns="0" tIns="0" rIns="0" bIns="0" rtlCol="0" anchor="t"/>
-          <a:lstStyle/>
-          <a:p>
-            <a:pPr indent="0" marL="0">
-              <a:buNone/>
-            </a:pPr>
-            <a:r>
-              <a:rPr lang="en-US" sz="1400" dirty="0">
-                <a:solidFill>
-                  <a:srgbClr val="FFFFFF"/>
-                </a:solidFill>
-                <a:latin typeface="Calibri" pitchFamily="34" charset="0"/>
-                <a:ea typeface="Calibri" pitchFamily="34" charset="-122"/>
-                <a:cs typeface="Calibri" pitchFamily="34" charset="-120"/>
-              </a:rPr>
-              <a:t>attacks stopped in the attack lab</a:t>
-            </a:r>
-            <a:endParaRPr lang="en-US" sz="1400" dirty="0"/>
-          </a:p>
-        </p:txBody>
-      </p:sp>
-      <p:sp>
-        <p:nvSpPr>
-          <p:cNvPr id="12" name="Shape 10"/>
-          <p:cNvSpPr/>
-          <p:nvPr/>
-        </p:nvSpPr>
-        <p:spPr>
-          <a:xfrm>
-            <a:off x="8997696" y="1371600"/>
-            <a:ext cx="2651760" cy="1691640"/>
-          </a:xfrm>
-          <a:prstGeom prst="roundRect">
-            <a:avLst>
-              <a:gd name="adj" fmla="val 6486"/>
-            </a:avLst>
-          </a:prstGeom>
-          <a:solidFill>
-            <a:srgbClr val="1F2F52"/>
-          </a:solidFill>
-          <a:ln/>
-        </p:spPr>
-      </p:sp>
-      <p:sp>
-        <p:nvSpPr>
-          <p:cNvPr id="13" name="Text 11"/>
-          <p:cNvSpPr txBox="1"/>
-          <p:nvPr/>
-        </p:nvSpPr>
-        <p:spPr>
-          <a:xfrm>
-            <a:off x="9226296" y="1481328"/>
-            <a:ext cx="2286000" cy="868680"/>
-          </a:xfrm>
-          <a:prstGeom prst="rect">
-            <a:avLst/>
-          </a:prstGeom>
-          <a:noFill/>
-          <a:ln/>
-        </p:spPr>
-        <p:txBody>
-          <a:bodyPr wrap="square" lIns="0" tIns="0" rIns="0" bIns="0" rtlCol="0" anchor="t"/>
-          <a:lstStyle/>
-          <a:p>
-            <a:pPr indent="0" marL="0">
-              <a:buNone/>
-            </a:pPr>
-            <a:r>
-              <a:rPr lang="en-US" sz="4400" b="1" dirty="0">
-                <a:solidFill>
-                  <a:srgbClr val="8FBCF0"/>
-                </a:solidFill>
-                <a:latin typeface="Cambria" pitchFamily="34" charset="0"/>
-                <a:ea typeface="Cambria" pitchFamily="34" charset="-122"/>
-                <a:cs typeface="Cambria" pitchFamily="34" charset="-120"/>
-              </a:rPr>
-              <a:t>153</a:t>
-            </a:r>
-            <a:endParaRPr lang="en-US" sz="4400" dirty="0"/>
-          </a:p>
-        </p:txBody>
-      </p:sp>
-      <p:sp>
-        <p:nvSpPr>
-          <p:cNvPr id="14" name="Text 12"/>
-          <p:cNvSpPr txBox="1"/>
-          <p:nvPr/>
-        </p:nvSpPr>
-        <p:spPr>
-          <a:xfrm>
-            <a:off x="9226296" y="2377440"/>
-            <a:ext cx="2286000" cy="594360"/>
-          </a:xfrm>
-          <a:prstGeom prst="rect">
-            <a:avLst/>
-          </a:prstGeom>
-          <a:noFill/>
-          <a:ln/>
-        </p:spPr>
-        <p:txBody>
-          <a:bodyPr wrap="square" lIns="0" tIns="0" rIns="0" bIns="0" rtlCol="0" anchor="t"/>
-          <a:lstStyle/>
-          <a:p>
-            <a:pPr indent="0" marL="0">
-              <a:buNone/>
-            </a:pPr>
-            <a:r>
-              <a:rPr lang="en-US" sz="1400" dirty="0">
-                <a:solidFill>
-                  <a:srgbClr val="FFFFFF"/>
-                </a:solidFill>
-                <a:latin typeface="Calibri" pitchFamily="34" charset="0"/>
-                <a:ea typeface="Calibri" pitchFamily="34" charset="-122"/>
-                <a:cs typeface="Calibri" pitchFamily="34" charset="-120"/>
-              </a:rPr>
-              <a:t>audit entries; the hash chain verifies</a:t>
-            </a:r>
-            <a:endParaRPr lang="en-US" sz="1400" dirty="0"/>
-          </a:p>
-        </p:txBody>
-      </p:sp>
-      <p:sp>
-        <p:nvSpPr>
-          <p:cNvPr id="15" name="Text 13"/>
-          <p:cNvSpPr txBox="1"/>
-          <p:nvPr/>
-        </p:nvSpPr>
-        <p:spPr>
-          <a:xfrm>
-            <a:off x="548640" y="3337560"/>
-            <a:ext cx="5303520" cy="365760"/>
-          </a:xfrm>
-          <a:prstGeom prst="rect">
-            <a:avLst/>
-          </a:prstGeom>
-          <a:noFill/>
-          <a:ln/>
-        </p:spPr>
-        <p:txBody>
-          <a:bodyPr wrap="square" lIns="0" tIns="0" rIns="0" bIns="0" rtlCol="0" anchor="t"/>
-          <a:lstStyle/>
-          <a:p>
-            <a:pPr indent="0" marL="0">
-              <a:buNone/>
-            </a:pPr>
-            <a:r>
-              <a:rPr lang="en-US" sz="1600" b="1" dirty="0">
-                <a:solidFill>
-                  <a:srgbClr val="FFFFFF"/>
-                </a:solidFill>
-                <a:latin typeface="Calibri" pitchFamily="34" charset="0"/>
-                <a:ea typeface="Calibri" pitchFamily="34" charset="-122"/>
-                <a:cs typeface="Calibri" pitchFamily="34" charset="-120"/>
-              </a:rPr>
-              <a:t>Scenarios by group</a:t>
-            </a:r>
-            <a:endParaRPr lang="en-US" sz="1600" dirty="0"/>
-          </a:p>
-        </p:txBody>
-      </p:sp>
-      <p:sp>
-        <p:nvSpPr>
-          <p:cNvPr id="16" name="Text 14"/>
-          <p:cNvSpPr txBox="1"/>
-          <p:nvPr/>
-        </p:nvSpPr>
-        <p:spPr>
-          <a:xfrm>
-            <a:off x="548640" y="3794760"/>
-            <a:ext cx="4389120" cy="365760"/>
-          </a:xfrm>
-          <a:prstGeom prst="rect">
-            <a:avLst/>
-          </a:prstGeom>
-          <a:noFill/>
-          <a:ln/>
-        </p:spPr>
-        <p:txBody>
-          <a:bodyPr wrap="square" lIns="0" tIns="0" rIns="0" bIns="0" rtlCol="0" anchor="t"/>
-          <a:lstStyle/>
-          <a:p>
-            <a:pPr indent="0" marL="0">
-              <a:buNone/>
-            </a:pPr>
-            <a:r>
-              <a:rPr lang="en-US" sz="1400" dirty="0">
-                <a:solidFill>
-                  <a:srgbClr val="FFFFFF"/>
-                </a:solidFill>
-                <a:latin typeface="Calibri" pitchFamily="34" charset="0"/>
-                <a:ea typeface="Calibri" pitchFamily="34" charset="-122"/>
-                <a:cs typeface="Calibri" pitchFamily="34" charset="-120"/>
-              </a:rPr>
-              <a:t>A  Task completion</a:t>
-            </a:r>
-            <a:endParaRPr lang="en-US" sz="1400" dirty="0"/>
-          </a:p>
-        </p:txBody>
-      </p:sp>
-      <p:sp>
-        <p:nvSpPr>
-          <p:cNvPr id="17" name="Text 15"/>
-          <p:cNvSpPr txBox="1"/>
-          <p:nvPr/>
-        </p:nvSpPr>
-        <p:spPr>
-          <a:xfrm>
-            <a:off x="4572000" y="3794760"/>
-            <a:ext cx="1280160" cy="365760"/>
-          </a:xfrm>
-          <a:prstGeom prst="rect">
-            <a:avLst/>
-          </a:prstGeom>
-          <a:noFill/>
-          <a:ln/>
-        </p:spPr>
-        <p:txBody>
-          <a:bodyPr wrap="square" lIns="0" tIns="0" rIns="0" bIns="0" rtlCol="0" anchor="t"/>
-          <a:lstStyle/>
-          <a:p>
-            <a:pPr algn="r" indent="0" marL="0">
-              <a:buNone/>
-            </a:pPr>
-            <a:r>
-              <a:rPr lang="en-US" sz="1400" b="1" dirty="0">
-                <a:solidFill>
-                  <a:srgbClr val="8FBCF0"/>
-                </a:solidFill>
-                <a:latin typeface="Calibri" pitchFamily="34" charset="0"/>
-                <a:ea typeface="Calibri" pitchFamily="34" charset="-122"/>
-                <a:cs typeface="Calibri" pitchFamily="34" charset="-120"/>
-              </a:rPr>
-              <a:t>10 / 10 pass</a:t>
-            </a:r>
-            <a:endParaRPr lang="en-US" sz="1400" dirty="0"/>
-          </a:p>
-        </p:txBody>
-      </p:sp>
-      <p:sp>
-        <p:nvSpPr>
-          <p:cNvPr id="18" name="Shape 16"/>
-          <p:cNvSpPr/>
-          <p:nvPr/>
-        </p:nvSpPr>
-        <p:spPr>
-          <a:xfrm>
-            <a:off x="548640" y="4197096"/>
-            <a:ext cx="5303520" cy="0"/>
-          </a:xfrm>
-          <a:prstGeom prst="line">
-            <a:avLst/>
-          </a:prstGeom>
-          <a:noFill/>
-          <a:ln w="9525">
-            <a:solidFill>
-              <a:srgbClr val="3A4A6E"/>
-            </a:solidFill>
-            <a:prstDash val="solid"/>
-          </a:ln>
-        </p:spPr>
-      </p:sp>
-      <p:sp>
-        <p:nvSpPr>
-          <p:cNvPr id="19" name="Text 17"/>
-          <p:cNvSpPr txBox="1"/>
-          <p:nvPr/>
-        </p:nvSpPr>
-        <p:spPr>
-          <a:xfrm>
-            <a:off x="548640" y="4251960"/>
-            <a:ext cx="4389120" cy="365760"/>
-          </a:xfrm>
-          <a:prstGeom prst="rect">
-            <a:avLst/>
-          </a:prstGeom>
-          <a:noFill/>
-          <a:ln/>
-        </p:spPr>
-        <p:txBody>
-          <a:bodyPr wrap="square" lIns="0" tIns="0" rIns="0" bIns="0" rtlCol="0" anchor="t"/>
-          <a:lstStyle/>
-          <a:p>
-            <a:pPr indent="0" marL="0">
-              <a:buNone/>
-            </a:pPr>
-            <a:r>
-              <a:rPr lang="en-US" sz="1400" dirty="0">
-                <a:solidFill>
-                  <a:srgbClr val="FFFFFF"/>
-                </a:solidFill>
-                <a:latin typeface="Calibri" pitchFamily="34" charset="0"/>
-                <a:ea typeface="Calibri" pitchFamily="34" charset="-122"/>
-                <a:cs typeface="Calibri" pitchFamily="34" charset="-120"/>
-              </a:rPr>
-              <a:t>B  Safe execution</a:t>
-            </a:r>
-            <a:endParaRPr lang="en-US" sz="1400" dirty="0"/>
-          </a:p>
-        </p:txBody>
-      </p:sp>
-      <p:sp>
-        <p:nvSpPr>
-          <p:cNvPr id="20" name="Text 18"/>
-          <p:cNvSpPr txBox="1"/>
-          <p:nvPr/>
-        </p:nvSpPr>
-        <p:spPr>
-          <a:xfrm>
-            <a:off x="4572000" y="4251960"/>
-            <a:ext cx="1280160" cy="365760"/>
-          </a:xfrm>
-          <a:prstGeom prst="rect">
-            <a:avLst/>
-          </a:prstGeom>
-          <a:noFill/>
-          <a:ln/>
-        </p:spPr>
-        <p:txBody>
-          <a:bodyPr wrap="square" lIns="0" tIns="0" rIns="0" bIns="0" rtlCol="0" anchor="t"/>
-          <a:lstStyle/>
-          <a:p>
-            <a:pPr algn="r" indent="0" marL="0">
-              <a:buNone/>
-            </a:pPr>
-            <a:r>
-              <a:rPr lang="en-US" sz="1400" b="1" dirty="0">
-                <a:solidFill>
-                  <a:srgbClr val="8FBCF0"/>
-                </a:solidFill>
-                <a:latin typeface="Calibri" pitchFamily="34" charset="0"/>
-                <a:ea typeface="Calibri" pitchFamily="34" charset="-122"/>
-                <a:cs typeface="Calibri" pitchFamily="34" charset="-120"/>
-              </a:rPr>
-              <a:t>6 / 6 pass</a:t>
-            </a:r>
-            <a:endParaRPr lang="en-US" sz="1400" dirty="0"/>
-          </a:p>
-        </p:txBody>
-      </p:sp>
-      <p:sp>
-        <p:nvSpPr>
-          <p:cNvPr id="21" name="Shape 19"/>
-          <p:cNvSpPr/>
-          <p:nvPr/>
-        </p:nvSpPr>
-        <p:spPr>
-          <a:xfrm>
-            <a:off x="548640" y="4654296"/>
-            <a:ext cx="5303520" cy="0"/>
-          </a:xfrm>
-          <a:prstGeom prst="line">
-            <a:avLst/>
-          </a:prstGeom>
-          <a:noFill/>
-          <a:ln w="9525">
-            <a:solidFill>
-              <a:srgbClr val="3A4A6E"/>
-            </a:solidFill>
-            <a:prstDash val="solid"/>
-          </a:ln>
-        </p:spPr>
-      </p:sp>
-      <p:sp>
-        <p:nvSpPr>
-          <p:cNvPr id="22" name="Text 20"/>
-          <p:cNvSpPr txBox="1"/>
-          <p:nvPr/>
-        </p:nvSpPr>
-        <p:spPr>
-          <a:xfrm>
-            <a:off x="548640" y="4709160"/>
-            <a:ext cx="4389120" cy="365760"/>
-          </a:xfrm>
-          <a:prstGeom prst="rect">
-            <a:avLst/>
-          </a:prstGeom>
-          <a:noFill/>
-          <a:ln/>
-        </p:spPr>
-        <p:txBody>
-          <a:bodyPr wrap="square" lIns="0" tIns="0" rIns="0" bIns="0" rtlCol="0" anchor="t"/>
-          <a:lstStyle/>
-          <a:p>
-            <a:pPr indent="0" marL="0">
-              <a:buNone/>
-            </a:pPr>
-            <a:r>
-              <a:rPr lang="en-US" sz="1400" dirty="0">
-                <a:solidFill>
-                  <a:srgbClr val="FFFFFF"/>
-                </a:solidFill>
-                <a:latin typeface="Calibri" pitchFamily="34" charset="0"/>
-                <a:ea typeface="Calibri" pitchFamily="34" charset="-122"/>
-                <a:cs typeface="Calibri" pitchFamily="34" charset="-120"/>
-              </a:rPr>
-              <a:t>C  Attacks, incl. forged approval and revoked key</a:t>
-            </a:r>
-            <a:endParaRPr lang="en-US" sz="1400" dirty="0"/>
-          </a:p>
-        </p:txBody>
-      </p:sp>
-      <p:sp>
-        <p:nvSpPr>
-          <p:cNvPr id="23" name="Text 21"/>
-          <p:cNvSpPr txBox="1"/>
-          <p:nvPr/>
-        </p:nvSpPr>
-        <p:spPr>
-          <a:xfrm>
-            <a:off x="4572000" y="4709160"/>
-            <a:ext cx="1280160" cy="365760"/>
-          </a:xfrm>
-          <a:prstGeom prst="rect">
-            <a:avLst/>
-          </a:prstGeom>
-          <a:noFill/>
-          <a:ln/>
-        </p:spPr>
-        <p:txBody>
-          <a:bodyPr wrap="square" lIns="0" tIns="0" rIns="0" bIns="0" rtlCol="0" anchor="t"/>
-          <a:lstStyle/>
-          <a:p>
-            <a:pPr algn="r" indent="0" marL="0">
-              <a:buNone/>
-            </a:pPr>
-            <a:r>
-              <a:rPr lang="en-US" sz="1400" b="1" dirty="0">
-                <a:solidFill>
-                  <a:srgbClr val="8FBCF0"/>
-                </a:solidFill>
-                <a:latin typeface="Calibri" pitchFamily="34" charset="0"/>
-                <a:ea typeface="Calibri" pitchFamily="34" charset="-122"/>
-                <a:cs typeface="Calibri" pitchFamily="34" charset="-120"/>
-              </a:rPr>
-              <a:t>9 / 9 pass</a:t>
-            </a:r>
-            <a:endParaRPr lang="en-US" sz="1400" dirty="0"/>
-          </a:p>
-        </p:txBody>
-      </p:sp>
-      <p:sp>
-        <p:nvSpPr>
-          <p:cNvPr id="24" name="Shape 22"/>
-          <p:cNvSpPr/>
-          <p:nvPr/>
-        </p:nvSpPr>
-        <p:spPr>
-          <a:xfrm>
-            <a:off x="548640" y="5111496"/>
-            <a:ext cx="5303520" cy="0"/>
-          </a:xfrm>
-          <a:prstGeom prst="line">
-            <a:avLst/>
-          </a:prstGeom>
-          <a:noFill/>
-          <a:ln w="9525">
-            <a:solidFill>
-              <a:srgbClr val="3A4A6E"/>
-            </a:solidFill>
-            <a:prstDash val="solid"/>
-          </a:ln>
-        </p:spPr>
-      </p:sp>
-      <p:sp>
-        <p:nvSpPr>
-          <p:cNvPr id="25" name="Text 23"/>
-          <p:cNvSpPr txBox="1"/>
-          <p:nvPr/>
-        </p:nvSpPr>
-        <p:spPr>
-          <a:xfrm>
-            <a:off x="548640" y="5166360"/>
-            <a:ext cx="4389120" cy="365760"/>
-          </a:xfrm>
-          <a:prstGeom prst="rect">
-            <a:avLst/>
-          </a:prstGeom>
-          <a:noFill/>
-          <a:ln/>
-        </p:spPr>
-        <p:txBody>
-          <a:bodyPr wrap="square" lIns="0" tIns="0" rIns="0" bIns="0" rtlCol="0" anchor="t"/>
-          <a:lstStyle/>
-          <a:p>
-            <a:pPr indent="0" marL="0">
-              <a:buNone/>
-            </a:pPr>
-            <a:r>
-              <a:rPr lang="en-US" sz="1400" dirty="0">
-                <a:solidFill>
-                  <a:srgbClr val="FFFFFF"/>
-                </a:solidFill>
-                <a:latin typeface="Calibri" pitchFamily="34" charset="0"/>
-                <a:ea typeface="Calibri" pitchFamily="34" charset="-122"/>
-                <a:cs typeface="Calibri" pitchFamily="34" charset="-120"/>
-              </a:rPr>
-              <a:t>D  Privacy</a:t>
-            </a:r>
-            <a:endParaRPr lang="en-US" sz="1400" dirty="0"/>
-          </a:p>
-        </p:txBody>
-      </p:sp>
-      <p:sp>
-        <p:nvSpPr>
-          <p:cNvPr id="26" name="Text 24"/>
-          <p:cNvSpPr txBox="1"/>
-          <p:nvPr/>
-        </p:nvSpPr>
-        <p:spPr>
-          <a:xfrm>
-            <a:off x="4572000" y="5166360"/>
-            <a:ext cx="1280160" cy="365760"/>
-          </a:xfrm>
-          <a:prstGeom prst="rect">
-            <a:avLst/>
-          </a:prstGeom>
-          <a:noFill/>
-          <a:ln/>
-        </p:spPr>
-        <p:txBody>
-          <a:bodyPr wrap="square" lIns="0" tIns="0" rIns="0" bIns="0" rtlCol="0" anchor="t"/>
-          <a:lstStyle/>
-          <a:p>
-            <a:pPr algn="r" indent="0" marL="0">
-              <a:buNone/>
-            </a:pPr>
-            <a:r>
-              <a:rPr lang="en-US" sz="1400" b="1" dirty="0">
-                <a:solidFill>
-                  <a:srgbClr val="8FBCF0"/>
-                </a:solidFill>
-                <a:latin typeface="Calibri" pitchFamily="34" charset="0"/>
-                <a:ea typeface="Calibri" pitchFamily="34" charset="-122"/>
-                <a:cs typeface="Calibri" pitchFamily="34" charset="-120"/>
-              </a:rPr>
-              <a:t>2 / 2 pass</a:t>
-            </a:r>
-            <a:endParaRPr lang="en-US" sz="1400" dirty="0"/>
-          </a:p>
-        </p:txBody>
-      </p:sp>
-      <p:sp>
-        <p:nvSpPr>
-          <p:cNvPr id="27" name="Shape 25"/>
-          <p:cNvSpPr/>
-          <p:nvPr/>
-        </p:nvSpPr>
-        <p:spPr>
-          <a:xfrm>
-            <a:off x="548640" y="5568696"/>
-            <a:ext cx="5303520" cy="0"/>
-          </a:xfrm>
-          <a:prstGeom prst="line">
-            <a:avLst/>
-          </a:prstGeom>
-          <a:noFill/>
-          <a:ln w="9525">
-            <a:solidFill>
-              <a:srgbClr val="3A4A6E"/>
-            </a:solidFill>
-            <a:prstDash val="solid"/>
-          </a:ln>
-        </p:spPr>
-      </p:sp>
-      <p:sp>
-        <p:nvSpPr>
-          <p:cNvPr id="28" name="Shape 26"/>
-          <p:cNvSpPr/>
-          <p:nvPr/>
-        </p:nvSpPr>
-        <p:spPr>
-          <a:xfrm>
-            <a:off x="6263640" y="3337560"/>
-            <a:ext cx="5349240" cy="2331720"/>
-          </a:xfrm>
-          <a:prstGeom prst="roundRect">
-            <a:avLst>
-              <a:gd name="adj" fmla="val 4706"/>
-            </a:avLst>
-          </a:prstGeom>
-          <a:solidFill>
-            <a:srgbClr val="1F2F52"/>
-          </a:solidFill>
-          <a:ln/>
-        </p:spPr>
-      </p:sp>
-      <p:sp>
-        <p:nvSpPr>
-          <p:cNvPr id="29" name="Text 27"/>
-          <p:cNvSpPr txBox="1"/>
-          <p:nvPr/>
-        </p:nvSpPr>
-        <p:spPr>
-          <a:xfrm>
-            <a:off x="6492240" y="3474720"/>
-            <a:ext cx="4937760" cy="365760"/>
-          </a:xfrm>
-          <a:prstGeom prst="rect">
-            <a:avLst/>
-          </a:prstGeom>
-          <a:noFill/>
-          <a:ln/>
-        </p:spPr>
-        <p:txBody>
-          <a:bodyPr wrap="square" lIns="0" tIns="0" rIns="0" bIns="0" rtlCol="0" anchor="t"/>
-          <a:lstStyle/>
-          <a:p>
-            <a:pPr indent="0" marL="0">
-              <a:buNone/>
-            </a:pPr>
-            <a:r>
-              <a:rPr lang="en-US" sz="1600" b="1" dirty="0">
-                <a:solidFill>
-                  <a:srgbClr val="FFFFFF"/>
-                </a:solidFill>
-                <a:latin typeface="Calibri" pitchFamily="34" charset="0"/>
-                <a:ea typeface="Calibri" pitchFamily="34" charset="-122"/>
-                <a:cs typeface="Calibri" pitchFamily="34" charset="-120"/>
-              </a:rPr>
-              <a:t>Finance audit: 400 random cases</a:t>
-            </a:r>
-            <a:endParaRPr lang="en-US" sz="1600" dirty="0"/>
-          </a:p>
-        </p:txBody>
-      </p:sp>
-      <p:sp>
-        <p:nvSpPr>
-          <p:cNvPr id="30" name="Text 28"/>
-          <p:cNvSpPr txBox="1"/>
-          <p:nvPr/>
-        </p:nvSpPr>
-        <p:spPr>
-          <a:xfrm>
-            <a:off x="6492240" y="3886200"/>
-            <a:ext cx="4937760" cy="1737360"/>
-          </a:xfrm>
-          <a:prstGeom prst="rect">
-            <a:avLst/>
-          </a:prstGeom>
-          <a:noFill/>
-          <a:ln/>
-        </p:spPr>
-        <p:txBody>
-          <a:bodyPr wrap="square" lIns="0" tIns="0" rIns="0" bIns="0" rtlCol="0" anchor="t"/>
-          <a:lstStyle/>
-          <a:p>
-            <a:pPr indent="0" marL="0">
-              <a:spcAft>
-                <a:spcPts val="300"/>
-              </a:spcAft>
-              <a:buNone/>
-            </a:pPr>
-            <a:r>
-              <a:rPr lang="en-US" sz="1400" dirty="0">
-                <a:solidFill>
-                  <a:srgbClr val="C9D3E6"/>
-                </a:solidFill>
-                <a:latin typeface="Calibri" pitchFamily="34" charset="0"/>
-                <a:ea typeface="Calibri" pitchFamily="34" charset="-122"/>
-                <a:cs typeface="Calibri" pitchFamily="34" charset="-120"/>
-              </a:rPr>
-              <a:t>The engine matched an independent formula in every case. The audit found 3 agent bugs, all fixed with tests:</a:t>
-            </a:r>
-            <a:endParaRPr lang="en-US" sz="1400" dirty="0"/>
-          </a:p>
-          <a:p>
-            <a:pPr marL="342900" indent="-342900">
-              <a:spcAft>
-                <a:spcPts val="300"/>
-              </a:spcAft>
-              <a:buSzPct val="100000"/>
-              <a:buChar char="•"/>
-            </a:pPr>
-            <a:r>
-              <a:rPr lang="en-US" sz="1400" dirty="0">
-                <a:solidFill>
-                  <a:srgbClr val="C9D3E6"/>
-                </a:solidFill>
-                <a:latin typeface="Calibri" pitchFamily="34" charset="0"/>
-                <a:ea typeface="Calibri" pitchFamily="34" charset="-122"/>
-                <a:cs typeface="Calibri" pitchFamily="34" charset="-120"/>
-              </a:rPr>
-              <a:t>an earlier in-app payment was not counted</a:t>
-            </a:r>
-            <a:endParaRPr lang="en-US" sz="1400" dirty="0"/>
-          </a:p>
-          <a:p>
-            <a:pPr marL="342900" indent="-342900">
-              <a:spcAft>
-                <a:spcPts val="300"/>
-              </a:spcAft>
-              <a:buSzPct val="100000"/>
-              <a:buChar char="•"/>
-            </a:pPr>
-            <a:r>
-              <a:rPr lang="en-US" sz="1400" dirty="0">
-                <a:solidFill>
-                  <a:srgbClr val="C9D3E6"/>
-                </a:solidFill>
-                <a:latin typeface="Calibri" pitchFamily="34" charset="0"/>
-                <a:ea typeface="Calibri" pitchFamily="34" charset="-122"/>
-                <a:cs typeface="Calibri" pitchFamily="34" charset="-120"/>
-              </a:rPr>
-              <a:t>inconsistent USD answers were accepted</a:t>
-            </a:r>
-            <a:endParaRPr lang="en-US" sz="1400" dirty="0"/>
-          </a:p>
-          <a:p>
-            <a:pPr marL="342900" indent="-342900">
-              <a:spcAft>
-                <a:spcPts val="300"/>
-              </a:spcAft>
-              <a:buSzPct val="100000"/>
-              <a:buChar char="•"/>
-            </a:pPr>
-            <a:r>
-              <a:rPr lang="en-US" sz="1400" dirty="0">
-                <a:solidFill>
-                  <a:srgbClr val="C9D3E6"/>
-                </a:solidFill>
-                <a:latin typeface="Calibri" pitchFamily="34" charset="0"/>
-                <a:ea typeface="Calibri" pitchFamily="34" charset="-122"/>
-                <a:cs typeface="Calibri" pitchFamily="34" charset="-120"/>
-              </a:rPr>
-              <a:t>no PAN + loan applied 0% silently (now a warning)</a:t>
-            </a:r>
-            <a:endParaRPr lang="en-US" sz="1400" dirty="0"/>
-          </a:p>
-        </p:txBody>
-      </p:sp>
-      <p:sp>
-        <p:nvSpPr>
-          <p:cNvPr id="31" name="Text 29"/>
-          <p:cNvSpPr txBox="1"/>
-          <p:nvPr/>
-        </p:nvSpPr>
-        <p:spPr>
-          <a:xfrm>
-            <a:off x="548640" y="5897880"/>
-            <a:ext cx="11064240" cy="320040"/>
-          </a:xfrm>
-          <a:prstGeom prst="rect">
-            <a:avLst/>
-          </a:prstGeom>
-          <a:noFill/>
-          <a:ln/>
-        </p:spPr>
-        <p:txBody>
-          <a:bodyPr wrap="square" lIns="0" tIns="0" rIns="0" bIns="0" rtlCol="0" anchor="t"/>
-          <a:lstStyle/>
-          <a:p>
-            <a:pPr indent="0" marL="0">
-              <a:buNone/>
-            </a:pPr>
-            <a:r>
-              <a:rPr lang="en-US" sz="1100" dirty="0">
-                <a:solidFill>
-                  <a:srgbClr val="A9B6CF"/>
-                </a:solidFill>
-                <a:latin typeface="Courier New" pitchFamily="34" charset="0"/>
-                <a:ea typeface="Courier New" pitchFamily="34" charset="-122"/>
-                <a:cs typeface="Courier New" pitchFamily="34" charset="-120"/>
-              </a:rPr>
-              <a:t>python -m unittest discover -s tests -t .   ·   python -m scenarios.runner   ·   python -m app.demo_run</a:t>
-            </a:r>
-            <a:endParaRPr lang="en-US" sz="1100" dirty="0"/>
-          </a:p>
-        </p:txBody>
-      </p:sp>
-      <p:sp>
-        <p:nvSpPr>
-          <p:cNvPr id="32" name="Text 30"/>
-          <p:cNvSpPr txBox="1"/>
-          <p:nvPr/>
-        </p:nvSpPr>
-        <p:spPr>
-          <a:xfrm>
-            <a:off x="548640" y="6355080"/>
-            <a:ext cx="9144000" cy="274320"/>
-          </a:xfrm>
-          <a:prstGeom prst="rect">
-            <a:avLst/>
-          </a:prstGeom>
-          <a:noFill/>
-          <a:ln/>
-        </p:spPr>
-        <p:txBody>
-          <a:bodyPr wrap="square" lIns="0" tIns="0" rIns="0" bIns="0" rtlCol="0" anchor="t"/>
-          <a:lstStyle/>
-          <a:p>
-            <a:pPr indent="0" marL="0">
-              <a:buNone/>
-            </a:pPr>
-            <a:r>
-              <a:rPr lang="en-US" sz="1000" dirty="0">
-                <a:solidFill>
-                  <a:srgbClr val="A9B6CF"/>
-                </a:solidFill>
-                <a:latin typeface="Calibri" pitchFamily="34" charset="0"/>
-                <a:ea typeface="Calibri" pitchFamily="34" charset="-122"/>
-                <a:cs typeface="Calibri" pitchFamily="34" charset="-120"/>
-              </a:rPr>
-              <a:t>TuitionPilot · 2026 Shenzhen FinTechathon · Synthetic data · Not tax advice</a:t>
-            </a:r>
-            <a:endParaRPr lang="en-US" sz="1000" dirty="0"/>
           </a:p>
         </p:txBody>
       </p:sp>
@@ -13786,4 +14350,319 @@
     </a:ext>
   </a:extLst>
 </a:theme>
+</file>
+
+<file path=ppt/theme/theme2.xml><?xml version="1.0" encoding="utf-8"?>
+<a:theme xmlns:a="http://schemas.openxmlformats.org/drawingml/2006/main" name="Office Theme">
+  <a:themeElements>
+    <a:clrScheme name="Office">
+      <a:dk1>
+        <a:sysClr val="windowText" lastClr="000000"/>
+      </a:dk1>
+      <a:lt1>
+        <a:sysClr val="window" lastClr="FFFFFF"/>
+      </a:lt1>
+      <a:dk2>
+        <a:srgbClr val="0E2841"/>
+      </a:dk2>
+      <a:lt2>
+        <a:srgbClr val="E8E8E8"/>
+      </a:lt2>
+      <a:accent1>
+        <a:srgbClr val="156082"/>
+      </a:accent1>
+      <a:accent2>
+        <a:srgbClr val="E97132"/>
+      </a:accent2>
+      <a:accent3>
+        <a:srgbClr val="196B24"/>
+      </a:accent3>
+      <a:accent4>
+        <a:srgbClr val="0F9ED5"/>
+      </a:accent4>
+      <a:accent5>
+        <a:srgbClr val="A02B93"/>
+      </a:accent5>
+      <a:accent6>
+        <a:srgbClr val="4EA72E"/>
+      </a:accent6>
+      <a:hlink>
+        <a:srgbClr val="467886"/>
+      </a:hlink>
+      <a:folHlink>
+        <a:srgbClr val="96607D"/>
+      </a:folHlink>
+    </a:clrScheme>
+    <a:fontScheme name="Office">
+      <a:majorFont>
+        <a:latin typeface="Aptos Display" panose="02110004020202020204"/>
+        <a:ea typeface=""/>
+        <a:cs typeface=""/>
+        <a:font script="Jpan" typeface="游ゴシック Light"/>
+        <a:font script="Hang" typeface="맑은 고딕"/>
+        <a:font script="Hans" typeface="等线 Light"/>
+        <a:font script="Hant" typeface="新細明體"/>
+        <a:font script="Arab" typeface="Times New Roman"/>
+        <a:font script="Hebr" typeface="Times New Roman"/>
+        <a:font script="Thai" typeface="Angsana New"/>
+        <a:font script="Ethi" typeface="Nyala"/>
+        <a:font script="Beng" typeface="Vrinda"/>
+        <a:font script="Gujr" typeface="Shruti"/>
+        <a:font script="Khmr" typeface="MoolBoran"/>
+        <a:font script="Knda" typeface="Tunga"/>
+        <a:font script="Guru" typeface="Raavi"/>
+        <a:font script="Cans" typeface="Euphemia"/>
+        <a:font script="Cher" typeface="Plantagenet Cherokee"/>
+        <a:font script="Yiii" typeface="Microsoft Yi Baiti"/>
+        <a:font script="Tibt" typeface="Microsoft Himalaya"/>
+        <a:font script="Thaa" typeface="MV Boli"/>
+        <a:font script="Deva" typeface="Mangal"/>
+        <a:font script="Telu" typeface="Gautami"/>
+        <a:font script="Taml" typeface="Latha"/>
+        <a:font script="Syrc" typeface="Estrangelo Edessa"/>
+        <a:font script="Orya" typeface="Kalinga"/>
+        <a:font script="Mlym" typeface="Kartika"/>
+        <a:font script="Laoo" typeface="DokChampa"/>
+        <a:font script="Sinh" typeface="Iskoola Pota"/>
+        <a:font script="Mong" typeface="Mongolian Baiti"/>
+        <a:font script="Viet" typeface="Times New Roman"/>
+        <a:font script="Uigh" typeface="Microsoft Uighur"/>
+        <a:font script="Geor" typeface="Sylfaen"/>
+        <a:font script="Armn" typeface="Arial"/>
+        <a:font script="Bugi" typeface="Leelawadee UI"/>
+        <a:font script="Bopo" typeface="Microsoft JhengHei"/>
+        <a:font script="Java" typeface="Javanese Text"/>
+        <a:font script="Lisu" typeface="Segoe UI"/>
+        <a:font script="Mymr" typeface="Myanmar Text"/>
+        <a:font script="Nkoo" typeface="Ebrima"/>
+        <a:font script="Olck" typeface="Nirmala UI"/>
+        <a:font script="Osma" typeface="Ebrima"/>
+        <a:font script="Phag" typeface="Phagspa"/>
+        <a:font script="Syrn" typeface="Estrangelo Edessa"/>
+        <a:font script="Syrj" typeface="Estrangelo Edessa"/>
+        <a:font script="Syre" typeface="Estrangelo Edessa"/>
+        <a:font script="Sora" typeface="Nirmala UI"/>
+        <a:font script="Tale" typeface="Microsoft Tai Le"/>
+        <a:font script="Talu" typeface="Microsoft New Tai Lue"/>
+        <a:font script="Tfng" typeface="Ebrima"/>
+      </a:majorFont>
+      <a:minorFont>
+        <a:latin typeface="Aptos" panose="02110004020202020204"/>
+        <a:ea typeface=""/>
+        <a:cs typeface=""/>
+        <a:font script="Jpan" typeface="游ゴシック"/>
+        <a:font script="Hang" typeface="맑은 고딕"/>
+        <a:font script="Hans" typeface="等线"/>
+        <a:font script="Hant" typeface="新細明體"/>
+        <a:font script="Arab" typeface="Arial"/>
+        <a:font script="Hebr" typeface="Arial"/>
+        <a:font script="Thai" typeface="Cordia New"/>
+        <a:font script="Ethi" typeface="Nyala"/>
+        <a:font script="Beng" typeface="Vrinda"/>
+        <a:font script="Gujr" typeface="Shruti"/>
+        <a:font script="Khmr" typeface="DaunPenh"/>
+        <a:font script="Knda" typeface="Tunga"/>
+        <a:font script="Guru" typeface="Raavi"/>
+        <a:font script="Cans" typeface="Euphemia"/>
+        <a:font script="Cher" typeface="Plantagenet Cherokee"/>
+        <a:font script="Yiii" typeface="Microsoft Yi Baiti"/>
+        <a:font script="Tibt" typeface="Microsoft Himalaya"/>
+        <a:font script="Thaa" typeface="MV Boli"/>
+        <a:font script="Deva" typeface="Mangal"/>
+        <a:font script="Telu" typeface="Gautami"/>
+        <a:font script="Taml" typeface="Latha"/>
+        <a:font script="Syrc" typeface="Estrangelo Edessa"/>
+        <a:font script="Orya" typeface="Kalinga"/>
+        <a:font script="Mlym" typeface="Kartika"/>
+        <a:font script="Laoo" typeface="DokChampa"/>
+        <a:font script="Sinh" typeface="Iskoola Pota"/>
+        <a:font script="Mong" typeface="Mongolian Baiti"/>
+        <a:font script="Viet" typeface="Arial"/>
+        <a:font script="Uigh" typeface="Microsoft Uighur"/>
+        <a:font script="Geor" typeface="Sylfaen"/>
+        <a:font script="Armn" typeface="Arial"/>
+        <a:font script="Bugi" typeface="Leelawadee UI"/>
+        <a:font script="Bopo" typeface="Microsoft JhengHei"/>
+        <a:font script="Java" typeface="Javanese Text"/>
+        <a:font script="Lisu" typeface="Segoe UI"/>
+        <a:font script="Mymr" typeface="Myanmar Text"/>
+        <a:font script="Nkoo" typeface="Ebrima"/>
+        <a:font script="Olck" typeface="Nirmala UI"/>
+        <a:font script="Osma" typeface="Ebrima"/>
+        <a:font script="Phag" typeface="Phagspa"/>
+        <a:font script="Syrn" typeface="Estrangelo Edessa"/>
+        <a:font script="Syrj" typeface="Estrangelo Edessa"/>
+        <a:font script="Syre" typeface="Estrangelo Edessa"/>
+        <a:font script="Sora" typeface="Nirmala UI"/>
+        <a:font script="Tale" typeface="Microsoft Tai Le"/>
+        <a:font script="Talu" typeface="Microsoft New Tai Lue"/>
+        <a:font script="Tfng" typeface="Ebrima"/>
+      </a:minorFont>
+    </a:fontScheme>
+    <a:fmtScheme name="Office">
+      <a:fillStyleLst>
+        <a:solidFill>
+          <a:schemeClr val="phClr"/>
+        </a:solidFill>
+        <a:gradFill rotWithShape="1">
+          <a:gsLst>
+            <a:gs pos="0">
+              <a:schemeClr val="phClr">
+                <a:lumMod val="110000"/>
+                <a:satMod val="105000"/>
+                <a:tint val="67000"/>
+              </a:schemeClr>
+            </a:gs>
+            <a:gs pos="50000">
+              <a:schemeClr val="phClr">
+                <a:lumMod val="105000"/>
+                <a:satMod val="103000"/>
+                <a:tint val="73000"/>
+              </a:schemeClr>
+            </a:gs>
+            <a:gs pos="100000">
+              <a:schemeClr val="phClr">
+                <a:lumMod val="105000"/>
+                <a:satMod val="109000"/>
+                <a:tint val="81000"/>
+              </a:schemeClr>
+            </a:gs>
+          </a:gsLst>
+          <a:lin ang="5400000" scaled="0"/>
+        </a:gradFill>
+        <a:gradFill rotWithShape="1">
+          <a:gsLst>
+            <a:gs pos="0">
+              <a:schemeClr val="phClr">
+                <a:satMod val="103000"/>
+                <a:lumMod val="102000"/>
+                <a:tint val="94000"/>
+              </a:schemeClr>
+            </a:gs>
+            <a:gs pos="50000">
+              <a:schemeClr val="phClr">
+                <a:satMod val="110000"/>
+                <a:lumMod val="100000"/>
+                <a:shade val="100000"/>
+              </a:schemeClr>
+            </a:gs>
+            <a:gs pos="100000">
+              <a:schemeClr val="phClr">
+                <a:lumMod val="99000"/>
+                <a:satMod val="120000"/>
+                <a:shade val="78000"/>
+              </a:schemeClr>
+            </a:gs>
+          </a:gsLst>
+          <a:lin ang="5400000" scaled="0"/>
+        </a:gradFill>
+      </a:fillStyleLst>
+      <a:lnStyleLst>
+        <a:ln w="12700" cap="flat" cmpd="sng" algn="ctr">
+          <a:solidFill>
+            <a:schemeClr val="phClr"/>
+          </a:solidFill>
+          <a:prstDash val="solid"/>
+          <a:miter lim="800000"/>
+        </a:ln>
+        <a:ln w="19050" cap="flat" cmpd="sng" algn="ctr">
+          <a:solidFill>
+            <a:schemeClr val="phClr"/>
+          </a:solidFill>
+          <a:prstDash val="solid"/>
+          <a:miter lim="800000"/>
+        </a:ln>
+        <a:ln w="25400" cap="flat" cmpd="sng" algn="ctr">
+          <a:solidFill>
+            <a:schemeClr val="phClr"/>
+          </a:solidFill>
+          <a:prstDash val="solid"/>
+          <a:miter lim="800000"/>
+        </a:ln>
+      </a:lnStyleLst>
+      <a:effectStyleLst>
+        <a:effectStyle>
+          <a:effectLst/>
+        </a:effectStyle>
+        <a:effectStyle>
+          <a:effectLst/>
+        </a:effectStyle>
+        <a:effectStyle>
+          <a:effectLst>
+            <a:outerShdw blurRad="57150" dist="19050" dir="5400000" algn="ctr" rotWithShape="0">
+              <a:srgbClr val="000000">
+                <a:alpha val="63000"/>
+              </a:srgbClr>
+            </a:outerShdw>
+          </a:effectLst>
+        </a:effectStyle>
+      </a:effectStyleLst>
+      <a:bgFillStyleLst>
+        <a:solidFill>
+          <a:schemeClr val="phClr"/>
+        </a:solidFill>
+        <a:solidFill>
+          <a:schemeClr val="phClr">
+            <a:tint val="95000"/>
+            <a:satMod val="170000"/>
+          </a:schemeClr>
+        </a:solidFill>
+        <a:gradFill rotWithShape="1">
+          <a:gsLst>
+            <a:gs pos="0">
+              <a:schemeClr val="phClr">
+                <a:tint val="93000"/>
+                <a:satMod val="150000"/>
+                <a:shade val="98000"/>
+                <a:lumMod val="102000"/>
+              </a:schemeClr>
+            </a:gs>
+            <a:gs pos="50000">
+              <a:schemeClr val="phClr">
+                <a:tint val="98000"/>
+                <a:satMod val="130000"/>
+                <a:shade val="90000"/>
+                <a:lumMod val="103000"/>
+              </a:schemeClr>
+            </a:gs>
+            <a:gs pos="100000">
+              <a:schemeClr val="phClr">
+                <a:shade val="63000"/>
+                <a:satMod val="120000"/>
+              </a:schemeClr>
+            </a:gs>
+          </a:gsLst>
+          <a:lin ang="5400000" scaled="0"/>
+        </a:gradFill>
+      </a:bgFillStyleLst>
+    </a:fmtScheme>
+  </a:themeElements>
+  <a:objectDefaults>
+    <a:lnDef>
+      <a:spPr/>
+      <a:bodyPr/>
+      <a:lstStyle/>
+      <a:style>
+        <a:lnRef idx="2">
+          <a:schemeClr val="accent1"/>
+        </a:lnRef>
+        <a:fillRef idx="0">
+          <a:schemeClr val="accent1"/>
+        </a:fillRef>
+        <a:effectRef idx="1">
+          <a:schemeClr val="accent1"/>
+        </a:effectRef>
+        <a:fontRef idx="minor">
+          <a:schemeClr val="tx1"/>
+        </a:fontRef>
+      </a:style>
+    </a:lnDef>
+  </a:objectDefaults>
+  <a:extraClrSchemeLst/>
+  <a:extLst>
+    <a:ext uri="{05A4C25C-085E-4340-85A3-A5531E510DB2}">
+      <thm15:themeFamily xmlns:thm15="http://schemas.microsoft.com/office/thememl/2012/main" name="Office Theme" id="{2E142A2C-CD16-42D6-873A-C26D2A0506FA}" vid="{1BDDFF52-6CD6-40A5-AB3C-68EB2F1E4D0A}"/>
+    </a:ext>
+  </a:extLst>
+</a:theme>
 </file>
--- a/docs/presentation/TuitionPilot_deck.pptx
+++ b/docs/presentation/TuitionPilot_deck.pptx
@@ -889,7 +889,7 @@
           <a:p>
             <a:r>
               <a:rPr lang="en-US"/>
-              <a:t>About 45 seconds. Everything here can be rerun with one command each. 239 tests pass. All 27 scenarios pass: ten task-completion, six safe-execution, nine attacks including a forged approval and a revoked university key, and two privacy scenarios. The attack lab stops all 16 attacks. The scripted sandbox run writes a ledger, the log of what the AI saw, and an audit log whose hash chain verifies. A finance audit of 400 random cases matched an independent formula.</a:t>
+              <a:t>About 45 seconds. Everything here can be rerun with one command each. 248 tests pass. All 27 scenarios pass: ten task-completion, six safe-execution, nine attacks including a forged approval and a revoked university key, and two privacy scenarios. The attack lab stops all 16 attacks. The scripted sandbox run writes a ledger, the log of what the AI saw, and an audit log whose hash chain verifies. A finance audit of 400 random cases matched an independent formula.</a:t>
             </a:r>
             <a:endParaRPr lang="en-US" dirty="0"/>
           </a:p>
@@ -1878,7 +1878,7 @@
           </a:prstGeom>
           <a:extLst>
             <a:ext uri="{C572A759-6A51-4108-AA02-DFA0A04FC94B}">
-              <ma14:wrappingTextBoxFlag xmlns="" xmlns:ma14="http://schemas.microsoft.com/office/mac/drawingml/2011/main" val="0"/>
+              <ma14:wrappingTextBoxFlag xmlns:ma14="http://schemas.microsoft.com/office/mac/drawingml/2011/main" xmlns="" val="0"/>
             </a:ext>
           </a:extLst>
         </p:spPr>
@@ -1989,7 +1989,7 @@
           </a:prstGeom>
           <a:extLst>
             <a:ext uri="{C572A759-6A51-4108-AA02-DFA0A04FC94B}">
-              <ma14:wrappingTextBoxFlag xmlns="" xmlns:ma14="http://schemas.microsoft.com/office/mac/drawingml/2011/main" val="0"/>
+              <ma14:wrappingTextBoxFlag xmlns:ma14="http://schemas.microsoft.com/office/mac/drawingml/2011/main" xmlns="" val="0"/>
             </a:ext>
           </a:extLst>
         </p:spPr>
@@ -2897,6 +2897,13 @@
           </a:solidFill>
           <a:ln/>
         </p:spPr>
+        <p:txBody>
+          <a:bodyPr/>
+          <a:lstStyle/>
+          <a:p>
+            <a:endParaRPr lang="en-IN"/>
+          </a:p>
+        </p:txBody>
       </p:sp>
       <p:sp>
         <p:nvSpPr>
@@ -2931,7 +2938,7 @@
                 <a:ea typeface="Cambria" pitchFamily="34" charset="-122"/>
                 <a:cs typeface="Cambria" pitchFamily="34" charset="-120"/>
               </a:rPr>
-              <a:t>239</a:t>
+              <a:t>248</a:t>
             </a:r>
             <a:endParaRPr lang="en-US" sz="4400" dirty="0"/>
           </a:p>
@@ -2997,6 +3004,13 @@
           </a:solidFill>
           <a:ln/>
         </p:spPr>
+        <p:txBody>
+          <a:bodyPr/>
+          <a:lstStyle/>
+          <a:p>
+            <a:endParaRPr lang="en-IN"/>
+          </a:p>
+        </p:txBody>
       </p:sp>
       <p:sp>
         <p:nvSpPr>
@@ -3097,6 +3111,13 @@
           </a:solidFill>
           <a:ln/>
         </p:spPr>
+        <p:txBody>
+          <a:bodyPr/>
+          <a:lstStyle/>
+          <a:p>
+            <a:endParaRPr lang="en-IN"/>
+          </a:p>
+        </p:txBody>
       </p:sp>
       <p:sp>
         <p:nvSpPr>
@@ -3197,6 +3218,13 @@
           </a:solidFill>
           <a:ln/>
         </p:spPr>
+        <p:txBody>
+          <a:bodyPr/>
+          <a:lstStyle/>
+          <a:p>
+            <a:endParaRPr lang="en-IN"/>
+          </a:p>
+        </p:txBody>
       </p:sp>
       <p:sp>
         <p:nvSpPr>
@@ -3415,6 +3443,13 @@
             <a:prstDash val="solid"/>
           </a:ln>
         </p:spPr>
+        <p:txBody>
+          <a:bodyPr/>
+          <a:lstStyle/>
+          <a:p>
+            <a:endParaRPr lang="en-IN"/>
+          </a:p>
+        </p:txBody>
       </p:sp>
       <p:sp>
         <p:nvSpPr>
@@ -3516,6 +3551,13 @@
             <a:prstDash val="solid"/>
           </a:ln>
         </p:spPr>
+        <p:txBody>
+          <a:bodyPr/>
+          <a:lstStyle/>
+          <a:p>
+            <a:endParaRPr lang="en-IN"/>
+          </a:p>
+        </p:txBody>
       </p:sp>
       <p:sp>
         <p:nvSpPr>
@@ -3617,6 +3659,13 @@
             <a:prstDash val="solid"/>
           </a:ln>
         </p:spPr>
+        <p:txBody>
+          <a:bodyPr/>
+          <a:lstStyle/>
+          <a:p>
+            <a:endParaRPr lang="en-IN"/>
+          </a:p>
+        </p:txBody>
       </p:sp>
       <p:sp>
         <p:nvSpPr>
@@ -3718,6 +3767,13 @@
             <a:prstDash val="solid"/>
           </a:ln>
         </p:spPr>
+        <p:txBody>
+          <a:bodyPr/>
+          <a:lstStyle/>
+          <a:p>
+            <a:endParaRPr lang="en-IN"/>
+          </a:p>
+        </p:txBody>
       </p:sp>
       <p:sp>
         <p:nvSpPr>
@@ -3740,6 +3796,13 @@
           </a:solidFill>
           <a:ln/>
         </p:spPr>
+        <p:txBody>
+          <a:bodyPr/>
+          <a:lstStyle/>
+          <a:p>
+            <a:endParaRPr lang="en-IN"/>
+          </a:p>
+        </p:txBody>
       </p:sp>
       <p:sp>
         <p:nvSpPr>
@@ -4589,7 +4652,7 @@
           </a:prstGeom>
           <a:extLst>
             <a:ext uri="{C572A759-6A51-4108-AA02-DFA0A04FC94B}">
-              <ma14:wrappingTextBoxFlag xmlns="" xmlns:ma14="http://schemas.microsoft.com/office/mac/drawingml/2011/main" val="0"/>
+              <ma14:wrappingTextBoxFlag xmlns:ma14="http://schemas.microsoft.com/office/mac/drawingml/2011/main" xmlns="" val="0"/>
             </a:ext>
           </a:extLst>
         </p:spPr>
@@ -5519,7 +5582,7 @@
           </a:prstGeom>
           <a:extLst>
             <a:ext uri="{C572A759-6A51-4108-AA02-DFA0A04FC94B}">
-              <ma14:wrappingTextBoxFlag xmlns="" xmlns:ma14="http://schemas.microsoft.com/office/mac/drawingml/2011/main" val="0"/>
+              <ma14:wrappingTextBoxFlag xmlns:ma14="http://schemas.microsoft.com/office/mac/drawingml/2011/main" xmlns="" val="0"/>
             </a:ext>
           </a:extLst>
         </p:spPr>
@@ -6970,7 +7033,7 @@
           </a:prstGeom>
           <a:extLst>
             <a:ext uri="{C572A759-6A51-4108-AA02-DFA0A04FC94B}">
-              <ma14:wrappingTextBoxFlag xmlns="" xmlns:ma14="http://schemas.microsoft.com/office/mac/drawingml/2011/main" val="0"/>
+              <ma14:wrappingTextBoxFlag xmlns:ma14="http://schemas.microsoft.com/office/mac/drawingml/2011/main" xmlns="" val="0"/>
             </a:ext>
           </a:extLst>
         </p:spPr>
@@ -7086,7 +7149,7 @@
           </a:prstGeom>
           <a:extLst>
             <a:ext uri="{C572A759-6A51-4108-AA02-DFA0A04FC94B}">
-              <ma14:wrappingTextBoxFlag xmlns:ma14="http://schemas.microsoft.com/office/mac/drawingml/2011/main" xmlns="" val="0"/>
+              <ma14:wrappingTextBoxFlag xmlns="" xmlns:ma14="http://schemas.microsoft.com/office/mac/drawingml/2011/main" val="0"/>
             </a:ext>
           </a:extLst>
         </p:spPr>
@@ -7971,7 +8034,7 @@
           </a:prstGeom>
           <a:extLst>
             <a:ext uri="{C572A759-6A51-4108-AA02-DFA0A04FC94B}">
-              <ma14:wrappingTextBoxFlag xmlns="" xmlns:ma14="http://schemas.microsoft.com/office/mac/drawingml/2011/main" val="0"/>
+              <ma14:wrappingTextBoxFlag xmlns:ma14="http://schemas.microsoft.com/office/mac/drawingml/2011/main" xmlns="" val="0"/>
             </a:ext>
           </a:extLst>
         </p:spPr>
@@ -9928,7 +9991,7 @@
           </a:prstGeom>
           <a:extLst>
             <a:ext uri="{C572A759-6A51-4108-AA02-DFA0A04FC94B}">
-              <ma14:wrappingTextBoxFlag xmlns="" xmlns:ma14="http://schemas.microsoft.com/office/mac/drawingml/2011/main" val="0"/>
+              <ma14:wrappingTextBoxFlag xmlns:ma14="http://schemas.microsoft.com/office/mac/drawingml/2011/main" xmlns="" val="0"/>
             </a:ext>
           </a:extLst>
         </p:spPr>
@@ -10534,7 +10597,7 @@
           </a:prstGeom>
           <a:extLst>
             <a:ext uri="{C572A759-6A51-4108-AA02-DFA0A04FC94B}">
-              <ma14:wrappingTextBoxFlag xmlns="" xmlns:ma14="http://schemas.microsoft.com/office/mac/drawingml/2011/main" val="0"/>
+              <ma14:wrappingTextBoxFlag xmlns:ma14="http://schemas.microsoft.com/office/mac/drawingml/2011/main" xmlns="" val="0"/>
             </a:ext>
           </a:extLst>
         </p:spPr>
@@ -11996,7 +12059,7 @@
           </a:prstGeom>
           <a:extLst>
             <a:ext uri="{C572A759-6A51-4108-AA02-DFA0A04FC94B}">
-              <ma14:wrappingTextBoxFlag xmlns="" xmlns:ma14="http://schemas.microsoft.com/office/mac/drawingml/2011/main" val="0"/>
+              <ma14:wrappingTextBoxFlag xmlns:ma14="http://schemas.microsoft.com/office/mac/drawingml/2011/main" xmlns="" val="0"/>
             </a:ext>
           </a:extLst>
         </p:spPr>
@@ -14021,7 +14084,7 @@
           </a:prstGeom>
           <a:extLst>
             <a:ext uri="{C572A759-6A51-4108-AA02-DFA0A04FC94B}">
-              <ma14:wrappingTextBoxFlag xmlns="" xmlns:ma14="http://schemas.microsoft.com/office/mac/drawingml/2011/main" val="0"/>
+              <ma14:wrappingTextBoxFlag xmlns:ma14="http://schemas.microsoft.com/office/mac/drawingml/2011/main" xmlns="" val="0"/>
             </a:ext>
           </a:extLst>
         </p:spPr>

--- a/docs/presentation/TuitionPilot_deck.pptx
+++ b/docs/presentation/TuitionPilot_deck.pptx
@@ -889,7 +889,7 @@
           <a:p>
             <a:r>
               <a:rPr lang="en-US"/>
-              <a:t>About 45 seconds. Everything here can be rerun with one command each. 248 tests pass. All 27 scenarios pass: ten task-completion, six safe-execution, nine attacks including a forged approval and a revoked university key, and two privacy scenarios. The attack lab stops all 16 attacks. The scripted sandbox run writes a ledger, the log of what the AI saw, and an audit log whose hash chain verifies. A finance audit of 400 random cases matched an independent formula.</a:t>
+              <a:t>About 45 seconds. Everything here can be rerun with one command each. 249 tests pass. All 27 scenarios pass: ten task-completion, six safe-execution, nine attacks including a forged approval and a revoked university key, and two privacy scenarios. The attack lab stops all 16 attacks. The scripted sandbox run writes a ledger, the log of what the AI saw, and an audit log whose hash chain verifies. A finance audit of 400 random cases matched an independent formula.</a:t>
             </a:r>
             <a:endParaRPr lang="en-US" dirty="0"/>
           </a:p>
@@ -1153,7 +1153,7 @@
           <a:p>
             <a:r>
               <a:rPr lang="en-US"/>
-              <a:t>About 50 seconds. The app tells the payment as a guided six-step story: consent, the invoice with an animated signature check, one question at a time, the best route with a cost chart and what-if sliders, review and sign with a PIN while the parent's device signs the plan, and the receipt. Beside it, a live agent panel shows the next action and why, every decision, and exactly what the AI saw. Code computes and the AI explains: it runs offline by default, and a hosted Claude model can be switched on behind the same guards.</a:t>
+              <a:t>About 50 seconds. The app walks the family through eight steps, shown as a bar across the top: consent, upload the invoice, the signature check, one question at a time, the best route with a cost chart and what-if sliders, the A2-style draft with the RBI compliance checks, review and sign with a PIN while the parent's device signs the plan, and a printable receipt. Beside it, a live agent panel shows the next action and why, every decision, the rule trace and exactly what the AI saw; it can be hidden. An Assistant page answers questions from the rules engine. Code computes and the AI explains: it runs offline by default, and a hosted Claude model can be switched on behind the same guards.</a:t>
             </a:r>
             <a:endParaRPr lang="en-US" dirty="0"/>
           </a:p>
@@ -2434,6 +2434,13 @@
           </a:solidFill>
           <a:ln/>
         </p:spPr>
+        <p:txBody>
+          <a:bodyPr/>
+          <a:lstStyle/>
+          <a:p>
+            <a:endParaRPr lang="en-IN"/>
+          </a:p>
+        </p:txBody>
       </p:sp>
       <p:sp>
         <p:nvSpPr>
@@ -2454,6 +2461,13 @@
           </a:solidFill>
           <a:ln/>
         </p:spPr>
+        <p:txBody>
+          <a:bodyPr/>
+          <a:lstStyle/>
+          <a:p>
+            <a:endParaRPr lang="en-IN"/>
+          </a:p>
+        </p:txBody>
       </p:sp>
       <p:sp>
         <p:nvSpPr>
@@ -2554,6 +2568,13 @@
           </a:solidFill>
           <a:ln/>
         </p:spPr>
+        <p:txBody>
+          <a:bodyPr/>
+          <a:lstStyle/>
+          <a:p>
+            <a:endParaRPr lang="en-IN"/>
+          </a:p>
+        </p:txBody>
       </p:sp>
       <p:sp>
         <p:nvSpPr>
@@ -2574,6 +2595,13 @@
           </a:solidFill>
           <a:ln/>
         </p:spPr>
+        <p:txBody>
+          <a:bodyPr/>
+          <a:lstStyle/>
+          <a:p>
+            <a:endParaRPr lang="en-IN"/>
+          </a:p>
+        </p:txBody>
       </p:sp>
       <p:sp>
         <p:nvSpPr>
@@ -2674,6 +2702,13 @@
           </a:solidFill>
           <a:ln/>
         </p:spPr>
+        <p:txBody>
+          <a:bodyPr/>
+          <a:lstStyle/>
+          <a:p>
+            <a:endParaRPr lang="en-IN"/>
+          </a:p>
+        </p:txBody>
       </p:sp>
       <p:sp>
         <p:nvSpPr>
@@ -2694,6 +2729,13 @@
           </a:solidFill>
           <a:ln/>
         </p:spPr>
+        <p:txBody>
+          <a:bodyPr/>
+          <a:lstStyle/>
+          <a:p>
+            <a:endParaRPr lang="en-IN"/>
+          </a:p>
+        </p:txBody>
       </p:sp>
       <p:sp>
         <p:nvSpPr>
@@ -2938,7 +2980,7 @@
                 <a:ea typeface="Cambria" pitchFamily="34" charset="-122"/>
                 <a:cs typeface="Cambria" pitchFamily="34" charset="-120"/>
               </a:rPr>
-              <a:t>248</a:t>
+              <a:t>249</a:t>
             </a:r>
             <a:endParaRPr lang="en-US" sz="4400" dirty="0"/>
           </a:p>
@@ -4120,6 +4162,13 @@
             <a:prstDash val="solid"/>
           </a:ln>
         </p:spPr>
+        <p:txBody>
+          <a:bodyPr/>
+          <a:lstStyle/>
+          <a:p>
+            <a:endParaRPr lang="en-IN"/>
+          </a:p>
+        </p:txBody>
       </p:sp>
       <p:sp>
         <p:nvSpPr>
@@ -4264,6 +4313,13 @@
           </a:solidFill>
           <a:ln/>
         </p:spPr>
+        <p:txBody>
+          <a:bodyPr/>
+          <a:lstStyle/>
+          <a:p>
+            <a:endParaRPr lang="en-IN"/>
+          </a:p>
+        </p:txBody>
       </p:sp>
       <p:sp>
         <p:nvSpPr>
@@ -4428,6 +4484,13 @@
           </a:solidFill>
           <a:ln/>
         </p:spPr>
+        <p:txBody>
+          <a:bodyPr/>
+          <a:lstStyle/>
+          <a:p>
+            <a:endParaRPr lang="en-IN"/>
+          </a:p>
+        </p:txBody>
       </p:sp>
       <p:sp>
         <p:nvSpPr>
@@ -4592,6 +4655,13 @@
           </a:solidFill>
           <a:ln/>
         </p:spPr>
+        <p:txBody>
+          <a:bodyPr/>
+          <a:lstStyle/>
+          <a:p>
+            <a:endParaRPr lang="en-IN"/>
+          </a:p>
+        </p:txBody>
       </p:sp>
       <p:sp>
         <p:nvSpPr>
@@ -4769,6 +4839,13 @@
           </a:solidFill>
           <a:ln/>
         </p:spPr>
+        <p:txBody>
+          <a:bodyPr/>
+          <a:lstStyle/>
+          <a:p>
+            <a:endParaRPr lang="en-IN"/>
+          </a:p>
+        </p:txBody>
       </p:sp>
       <p:sp>
         <p:nvSpPr>
@@ -4789,6 +4866,13 @@
           </a:solidFill>
           <a:ln/>
         </p:spPr>
+        <p:txBody>
+          <a:bodyPr/>
+          <a:lstStyle/>
+          <a:p>
+            <a:endParaRPr lang="en-IN"/>
+          </a:p>
+        </p:txBody>
       </p:sp>
       <p:sp>
         <p:nvSpPr>
@@ -4928,6 +5012,13 @@
           </a:solidFill>
           <a:ln/>
         </p:spPr>
+        <p:txBody>
+          <a:bodyPr/>
+          <a:lstStyle/>
+          <a:p>
+            <a:endParaRPr lang="en-IN"/>
+          </a:p>
+        </p:txBody>
       </p:sp>
       <p:sp>
         <p:nvSpPr>
@@ -4948,6 +5039,13 @@
           </a:solidFill>
           <a:ln/>
         </p:spPr>
+        <p:txBody>
+          <a:bodyPr/>
+          <a:lstStyle/>
+          <a:p>
+            <a:endParaRPr lang="en-IN"/>
+          </a:p>
+        </p:txBody>
       </p:sp>
       <p:sp>
         <p:nvSpPr>
@@ -5087,6 +5185,13 @@
           </a:solidFill>
           <a:ln/>
         </p:spPr>
+        <p:txBody>
+          <a:bodyPr/>
+          <a:lstStyle/>
+          <a:p>
+            <a:endParaRPr lang="en-IN"/>
+          </a:p>
+        </p:txBody>
       </p:sp>
       <p:sp>
         <p:nvSpPr>
@@ -5107,6 +5212,13 @@
           </a:solidFill>
           <a:ln/>
         </p:spPr>
+        <p:txBody>
+          <a:bodyPr/>
+          <a:lstStyle/>
+          <a:p>
+            <a:endParaRPr lang="en-IN"/>
+          </a:p>
+        </p:txBody>
       </p:sp>
       <p:sp>
         <p:nvSpPr>
@@ -5246,6 +5358,13 @@
           </a:solidFill>
           <a:ln/>
         </p:spPr>
+        <p:txBody>
+          <a:bodyPr/>
+          <a:lstStyle/>
+          <a:p>
+            <a:endParaRPr lang="en-IN"/>
+          </a:p>
+        </p:txBody>
       </p:sp>
       <p:sp>
         <p:nvSpPr>
@@ -5266,6 +5385,13 @@
           </a:solidFill>
           <a:ln/>
         </p:spPr>
+        <p:txBody>
+          <a:bodyPr/>
+          <a:lstStyle/>
+          <a:p>
+            <a:endParaRPr lang="en-IN"/>
+          </a:p>
+        </p:txBody>
       </p:sp>
       <p:sp>
         <p:nvSpPr>
@@ -5405,6 +5531,13 @@
           </a:solidFill>
           <a:ln/>
         </p:spPr>
+        <p:txBody>
+          <a:bodyPr/>
+          <a:lstStyle/>
+          <a:p>
+            <a:endParaRPr lang="en-IN"/>
+          </a:p>
+        </p:txBody>
       </p:sp>
       <p:sp>
         <p:nvSpPr>
@@ -5664,7 +5797,7 @@
               <a:buNone/>
             </a:pPr>
             <a:r>
-              <a:rPr lang="en-US" sz="3000" b="1" dirty="0">
+              <a:rPr lang="en-US" sz="3000" b="1">
                 <a:solidFill>
                   <a:srgbClr val="14213D"/>
                 </a:solidFill>
@@ -5672,7 +5805,7 @@
                 <a:ea typeface="Cambria" pitchFamily="34" charset="-122"/>
                 <a:cs typeface="Cambria" pitchFamily="34" charset="-120"/>
               </a:rPr>
-              <a:t>One guided flow, from invoice to receipt</a:t>
+              <a:t>Eight guided steps, from invoice to receipt</a:t>
             </a:r>
             <a:endParaRPr lang="en-US" sz="3000" dirty="0"/>
           </a:p>
@@ -5686,8 +5819,8 @@
         </p:nvSpPr>
         <p:spPr>
           <a:xfrm>
-            <a:off x="548640" y="1371600"/>
-            <a:ext cx="1719072" cy="2331720"/>
+            <a:off x="546100" y="1371600"/>
+            <a:ext cx="1244600" cy="2331720"/>
           </a:xfrm>
           <a:prstGeom prst="roundRect">
             <a:avLst>
@@ -5699,6 +5832,13 @@
           </a:solidFill>
           <a:ln/>
         </p:spPr>
+        <p:txBody>
+          <a:bodyPr/>
+          <a:lstStyle/>
+          <a:p>
+            <a:endParaRPr lang="en-IN"/>
+          </a:p>
+        </p:txBody>
       </p:sp>
       <p:sp>
         <p:nvSpPr>
@@ -5708,7 +5848,7 @@
         </p:nvSpPr>
         <p:spPr>
           <a:xfrm>
-            <a:off x="749808" y="1572768"/>
+            <a:off x="698500" y="1572768"/>
             <a:ext cx="502920" cy="502920"/>
           </a:xfrm>
           <a:prstGeom prst="ellipse">
@@ -5719,6 +5859,13 @@
           </a:solidFill>
           <a:ln/>
         </p:spPr>
+        <p:txBody>
+          <a:bodyPr/>
+          <a:lstStyle/>
+          <a:p>
+            <a:endParaRPr lang="en-IN"/>
+          </a:p>
+        </p:txBody>
       </p:sp>
       <p:sp>
         <p:nvSpPr>
@@ -5728,7 +5875,7 @@
         </p:nvSpPr>
         <p:spPr>
           <a:xfrm>
-            <a:off x="749808" y="1572768"/>
+            <a:off x="698500" y="1572768"/>
             <a:ext cx="502920" cy="502920"/>
           </a:xfrm>
           <a:prstGeom prst="rect">
@@ -5745,7 +5892,7 @@
               <a:buNone/>
             </a:pPr>
             <a:r>
-              <a:rPr lang="en-US" sz="1800" b="1" dirty="0">
+              <a:rPr lang="en-US" sz="1800" b="1">
                 <a:solidFill>
                   <a:srgbClr val="FFFFFF"/>
                 </a:solidFill>
@@ -5767,8 +5914,8 @@
         </p:nvSpPr>
         <p:spPr>
           <a:xfrm>
-            <a:off x="749808" y="2194560"/>
-            <a:ext cx="1371600" cy="365760"/>
+            <a:off x="647700" y="2194560"/>
+            <a:ext cx="1041400" cy="381000"/>
           </a:xfrm>
           <a:prstGeom prst="rect">
             <a:avLst/>
@@ -5784,7 +5931,7 @@
               <a:buNone/>
             </a:pPr>
             <a:r>
-              <a:rPr lang="en-US" sz="1600" b="1" dirty="0">
+              <a:rPr lang="en-US" sz="1100" b="1">
                 <a:solidFill>
                   <a:srgbClr val="14213D"/>
                 </a:solidFill>
@@ -5792,9 +5939,9 @@
                 <a:ea typeface="Calibri" pitchFamily="34" charset="-122"/>
                 <a:cs typeface="Calibri" pitchFamily="34" charset="-120"/>
               </a:rPr>
-              <a:t>Welcome</a:t>
-            </a:r>
-            <a:endParaRPr lang="en-US" sz="1600" dirty="0"/>
+              <a:t>Consent</a:t>
+            </a:r>
+            <a:endParaRPr lang="en-US" sz="1100" dirty="0"/>
           </a:p>
         </p:txBody>
       </p:sp>
@@ -5806,8 +5953,8 @@
         </p:nvSpPr>
         <p:spPr>
           <a:xfrm>
-            <a:off x="749808" y="2606040"/>
-            <a:ext cx="1371600" cy="1005840"/>
+            <a:off x="647700" y="2628900"/>
+            <a:ext cx="1041400" cy="1005840"/>
           </a:xfrm>
           <a:prstGeom prst="rect">
             <a:avLst/>
@@ -5823,7 +5970,7 @@
               <a:buNone/>
             </a:pPr>
             <a:r>
-              <a:rPr lang="en-US" sz="1300" dirty="0">
+              <a:rPr lang="en-US" sz="950">
                 <a:solidFill>
                   <a:srgbClr val="5A6378"/>
                 </a:solidFill>
@@ -5833,7 +5980,7 @@
               </a:rPr>
               <a:t>Two consents before any data is read</a:t>
             </a:r>
-            <a:endParaRPr lang="en-US" sz="1300" dirty="0"/>
+            <a:endParaRPr lang="en-US" sz="950" dirty="0"/>
           </a:p>
         </p:txBody>
       </p:sp>
@@ -5845,8 +5992,8 @@
         </p:nvSpPr>
         <p:spPr>
           <a:xfrm>
-            <a:off x="2423160" y="1371600"/>
-            <a:ext cx="1719072" cy="2331720"/>
+            <a:off x="1948543" y="1371600"/>
+            <a:ext cx="1244600" cy="2331720"/>
           </a:xfrm>
           <a:prstGeom prst="roundRect">
             <a:avLst>
@@ -5858,6 +6005,13 @@
           </a:solidFill>
           <a:ln/>
         </p:spPr>
+        <p:txBody>
+          <a:bodyPr/>
+          <a:lstStyle/>
+          <a:p>
+            <a:endParaRPr lang="en-IN"/>
+          </a:p>
+        </p:txBody>
       </p:sp>
       <p:sp>
         <p:nvSpPr>
@@ -5867,7 +6021,7 @@
         </p:nvSpPr>
         <p:spPr>
           <a:xfrm>
-            <a:off x="2624328" y="1572768"/>
+            <a:off x="2100943" y="1572768"/>
             <a:ext cx="502920" cy="502920"/>
           </a:xfrm>
           <a:prstGeom prst="ellipse">
@@ -5878,6 +6032,13 @@
           </a:solidFill>
           <a:ln/>
         </p:spPr>
+        <p:txBody>
+          <a:bodyPr/>
+          <a:lstStyle/>
+          <a:p>
+            <a:endParaRPr lang="en-IN"/>
+          </a:p>
+        </p:txBody>
       </p:sp>
       <p:sp>
         <p:nvSpPr>
@@ -5887,7 +6048,7 @@
         </p:nvSpPr>
         <p:spPr>
           <a:xfrm>
-            <a:off x="2624328" y="1572768"/>
+            <a:off x="2100943" y="1572768"/>
             <a:ext cx="502920" cy="502920"/>
           </a:xfrm>
           <a:prstGeom prst="rect">
@@ -5904,7 +6065,7 @@
               <a:buNone/>
             </a:pPr>
             <a:r>
-              <a:rPr lang="en-US" sz="1800" b="1" dirty="0">
+              <a:rPr lang="en-US" sz="1800" b="1">
                 <a:solidFill>
                   <a:srgbClr val="FFFFFF"/>
                 </a:solidFill>
@@ -5926,8 +6087,8 @@
         </p:nvSpPr>
         <p:spPr>
           <a:xfrm>
-            <a:off x="2624328" y="2194560"/>
-            <a:ext cx="1371600" cy="365760"/>
+            <a:off x="2050143" y="2194560"/>
+            <a:ext cx="1041400" cy="381000"/>
           </a:xfrm>
           <a:prstGeom prst="rect">
             <a:avLst/>
@@ -5943,7 +6104,7 @@
               <a:buNone/>
             </a:pPr>
             <a:r>
-              <a:rPr lang="en-US" sz="1600" b="1" dirty="0">
+              <a:rPr lang="en-US" sz="1100" b="1">
                 <a:solidFill>
                   <a:srgbClr val="14213D"/>
                 </a:solidFill>
@@ -5951,9 +6112,9 @@
                 <a:ea typeface="Calibri" pitchFamily="34" charset="-122"/>
                 <a:cs typeface="Calibri" pitchFamily="34" charset="-120"/>
               </a:rPr>
-              <a:t>Invoice</a:t>
-            </a:r>
-            <a:endParaRPr lang="en-US" sz="1600" dirty="0"/>
+              <a:t>Upload invoice</a:t>
+            </a:r>
+            <a:endParaRPr lang="en-US" sz="1100" dirty="0"/>
           </a:p>
         </p:txBody>
       </p:sp>
@@ -5965,8 +6126,8 @@
         </p:nvSpPr>
         <p:spPr>
           <a:xfrm>
-            <a:off x="2624328" y="2606040"/>
-            <a:ext cx="1371600" cy="1005840"/>
+            <a:off x="2050143" y="2628900"/>
+            <a:ext cx="1041400" cy="1005840"/>
           </a:xfrm>
           <a:prstGeom prst="rect">
             <a:avLst/>
@@ -5982,7 +6143,7 @@
               <a:buNone/>
             </a:pPr>
             <a:r>
-              <a:rPr lang="en-US" sz="1300" dirty="0">
+              <a:rPr lang="en-US" sz="950">
                 <a:solidFill>
                   <a:srgbClr val="5A6378"/>
                 </a:solidFill>
@@ -5990,9 +6151,9 @@
                 <a:ea typeface="Calibri" pitchFamily="34" charset="-122"/>
                 <a:cs typeface="Calibri" pitchFamily="34" charset="-120"/>
               </a:rPr>
-              <a:t>Animated check of the university’s signature chain</a:t>
-            </a:r>
-            <a:endParaRPr lang="en-US" sz="1300" dirty="0"/>
+              <a:t>PDF, JSON or pasted text; masked first</a:t>
+            </a:r>
+            <a:endParaRPr lang="en-US" sz="950" dirty="0"/>
           </a:p>
         </p:txBody>
       </p:sp>
@@ -6004,8 +6165,8 @@
         </p:nvSpPr>
         <p:spPr>
           <a:xfrm>
-            <a:off x="4297680" y="1371600"/>
-            <a:ext cx="1719072" cy="2331720"/>
+            <a:off x="3350986" y="1371600"/>
+            <a:ext cx="1244600" cy="2331720"/>
           </a:xfrm>
           <a:prstGeom prst="roundRect">
             <a:avLst>
@@ -6017,6 +6178,13 @@
           </a:solidFill>
           <a:ln/>
         </p:spPr>
+        <p:txBody>
+          <a:bodyPr/>
+          <a:lstStyle/>
+          <a:p>
+            <a:endParaRPr lang="en-IN"/>
+          </a:p>
+        </p:txBody>
       </p:sp>
       <p:sp>
         <p:nvSpPr>
@@ -6026,7 +6194,7 @@
         </p:nvSpPr>
         <p:spPr>
           <a:xfrm>
-            <a:off x="4498848" y="1572768"/>
+            <a:off x="3503386" y="1572768"/>
             <a:ext cx="502920" cy="502920"/>
           </a:xfrm>
           <a:prstGeom prst="ellipse">
@@ -6037,6 +6205,13 @@
           </a:solidFill>
           <a:ln/>
         </p:spPr>
+        <p:txBody>
+          <a:bodyPr/>
+          <a:lstStyle/>
+          <a:p>
+            <a:endParaRPr lang="en-IN"/>
+          </a:p>
+        </p:txBody>
       </p:sp>
       <p:sp>
         <p:nvSpPr>
@@ -6046,7 +6221,7 @@
         </p:nvSpPr>
         <p:spPr>
           <a:xfrm>
-            <a:off x="4498848" y="1572768"/>
+            <a:off x="3503386" y="1572768"/>
             <a:ext cx="502920" cy="502920"/>
           </a:xfrm>
           <a:prstGeom prst="rect">
@@ -6063,7 +6238,7 @@
               <a:buNone/>
             </a:pPr>
             <a:r>
-              <a:rPr lang="en-US" sz="1800" b="1" dirty="0">
+              <a:rPr lang="en-US" sz="1800" b="1">
                 <a:solidFill>
                   <a:srgbClr val="FFFFFF"/>
                 </a:solidFill>
@@ -6085,8 +6260,8 @@
         </p:nvSpPr>
         <p:spPr>
           <a:xfrm>
-            <a:off x="4498848" y="2194560"/>
-            <a:ext cx="1371600" cy="365760"/>
+            <a:off x="3452586" y="2194560"/>
+            <a:ext cx="1041400" cy="381000"/>
           </a:xfrm>
           <a:prstGeom prst="rect">
             <a:avLst/>
@@ -6102,7 +6277,7 @@
               <a:buNone/>
             </a:pPr>
             <a:r>
-              <a:rPr lang="en-US" sz="1600" b="1" dirty="0">
+              <a:rPr lang="en-US" sz="1100" b="1">
                 <a:solidFill>
                   <a:srgbClr val="14213D"/>
                 </a:solidFill>
@@ -6110,9 +6285,9 @@
                 <a:ea typeface="Calibri" pitchFamily="34" charset="-122"/>
                 <a:cs typeface="Calibri" pitchFamily="34" charset="-120"/>
               </a:rPr>
-              <a:t>Questions</a:t>
-            </a:r>
-            <a:endParaRPr lang="en-US" sz="1600" dirty="0"/>
+              <a:t>Verify signature</a:t>
+            </a:r>
+            <a:endParaRPr lang="en-US" sz="1100" dirty="0"/>
           </a:p>
         </p:txBody>
       </p:sp>
@@ -6124,8 +6299,8 @@
         </p:nvSpPr>
         <p:spPr>
           <a:xfrm>
-            <a:off x="4498848" y="2606040"/>
-            <a:ext cx="1371600" cy="1005840"/>
+            <a:off x="3452586" y="2628900"/>
+            <a:ext cx="1041400" cy="1005840"/>
           </a:xfrm>
           <a:prstGeom prst="rect">
             <a:avLst/>
@@ -6141,7 +6316,7 @@
               <a:buNone/>
             </a:pPr>
             <a:r>
-              <a:rPr lang="en-US" sz="1300" dirty="0">
+              <a:rPr lang="en-US" sz="950">
                 <a:solidFill>
                   <a:srgbClr val="5A6378"/>
                 </a:solidFill>
@@ -6149,9 +6324,9 @@
                 <a:ea typeface="Calibri" pitchFamily="34" charset="-122"/>
                 <a:cs typeface="Calibri" pitchFamily="34" charset="-120"/>
               </a:rPr>
-              <a:t>One at a time; the agent asks, never guesses</a:t>
-            </a:r>
-            <a:endParaRPr lang="en-US" sz="1300" dirty="0"/>
+              <a:t>Root, certificate and invoice, link by link</a:t>
+            </a:r>
+            <a:endParaRPr lang="en-US" sz="950" dirty="0"/>
           </a:p>
         </p:txBody>
       </p:sp>
@@ -6163,8 +6338,8 @@
         </p:nvSpPr>
         <p:spPr>
           <a:xfrm>
-            <a:off x="6172200" y="1371600"/>
-            <a:ext cx="1719072" cy="2331720"/>
+            <a:off x="4753428" y="1371600"/>
+            <a:ext cx="1244600" cy="2331720"/>
           </a:xfrm>
           <a:prstGeom prst="roundRect">
             <a:avLst>
@@ -6176,6 +6351,13 @@
           </a:solidFill>
           <a:ln/>
         </p:spPr>
+        <p:txBody>
+          <a:bodyPr/>
+          <a:lstStyle/>
+          <a:p>
+            <a:endParaRPr lang="en-IN"/>
+          </a:p>
+        </p:txBody>
       </p:sp>
       <p:sp>
         <p:nvSpPr>
@@ -6185,7 +6367,7 @@
         </p:nvSpPr>
         <p:spPr>
           <a:xfrm>
-            <a:off x="6373368" y="1572768"/>
+            <a:off x="4905828" y="1572768"/>
             <a:ext cx="502920" cy="502920"/>
           </a:xfrm>
           <a:prstGeom prst="ellipse">
@@ -6196,6 +6378,13 @@
           </a:solidFill>
           <a:ln/>
         </p:spPr>
+        <p:txBody>
+          <a:bodyPr/>
+          <a:lstStyle/>
+          <a:p>
+            <a:endParaRPr lang="en-IN"/>
+          </a:p>
+        </p:txBody>
       </p:sp>
       <p:sp>
         <p:nvSpPr>
@@ -6205,7 +6394,7 @@
         </p:nvSpPr>
         <p:spPr>
           <a:xfrm>
-            <a:off x="6373368" y="1572768"/>
+            <a:off x="4905828" y="1572768"/>
             <a:ext cx="502920" cy="502920"/>
           </a:xfrm>
           <a:prstGeom prst="rect">
@@ -6222,7 +6411,7 @@
               <a:buNone/>
             </a:pPr>
             <a:r>
-              <a:rPr lang="en-US" sz="1800" b="1" dirty="0">
+              <a:rPr lang="en-US" sz="1800" b="1">
                 <a:solidFill>
                   <a:srgbClr val="FFFFFF"/>
                 </a:solidFill>
@@ -6244,8 +6433,8 @@
         </p:nvSpPr>
         <p:spPr>
           <a:xfrm>
-            <a:off x="6373368" y="2194560"/>
-            <a:ext cx="1371600" cy="365760"/>
+            <a:off x="4855028" y="2194560"/>
+            <a:ext cx="1041400" cy="381000"/>
           </a:xfrm>
           <a:prstGeom prst="rect">
             <a:avLst/>
@@ -6261,7 +6450,7 @@
               <a:buNone/>
             </a:pPr>
             <a:r>
-              <a:rPr lang="en-US" sz="1600" b="1" dirty="0">
+              <a:rPr lang="en-US" sz="1100" b="1">
                 <a:solidFill>
                   <a:srgbClr val="14213D"/>
                 </a:solidFill>
@@ -6269,9 +6458,9 @@
                 <a:ea typeface="Calibri" pitchFamily="34" charset="-122"/>
                 <a:cs typeface="Calibri" pitchFamily="34" charset="-120"/>
               </a:rPr>
-              <a:t>Best route</a:t>
-            </a:r>
-            <a:endParaRPr lang="en-US" sz="1600" dirty="0"/>
+              <a:t>Questions</a:t>
+            </a:r>
+            <a:endParaRPr lang="en-US" sz="1100" dirty="0"/>
           </a:p>
         </p:txBody>
       </p:sp>
@@ -6283,8 +6472,8 @@
         </p:nvSpPr>
         <p:spPr>
           <a:xfrm>
-            <a:off x="6373368" y="2606040"/>
-            <a:ext cx="1371600" cy="1005840"/>
+            <a:off x="4855028" y="2628900"/>
+            <a:ext cx="1041400" cy="1005840"/>
           </a:xfrm>
           <a:prstGeom prst="rect">
             <a:avLst/>
@@ -6300,7 +6489,7 @@
               <a:buNone/>
             </a:pPr>
             <a:r>
-              <a:rPr lang="en-US" sz="1300" dirty="0">
+              <a:rPr lang="en-US" sz="950">
                 <a:solidFill>
                   <a:srgbClr val="5A6378"/>
                 </a:solidFill>
@@ -6308,9 +6497,9 @@
                 <a:ea typeface="Calibri" pitchFamily="34" charset="-122"/>
                 <a:cs typeface="Calibri" pitchFamily="34" charset="-120"/>
               </a:rPr>
-              <a:t>Cost chart, what-if sliders, LRS limit gauge</a:t>
-            </a:r>
-            <a:endParaRPr lang="en-US" sz="1300" dirty="0"/>
+              <a:t>One at a time; asks, never guesses</a:t>
+            </a:r>
+            <a:endParaRPr lang="en-US" sz="950" dirty="0"/>
           </a:p>
         </p:txBody>
       </p:sp>
@@ -6322,8 +6511,8 @@
         </p:nvSpPr>
         <p:spPr>
           <a:xfrm>
-            <a:off x="8046720" y="1371600"/>
-            <a:ext cx="1719072" cy="2331720"/>
+            <a:off x="6155872" y="1371600"/>
+            <a:ext cx="1244600" cy="2331720"/>
           </a:xfrm>
           <a:prstGeom prst="roundRect">
             <a:avLst>
@@ -6340,6 +6529,13 @@
             <a:prstDash val="solid"/>
           </a:ln>
         </p:spPr>
+        <p:txBody>
+          <a:bodyPr/>
+          <a:lstStyle/>
+          <a:p>
+            <a:endParaRPr lang="en-IN"/>
+          </a:p>
+        </p:txBody>
       </p:sp>
       <p:sp>
         <p:nvSpPr>
@@ -6349,7 +6545,7 @@
         </p:nvSpPr>
         <p:spPr>
           <a:xfrm>
-            <a:off x="8247888" y="1572768"/>
+            <a:off x="6308272" y="1572768"/>
             <a:ext cx="502920" cy="502920"/>
           </a:xfrm>
           <a:prstGeom prst="ellipse">
@@ -6360,6 +6556,13 @@
           </a:solidFill>
           <a:ln/>
         </p:spPr>
+        <p:txBody>
+          <a:bodyPr/>
+          <a:lstStyle/>
+          <a:p>
+            <a:endParaRPr lang="en-IN"/>
+          </a:p>
+        </p:txBody>
       </p:sp>
       <p:sp>
         <p:nvSpPr>
@@ -6369,7 +6572,7 @@
         </p:nvSpPr>
         <p:spPr>
           <a:xfrm>
-            <a:off x="8247888" y="1572768"/>
+            <a:off x="6308272" y="1572768"/>
             <a:ext cx="502920" cy="502920"/>
           </a:xfrm>
           <a:prstGeom prst="rect">
@@ -6386,7 +6589,7 @@
               <a:buNone/>
             </a:pPr>
             <a:r>
-              <a:rPr lang="en-US" sz="1800" b="1" dirty="0">
+              <a:rPr lang="en-US" sz="1800" b="1">
                 <a:solidFill>
                   <a:srgbClr val="FFFFFF"/>
                 </a:solidFill>
@@ -6408,8 +6611,8 @@
         </p:nvSpPr>
         <p:spPr>
           <a:xfrm>
-            <a:off x="8247888" y="2194560"/>
-            <a:ext cx="1371600" cy="365760"/>
+            <a:off x="6257472" y="2194560"/>
+            <a:ext cx="1041400" cy="381000"/>
           </a:xfrm>
           <a:prstGeom prst="rect">
             <a:avLst/>
@@ -6425,7 +6628,7 @@
               <a:buNone/>
             </a:pPr>
             <a:r>
-              <a:rPr lang="en-US" sz="1600" b="1" dirty="0">
+              <a:rPr lang="en-US" sz="1100" b="1">
                 <a:solidFill>
                   <a:srgbClr val="14213D"/>
                 </a:solidFill>
@@ -6433,9 +6636,9 @@
                 <a:ea typeface="Calibri" pitchFamily="34" charset="-122"/>
                 <a:cs typeface="Calibri" pitchFamily="34" charset="-120"/>
               </a:rPr>
-              <a:t>Review &amp; sign</a:t>
-            </a:r>
-            <a:endParaRPr lang="en-US" sz="1600" dirty="0"/>
+              <a:t>Compare routes</a:t>
+            </a:r>
+            <a:endParaRPr lang="en-US" sz="1100" dirty="0"/>
           </a:p>
         </p:txBody>
       </p:sp>
@@ -6447,8 +6650,8 @@
         </p:nvSpPr>
         <p:spPr>
           <a:xfrm>
-            <a:off x="8247888" y="2606040"/>
-            <a:ext cx="1371600" cy="1005840"/>
+            <a:off x="6257472" y="2628900"/>
+            <a:ext cx="1041400" cy="1005840"/>
           </a:xfrm>
           <a:prstGeom prst="rect">
             <a:avLst/>
@@ -6464,7 +6667,7 @@
               <a:buNone/>
             </a:pPr>
             <a:r>
-              <a:rPr lang="en-US" sz="1300" dirty="0">
+              <a:rPr lang="en-US" sz="950">
                 <a:solidFill>
                   <a:srgbClr val="5A6378"/>
                 </a:solidFill>
@@ -6472,9 +6675,9 @@
                 <a:ea typeface="Calibri" pitchFamily="34" charset="-122"/>
                 <a:cs typeface="Calibri" pitchFamily="34" charset="-120"/>
               </a:rPr>
-              <a:t>PIN pad; the parent’s device signs the plan</a:t>
-            </a:r>
-            <a:endParaRPr lang="en-US" sz="1300" dirty="0"/>
+              <a:t>Cost chart, what-if sliders, LRS gauge</a:t>
+            </a:r>
+            <a:endParaRPr lang="en-US" sz="950" dirty="0"/>
           </a:p>
         </p:txBody>
       </p:sp>
@@ -6486,8 +6689,8 @@
         </p:nvSpPr>
         <p:spPr>
           <a:xfrm>
-            <a:off x="9921240" y="1371600"/>
-            <a:ext cx="1719072" cy="2331720"/>
+            <a:off x="7558315" y="1371600"/>
+            <a:ext cx="1244600" cy="2331720"/>
           </a:xfrm>
           <a:prstGeom prst="roundRect">
             <a:avLst>
@@ -6499,6 +6702,13 @@
           </a:solidFill>
           <a:ln/>
         </p:spPr>
+        <p:txBody>
+          <a:bodyPr/>
+          <a:lstStyle/>
+          <a:p>
+            <a:endParaRPr lang="en-IN"/>
+          </a:p>
+        </p:txBody>
       </p:sp>
       <p:sp>
         <p:nvSpPr>
@@ -6508,7 +6718,7 @@
         </p:nvSpPr>
         <p:spPr>
           <a:xfrm>
-            <a:off x="10122408" y="1572768"/>
+            <a:off x="7710715" y="1572768"/>
             <a:ext cx="502920" cy="502920"/>
           </a:xfrm>
           <a:prstGeom prst="ellipse">
@@ -6519,6 +6729,13 @@
           </a:solidFill>
           <a:ln/>
         </p:spPr>
+        <p:txBody>
+          <a:bodyPr/>
+          <a:lstStyle/>
+          <a:p>
+            <a:endParaRPr lang="en-IN"/>
+          </a:p>
+        </p:txBody>
       </p:sp>
       <p:sp>
         <p:nvSpPr>
@@ -6528,7 +6745,7 @@
         </p:nvSpPr>
         <p:spPr>
           <a:xfrm>
-            <a:off x="10122408" y="1572768"/>
+            <a:off x="7710715" y="1572768"/>
             <a:ext cx="502920" cy="502920"/>
           </a:xfrm>
           <a:prstGeom prst="rect">
@@ -6545,7 +6762,7 @@
               <a:buNone/>
             </a:pPr>
             <a:r>
-              <a:rPr lang="en-US" sz="1800" b="1" dirty="0">
+              <a:rPr lang="en-US" sz="1800" b="1">
                 <a:solidFill>
                   <a:srgbClr val="FFFFFF"/>
                 </a:solidFill>
@@ -6567,8 +6784,8 @@
         </p:nvSpPr>
         <p:spPr>
           <a:xfrm>
-            <a:off x="10122408" y="2194560"/>
-            <a:ext cx="1371600" cy="365760"/>
+            <a:off x="7659915" y="2194560"/>
+            <a:ext cx="1041400" cy="381000"/>
           </a:xfrm>
           <a:prstGeom prst="rect">
             <a:avLst/>
@@ -6584,7 +6801,7 @@
               <a:buNone/>
             </a:pPr>
             <a:r>
-              <a:rPr lang="en-US" sz="1600" b="1" dirty="0">
+              <a:rPr lang="en-US" sz="1100" b="1">
                 <a:solidFill>
                   <a:srgbClr val="14213D"/>
                 </a:solidFill>
@@ -6592,9 +6809,9 @@
                 <a:ea typeface="Calibri" pitchFamily="34" charset="-122"/>
                 <a:cs typeface="Calibri" pitchFamily="34" charset="-120"/>
               </a:rPr>
-              <a:t>Receipt</a:t>
-            </a:r>
-            <a:endParaRPr lang="en-US" sz="1600" dirty="0"/>
+              <a:t>Documents &amp; A2</a:t>
+            </a:r>
+            <a:endParaRPr lang="en-US" sz="1100" dirty="0"/>
           </a:p>
         </p:txBody>
       </p:sp>
@@ -6606,8 +6823,8 @@
         </p:nvSpPr>
         <p:spPr>
           <a:xfrm>
-            <a:off x="10122408" y="2606040"/>
-            <a:ext cx="1371600" cy="1005840"/>
+            <a:off x="7659915" y="2628900"/>
+            <a:ext cx="1041400" cy="1005840"/>
           </a:xfrm>
           <a:prstGeom prst="rect">
             <a:avLst/>
@@ -6623,7 +6840,7 @@
               <a:buNone/>
             </a:pPr>
             <a:r>
-              <a:rPr lang="en-US" sz="1300" dirty="0">
+              <a:rPr lang="en-US" sz="950">
                 <a:solidFill>
                   <a:srgbClr val="5A6378"/>
                 </a:solidFill>
@@ -6631,9 +6848,9 @@
                 <a:ea typeface="Calibri" pitchFamily="34" charset="-122"/>
                 <a:cs typeface="Calibri" pitchFamily="34" charset="-120"/>
               </a:rPr>
-              <a:t>Transaction, certificate, signature, audit entry</a:t>
-            </a:r>
-            <a:endParaRPr lang="en-US" sz="1300" dirty="0"/>
+              <a:t>A2-style draft, RBI checks, papers list</a:t>
+            </a:r>
+            <a:endParaRPr lang="en-US" sz="950" dirty="0"/>
           </a:p>
         </p:txBody>
       </p:sp>
@@ -6663,6 +6880,13 @@
             <a:prstDash val="solid"/>
           </a:ln>
         </p:spPr>
+        <p:txBody>
+          <a:bodyPr/>
+          <a:lstStyle/>
+          <a:p>
+            <a:endParaRPr lang="en-IN"/>
+          </a:p>
+        </p:txBody>
       </p:sp>
       <p:sp>
         <p:nvSpPr>
@@ -6768,6 +6992,13 @@
             <a:prstDash val="solid"/>
           </a:ln>
         </p:spPr>
+        <p:txBody>
+          <a:bodyPr/>
+          <a:lstStyle/>
+          <a:p>
+            <a:endParaRPr lang="en-IN"/>
+          </a:p>
+        </p:txBody>
       </p:sp>
       <p:sp>
         <p:nvSpPr>
@@ -6873,6 +7104,13 @@
             <a:prstDash val="solid"/>
           </a:ln>
         </p:spPr>
+        <p:txBody>
+          <a:bodyPr/>
+          <a:lstStyle/>
+          <a:p>
+            <a:endParaRPr lang="en-IN"/>
+          </a:p>
+        </p:txBody>
       </p:sp>
       <p:sp>
         <p:nvSpPr>
@@ -6973,6 +7211,13 @@
           </a:solidFill>
           <a:ln/>
         </p:spPr>
+        <p:txBody>
+          <a:bodyPr/>
+          <a:lstStyle/>
+          <a:p>
+            <a:endParaRPr lang="en-IN"/>
+          </a:p>
+        </p:txBody>
       </p:sp>
       <p:sp>
         <p:nvSpPr>
@@ -7058,6 +7303,412 @@
               <a:t>3</a:t>
             </a:fld>
             <a:endParaRPr lang="en-US"/>
+          </a:p>
+        </p:txBody>
+      </p:sp>
+      <p:sp>
+        <p:nvSpPr>
+          <p:cNvPr id="45" name="Shape 26">
+            <a:extLst>
+              <a:ext uri="{FF2B5EF4-FFF2-40B4-BE49-F238E27FC236}">
+                <a16:creationId xmlns:a16="http://schemas.microsoft.com/office/drawing/2014/main" id="{C61D8855-DFBB-192E-2257-74F15552101F}"/>
+              </a:ext>
+            </a:extLst>
+          </p:cNvPr>
+          <p:cNvSpPr/>
+          <p:nvPr/>
+        </p:nvSpPr>
+        <p:spPr>
+          <a:xfrm>
+            <a:off x="8960757" y="1371600"/>
+            <a:ext cx="1244600" cy="2331720"/>
+          </a:xfrm>
+          <a:prstGeom prst="roundRect">
+            <a:avLst>
+              <a:gd name="adj" fmla="val 6383"/>
+            </a:avLst>
+          </a:prstGeom>
+          <a:solidFill>
+            <a:srgbClr val="F3F5F9"/>
+          </a:solidFill>
+          <a:ln/>
+        </p:spPr>
+        <p:txBody>
+          <a:bodyPr/>
+          <a:lstStyle/>
+          <a:p>
+            <a:endParaRPr lang="en-IN"/>
+          </a:p>
+        </p:txBody>
+      </p:sp>
+      <p:sp>
+        <p:nvSpPr>
+          <p:cNvPr id="46" name="Shape 27">
+            <a:extLst>
+              <a:ext uri="{FF2B5EF4-FFF2-40B4-BE49-F238E27FC236}">
+                <a16:creationId xmlns:a16="http://schemas.microsoft.com/office/drawing/2014/main" id="{9D80A84E-88F1-3614-FE6B-14667D2FC087}"/>
+              </a:ext>
+            </a:extLst>
+          </p:cNvPr>
+          <p:cNvSpPr/>
+          <p:nvPr/>
+        </p:nvSpPr>
+        <p:spPr>
+          <a:xfrm>
+            <a:off x="9113157" y="1572768"/>
+            <a:ext cx="502920" cy="502920"/>
+          </a:xfrm>
+          <a:prstGeom prst="ellipse">
+            <a:avLst/>
+          </a:prstGeom>
+          <a:solidFill>
+            <a:srgbClr val="1F5FA8"/>
+          </a:solidFill>
+          <a:ln/>
+        </p:spPr>
+        <p:txBody>
+          <a:bodyPr/>
+          <a:lstStyle/>
+          <a:p>
+            <a:endParaRPr lang="en-IN"/>
+          </a:p>
+        </p:txBody>
+      </p:sp>
+      <p:sp>
+        <p:nvSpPr>
+          <p:cNvPr id="47" name="Text 28">
+            <a:extLst>
+              <a:ext uri="{FF2B5EF4-FFF2-40B4-BE49-F238E27FC236}">
+                <a16:creationId xmlns:a16="http://schemas.microsoft.com/office/drawing/2014/main" id="{F2D691FD-BB4A-F13B-A1B7-5825FAC50A8E}"/>
+              </a:ext>
+            </a:extLst>
+          </p:cNvPr>
+          <p:cNvSpPr txBox="1"/>
+          <p:nvPr/>
+        </p:nvSpPr>
+        <p:spPr>
+          <a:xfrm>
+            <a:off x="9113157" y="1572768"/>
+            <a:ext cx="502920" cy="502920"/>
+          </a:xfrm>
+          <a:prstGeom prst="rect">
+            <a:avLst/>
+          </a:prstGeom>
+          <a:noFill/>
+          <a:ln/>
+        </p:spPr>
+        <p:txBody>
+          <a:bodyPr wrap="square" lIns="0" tIns="0" rIns="0" bIns="0" rtlCol="0" anchor="ctr"/>
+          <a:lstStyle/>
+          <a:p>
+            <a:pPr marL="0" indent="0" algn="ctr">
+              <a:buNone/>
+            </a:pPr>
+            <a:r>
+              <a:rPr lang="en-US" sz="1800" b="1">
+                <a:solidFill>
+                  <a:srgbClr val="FFFFFF"/>
+                </a:solidFill>
+                <a:latin typeface="Calibri" pitchFamily="34" charset="0"/>
+                <a:ea typeface="Calibri" pitchFamily="34" charset="-122"/>
+                <a:cs typeface="Calibri" pitchFamily="34" charset="-120"/>
+              </a:rPr>
+              <a:t>7</a:t>
+            </a:r>
+            <a:endParaRPr lang="en-US" sz="1800" dirty="0"/>
+          </a:p>
+        </p:txBody>
+      </p:sp>
+      <p:sp>
+        <p:nvSpPr>
+          <p:cNvPr id="48" name="Text 29">
+            <a:extLst>
+              <a:ext uri="{FF2B5EF4-FFF2-40B4-BE49-F238E27FC236}">
+                <a16:creationId xmlns:a16="http://schemas.microsoft.com/office/drawing/2014/main" id="{95538B0B-E46D-599D-1B7D-C7718F45427A}"/>
+              </a:ext>
+            </a:extLst>
+          </p:cNvPr>
+          <p:cNvSpPr txBox="1"/>
+          <p:nvPr/>
+        </p:nvSpPr>
+        <p:spPr>
+          <a:xfrm>
+            <a:off x="9062357" y="2194560"/>
+            <a:ext cx="1041400" cy="381000"/>
+          </a:xfrm>
+          <a:prstGeom prst="rect">
+            <a:avLst/>
+          </a:prstGeom>
+          <a:noFill/>
+          <a:ln/>
+        </p:spPr>
+        <p:txBody>
+          <a:bodyPr wrap="square" lIns="0" tIns="0" rIns="0" bIns="0" rtlCol="0" anchor="t"/>
+          <a:lstStyle/>
+          <a:p>
+            <a:pPr marL="0" indent="0">
+              <a:buNone/>
+            </a:pPr>
+            <a:r>
+              <a:rPr lang="en-US" sz="1100" b="1">
+                <a:solidFill>
+                  <a:srgbClr val="14213D"/>
+                </a:solidFill>
+                <a:latin typeface="Calibri" pitchFamily="34" charset="0"/>
+                <a:ea typeface="Calibri" pitchFamily="34" charset="-122"/>
+                <a:cs typeface="Calibri" pitchFamily="34" charset="-120"/>
+              </a:rPr>
+              <a:t>Review &amp; sign</a:t>
+            </a:r>
+            <a:endParaRPr lang="en-US" sz="1100" dirty="0"/>
+          </a:p>
+        </p:txBody>
+      </p:sp>
+      <p:sp>
+        <p:nvSpPr>
+          <p:cNvPr id="49" name="Text 30">
+            <a:extLst>
+              <a:ext uri="{FF2B5EF4-FFF2-40B4-BE49-F238E27FC236}">
+                <a16:creationId xmlns:a16="http://schemas.microsoft.com/office/drawing/2014/main" id="{F23BA966-D9D5-55AF-5F1A-17171859C326}"/>
+              </a:ext>
+            </a:extLst>
+          </p:cNvPr>
+          <p:cNvSpPr txBox="1"/>
+          <p:nvPr/>
+        </p:nvSpPr>
+        <p:spPr>
+          <a:xfrm>
+            <a:off x="9062357" y="2628900"/>
+            <a:ext cx="1041400" cy="1005840"/>
+          </a:xfrm>
+          <a:prstGeom prst="rect">
+            <a:avLst/>
+          </a:prstGeom>
+          <a:noFill/>
+          <a:ln/>
+        </p:spPr>
+        <p:txBody>
+          <a:bodyPr wrap="square" lIns="0" tIns="0" rIns="0" bIns="0" rtlCol="0" anchor="t"/>
+          <a:lstStyle/>
+          <a:p>
+            <a:pPr marL="0" indent="0">
+              <a:buNone/>
+            </a:pPr>
+            <a:r>
+              <a:rPr lang="en-US" sz="950">
+                <a:solidFill>
+                  <a:srgbClr val="5A6378"/>
+                </a:solidFill>
+                <a:latin typeface="Calibri" pitchFamily="34" charset="0"/>
+                <a:ea typeface="Calibri" pitchFamily="34" charset="-122"/>
+                <a:cs typeface="Calibri" pitchFamily="34" charset="-120"/>
+              </a:rPr>
+              <a:t>PIN pad; the parent's device signs the plan</a:t>
+            </a:r>
+            <a:endParaRPr lang="en-US" sz="950" dirty="0"/>
+          </a:p>
+        </p:txBody>
+      </p:sp>
+      <p:sp>
+        <p:nvSpPr>
+          <p:cNvPr id="50" name="Shape 26">
+            <a:extLst>
+              <a:ext uri="{FF2B5EF4-FFF2-40B4-BE49-F238E27FC236}">
+                <a16:creationId xmlns:a16="http://schemas.microsoft.com/office/drawing/2014/main" id="{84EE8BA8-F354-6A24-E6DB-83D27FD0EFA5}"/>
+              </a:ext>
+            </a:extLst>
+          </p:cNvPr>
+          <p:cNvSpPr/>
+          <p:nvPr/>
+        </p:nvSpPr>
+        <p:spPr>
+          <a:xfrm>
+            <a:off x="10363200" y="1371600"/>
+            <a:ext cx="1244600" cy="2331720"/>
+          </a:xfrm>
+          <a:prstGeom prst="roundRect">
+            <a:avLst>
+              <a:gd name="adj" fmla="val 6383"/>
+            </a:avLst>
+          </a:prstGeom>
+          <a:solidFill>
+            <a:srgbClr val="F3F5F9"/>
+          </a:solidFill>
+          <a:ln/>
+        </p:spPr>
+        <p:txBody>
+          <a:bodyPr/>
+          <a:lstStyle/>
+          <a:p>
+            <a:endParaRPr lang="en-IN"/>
+          </a:p>
+        </p:txBody>
+      </p:sp>
+      <p:sp>
+        <p:nvSpPr>
+          <p:cNvPr id="51" name="Shape 27">
+            <a:extLst>
+              <a:ext uri="{FF2B5EF4-FFF2-40B4-BE49-F238E27FC236}">
+                <a16:creationId xmlns:a16="http://schemas.microsoft.com/office/drawing/2014/main" id="{A78970FF-E4ED-0EDA-2EA2-87A8ED270D0A}"/>
+              </a:ext>
+            </a:extLst>
+          </p:cNvPr>
+          <p:cNvSpPr/>
+          <p:nvPr/>
+        </p:nvSpPr>
+        <p:spPr>
+          <a:xfrm>
+            <a:off x="10515600" y="1572768"/>
+            <a:ext cx="502920" cy="502920"/>
+          </a:xfrm>
+          <a:prstGeom prst="ellipse">
+            <a:avLst/>
+          </a:prstGeom>
+          <a:solidFill>
+            <a:srgbClr val="1F5FA8"/>
+          </a:solidFill>
+          <a:ln/>
+        </p:spPr>
+        <p:txBody>
+          <a:bodyPr/>
+          <a:lstStyle/>
+          <a:p>
+            <a:endParaRPr lang="en-IN"/>
+          </a:p>
+        </p:txBody>
+      </p:sp>
+      <p:sp>
+        <p:nvSpPr>
+          <p:cNvPr id="52" name="Text 28">
+            <a:extLst>
+              <a:ext uri="{FF2B5EF4-FFF2-40B4-BE49-F238E27FC236}">
+                <a16:creationId xmlns:a16="http://schemas.microsoft.com/office/drawing/2014/main" id="{3C0CF6D4-134F-76E0-C45E-95E87107CCD0}"/>
+              </a:ext>
+            </a:extLst>
+          </p:cNvPr>
+          <p:cNvSpPr txBox="1"/>
+          <p:nvPr/>
+        </p:nvSpPr>
+        <p:spPr>
+          <a:xfrm>
+            <a:off x="10515600" y="1572768"/>
+            <a:ext cx="502920" cy="502920"/>
+          </a:xfrm>
+          <a:prstGeom prst="rect">
+            <a:avLst/>
+          </a:prstGeom>
+          <a:noFill/>
+          <a:ln/>
+        </p:spPr>
+        <p:txBody>
+          <a:bodyPr wrap="square" lIns="0" tIns="0" rIns="0" bIns="0" rtlCol="0" anchor="ctr"/>
+          <a:lstStyle/>
+          <a:p>
+            <a:pPr marL="0" indent="0" algn="ctr">
+              <a:buNone/>
+            </a:pPr>
+            <a:r>
+              <a:rPr lang="en-US" sz="1800" b="1">
+                <a:solidFill>
+                  <a:srgbClr val="FFFFFF"/>
+                </a:solidFill>
+                <a:latin typeface="Calibri" pitchFamily="34" charset="0"/>
+                <a:ea typeface="Calibri" pitchFamily="34" charset="-122"/>
+                <a:cs typeface="Calibri" pitchFamily="34" charset="-120"/>
+              </a:rPr>
+              <a:t>8</a:t>
+            </a:r>
+            <a:endParaRPr lang="en-US" sz="1800" dirty="0"/>
+          </a:p>
+        </p:txBody>
+      </p:sp>
+      <p:sp>
+        <p:nvSpPr>
+          <p:cNvPr id="53" name="Text 29">
+            <a:extLst>
+              <a:ext uri="{FF2B5EF4-FFF2-40B4-BE49-F238E27FC236}">
+                <a16:creationId xmlns:a16="http://schemas.microsoft.com/office/drawing/2014/main" id="{FAA8B911-3018-5E66-2C1F-91423A4AD1C4}"/>
+              </a:ext>
+            </a:extLst>
+          </p:cNvPr>
+          <p:cNvSpPr txBox="1"/>
+          <p:nvPr/>
+        </p:nvSpPr>
+        <p:spPr>
+          <a:xfrm>
+            <a:off x="10464800" y="2194560"/>
+            <a:ext cx="1041400" cy="381000"/>
+          </a:xfrm>
+          <a:prstGeom prst="rect">
+            <a:avLst/>
+          </a:prstGeom>
+          <a:noFill/>
+          <a:ln/>
+        </p:spPr>
+        <p:txBody>
+          <a:bodyPr wrap="square" lIns="0" tIns="0" rIns="0" bIns="0" rtlCol="0" anchor="t"/>
+          <a:lstStyle/>
+          <a:p>
+            <a:pPr marL="0" indent="0">
+              <a:buNone/>
+            </a:pPr>
+            <a:r>
+              <a:rPr lang="en-US" sz="1100" b="1">
+                <a:solidFill>
+                  <a:srgbClr val="14213D"/>
+                </a:solidFill>
+                <a:latin typeface="Calibri" pitchFamily="34" charset="0"/>
+                <a:ea typeface="Calibri" pitchFamily="34" charset="-122"/>
+                <a:cs typeface="Calibri" pitchFamily="34" charset="-120"/>
+              </a:rPr>
+              <a:t>Receipt</a:t>
+            </a:r>
+            <a:endParaRPr lang="en-US" sz="1100" dirty="0"/>
+          </a:p>
+        </p:txBody>
+      </p:sp>
+      <p:sp>
+        <p:nvSpPr>
+          <p:cNvPr id="54" name="Text 30">
+            <a:extLst>
+              <a:ext uri="{FF2B5EF4-FFF2-40B4-BE49-F238E27FC236}">
+                <a16:creationId xmlns:a16="http://schemas.microsoft.com/office/drawing/2014/main" id="{3CD3F4CE-4E4A-E2B8-CA5C-871B0CBEF392}"/>
+              </a:ext>
+            </a:extLst>
+          </p:cNvPr>
+          <p:cNvSpPr txBox="1"/>
+          <p:nvPr/>
+        </p:nvSpPr>
+        <p:spPr>
+          <a:xfrm>
+            <a:off x="10464800" y="2628900"/>
+            <a:ext cx="1041400" cy="1005840"/>
+          </a:xfrm>
+          <a:prstGeom prst="rect">
+            <a:avLst/>
+          </a:prstGeom>
+          <a:noFill/>
+          <a:ln/>
+        </p:spPr>
+        <p:txBody>
+          <a:bodyPr wrap="square" lIns="0" tIns="0" rIns="0" bIns="0" rtlCol="0" anchor="t"/>
+          <a:lstStyle/>
+          <a:p>
+            <a:pPr marL="0" indent="0">
+              <a:buNone/>
+            </a:pPr>
+            <a:r>
+              <a:rPr lang="fr-FR" sz="950">
+                <a:solidFill>
+                  <a:srgbClr val="5A6378"/>
+                </a:solidFill>
+                <a:latin typeface="Calibri" pitchFamily="34" charset="0"/>
+                <a:ea typeface="Calibri" pitchFamily="34" charset="-122"/>
+                <a:cs typeface="Calibri" pitchFamily="34" charset="-120"/>
+              </a:rPr>
+              <a:t>Printable: transaction, signature, audit entry</a:t>
+            </a:r>
+            <a:endParaRPr lang="en-US" sz="950" dirty="0"/>
           </a:p>
         </p:txBody>
       </p:sp>
@@ -7293,41 +7944,6 @@
           </a:p>
         </p:txBody>
       </p:sp>
-      <p:pic>
-        <p:nvPicPr>
-          <p:cNvPr id="47" name="Picture 46">
-            <a:extLst>
-              <a:ext uri="{FF2B5EF4-FFF2-40B4-BE49-F238E27FC236}">
-                <a16:creationId xmlns:a16="http://schemas.microsoft.com/office/drawing/2014/main" id="{1B7A7462-0B3C-5311-1733-F21733A383E2}"/>
-              </a:ext>
-            </a:extLst>
-          </p:cNvPr>
-          <p:cNvPicPr>
-            <a:picLocks/>
-          </p:cNvPicPr>
-          <p:nvPr/>
-        </p:nvPicPr>
-        <p:blipFill>
-          <a:blip r:embed="rId3"/>
-          <a:stretch>
-            <a:fillRect/>
-          </a:stretch>
-        </p:blipFill>
-        <p:spPr>
-          <a:xfrm>
-            <a:off x="4445000" y="1320800"/>
-            <a:ext cx="3479800" cy="2159000"/>
-          </a:xfrm>
-          <a:prstGeom prst="rect">
-            <a:avLst/>
-          </a:prstGeom>
-          <a:ln w="9525">
-            <a:solidFill>
-              <a:srgbClr val="DBDBDB"/>
-            </a:solidFill>
-          </a:ln>
-        </p:spPr>
-      </p:pic>
       <p:sp>
         <p:nvSpPr>
           <p:cNvPr id="48" name="TextBox 47">
@@ -7374,41 +7990,6 @@
           </a:p>
         </p:txBody>
       </p:sp>
-      <p:pic>
-        <p:nvPicPr>
-          <p:cNvPr id="50" name="Picture 49">
-            <a:extLst>
-              <a:ext uri="{FF2B5EF4-FFF2-40B4-BE49-F238E27FC236}">
-                <a16:creationId xmlns:a16="http://schemas.microsoft.com/office/drawing/2014/main" id="{9B22E8E5-20A5-E081-A529-690C7D37D423}"/>
-              </a:ext>
-            </a:extLst>
-          </p:cNvPr>
-          <p:cNvPicPr>
-            <a:picLocks/>
-          </p:cNvPicPr>
-          <p:nvPr/>
-        </p:nvPicPr>
-        <p:blipFill>
-          <a:blip r:embed="rId4"/>
-          <a:stretch>
-            <a:fillRect/>
-          </a:stretch>
-        </p:blipFill>
-        <p:spPr>
-          <a:xfrm>
-            <a:off x="8128000" y="1320800"/>
-            <a:ext cx="3479800" cy="2159000"/>
-          </a:xfrm>
-          <a:prstGeom prst="rect">
-            <a:avLst/>
-          </a:prstGeom>
-          <a:ln w="9525">
-            <a:solidFill>
-              <a:srgbClr val="DBDBDB"/>
-            </a:solidFill>
-          </a:ln>
-        </p:spPr>
-      </p:pic>
       <p:sp>
         <p:nvSpPr>
           <p:cNvPr id="51" name="TextBox 50">
@@ -7455,41 +8036,6 @@
           </a:p>
         </p:txBody>
       </p:sp>
-      <p:pic>
-        <p:nvPicPr>
-          <p:cNvPr id="53" name="Picture 52">
-            <a:extLst>
-              <a:ext uri="{FF2B5EF4-FFF2-40B4-BE49-F238E27FC236}">
-                <a16:creationId xmlns:a16="http://schemas.microsoft.com/office/drawing/2014/main" id="{FC98E358-E0F6-F3B6-5EC1-8A0DB59EBA25}"/>
-              </a:ext>
-            </a:extLst>
-          </p:cNvPr>
-          <p:cNvPicPr>
-            <a:picLocks/>
-          </p:cNvPicPr>
-          <p:nvPr/>
-        </p:nvPicPr>
-        <p:blipFill>
-          <a:blip r:embed="rId5"/>
-          <a:stretch>
-            <a:fillRect/>
-          </a:stretch>
-        </p:blipFill>
-        <p:spPr>
-          <a:xfrm>
-            <a:off x="4445000" y="3810000"/>
-            <a:ext cx="3479800" cy="2159000"/>
-          </a:xfrm>
-          <a:prstGeom prst="rect">
-            <a:avLst/>
-          </a:prstGeom>
-          <a:ln w="9525">
-            <a:solidFill>
-              <a:srgbClr val="DBDBDB"/>
-            </a:solidFill>
-          </a:ln>
-        </p:spPr>
-      </p:pic>
       <p:sp>
         <p:nvSpPr>
           <p:cNvPr id="54" name="TextBox 53">
@@ -7536,41 +8082,6 @@
           </a:p>
         </p:txBody>
       </p:sp>
-      <p:pic>
-        <p:nvPicPr>
-          <p:cNvPr id="56" name="Picture 55">
-            <a:extLst>
-              <a:ext uri="{FF2B5EF4-FFF2-40B4-BE49-F238E27FC236}">
-                <a16:creationId xmlns:a16="http://schemas.microsoft.com/office/drawing/2014/main" id="{AABB2022-FCF0-3BE9-1D50-38A934466BC2}"/>
-              </a:ext>
-            </a:extLst>
-          </p:cNvPr>
-          <p:cNvPicPr>
-            <a:picLocks/>
-          </p:cNvPicPr>
-          <p:nvPr/>
-        </p:nvPicPr>
-        <p:blipFill>
-          <a:blip r:embed="rId6"/>
-          <a:stretch>
-            <a:fillRect/>
-          </a:stretch>
-        </p:blipFill>
-        <p:spPr>
-          <a:xfrm>
-            <a:off x="8128000" y="3810000"/>
-            <a:ext cx="3479800" cy="2159000"/>
-          </a:xfrm>
-          <a:prstGeom prst="rect">
-            <a:avLst/>
-          </a:prstGeom>
-          <a:ln w="9525">
-            <a:solidFill>
-              <a:srgbClr val="DBDBDB"/>
-            </a:solidFill>
-          </a:ln>
-        </p:spPr>
-      </p:pic>
       <p:sp>
         <p:nvSpPr>
           <p:cNvPr id="57" name="TextBox 56">
@@ -7617,6 +8128,146 @@
           </a:p>
         </p:txBody>
       </p:sp>
+      <p:pic>
+        <p:nvPicPr>
+          <p:cNvPr id="4" name="Picture 3">
+            <a:extLst>
+              <a:ext uri="{FF2B5EF4-FFF2-40B4-BE49-F238E27FC236}">
+                <a16:creationId xmlns:a16="http://schemas.microsoft.com/office/drawing/2014/main" id="{7FEB051A-F088-F027-4A84-2BC9D4DE8101}"/>
+              </a:ext>
+            </a:extLst>
+          </p:cNvPr>
+          <p:cNvPicPr>
+            <a:picLocks/>
+          </p:cNvPicPr>
+          <p:nvPr/>
+        </p:nvPicPr>
+        <p:blipFill>
+          <a:blip r:embed="rId3"/>
+          <a:stretch>
+            <a:fillRect/>
+          </a:stretch>
+        </p:blipFill>
+        <p:spPr>
+          <a:xfrm>
+            <a:off x="4445000" y="1320800"/>
+            <a:ext cx="3479800" cy="2159000"/>
+          </a:xfrm>
+          <a:prstGeom prst="rect">
+            <a:avLst/>
+          </a:prstGeom>
+          <a:ln w="9525">
+            <a:solidFill>
+              <a:srgbClr val="DBDBDB"/>
+            </a:solidFill>
+          </a:ln>
+        </p:spPr>
+      </p:pic>
+      <p:pic>
+        <p:nvPicPr>
+          <p:cNvPr id="6" name="Picture 5">
+            <a:extLst>
+              <a:ext uri="{FF2B5EF4-FFF2-40B4-BE49-F238E27FC236}">
+                <a16:creationId xmlns:a16="http://schemas.microsoft.com/office/drawing/2014/main" id="{D2483DBF-C457-7572-CA40-E635F6B7BA52}"/>
+              </a:ext>
+            </a:extLst>
+          </p:cNvPr>
+          <p:cNvPicPr>
+            <a:picLocks/>
+          </p:cNvPicPr>
+          <p:nvPr/>
+        </p:nvPicPr>
+        <p:blipFill>
+          <a:blip r:embed="rId4"/>
+          <a:stretch>
+            <a:fillRect/>
+          </a:stretch>
+        </p:blipFill>
+        <p:spPr>
+          <a:xfrm>
+            <a:off x="8128000" y="1320800"/>
+            <a:ext cx="3479800" cy="2159000"/>
+          </a:xfrm>
+          <a:prstGeom prst="rect">
+            <a:avLst/>
+          </a:prstGeom>
+          <a:ln w="9525">
+            <a:solidFill>
+              <a:srgbClr val="DBDBDB"/>
+            </a:solidFill>
+          </a:ln>
+        </p:spPr>
+      </p:pic>
+      <p:pic>
+        <p:nvPicPr>
+          <p:cNvPr id="8" name="Picture 7">
+            <a:extLst>
+              <a:ext uri="{FF2B5EF4-FFF2-40B4-BE49-F238E27FC236}">
+                <a16:creationId xmlns:a16="http://schemas.microsoft.com/office/drawing/2014/main" id="{7E954085-5698-092D-87EF-BCBA824FA498}"/>
+              </a:ext>
+            </a:extLst>
+          </p:cNvPr>
+          <p:cNvPicPr>
+            <a:picLocks/>
+          </p:cNvPicPr>
+          <p:nvPr/>
+        </p:nvPicPr>
+        <p:blipFill>
+          <a:blip r:embed="rId5"/>
+          <a:stretch>
+            <a:fillRect/>
+          </a:stretch>
+        </p:blipFill>
+        <p:spPr>
+          <a:xfrm>
+            <a:off x="4445000" y="3810000"/>
+            <a:ext cx="3479800" cy="2159000"/>
+          </a:xfrm>
+          <a:prstGeom prst="rect">
+            <a:avLst/>
+          </a:prstGeom>
+          <a:ln w="9525">
+            <a:solidFill>
+              <a:srgbClr val="DBDBDB"/>
+            </a:solidFill>
+          </a:ln>
+        </p:spPr>
+      </p:pic>
+      <p:pic>
+        <p:nvPicPr>
+          <p:cNvPr id="10" name="Picture 9">
+            <a:extLst>
+              <a:ext uri="{FF2B5EF4-FFF2-40B4-BE49-F238E27FC236}">
+                <a16:creationId xmlns:a16="http://schemas.microsoft.com/office/drawing/2014/main" id="{4F30C1D6-D7DB-68C8-8853-BEE2DDAD7634}"/>
+              </a:ext>
+            </a:extLst>
+          </p:cNvPr>
+          <p:cNvPicPr>
+            <a:picLocks/>
+          </p:cNvPicPr>
+          <p:nvPr/>
+        </p:nvPicPr>
+        <p:blipFill>
+          <a:blip r:embed="rId6"/>
+          <a:stretch>
+            <a:fillRect/>
+          </a:stretch>
+        </p:blipFill>
+        <p:spPr>
+          <a:xfrm>
+            <a:off x="8128000" y="3810000"/>
+            <a:ext cx="3479800" cy="2159000"/>
+          </a:xfrm>
+          <a:prstGeom prst="rect">
+            <a:avLst/>
+          </a:prstGeom>
+          <a:ln w="9525">
+            <a:solidFill>
+              <a:srgbClr val="DBDBDB"/>
+            </a:solidFill>
+          </a:ln>
+        </p:spPr>
+      </p:pic>
     </p:spTree>
     <p:extLst>
       <p:ext uri="{BB962C8B-B14F-4D97-AF65-F5344CB8AC3E}">
@@ -7735,6 +8386,13 @@
           </a:solidFill>
           <a:ln/>
         </p:spPr>
+        <p:txBody>
+          <a:bodyPr/>
+          <a:lstStyle/>
+          <a:p>
+            <a:endParaRPr lang="en-IN"/>
+          </a:p>
+        </p:txBody>
       </p:sp>
       <p:sp>
         <p:nvSpPr>
@@ -7835,6 +8493,13 @@
           </a:solidFill>
           <a:ln/>
         </p:spPr>
+        <p:txBody>
+          <a:bodyPr/>
+          <a:lstStyle/>
+          <a:p>
+            <a:endParaRPr lang="en-IN"/>
+          </a:p>
+        </p:txBody>
       </p:sp>
       <p:sp>
         <p:nvSpPr>
@@ -7935,6 +8600,13 @@
           </a:solidFill>
           <a:ln/>
         </p:spPr>
+        <p:txBody>
+          <a:bodyPr/>
+          <a:lstStyle/>
+          <a:p>
+            <a:endParaRPr lang="en-IN"/>
+          </a:p>
+        </p:txBody>
       </p:sp>
       <p:sp>
         <p:nvSpPr>
@@ -9436,6 +10108,13 @@
           </a:solidFill>
           <a:ln/>
         </p:spPr>
+        <p:txBody>
+          <a:bodyPr/>
+          <a:lstStyle/>
+          <a:p>
+            <a:endParaRPr lang="en-IN"/>
+          </a:p>
+        </p:txBody>
       </p:sp>
       <p:sp>
         <p:nvSpPr>
@@ -9518,6 +10197,13 @@
             <a:prstDash val="solid"/>
           </a:ln>
         </p:spPr>
+        <p:txBody>
+          <a:bodyPr/>
+          <a:lstStyle/>
+          <a:p>
+            <a:endParaRPr lang="en-IN"/>
+          </a:p>
+        </p:txBody>
       </p:sp>
       <p:sp>
         <p:nvSpPr>
@@ -9853,6 +10539,13 @@
             <a:prstDash val="solid"/>
           </a:ln>
         </p:spPr>
+        <p:txBody>
+          <a:bodyPr/>
+          <a:lstStyle/>
+          <a:p>
+            <a:endParaRPr lang="en-IN"/>
+          </a:p>
+        </p:txBody>
       </p:sp>
       <p:sp>
         <p:nvSpPr>
@@ -10124,6 +10817,13 @@
           </a:solidFill>
           <a:ln/>
         </p:spPr>
+        <p:txBody>
+          <a:bodyPr/>
+          <a:lstStyle/>
+          <a:p>
+            <a:endParaRPr lang="en-IN"/>
+          </a:p>
+        </p:txBody>
       </p:sp>
       <p:sp>
         <p:nvSpPr>
@@ -10420,6 +11120,13 @@
             <a:prstDash val="solid"/>
           </a:ln>
         </p:spPr>
+        <p:txBody>
+          <a:bodyPr/>
+          <a:lstStyle/>
+          <a:p>
+            <a:endParaRPr lang="en-IN"/>
+          </a:p>
+        </p:txBody>
       </p:sp>
       <p:sp>
         <p:nvSpPr>
@@ -10764,6 +11471,13 @@
           </a:solidFill>
           <a:ln/>
         </p:spPr>
+        <p:txBody>
+          <a:bodyPr/>
+          <a:lstStyle/>
+          <a:p>
+            <a:endParaRPr lang="en-IN"/>
+          </a:p>
+        </p:txBody>
       </p:sp>
       <p:sp>
         <p:nvSpPr>
@@ -10862,6 +11576,13 @@
           </a:solidFill>
           <a:ln/>
         </p:spPr>
+        <p:txBody>
+          <a:bodyPr/>
+          <a:lstStyle/>
+          <a:p>
+            <a:endParaRPr lang="en-IN"/>
+          </a:p>
+        </p:txBody>
       </p:sp>
       <p:sp>
         <p:nvSpPr>
@@ -10884,6 +11605,13 @@
           </a:solidFill>
           <a:ln/>
         </p:spPr>
+        <p:txBody>
+          <a:bodyPr/>
+          <a:lstStyle/>
+          <a:p>
+            <a:endParaRPr lang="en-IN"/>
+          </a:p>
+        </p:txBody>
       </p:sp>
       <p:sp>
         <p:nvSpPr>
@@ -10982,6 +11710,13 @@
           </a:solidFill>
           <a:ln/>
         </p:spPr>
+        <p:txBody>
+          <a:bodyPr/>
+          <a:lstStyle/>
+          <a:p>
+            <a:endParaRPr lang="en-IN"/>
+          </a:p>
+        </p:txBody>
       </p:sp>
       <p:sp>
         <p:nvSpPr>
@@ -11004,6 +11739,13 @@
           </a:solidFill>
           <a:ln/>
         </p:spPr>
+        <p:txBody>
+          <a:bodyPr/>
+          <a:lstStyle/>
+          <a:p>
+            <a:endParaRPr lang="en-IN"/>
+          </a:p>
+        </p:txBody>
       </p:sp>
       <p:sp>
         <p:nvSpPr>
@@ -11102,6 +11844,13 @@
           </a:solidFill>
           <a:ln/>
         </p:spPr>
+        <p:txBody>
+          <a:bodyPr/>
+          <a:lstStyle/>
+          <a:p>
+            <a:endParaRPr lang="en-IN"/>
+          </a:p>
+        </p:txBody>
       </p:sp>
       <p:sp>
         <p:nvSpPr>
@@ -11124,6 +11873,13 @@
           </a:solidFill>
           <a:ln/>
         </p:spPr>
+        <p:txBody>
+          <a:bodyPr/>
+          <a:lstStyle/>
+          <a:p>
+            <a:endParaRPr lang="en-IN"/>
+          </a:p>
+        </p:txBody>
       </p:sp>
       <p:sp>
         <p:nvSpPr>
@@ -11222,6 +11978,13 @@
           </a:solidFill>
           <a:ln/>
         </p:spPr>
+        <p:txBody>
+          <a:bodyPr/>
+          <a:lstStyle/>
+          <a:p>
+            <a:endParaRPr lang="en-IN"/>
+          </a:p>
+        </p:txBody>
       </p:sp>
       <p:sp>
         <p:nvSpPr>
@@ -11244,6 +12007,13 @@
           </a:solidFill>
           <a:ln/>
         </p:spPr>
+        <p:txBody>
+          <a:bodyPr/>
+          <a:lstStyle/>
+          <a:p>
+            <a:endParaRPr lang="en-IN"/>
+          </a:p>
+        </p:txBody>
       </p:sp>
       <p:sp>
         <p:nvSpPr>
@@ -11399,6 +12169,13 @@
             <a:prstDash val="solid"/>
           </a:ln>
         </p:spPr>
+        <p:txBody>
+          <a:bodyPr/>
+          <a:lstStyle/>
+          <a:p>
+            <a:endParaRPr lang="en-IN"/>
+          </a:p>
+        </p:txBody>
       </p:sp>
       <p:sp>
         <p:nvSpPr>
@@ -11497,6 +12274,13 @@
           </a:solidFill>
           <a:ln/>
         </p:spPr>
+        <p:txBody>
+          <a:bodyPr/>
+          <a:lstStyle/>
+          <a:p>
+            <a:endParaRPr lang="en-IN"/>
+          </a:p>
+        </p:txBody>
       </p:sp>
       <p:sp>
         <p:nvSpPr>
@@ -11524,6 +12308,13 @@
             <a:prstDash val="solid"/>
           </a:ln>
         </p:spPr>
+        <p:txBody>
+          <a:bodyPr/>
+          <a:lstStyle/>
+          <a:p>
+            <a:endParaRPr lang="en-IN"/>
+          </a:p>
+        </p:txBody>
       </p:sp>
       <p:sp>
         <p:nvSpPr>
@@ -11622,6 +12413,13 @@
           </a:solidFill>
           <a:ln/>
         </p:spPr>
+        <p:txBody>
+          <a:bodyPr/>
+          <a:lstStyle/>
+          <a:p>
+            <a:endParaRPr lang="en-IN"/>
+          </a:p>
+        </p:txBody>
       </p:sp>
       <p:sp>
         <p:nvSpPr>
@@ -11649,6 +12447,13 @@
             <a:prstDash val="solid"/>
           </a:ln>
         </p:spPr>
+        <p:txBody>
+          <a:bodyPr/>
+          <a:lstStyle/>
+          <a:p>
+            <a:endParaRPr lang="en-IN"/>
+          </a:p>
+        </p:txBody>
       </p:sp>
       <p:sp>
         <p:nvSpPr>
@@ -11747,6 +12552,13 @@
           </a:solidFill>
           <a:ln/>
         </p:spPr>
+        <p:txBody>
+          <a:bodyPr/>
+          <a:lstStyle/>
+          <a:p>
+            <a:endParaRPr lang="en-IN"/>
+          </a:p>
+        </p:txBody>
       </p:sp>
       <p:sp>
         <p:nvSpPr>
@@ -11774,6 +12586,13 @@
             <a:prstDash val="solid"/>
           </a:ln>
         </p:spPr>
+        <p:txBody>
+          <a:bodyPr/>
+          <a:lstStyle/>
+          <a:p>
+            <a:endParaRPr lang="en-IN"/>
+          </a:p>
+        </p:txBody>
       </p:sp>
       <p:sp>
         <p:nvSpPr>
@@ -11872,6 +12691,13 @@
           </a:solidFill>
           <a:ln/>
         </p:spPr>
+        <p:txBody>
+          <a:bodyPr/>
+          <a:lstStyle/>
+          <a:p>
+            <a:endParaRPr lang="en-IN"/>
+          </a:p>
+        </p:txBody>
       </p:sp>
       <p:sp>
         <p:nvSpPr>
@@ -11899,6 +12725,13 @@
             <a:prstDash val="solid"/>
           </a:ln>
         </p:spPr>
+        <p:txBody>
+          <a:bodyPr/>
+          <a:lstStyle/>
+          <a:p>
+            <a:endParaRPr lang="en-IN"/>
+          </a:p>
+        </p:txBody>
       </p:sp>
       <p:sp>
         <p:nvSpPr>
@@ -11999,6 +12832,13 @@
           </a:solidFill>
           <a:ln/>
         </p:spPr>
+        <p:txBody>
+          <a:bodyPr/>
+          <a:lstStyle/>
+          <a:p>
+            <a:endParaRPr lang="en-IN"/>
+          </a:p>
+        </p:txBody>
       </p:sp>
       <p:sp>
         <p:nvSpPr>
@@ -13485,6 +14325,13 @@
           </a:solidFill>
           <a:ln/>
         </p:spPr>
+        <p:txBody>
+          <a:bodyPr/>
+          <a:lstStyle/>
+          <a:p>
+            <a:endParaRPr lang="en-IN"/>
+          </a:p>
+        </p:txBody>
       </p:sp>
       <p:sp>
         <p:nvSpPr>
@@ -13585,6 +14432,13 @@
           </a:solidFill>
           <a:ln/>
         </p:spPr>
+        <p:txBody>
+          <a:bodyPr/>
+          <a:lstStyle/>
+          <a:p>
+            <a:endParaRPr lang="en-IN"/>
+          </a:p>
+        </p:txBody>
       </p:sp>
       <p:sp>
         <p:nvSpPr>
@@ -13685,6 +14539,13 @@
           </a:solidFill>
           <a:ln/>
         </p:spPr>
+        <p:txBody>
+          <a:bodyPr/>
+          <a:lstStyle/>
+          <a:p>
+            <a:endParaRPr lang="en-IN"/>
+          </a:p>
+        </p:txBody>
       </p:sp>
       <p:sp>
         <p:nvSpPr>
@@ -13785,6 +14646,13 @@
           </a:solidFill>
           <a:ln/>
         </p:spPr>
+        <p:txBody>
+          <a:bodyPr/>
+          <a:lstStyle/>
+          <a:p>
+            <a:endParaRPr lang="en-IN"/>
+          </a:p>
+        </p:txBody>
       </p:sp>
       <p:sp>
         <p:nvSpPr>
@@ -13885,6 +14753,13 @@
           </a:solidFill>
           <a:ln/>
         </p:spPr>
+        <p:txBody>
+          <a:bodyPr/>
+          <a:lstStyle/>
+          <a:p>
+            <a:endParaRPr lang="en-IN"/>
+          </a:p>
+        </p:txBody>
       </p:sp>
       <p:sp>
         <p:nvSpPr>
@@ -13985,6 +14860,13 @@
           </a:solidFill>
           <a:ln/>
         </p:spPr>
+        <p:txBody>
+          <a:bodyPr/>
+          <a:lstStyle/>
+          <a:p>
+            <a:endParaRPr lang="en-IN"/>
+          </a:p>
+        </p:txBody>
       </p:sp>
       <p:sp>
         <p:nvSpPr>

--- a/docs/presentation/TuitionPilot_deck.pptx
+++ b/docs/presentation/TuitionPilot_deck.pptx
@@ -889,7 +889,7 @@
           <a:p>
             <a:r>
               <a:rPr lang="en-US"/>
-              <a:t>About 45 seconds. Everything here can be rerun with one command each. 249 tests pass. All 27 scenarios pass: ten task-completion, six safe-execution, nine attacks including a forged approval and a revoked university key, and two privacy scenarios. The attack lab stops all 16 attacks. The scripted sandbox run writes a ledger, the log of what the AI saw, and an audit log whose hash chain verifies. A finance audit of 400 random cases matched an independent formula.</a:t>
+              <a:t>About 45 seconds. Everything here can be rerun with one command each. 271 tests pass. All 27 scenarios pass: ten task-completion, six safe-execution, nine attacks including a forged approval and a revoked university key, and two privacy scenarios. The attack lab stops all 16 attacks. The scripted sandbox run writes a ledger, the log of what the AI saw, and an audit log whose hash chain verifies. A finance audit of 400 random cases matched an independent formula.</a:t>
             </a:r>
             <a:endParaRPr lang="en-US" dirty="0"/>
           </a:p>
@@ -977,7 +977,7 @@
           <a:p>
             <a:r>
               <a:rPr lang="en-US"/>
-              <a:t>About 45 seconds. Limits, plainly. Six tax rules are now verified against RBI and the Income-tax Act; two still need a bank's confirmation, and GST on the conversion itself is not modelled. The default AI step is offline, our signature code is not hardened, and the demo keys are synthetic. Next: bank confirmation, credit building and more destinations for students, a vetted crypto library or hardware keys, and cookie sessions. Thank you.</a:t>
+              <a:t>About 45 seconds. Limits, plainly. Ten rules are verified against RBI and the Income-tax Act; the rest are flagged in every output, including the new sanctions-screening, source-of-funds and living-cost rules. The default AI step is offline, our signature code is not hardened, and the demo keys and sanctions list are synthetic. Next: a bank's confirmation, the bank's real sanctions lists and a lender who accepts the signed payment record, a vetted crypto library or hardware keys, and more destinations. Thank you.</a:t>
             </a:r>
             <a:endParaRPr lang="en-US" dirty="0"/>
           </a:p>
@@ -1153,7 +1153,7 @@
           <a:p>
             <a:r>
               <a:rPr lang="en-US"/>
-              <a:t>About 50 seconds. The app walks the family through eight steps, shown as a bar across the top: consent, upload the invoice, the signature check, one question at a time, the best route with a cost chart and what-if sliders, the A2-style draft with the RBI compliance checks, review and sign with a PIN while the parent's device signs the plan, and a printable receipt. Beside it, a live agent panel shows the next action and why, every decision, the rule trace and exactly what the AI saw; it can be hidden. An Assistant page answers questions from the rules engine. Code computes and the AI explains: it runs offline by default, and a hosted Claude model can be switched on behind the same guards.</a:t>
+              <a:t>About 50 seconds. The app walks the family through eight steps, shown as a bar across the top: consent, upload the invoice, the signature check, one question at a time, the best route with a cost chart and what-if sliders, the A2-style draft with the RBI compliance checks, review and sign with a PIN while the parent's device signs the plan, and a printable receipt. Beside it, a live agent panel shows the next action and why, every decision, the rule trace and exactly what the AI saw; it can be hidden. An Assistant page answers questions from the rules engine. Code computes and the AI explains: it runs offline by default, and a hosted Claude model can be switched on behind the same guards. A Student money page costs the student's monthly living money, sent monthly or quarterly, and downloads an on-time payment record signed by the bank.</a:t>
             </a:r>
             <a:endParaRPr lang="en-US" dirty="0"/>
           </a:p>
@@ -1878,7 +1878,7 @@
           </a:prstGeom>
           <a:extLst>
             <a:ext uri="{C572A759-6A51-4108-AA02-DFA0A04FC94B}">
-              <ma14:wrappingTextBoxFlag xmlns:ma14="http://schemas.microsoft.com/office/mac/drawingml/2011/main" xmlns="" val="0"/>
+              <ma14:wrappingTextBoxFlag xmlns="" xmlns:ma14="http://schemas.microsoft.com/office/mac/drawingml/2011/main" val="0"/>
             </a:ext>
           </a:extLst>
         </p:spPr>
@@ -1989,7 +1989,7 @@
           </a:prstGeom>
           <a:extLst>
             <a:ext uri="{C572A759-6A51-4108-AA02-DFA0A04FC94B}">
-              <ma14:wrappingTextBoxFlag xmlns:ma14="http://schemas.microsoft.com/office/mac/drawingml/2011/main" xmlns="" val="0"/>
+              <ma14:wrappingTextBoxFlag xmlns="" xmlns:ma14="http://schemas.microsoft.com/office/mac/drawingml/2011/main" val="0"/>
             </a:ext>
           </a:extLst>
         </p:spPr>
@@ -2980,7 +2980,7 @@
                 <a:ea typeface="Cambria" pitchFamily="34" charset="-122"/>
                 <a:cs typeface="Cambria" pitchFamily="34" charset="-120"/>
               </a:rPr>
-              <a:t>249</a:t>
+              <a:t>271</a:t>
             </a:r>
             <a:endParaRPr lang="en-US" sz="4400" dirty="0"/>
           </a:p>
@@ -3293,7 +3293,7 @@
               <a:buNone/>
             </a:pPr>
             <a:r>
-              <a:rPr lang="en-US" sz="4400" b="1" dirty="0">
+              <a:rPr lang="en-US" sz="4400" b="1">
                 <a:solidFill>
                   <a:srgbClr val="8FBCF0"/>
                 </a:solidFill>
@@ -3301,7 +3301,7 @@
                 <a:ea typeface="Cambria" pitchFamily="34" charset="-122"/>
                 <a:cs typeface="Cambria" pitchFamily="34" charset="-120"/>
               </a:rPr>
-              <a:t>153</a:t>
+              <a:t>180</a:t>
             </a:r>
             <a:endParaRPr lang="en-US" sz="4400" dirty="0"/>
           </a:p>
@@ -4238,7 +4238,7 @@
               <a:buChar char="•"/>
             </a:pPr>
             <a:r>
-              <a:rPr lang="en-US" sz="1400">
+              <a:rPr lang="en-US" sz="1200">
                 <a:solidFill>
                   <a:srgbClr val="1F2A44"/>
                 </a:solidFill>
@@ -4246,7 +4246,7 @@
                 <a:ea typeface="Calibri" pitchFamily="34" charset="-122"/>
                 <a:cs typeface="Calibri" pitchFamily="34" charset="-120"/>
               </a:rPr>
-              <a:t>Verified 18 Oct: LRS cap, Rs 10 lakh threshold, 2% and loan-free education rates, 5% without PAN</a:t>
+              <a:t>Verified 18-19 Oct: LRS cap, Rs 10 lakh threshold, 2% and loan-free education rates, 5% without PAN, four RBI LRS rules</a:t>
             </a:r>
           </a:p>
           <a:p>
@@ -4258,7 +4258,7 @@
               <a:buChar char="•"/>
             </a:pPr>
             <a:r>
-              <a:rPr lang="en-US" sz="1400">
+              <a:rPr lang="en-US" sz="1200">
                 <a:solidFill>
                   <a:srgbClr val="1F2A44"/>
                 </a:solidFill>
@@ -4266,7 +4266,7 @@
                 <a:ea typeface="Calibri" pitchFamily="34" charset="-122"/>
                 <a:cs typeface="Calibri" pitchFamily="34" charset="-120"/>
               </a:rPr>
-              <a:t>Still open: earlier other-purpose payments using up the threshold; TCS on the amount sent, not fees</a:t>
+              <a:t>Still open: earlier other-purpose payments using up the threshold; TCS on the amount sent; sanctions-screening and source-of-funds texts; living costs taxed as education</a:t>
             </a:r>
           </a:p>
           <a:p>
@@ -4278,7 +4278,7 @@
               <a:buChar char="•"/>
             </a:pPr>
             <a:r>
-              <a:rPr lang="en-US" sz="1400">
+              <a:rPr lang="en-US" sz="1200">
                 <a:solidFill>
                   <a:srgbClr val="1F2A44"/>
                 </a:solidFill>
@@ -4288,7 +4288,7 @@
               </a:rPr>
               <a:t>Not modelled: GST on the currency conversion itself</a:t>
             </a:r>
-            <a:endParaRPr lang="en-US" sz="1400" dirty="0"/>
+            <a:endParaRPr lang="en-US" sz="1200" dirty="0"/>
           </a:p>
         </p:txBody>
       </p:sp>
@@ -4389,7 +4389,7 @@
               <a:buChar char="•"/>
             </a:pPr>
             <a:r>
-              <a:rPr lang="en-US" sz="1400">
+              <a:rPr lang="en-US" sz="1200">
                 <a:solidFill>
                   <a:srgbClr val="1F2A44"/>
                 </a:solidFill>
@@ -4409,7 +4409,7 @@
               <a:buChar char="•"/>
             </a:pPr>
             <a:r>
-              <a:rPr lang="en-US" sz="1400">
+              <a:rPr lang="en-US" sz="1200">
                 <a:solidFill>
                   <a:srgbClr val="1F2A44"/>
                 </a:solidFill>
@@ -4429,7 +4429,7 @@
               <a:buChar char="•"/>
             </a:pPr>
             <a:r>
-              <a:rPr lang="en-US" sz="1400">
+              <a:rPr lang="en-US" sz="1200">
                 <a:solidFill>
                   <a:srgbClr val="1F2A44"/>
                 </a:solidFill>
@@ -4437,7 +4437,7 @@
                 <a:ea typeface="Calibri" pitchFamily="34" charset="-122"/>
                 <a:cs typeface="Calibri" pitchFamily="34" charset="-120"/>
               </a:rPr>
-              <a:t>Demo keys are synthetic; one trust root</a:t>
+              <a:t>Demo keys and the sanctions list are synthetic; one trust root</a:t>
             </a:r>
           </a:p>
           <a:p>
@@ -4449,7 +4449,7 @@
               <a:buChar char="•"/>
             </a:pPr>
             <a:r>
-              <a:rPr lang="en-US" sz="1400">
+              <a:rPr lang="en-US" sz="1200">
                 <a:solidFill>
                   <a:srgbClr val="1F2A44"/>
                 </a:solidFill>
@@ -4457,9 +4457,9 @@
                 <a:ea typeface="Calibri" pitchFamily="34" charset="-122"/>
                 <a:cs typeface="Calibri" pitchFamily="34" charset="-120"/>
               </a:rPr>
-              <a:t>Demo PIN is fixed; scanned PDFs need OCR</a:t>
-            </a:r>
-            <a:endParaRPr lang="en-US" sz="1400" dirty="0"/>
+              <a:t>Send-by dates skip weekends, not bank holidays; scanned PDFs need OCR</a:t>
+            </a:r>
+            <a:endParaRPr lang="en-US" sz="1200" dirty="0"/>
           </a:p>
         </p:txBody>
       </p:sp>
@@ -4560,7 +4560,7 @@
               <a:buChar char="•"/>
             </a:pPr>
             <a:r>
-              <a:rPr lang="en-US" sz="1400">
+              <a:rPr lang="en-US" sz="1200">
                 <a:solidFill>
                   <a:srgbClr val="1F2A44"/>
                 </a:solidFill>
@@ -4568,7 +4568,7 @@
                 <a:ea typeface="Calibri" pitchFamily="34" charset="-122"/>
                 <a:cs typeface="Calibri" pitchFamily="34" charset="-120"/>
               </a:rPr>
-              <a:t>A bank's confirmation for the two open rules</a:t>
+              <a:t>A bank's confirmation for the open rules</a:t>
             </a:r>
           </a:p>
           <a:p>
@@ -4580,7 +4580,7 @@
               <a:buChar char="•"/>
             </a:pPr>
             <a:r>
-              <a:rPr lang="en-US" sz="1400">
+              <a:rPr lang="en-US" sz="1200">
                 <a:solidFill>
                   <a:srgbClr val="1F2A44"/>
                 </a:solidFill>
@@ -4588,7 +4588,7 @@
                 <a:ea typeface="Calibri" pitchFamily="34" charset="-122"/>
                 <a:cs typeface="Calibri" pitchFamily="34" charset="-120"/>
               </a:rPr>
-              <a:t>Credit building and more destination countries for students</a:t>
+              <a:t>The bank's real sanctions lists, and a lender who accepts the signed payment record</a:t>
             </a:r>
           </a:p>
           <a:p>
@@ -4600,7 +4600,7 @@
               <a:buChar char="•"/>
             </a:pPr>
             <a:r>
-              <a:rPr lang="en-US" sz="1400">
+              <a:rPr lang="en-US" sz="1200">
                 <a:solidFill>
                   <a:srgbClr val="1F2A44"/>
                 </a:solidFill>
@@ -4620,7 +4620,7 @@
               <a:buChar char="•"/>
             </a:pPr>
             <a:r>
-              <a:rPr lang="en-US" sz="1400">
+              <a:rPr lang="en-US" sz="1200">
                 <a:solidFill>
                   <a:srgbClr val="1F2A44"/>
                 </a:solidFill>
@@ -4628,9 +4628,9 @@
                 <a:ea typeface="Calibri" pitchFamily="34" charset="-122"/>
                 <a:cs typeface="Calibri" pitchFamily="34" charset="-120"/>
               </a:rPr>
-              <a:t>Cookie sessions with idle timeouts</a:t>
-            </a:r>
-            <a:endParaRPr lang="en-US" sz="1400" dirty="0"/>
+              <a:t>More destination countries</a:t>
+            </a:r>
+            <a:endParaRPr lang="en-US" sz="1200" dirty="0"/>
           </a:p>
         </p:txBody>
       </p:sp>
@@ -4722,7 +4722,7 @@
           </a:prstGeom>
           <a:extLst>
             <a:ext uri="{C572A759-6A51-4108-AA02-DFA0A04FC94B}">
-              <ma14:wrappingTextBoxFlag xmlns:ma14="http://schemas.microsoft.com/office/mac/drawingml/2011/main" xmlns="" val="0"/>
+              <ma14:wrappingTextBoxFlag xmlns="" xmlns:ma14="http://schemas.microsoft.com/office/mac/drawingml/2011/main" val="0"/>
             </a:ext>
           </a:extLst>
         </p:spPr>
@@ -5715,7 +5715,7 @@
           </a:prstGeom>
           <a:extLst>
             <a:ext uri="{C572A759-6A51-4108-AA02-DFA0A04FC94B}">
-              <ma14:wrappingTextBoxFlag xmlns:ma14="http://schemas.microsoft.com/office/mac/drawingml/2011/main" xmlns="" val="0"/>
+              <ma14:wrappingTextBoxFlag xmlns="" xmlns:ma14="http://schemas.microsoft.com/office/mac/drawingml/2011/main" val="0"/>
             </a:ext>
           </a:extLst>
         </p:spPr>
@@ -7137,7 +7137,7 @@
               <a:buNone/>
             </a:pPr>
             <a:r>
-              <a:rPr lang="en-US" sz="1500" b="1" dirty="0">
+              <a:rPr lang="en-US" sz="1500" b="1">
                 <a:solidFill>
                   <a:srgbClr val="1F5FA8"/>
                 </a:solidFill>
@@ -7145,7 +7145,7 @@
                 <a:ea typeface="Calibri" pitchFamily="34" charset="-122"/>
                 <a:cs typeface="Calibri" pitchFamily="34" charset="-120"/>
               </a:rPr>
-              <a:t>Family devices and vault</a:t>
+              <a:t>Student money and vault</a:t>
             </a:r>
             <a:endParaRPr lang="en-US" sz="1500" dirty="0"/>
           </a:p>
@@ -7184,7 +7184,7 @@
                 <a:ea typeface="Calibri" pitchFamily="34" charset="-122"/>
                 <a:cs typeface="Calibri" pitchFamily="34" charset="-120"/>
               </a:rPr>
-              <a:t>Passwordless sign-in on each enrolled device. A student prepares the payment; only a parent device can sign it. Documents are encrypted in the browser.</a:t>
+              <a:t>A living-cost budget (monthly or quarterly), a bank-signed on-time payment record, and documents encrypted in the browser.</a:t>
             </a:r>
             <a:endParaRPr lang="en-US" sz="1300" dirty="0"/>
           </a:p>
@@ -7278,7 +7278,7 @@
           </a:prstGeom>
           <a:extLst>
             <a:ext uri="{C572A759-6A51-4108-AA02-DFA0A04FC94B}">
-              <ma14:wrappingTextBoxFlag xmlns:ma14="http://schemas.microsoft.com/office/mac/drawingml/2011/main" xmlns="" val="0"/>
+              <ma14:wrappingTextBoxFlag xmlns="" xmlns:ma14="http://schemas.microsoft.com/office/mac/drawingml/2011/main" val="0"/>
             </a:ext>
           </a:extLst>
         </p:spPr>
@@ -7800,7 +7800,7 @@
           </a:prstGeom>
           <a:extLst>
             <a:ext uri="{C572A759-6A51-4108-AA02-DFA0A04FC94B}">
-              <ma14:wrappingTextBoxFlag xmlns="" xmlns:ma14="http://schemas.microsoft.com/office/mac/drawingml/2011/main" val="0"/>
+              <ma14:wrappingTextBoxFlag xmlns:ma14="http://schemas.microsoft.com/office/mac/drawingml/2011/main" xmlns="" val="0"/>
             </a:ext>
           </a:extLst>
         </p:spPr>
@@ -8706,7 +8706,7 @@
           </a:prstGeom>
           <a:extLst>
             <a:ext uri="{C572A759-6A51-4108-AA02-DFA0A04FC94B}">
-              <ma14:wrappingTextBoxFlag xmlns:ma14="http://schemas.microsoft.com/office/mac/drawingml/2011/main" xmlns="" val="0"/>
+              <ma14:wrappingTextBoxFlag xmlns="" xmlns:ma14="http://schemas.microsoft.com/office/mac/drawingml/2011/main" val="0"/>
             </a:ext>
           </a:extLst>
         </p:spPr>
@@ -10684,7 +10684,7 @@
           </a:prstGeom>
           <a:extLst>
             <a:ext uri="{C572A759-6A51-4108-AA02-DFA0A04FC94B}">
-              <ma14:wrappingTextBoxFlag xmlns:ma14="http://schemas.microsoft.com/office/mac/drawingml/2011/main" xmlns="" val="0"/>
+              <ma14:wrappingTextBoxFlag xmlns="" xmlns:ma14="http://schemas.microsoft.com/office/mac/drawingml/2011/main" val="0"/>
             </a:ext>
           </a:extLst>
         </p:spPr>
@@ -11304,7 +11304,7 @@
           </a:prstGeom>
           <a:extLst>
             <a:ext uri="{C572A759-6A51-4108-AA02-DFA0A04FC94B}">
-              <ma14:wrappingTextBoxFlag xmlns:ma14="http://schemas.microsoft.com/office/mac/drawingml/2011/main" xmlns="" val="0"/>
+              <ma14:wrappingTextBoxFlag xmlns="" xmlns:ma14="http://schemas.microsoft.com/office/mac/drawingml/2011/main" val="0"/>
             </a:ext>
           </a:extLst>
         </p:spPr>
@@ -12899,7 +12899,7 @@
           </a:prstGeom>
           <a:extLst>
             <a:ext uri="{C572A759-6A51-4108-AA02-DFA0A04FC94B}">
-              <ma14:wrappingTextBoxFlag xmlns:ma14="http://schemas.microsoft.com/office/mac/drawingml/2011/main" xmlns="" val="0"/>
+              <ma14:wrappingTextBoxFlag xmlns="" xmlns:ma14="http://schemas.microsoft.com/office/mac/drawingml/2011/main" val="0"/>
             </a:ext>
           </a:extLst>
         </p:spPr>
@@ -13004,7 +13004,7 @@
           <p:nvPr>
             <p:extLst>
               <p:ext uri="{D42A27DB-BD31-4B8C-83A1-F6EECF244321}">
-                <p14:modId xmlns:p14="http://schemas.microsoft.com/office/powerpoint/2010/main" val="1579011935"/>
+                <p14:modId xmlns:p14="http://schemas.microsoft.com/office/powerpoint/2010/main" val="3167539147"/>
               </p:ext>
             </p:extLst>
           </p:nvPr>
@@ -14134,7 +14134,7 @@
                         <a:buNone/>
                       </a:pPr>
                       <a:r>
-                        <a:rPr lang="en-US" sz="1300" dirty="0">
+                        <a:rPr lang="en-US" sz="1300">
                           <a:solidFill>
                             <a:srgbClr val="1F2A44"/>
                           </a:solidFill>
@@ -14142,7 +14142,7 @@
                           <a:ea typeface="Calibri" pitchFamily="34" charset="-122"/>
                           <a:cs typeface="Calibri" pitchFamily="34" charset="-120"/>
                         </a:rPr>
-                        <a:t>New or unverified payee, change limits, skip approval</a:t>
+                        <a:t>New, unverified or sanctioned payee, change limits, skip approval</a:t>
                       </a:r>
                       <a:endParaRPr lang="en-US" sz="1300" dirty="0">
                         <a:latin typeface="Calibri" charset="0"/>
@@ -14290,7 +14290,7 @@
               <a:buNone/>
             </a:pPr>
             <a:r>
-              <a:rPr lang="en-US" sz="1400" dirty="0">
+              <a:rPr lang="en-US" sz="1200">
                 <a:solidFill>
                   <a:srgbClr val="1F2A44"/>
                 </a:solidFill>
@@ -14298,9 +14298,9 @@
                 <a:ea typeface="Calibri" pitchFamily="34" charset="-122"/>
                 <a:cs typeface="Calibri" pitchFamily="34" charset="-120"/>
               </a:rPr>
-              <a:t>The AI model has no payment tool. Every tool call passes the policy gate. Sign-in is passwordless: the device signs a one-time 2-minute challenge, and a new device needs a parent device’s signature.</a:t>
-            </a:r>
-            <a:endParaRPr lang="en-US" sz="1400" dirty="0"/>
+              <a:t>The AI model has no payment tool. Every tool call passes the policy gate. Passwordless sign-in; the session lives in an HttpOnly cookie that expires after 30 idle minutes. Sender, student and payee are screened against a sanctions list.</a:t>
+            </a:r>
+            <a:endParaRPr lang="en-US" sz="1200" dirty="0"/>
           </a:p>
         </p:txBody>
       </p:sp>
@@ -14966,7 +14966,7 @@
           </a:prstGeom>
           <a:extLst>
             <a:ext uri="{C572A759-6A51-4108-AA02-DFA0A04FC94B}">
-              <ma14:wrappingTextBoxFlag xmlns:ma14="http://schemas.microsoft.com/office/mac/drawingml/2011/main" xmlns="" val="0"/>
+              <ma14:wrappingTextBoxFlag xmlns="" xmlns:ma14="http://schemas.microsoft.com/office/mac/drawingml/2011/main" val="0"/>
             </a:ext>
           </a:extLst>
         </p:spPr>

--- a/docs/presentation/TuitionPilot_deck.pptx
+++ b/docs/presentation/TuitionPilot_deck.pptx
@@ -1878,7 +1878,7 @@
           </a:prstGeom>
           <a:extLst>
             <a:ext uri="{C572A759-6A51-4108-AA02-DFA0A04FC94B}">
-              <ma14:wrappingTextBoxFlag xmlns="" xmlns:ma14="http://schemas.microsoft.com/office/mac/drawingml/2011/main" val="0"/>
+              <ma14:wrappingTextBoxFlag xmlns:ma14="http://schemas.microsoft.com/office/mac/drawingml/2011/main" xmlns="" val="0"/>
             </a:ext>
           </a:extLst>
         </p:spPr>
@@ -1989,7 +1989,7 @@
           </a:prstGeom>
           <a:extLst>
             <a:ext uri="{C572A759-6A51-4108-AA02-DFA0A04FC94B}">
-              <ma14:wrappingTextBoxFlag xmlns="" xmlns:ma14="http://schemas.microsoft.com/office/mac/drawingml/2011/main" val="0"/>
+              <ma14:wrappingTextBoxFlag xmlns:ma14="http://schemas.microsoft.com/office/mac/drawingml/2011/main" xmlns="" val="0"/>
             </a:ext>
           </a:extLst>
         </p:spPr>
@@ -4722,7 +4722,7 @@
           </a:prstGeom>
           <a:extLst>
             <a:ext uri="{C572A759-6A51-4108-AA02-DFA0A04FC94B}">
-              <ma14:wrappingTextBoxFlag xmlns="" xmlns:ma14="http://schemas.microsoft.com/office/mac/drawingml/2011/main" val="0"/>
+              <ma14:wrappingTextBoxFlag xmlns:ma14="http://schemas.microsoft.com/office/mac/drawingml/2011/main" xmlns="" val="0"/>
             </a:ext>
           </a:extLst>
         </p:spPr>
@@ -5715,7 +5715,7 @@
           </a:prstGeom>
           <a:extLst>
             <a:ext uri="{C572A759-6A51-4108-AA02-DFA0A04FC94B}">
-              <ma14:wrappingTextBoxFlag xmlns="" xmlns:ma14="http://schemas.microsoft.com/office/mac/drawingml/2011/main" val="0"/>
+              <ma14:wrappingTextBoxFlag xmlns:ma14="http://schemas.microsoft.com/office/mac/drawingml/2011/main" xmlns="" val="0"/>
             </a:ext>
           </a:extLst>
         </p:spPr>
@@ -7278,7 +7278,7 @@
           </a:prstGeom>
           <a:extLst>
             <a:ext uri="{C572A759-6A51-4108-AA02-DFA0A04FC94B}">
-              <ma14:wrappingTextBoxFlag xmlns="" xmlns:ma14="http://schemas.microsoft.com/office/mac/drawingml/2011/main" val="0"/>
+              <ma14:wrappingTextBoxFlag xmlns:ma14="http://schemas.microsoft.com/office/mac/drawingml/2011/main" xmlns="" val="0"/>
             </a:ext>
           </a:extLst>
         </p:spPr>
@@ -7800,7 +7800,7 @@
           </a:prstGeom>
           <a:extLst>
             <a:ext uri="{C572A759-6A51-4108-AA02-DFA0A04FC94B}">
-              <ma14:wrappingTextBoxFlag xmlns:ma14="http://schemas.microsoft.com/office/mac/drawingml/2011/main" xmlns="" val="0"/>
+              <ma14:wrappingTextBoxFlag xmlns="" xmlns:ma14="http://schemas.microsoft.com/office/mac/drawingml/2011/main" val="0"/>
             </a:ext>
           </a:extLst>
         </p:spPr>
@@ -8298,6 +8298,36 @@
           <a:chExt cx="0" cy="0"/>
         </a:xfrm>
       </p:grpSpPr>
+      <p:pic>
+        <p:nvPicPr>
+          <p:cNvPr id="14" name="Image 0">
+            <a:extLst>
+              <a:ext uri="{FF2B5EF4-FFF2-40B4-BE49-F238E27FC236}">
+                <a16:creationId xmlns:a16="http://schemas.microsoft.com/office/drawing/2014/main" id="{C54C5D1C-1787-A526-4B84-34317D2F6D94}"/>
+              </a:ext>
+            </a:extLst>
+          </p:cNvPr>
+          <p:cNvPicPr>
+            <a:picLocks/>
+          </p:cNvPicPr>
+          <p:nvPr/>
+        </p:nvPicPr>
+        <p:blipFill>
+          <a:blip r:embed="rId3"/>
+          <a:stretch>
+            <a:fillRect/>
+          </a:stretch>
+        </p:blipFill>
+        <p:spPr>
+          <a:xfrm>
+            <a:off x="548640" y="1234440"/>
+            <a:ext cx="8046720" cy="5029200"/>
+          </a:xfrm>
+          <a:prstGeom prst="rect">
+            <a:avLst/>
+          </a:prstGeom>
+        </p:spPr>
+      </p:pic>
       <p:sp>
         <p:nvSpPr>
           <p:cNvPr id="2" name="Text 0"/>
@@ -8341,30 +8371,6 @@
           </a:p>
         </p:txBody>
       </p:sp>
-      <p:pic>
-        <p:nvPicPr>
-          <p:cNvPr id="3" name="Image 0" descr="TuitionPilot architecture diagram"/>
-          <p:cNvPicPr>
-            <a:picLocks noChangeAspect="1"/>
-          </p:cNvPicPr>
-          <p:nvPr/>
-        </p:nvPicPr>
-        <p:blipFill>
-          <a:blip r:embed="rId3"/>
-          <a:stretch>
-            <a:fillRect/>
-          </a:stretch>
-        </p:blipFill>
-        <p:spPr>
-          <a:xfrm>
-            <a:off x="548640" y="1234440"/>
-            <a:ext cx="8046720" cy="5029200"/>
-          </a:xfrm>
-          <a:prstGeom prst="rect">
-            <a:avLst/>
-          </a:prstGeom>
-        </p:spPr>
-      </p:pic>
       <p:sp>
         <p:nvSpPr>
           <p:cNvPr id="4" name="Shape 1"/>
@@ -8706,7 +8712,7 @@
           </a:prstGeom>
           <a:extLst>
             <a:ext uri="{C572A759-6A51-4108-AA02-DFA0A04FC94B}">
-              <ma14:wrappingTextBoxFlag xmlns="" xmlns:ma14="http://schemas.microsoft.com/office/mac/drawingml/2011/main" val="0"/>
+              <ma14:wrappingTextBoxFlag xmlns:ma14="http://schemas.microsoft.com/office/mac/drawingml/2011/main" xmlns="" val="0"/>
             </a:ext>
           </a:extLst>
         </p:spPr>
@@ -10684,7 +10690,7 @@
           </a:prstGeom>
           <a:extLst>
             <a:ext uri="{C572A759-6A51-4108-AA02-DFA0A04FC94B}">
-              <ma14:wrappingTextBoxFlag xmlns="" xmlns:ma14="http://schemas.microsoft.com/office/mac/drawingml/2011/main" val="0"/>
+              <ma14:wrappingTextBoxFlag xmlns:ma14="http://schemas.microsoft.com/office/mac/drawingml/2011/main" xmlns="" val="0"/>
             </a:ext>
           </a:extLst>
         </p:spPr>
@@ -11304,7 +11310,7 @@
           </a:prstGeom>
           <a:extLst>
             <a:ext uri="{C572A759-6A51-4108-AA02-DFA0A04FC94B}">
-              <ma14:wrappingTextBoxFlag xmlns="" xmlns:ma14="http://schemas.microsoft.com/office/mac/drawingml/2011/main" val="0"/>
+              <ma14:wrappingTextBoxFlag xmlns:ma14="http://schemas.microsoft.com/office/mac/drawingml/2011/main" xmlns="" val="0"/>
             </a:ext>
           </a:extLst>
         </p:spPr>
@@ -12899,7 +12905,7 @@
           </a:prstGeom>
           <a:extLst>
             <a:ext uri="{C572A759-6A51-4108-AA02-DFA0A04FC94B}">
-              <ma14:wrappingTextBoxFlag xmlns="" xmlns:ma14="http://schemas.microsoft.com/office/mac/drawingml/2011/main" val="0"/>
+              <ma14:wrappingTextBoxFlag xmlns:ma14="http://schemas.microsoft.com/office/mac/drawingml/2011/main" xmlns="" val="0"/>
             </a:ext>
           </a:extLst>
         </p:spPr>
@@ -14966,7 +14972,7 @@
           </a:prstGeom>
           <a:extLst>
             <a:ext uri="{C572A759-6A51-4108-AA02-DFA0A04FC94B}">
-              <ma14:wrappingTextBoxFlag xmlns="" xmlns:ma14="http://schemas.microsoft.com/office/mac/drawingml/2011/main" val="0"/>
+              <ma14:wrappingTextBoxFlag xmlns:ma14="http://schemas.microsoft.com/office/mac/drawingml/2011/main" xmlns="" val="0"/>
             </a:ext>
           </a:extLst>
         </p:spPr>
